--- a/presentation/presentation.pptx
+++ b/presentation/presentation.pptx
@@ -211,7 +211,7 @@
           <a:p>
             <a:fld id="{5282F153-3F37-0F45-9E97-73ACFA13230C}" type="datetimeFigureOut">
               <a:rPr lang="en-US"/>
-              <a:t>9/24/26</a:t>
+              <a:t>10/9/26</a:t>
             </a:fld>
             <a:endParaRPr lang="en-US"/>
           </a:p>
@@ -3108,123 +3108,6 @@
       </p:sp>
       <p:sp>
         <p:nvSpPr>
-          <p:cNvPr id="5" name="static:3:text"/>
-          <p:cNvSpPr/>
-          <p:nvPr/>
-        </p:nvSpPr>
-        <p:spPr>
-          <a:xfrm>
-            <a:off x="975360" y="3895130"/>
-            <a:ext cx="3240524" cy="259080"/>
-          </a:xfrm>
-          <a:prstGeom prst="rect">
-            <a:avLst/>
-          </a:prstGeom>
-          <a:noFill/>
-          <a:ln/>
-        </p:spPr>
-        <p:txBody>
-          <a:bodyPr wrap="none" lIns="0" tIns="0" rIns="0" bIns="0" rtlCol="0" anchor="ctr"/>
-          <a:lstStyle/>
-          <a:p>
-            <a:pPr marL="0" indent="0" algn="l">
-              <a:buNone/>
-            </a:pPr>
-            <a:r>
-              <a:rPr lang="en-US" sz="1620" dirty="0">
-                <a:solidFill>
-                  <a:srgbClr val="B0B0B0"/>
-                </a:solidFill>
-                <a:latin typeface="Arial" pitchFamily="34" charset="0"/>
-                <a:ea typeface="Arial" pitchFamily="34" charset="-122"/>
-                <a:cs typeface="Arial" pitchFamily="34" charset="-120"/>
-              </a:rPr>
-              <a:t>Start with a working agent. Measure</a:t>
-            </a:r>
-            <a:endParaRPr lang="en-US" sz="1620" dirty="0"/>
-          </a:p>
-        </p:txBody>
-      </p:sp>
-      <p:sp>
-        <p:nvSpPr>
-          <p:cNvPr id="6" name="static:4:text"/>
-          <p:cNvSpPr/>
-          <p:nvPr/>
-        </p:nvSpPr>
-        <p:spPr>
-          <a:xfrm>
-            <a:off x="975360" y="4172783"/>
-            <a:ext cx="3783806" cy="259080"/>
-          </a:xfrm>
-          <a:prstGeom prst="rect">
-            <a:avLst/>
-          </a:prstGeom>
-          <a:noFill/>
-          <a:ln/>
-        </p:spPr>
-        <p:txBody>
-          <a:bodyPr wrap="none" lIns="0" tIns="0" rIns="0" bIns="0" rtlCol="0" anchor="ctr"/>
-          <a:lstStyle/>
-          <a:p>
-            <a:pPr marL="0" indent="0" algn="l">
-              <a:buNone/>
-            </a:pPr>
-            <a:r>
-              <a:rPr lang="en-US" sz="1620" dirty="0">
-                <a:solidFill>
-                  <a:srgbClr val="B0B0B0"/>
-                </a:solidFill>
-                <a:latin typeface="Arial" pitchFamily="34" charset="0"/>
-                <a:ea typeface="Arial" pitchFamily="34" charset="-122"/>
-                <a:cs typeface="Arial" pitchFamily="34" charset="-120"/>
-              </a:rPr>
-              <a:t>consistency, speed and cost. Improve with</a:t>
-            </a:r>
-            <a:endParaRPr lang="en-US" sz="1620" dirty="0"/>
-          </a:p>
-        </p:txBody>
-      </p:sp>
-      <p:sp>
-        <p:nvSpPr>
-          <p:cNvPr id="7" name="static:5:text"/>
-          <p:cNvSpPr/>
-          <p:nvPr/>
-        </p:nvSpPr>
-        <p:spPr>
-          <a:xfrm>
-            <a:off x="975360" y="4450437"/>
-            <a:ext cx="940594" cy="259080"/>
-          </a:xfrm>
-          <a:prstGeom prst="rect">
-            <a:avLst/>
-          </a:prstGeom>
-          <a:noFill/>
-          <a:ln/>
-        </p:spPr>
-        <p:txBody>
-          <a:bodyPr wrap="none" lIns="0" tIns="0" rIns="0" bIns="0" rtlCol="0" anchor="ctr"/>
-          <a:lstStyle/>
-          <a:p>
-            <a:pPr marL="0" indent="0" algn="l">
-              <a:buNone/>
-            </a:pPr>
-            <a:r>
-              <a:rPr lang="en-US" sz="1620" dirty="0">
-                <a:solidFill>
-                  <a:srgbClr val="B0B0B0"/>
-                </a:solidFill>
-                <a:latin typeface="Arial" pitchFamily="34" charset="0"/>
-                <a:ea typeface="Arial" pitchFamily="34" charset="-122"/>
-                <a:cs typeface="Arial" pitchFamily="34" charset="-120"/>
-              </a:rPr>
-              <a:t>evidence.</a:t>
-            </a:r>
-            <a:endParaRPr lang="en-US" sz="1620" dirty="0"/>
-          </a:p>
-        </p:txBody>
-      </p:sp>
-      <p:sp>
-        <p:nvSpPr>
           <p:cNvPr id="8" name="static:6:text"/>
           <p:cNvSpPr/>
           <p:nvPr/>
@@ -3259,454 +3142,6 @@
               <a:t>Graeme Foster</a:t>
             </a:r>
             <a:endParaRPr lang="en-US" sz="840" dirty="0"/>
-          </a:p>
-        </p:txBody>
-      </p:sp>
-      <p:sp>
-        <p:nvSpPr>
-          <p:cNvPr id="9" name="static:7:shape"/>
-          <p:cNvSpPr/>
-          <p:nvPr/>
-        </p:nvSpPr>
-        <p:spPr>
-          <a:xfrm>
-            <a:off x="6838355" y="2740104"/>
-            <a:ext cx="2143363" cy="899160"/>
-          </a:xfrm>
-          <a:prstGeom prst="roundRect">
-            <a:avLst>
-              <a:gd name="adj" fmla="val 13559"/>
-            </a:avLst>
-          </a:prstGeom>
-          <a:solidFill>
-            <a:srgbClr val="292929"/>
-          </a:solidFill>
-          <a:ln w="7620">
-            <a:solidFill>
-              <a:srgbClr val="474747"/>
-            </a:solidFill>
-            <a:prstDash val="solid"/>
-          </a:ln>
-        </p:spPr>
-        <p:txBody>
-          <a:bodyPr/>
-          <a:lstStyle/>
-          <a:p>
-            <a:endParaRPr lang="en-US"/>
-          </a:p>
-        </p:txBody>
-      </p:sp>
-      <p:sp>
-        <p:nvSpPr>
-          <p:cNvPr id="10" name="static:8:text"/>
-          <p:cNvSpPr/>
-          <p:nvPr/>
-        </p:nvSpPr>
-        <p:spPr>
-          <a:xfrm>
-            <a:off x="6983135" y="2877264"/>
-            <a:ext cx="660440" cy="190500"/>
-          </a:xfrm>
-          <a:prstGeom prst="rect">
-            <a:avLst/>
-          </a:prstGeom>
-          <a:noFill/>
-          <a:ln/>
-        </p:spPr>
-        <p:txBody>
-          <a:bodyPr wrap="none" lIns="0" tIns="0" rIns="0" bIns="0" rtlCol="0" anchor="ctr"/>
-          <a:lstStyle/>
-          <a:p>
-            <a:pPr marL="0" indent="0" algn="l">
-              <a:buNone/>
-            </a:pPr>
-            <a:r>
-              <a:rPr lang="en-US" sz="1200" b="1" dirty="0">
-                <a:solidFill>
-                  <a:srgbClr val="FBBF24"/>
-                </a:solidFill>
-                <a:latin typeface="Arial" pitchFamily="34" charset="0"/>
-                <a:ea typeface="Arial" pitchFamily="34" charset="-122"/>
-                <a:cs typeface="Arial" pitchFamily="34" charset="-120"/>
-              </a:rPr>
-              <a:t>Context</a:t>
-            </a:r>
-            <a:endParaRPr lang="en-US" sz="1200" dirty="0"/>
-          </a:p>
-        </p:txBody>
-      </p:sp>
-      <p:sp>
-        <p:nvSpPr>
-          <p:cNvPr id="11" name="static:9:text"/>
-          <p:cNvSpPr/>
-          <p:nvPr/>
-        </p:nvSpPr>
-        <p:spPr>
-          <a:xfrm>
-            <a:off x="6983135" y="3113484"/>
-            <a:ext cx="769739" cy="152400"/>
-          </a:xfrm>
-          <a:prstGeom prst="rect">
-            <a:avLst/>
-          </a:prstGeom>
-          <a:noFill/>
-          <a:ln/>
-        </p:spPr>
-        <p:txBody>
-          <a:bodyPr wrap="none" lIns="0" tIns="0" rIns="0" bIns="0" rtlCol="0" anchor="ctr"/>
-          <a:lstStyle/>
-          <a:p>
-            <a:pPr marL="0" indent="0" algn="l">
-              <a:buNone/>
-            </a:pPr>
-            <a:r>
-              <a:rPr lang="en-US" sz="960" dirty="0">
-                <a:solidFill>
-                  <a:srgbClr val="DEDEDE"/>
-                </a:solidFill>
-                <a:latin typeface="Arial" pitchFamily="34" charset="0"/>
-                <a:ea typeface="Arial" pitchFamily="34" charset="-122"/>
-                <a:cs typeface="Arial" pitchFamily="34" charset="-120"/>
-              </a:rPr>
-              <a:t>Microsoft IQ</a:t>
-            </a:r>
-            <a:endParaRPr lang="en-US" sz="960" dirty="0"/>
-          </a:p>
-        </p:txBody>
-      </p:sp>
-      <p:sp>
-        <p:nvSpPr>
-          <p:cNvPr id="12" name="static:10:shape"/>
-          <p:cNvSpPr/>
-          <p:nvPr/>
-        </p:nvSpPr>
-        <p:spPr>
-          <a:xfrm>
-            <a:off x="9073158" y="2740104"/>
-            <a:ext cx="2143482" cy="899160"/>
-          </a:xfrm>
-          <a:prstGeom prst="roundRect">
-            <a:avLst>
-              <a:gd name="adj" fmla="val 13559"/>
-            </a:avLst>
-          </a:prstGeom>
-          <a:solidFill>
-            <a:srgbClr val="292929"/>
-          </a:solidFill>
-          <a:ln w="7620">
-            <a:solidFill>
-              <a:srgbClr val="474747"/>
-            </a:solidFill>
-            <a:prstDash val="solid"/>
-          </a:ln>
-        </p:spPr>
-        <p:txBody>
-          <a:bodyPr/>
-          <a:lstStyle/>
-          <a:p>
-            <a:endParaRPr lang="en-US"/>
-          </a:p>
-        </p:txBody>
-      </p:sp>
-      <p:sp>
-        <p:nvSpPr>
-          <p:cNvPr id="13" name="static:11:text"/>
-          <p:cNvSpPr/>
-          <p:nvPr/>
-        </p:nvSpPr>
-        <p:spPr>
-          <a:xfrm>
-            <a:off x="9217938" y="2877264"/>
-            <a:ext cx="837486" cy="190500"/>
-          </a:xfrm>
-          <a:prstGeom prst="rect">
-            <a:avLst/>
-          </a:prstGeom>
-          <a:noFill/>
-          <a:ln/>
-        </p:spPr>
-        <p:txBody>
-          <a:bodyPr wrap="none" lIns="0" tIns="0" rIns="0" bIns="0" rtlCol="0" anchor="ctr"/>
-          <a:lstStyle/>
-          <a:p>
-            <a:pPr marL="0" indent="0" algn="l">
-              <a:buNone/>
-            </a:pPr>
-            <a:r>
-              <a:rPr lang="en-US" sz="1200" b="1" dirty="0">
-                <a:solidFill>
-                  <a:srgbClr val="FBBF24"/>
-                </a:solidFill>
-                <a:latin typeface="Arial" pitchFamily="34" charset="0"/>
-                <a:ea typeface="Arial" pitchFamily="34" charset="-122"/>
-                <a:cs typeface="Arial" pitchFamily="34" charset="-120"/>
-              </a:rPr>
-              <a:t>Evaluation</a:t>
-            </a:r>
-            <a:endParaRPr lang="en-US" sz="1200" dirty="0"/>
-          </a:p>
-        </p:txBody>
-      </p:sp>
-      <p:sp>
-        <p:nvSpPr>
-          <p:cNvPr id="14" name="static:12:text"/>
-          <p:cNvSpPr/>
-          <p:nvPr/>
-        </p:nvSpPr>
-        <p:spPr>
-          <a:xfrm>
-            <a:off x="9217938" y="3113484"/>
-            <a:ext cx="1409105" cy="152400"/>
-          </a:xfrm>
-          <a:prstGeom prst="rect">
-            <a:avLst/>
-          </a:prstGeom>
-          <a:noFill/>
-          <a:ln/>
-        </p:spPr>
-        <p:txBody>
-          <a:bodyPr wrap="none" lIns="0" tIns="0" rIns="0" bIns="0" rtlCol="0" anchor="ctr"/>
-          <a:lstStyle/>
-          <a:p>
-            <a:pPr marL="0" indent="0" algn="l">
-              <a:buNone/>
-            </a:pPr>
-            <a:r>
-              <a:rPr lang="en-US" sz="960" dirty="0">
-                <a:solidFill>
-                  <a:srgbClr val="DEDEDE"/>
-                </a:solidFill>
-                <a:latin typeface="Arial" pitchFamily="34" charset="0"/>
-                <a:ea typeface="Arial" pitchFamily="34" charset="-122"/>
-                <a:cs typeface="Arial" pitchFamily="34" charset="-120"/>
-              </a:rPr>
-              <a:t>Evaluations + checklists</a:t>
-            </a:r>
-            <a:endParaRPr lang="en-US" sz="960" dirty="0"/>
-          </a:p>
-        </p:txBody>
-      </p:sp>
-      <p:sp>
-        <p:nvSpPr>
-          <p:cNvPr id="15" name="static:13:shape"/>
-          <p:cNvSpPr/>
-          <p:nvPr/>
-        </p:nvSpPr>
-        <p:spPr>
-          <a:xfrm>
-            <a:off x="6838355" y="3730704"/>
-            <a:ext cx="2143363" cy="899160"/>
-          </a:xfrm>
-          <a:prstGeom prst="roundRect">
-            <a:avLst>
-              <a:gd name="adj" fmla="val 13559"/>
-            </a:avLst>
-          </a:prstGeom>
-          <a:solidFill>
-            <a:srgbClr val="292929"/>
-          </a:solidFill>
-          <a:ln w="7620">
-            <a:solidFill>
-              <a:srgbClr val="474747"/>
-            </a:solidFill>
-            <a:prstDash val="solid"/>
-          </a:ln>
-        </p:spPr>
-        <p:txBody>
-          <a:bodyPr/>
-          <a:lstStyle/>
-          <a:p>
-            <a:endParaRPr lang="en-US"/>
-          </a:p>
-        </p:txBody>
-      </p:sp>
-      <p:sp>
-        <p:nvSpPr>
-          <p:cNvPr id="16" name="static:14:text"/>
-          <p:cNvSpPr/>
-          <p:nvPr/>
-        </p:nvSpPr>
-        <p:spPr>
-          <a:xfrm>
-            <a:off x="6983135" y="3867864"/>
-            <a:ext cx="1012507" cy="190500"/>
-          </a:xfrm>
-          <a:prstGeom prst="rect">
-            <a:avLst/>
-          </a:prstGeom>
-          <a:noFill/>
-          <a:ln/>
-        </p:spPr>
-        <p:txBody>
-          <a:bodyPr wrap="none" lIns="0" tIns="0" rIns="0" bIns="0" rtlCol="0" anchor="ctr"/>
-          <a:lstStyle/>
-          <a:p>
-            <a:pPr marL="0" indent="0" algn="l">
-              <a:buNone/>
-            </a:pPr>
-            <a:r>
-              <a:rPr lang="en-US" sz="1200" b="1" dirty="0">
-                <a:solidFill>
-                  <a:srgbClr val="FBBF24"/>
-                </a:solidFill>
-                <a:latin typeface="Arial" pitchFamily="34" charset="0"/>
-                <a:ea typeface="Arial" pitchFamily="34" charset="-122"/>
-                <a:cs typeface="Arial" pitchFamily="34" charset="-120"/>
-              </a:rPr>
-              <a:t>Optimisation</a:t>
-            </a:r>
-            <a:endParaRPr lang="en-US" sz="1200" dirty="0"/>
-          </a:p>
-        </p:txBody>
-      </p:sp>
-      <p:sp>
-        <p:nvSpPr>
-          <p:cNvPr id="17" name="static:15:text"/>
-          <p:cNvSpPr/>
-          <p:nvPr/>
-        </p:nvSpPr>
-        <p:spPr>
-          <a:xfrm>
-            <a:off x="6983135" y="4104084"/>
-            <a:ext cx="987147" cy="152400"/>
-          </a:xfrm>
-          <a:prstGeom prst="rect">
-            <a:avLst/>
-          </a:prstGeom>
-          <a:noFill/>
-          <a:ln/>
-        </p:spPr>
-        <p:txBody>
-          <a:bodyPr wrap="none" lIns="0" tIns="0" rIns="0" bIns="0" rtlCol="0" anchor="ctr"/>
-          <a:lstStyle/>
-          <a:p>
-            <a:pPr marL="0" indent="0" algn="l">
-              <a:buNone/>
-            </a:pPr>
-            <a:r>
-              <a:rPr lang="en-US" sz="960" dirty="0">
-                <a:solidFill>
-                  <a:srgbClr val="DEDEDE"/>
-                </a:solidFill>
-                <a:latin typeface="Arial" pitchFamily="34" charset="0"/>
-                <a:ea typeface="Arial" pitchFamily="34" charset="-122"/>
-                <a:cs typeface="Arial" pitchFamily="34" charset="-120"/>
-              </a:rPr>
-              <a:t>Agent Optimizer</a:t>
-            </a:r>
-            <a:endParaRPr lang="en-US" sz="960" dirty="0"/>
-          </a:p>
-        </p:txBody>
-      </p:sp>
-      <p:sp>
-        <p:nvSpPr>
-          <p:cNvPr id="18" name="static:16:shape"/>
-          <p:cNvSpPr/>
-          <p:nvPr/>
-        </p:nvSpPr>
-        <p:spPr>
-          <a:xfrm>
-            <a:off x="9073158" y="3730704"/>
-            <a:ext cx="2143482" cy="899160"/>
-          </a:xfrm>
-          <a:prstGeom prst="roundRect">
-            <a:avLst>
-              <a:gd name="adj" fmla="val 13559"/>
-            </a:avLst>
-          </a:prstGeom>
-          <a:solidFill>
-            <a:srgbClr val="292929"/>
-          </a:solidFill>
-          <a:ln w="7620">
-            <a:solidFill>
-              <a:srgbClr val="474747"/>
-            </a:solidFill>
-            <a:prstDash val="solid"/>
-          </a:ln>
-        </p:spPr>
-        <p:txBody>
-          <a:bodyPr/>
-          <a:lstStyle/>
-          <a:p>
-            <a:endParaRPr lang="en-US"/>
-          </a:p>
-        </p:txBody>
-      </p:sp>
-      <p:sp>
-        <p:nvSpPr>
-          <p:cNvPr id="19" name="static:17:text"/>
-          <p:cNvSpPr/>
-          <p:nvPr/>
-        </p:nvSpPr>
-        <p:spPr>
-          <a:xfrm>
-            <a:off x="9217938" y="3867864"/>
-            <a:ext cx="507444" cy="190500"/>
-          </a:xfrm>
-          <a:prstGeom prst="rect">
-            <a:avLst/>
-          </a:prstGeom>
-          <a:noFill/>
-          <a:ln/>
-        </p:spPr>
-        <p:txBody>
-          <a:bodyPr wrap="none" lIns="0" tIns="0" rIns="0" bIns="0" rtlCol="0" anchor="ctr"/>
-          <a:lstStyle/>
-          <a:p>
-            <a:pPr marL="0" indent="0" algn="l">
-              <a:buNone/>
-            </a:pPr>
-            <a:r>
-              <a:rPr lang="en-US" sz="1200" b="1" dirty="0">
-                <a:solidFill>
-                  <a:srgbClr val="FBBF24"/>
-                </a:solidFill>
-                <a:latin typeface="Arial" pitchFamily="34" charset="0"/>
-                <a:ea typeface="Arial" pitchFamily="34" charset="-122"/>
-                <a:cs typeface="Arial" pitchFamily="34" charset="-120"/>
-              </a:rPr>
-              <a:t>CI/CD</a:t>
-            </a:r>
-            <a:endParaRPr lang="en-US" sz="1200" dirty="0"/>
-          </a:p>
-        </p:txBody>
-      </p:sp>
-      <p:sp>
-        <p:nvSpPr>
-          <p:cNvPr id="20" name="static:18:text"/>
-          <p:cNvSpPr/>
-          <p:nvPr/>
-        </p:nvSpPr>
-        <p:spPr>
-          <a:xfrm>
-            <a:off x="9217938" y="4104084"/>
-            <a:ext cx="923806" cy="152400"/>
-          </a:xfrm>
-          <a:prstGeom prst="rect">
-            <a:avLst/>
-          </a:prstGeom>
-          <a:noFill/>
-          <a:ln/>
-        </p:spPr>
-        <p:txBody>
-          <a:bodyPr wrap="none" lIns="0" tIns="0" rIns="0" bIns="0" rtlCol="0" anchor="ctr"/>
-          <a:lstStyle/>
-          <a:p>
-            <a:pPr marL="0" indent="0" algn="l">
-              <a:buNone/>
-            </a:pPr>
-            <a:r>
-              <a:rPr lang="en-US" sz="960" dirty="0">
-                <a:solidFill>
-                  <a:srgbClr val="DEDEDE"/>
-                </a:solidFill>
-                <a:latin typeface="Arial" pitchFamily="34" charset="0"/>
-                <a:ea typeface="Arial" pitchFamily="34" charset="-122"/>
-                <a:cs typeface="Arial" pitchFamily="34" charset="-120"/>
-              </a:rPr>
-              <a:t>GitHub Actions</a:t>
-            </a:r>
-            <a:endParaRPr lang="en-US" sz="960" dirty="0"/>
           </a:p>
         </p:txBody>
       </p:sp>
@@ -12202,7 +11637,7 @@
               <a:buNone/>
             </a:pPr>
             <a:r>
-              <a:rPr lang="en-US" sz="1680" b="1" dirty="0">
+              <a:rPr lang="en-US" sz="2000" b="1" dirty="0">
                 <a:solidFill>
                   <a:srgbClr val="4DA6FF"/>
                 </a:solidFill>
@@ -12212,7 +11647,7 @@
               </a:rPr>
               <a:t>01</a:t>
             </a:r>
-            <a:endParaRPr lang="en-US" sz="1680" dirty="0"/>
+            <a:endParaRPr lang="en-US" sz="2000" dirty="0"/>
           </a:p>
         </p:txBody>
       </p:sp>
@@ -12241,7 +11676,7 @@
               <a:buNone/>
             </a:pPr>
             <a:r>
-              <a:rPr lang="en-US" sz="1680" b="1" dirty="0">
+              <a:rPr lang="en-US" sz="2000" b="1" dirty="0">
                 <a:solidFill>
                   <a:srgbClr val="DEDEDE"/>
                 </a:solidFill>
@@ -12251,7 +11686,7 @@
               </a:rPr>
               <a:t>Model Choice</a:t>
             </a:r>
-            <a:endParaRPr lang="en-US" sz="1680" dirty="0"/>
+            <a:endParaRPr lang="en-US" sz="2000" dirty="0"/>
           </a:p>
         </p:txBody>
       </p:sp>
@@ -12280,7 +11715,7 @@
               <a:buNone/>
             </a:pPr>
             <a:r>
-              <a:rPr lang="en-US" sz="1200" dirty="0">
+              <a:rPr lang="en-US" sz="1600" dirty="0">
                 <a:solidFill>
                   <a:srgbClr val="B0B0B0"/>
                 </a:solidFill>
@@ -12290,7 +11725,7 @@
               </a:rPr>
               <a:t>Model comparison + Model Router</a:t>
             </a:r>
-            <a:endParaRPr lang="en-US" sz="1200" dirty="0"/>
+            <a:endParaRPr lang="en-US" sz="1600" dirty="0"/>
           </a:p>
         </p:txBody>
       </p:sp>
@@ -12302,7 +11737,7 @@
         </p:nvSpPr>
         <p:spPr>
           <a:xfrm>
-            <a:off x="4256961" y="2251234"/>
+            <a:off x="4535741" y="2265472"/>
             <a:ext cx="374690" cy="266700"/>
           </a:xfrm>
           <a:prstGeom prst="rect">
@@ -12319,7 +11754,7 @@
               <a:buNone/>
             </a:pPr>
             <a:r>
-              <a:rPr lang="en-US" sz="1680" b="1" dirty="0">
+              <a:rPr lang="en-US" sz="2000" b="1" dirty="0">
                 <a:solidFill>
                   <a:srgbClr val="FD8EA1"/>
                 </a:solidFill>
@@ -12329,7 +11764,7 @@
               </a:rPr>
               <a:t>02</a:t>
             </a:r>
-            <a:endParaRPr lang="en-US" sz="1680" dirty="0"/>
+            <a:endParaRPr lang="en-US" sz="2000" dirty="0"/>
           </a:p>
         </p:txBody>
       </p:sp>
@@ -12341,7 +11776,7 @@
         </p:nvSpPr>
         <p:spPr>
           <a:xfrm>
-            <a:off x="4256961" y="2578894"/>
+            <a:off x="4535741" y="2593132"/>
             <a:ext cx="1142881" cy="266700"/>
           </a:xfrm>
           <a:prstGeom prst="rect">
@@ -12358,7 +11793,7 @@
               <a:buNone/>
             </a:pPr>
             <a:r>
-              <a:rPr lang="en-US" sz="1680" b="1" dirty="0">
+              <a:rPr lang="en-US" sz="2000" b="1" dirty="0">
                 <a:solidFill>
                   <a:srgbClr val="DEDEDE"/>
                 </a:solidFill>
@@ -12368,7 +11803,7 @@
               </a:rPr>
               <a:t>Grounding</a:t>
             </a:r>
-            <a:endParaRPr lang="en-US" sz="1680" dirty="0"/>
+            <a:endParaRPr lang="en-US" sz="2000" dirty="0"/>
           </a:p>
         </p:txBody>
       </p:sp>
@@ -12380,7 +11815,7 @@
         </p:nvSpPr>
         <p:spPr>
           <a:xfrm>
-            <a:off x="4256961" y="2912626"/>
+            <a:off x="4535741" y="2926864"/>
             <a:ext cx="2186583" cy="190500"/>
           </a:xfrm>
           <a:prstGeom prst="rect">
@@ -12397,7 +11832,7 @@
               <a:buNone/>
             </a:pPr>
             <a:r>
-              <a:rPr lang="en-US" sz="1200" dirty="0">
+              <a:rPr lang="en-US" sz="1600" dirty="0">
                 <a:solidFill>
                   <a:srgbClr val="B0B0B0"/>
                 </a:solidFill>
@@ -12407,20 +11842,20 @@
               </a:rPr>
               <a:t>Foundry IQ, Fabric IQ + Work IQ</a:t>
             </a:r>
-            <a:endParaRPr lang="en-US" sz="1200" dirty="0"/>
-          </a:p>
-        </p:txBody>
-      </p:sp>
-      <p:sp>
-        <p:nvSpPr>
-          <p:cNvPr id="10" name="static:8:text"/>
+            <a:endParaRPr lang="en-US" sz="1600" dirty="0"/>
+          </a:p>
+        </p:txBody>
+      </p:sp>
+      <p:sp>
+        <p:nvSpPr>
+          <p:cNvPr id="16" name="static:14:text"/>
           <p:cNvSpPr/>
           <p:nvPr/>
         </p:nvSpPr>
         <p:spPr>
           <a:xfrm>
-            <a:off x="7538680" y="2251234"/>
-            <a:ext cx="380881" cy="266700"/>
+            <a:off x="4535741" y="3637072"/>
+            <a:ext cx="378619" cy="266700"/>
           </a:xfrm>
           <a:prstGeom prst="rect">
             <a:avLst/>
@@ -12436,241 +11871,7 @@
               <a:buNone/>
             </a:pPr>
             <a:r>
-              <a:rPr lang="en-US" sz="1680" b="1" dirty="0">
-                <a:solidFill>
-                  <a:srgbClr val="FBBF24"/>
-                </a:solidFill>
-                <a:latin typeface="Arial" pitchFamily="34" charset="0"/>
-                <a:ea typeface="Arial" pitchFamily="34" charset="-122"/>
-                <a:cs typeface="Arial" pitchFamily="34" charset="-120"/>
-              </a:rPr>
-              <a:t>03</a:t>
-            </a:r>
-            <a:endParaRPr lang="en-US" sz="1680" dirty="0"/>
-          </a:p>
-        </p:txBody>
-      </p:sp>
-      <p:sp>
-        <p:nvSpPr>
-          <p:cNvPr id="11" name="static:9:text"/>
-          <p:cNvSpPr/>
-          <p:nvPr/>
-        </p:nvSpPr>
-        <p:spPr>
-          <a:xfrm>
-            <a:off x="7538680" y="2578894"/>
-            <a:ext cx="936546" cy="266700"/>
-          </a:xfrm>
-          <a:prstGeom prst="rect">
-            <a:avLst/>
-          </a:prstGeom>
-          <a:noFill/>
-          <a:ln/>
-        </p:spPr>
-        <p:txBody>
-          <a:bodyPr wrap="none" lIns="0" tIns="0" rIns="0" bIns="0" rtlCol="0" anchor="ctr"/>
-          <a:lstStyle/>
-          <a:p>
-            <a:pPr marL="0" indent="0" algn="l">
-              <a:buNone/>
-            </a:pPr>
-            <a:r>
-              <a:rPr lang="en-US" sz="1680" b="1" dirty="0">
-                <a:solidFill>
-                  <a:srgbClr val="DEDEDE"/>
-                </a:solidFill>
-                <a:latin typeface="Arial" pitchFamily="34" charset="0"/>
-                <a:ea typeface="Arial" pitchFamily="34" charset="-122"/>
-                <a:cs typeface="Arial" pitchFamily="34" charset="-120"/>
-              </a:rPr>
-              <a:t>Observe</a:t>
-            </a:r>
-            <a:endParaRPr lang="en-US" sz="1680" dirty="0"/>
-          </a:p>
-        </p:txBody>
-      </p:sp>
-      <p:sp>
-        <p:nvSpPr>
-          <p:cNvPr id="12" name="static:10:text"/>
-          <p:cNvSpPr/>
-          <p:nvPr/>
-        </p:nvSpPr>
-        <p:spPr>
-          <a:xfrm>
-            <a:off x="7538680" y="2912626"/>
-            <a:ext cx="1894999" cy="190500"/>
-          </a:xfrm>
-          <a:prstGeom prst="rect">
-            <a:avLst/>
-          </a:prstGeom>
-          <a:noFill/>
-          <a:ln/>
-        </p:spPr>
-        <p:txBody>
-          <a:bodyPr wrap="none" lIns="0" tIns="0" rIns="0" bIns="0" rtlCol="0" anchor="ctr"/>
-          <a:lstStyle/>
-          <a:p>
-            <a:pPr marL="0" indent="0" algn="l">
-              <a:buNone/>
-            </a:pPr>
-            <a:r>
-              <a:rPr lang="en-US" sz="1200" dirty="0">
-                <a:solidFill>
-                  <a:srgbClr val="B0B0B0"/>
-                </a:solidFill>
-                <a:latin typeface="Arial" pitchFamily="34" charset="0"/>
-                <a:ea typeface="Arial" pitchFamily="34" charset="-122"/>
-                <a:cs typeface="Arial" pitchFamily="34" charset="-120"/>
-              </a:rPr>
-              <a:t>Foundry tracing + tool calls</a:t>
-            </a:r>
-            <a:endParaRPr lang="en-US" sz="1200" dirty="0"/>
-          </a:p>
-        </p:txBody>
-      </p:sp>
-      <p:sp>
-        <p:nvSpPr>
-          <p:cNvPr id="13" name="static:11:text"/>
-          <p:cNvSpPr/>
-          <p:nvPr/>
-        </p:nvSpPr>
-        <p:spPr>
-          <a:xfrm>
-            <a:off x="975360" y="3622834"/>
-            <a:ext cx="385286" cy="266700"/>
-          </a:xfrm>
-          <a:prstGeom prst="rect">
-            <a:avLst/>
-          </a:prstGeom>
-          <a:noFill/>
-          <a:ln/>
-        </p:spPr>
-        <p:txBody>
-          <a:bodyPr wrap="none" lIns="0" tIns="0" rIns="0" bIns="0" rtlCol="0" anchor="ctr"/>
-          <a:lstStyle/>
-          <a:p>
-            <a:pPr marL="0" indent="0" algn="l">
-              <a:buNone/>
-            </a:pPr>
-            <a:r>
-              <a:rPr lang="en-US" sz="1680" b="1" dirty="0">
-                <a:solidFill>
-                  <a:srgbClr val="4ADE80"/>
-                </a:solidFill>
-                <a:latin typeface="Arial" pitchFamily="34" charset="0"/>
-                <a:ea typeface="Arial" pitchFamily="34" charset="-122"/>
-                <a:cs typeface="Arial" pitchFamily="34" charset="-120"/>
-              </a:rPr>
-              <a:t>04</a:t>
-            </a:r>
-            <a:endParaRPr lang="en-US" sz="1680" dirty="0"/>
-          </a:p>
-        </p:txBody>
-      </p:sp>
-      <p:sp>
-        <p:nvSpPr>
-          <p:cNvPr id="14" name="static:12:text"/>
-          <p:cNvSpPr/>
-          <p:nvPr/>
-        </p:nvSpPr>
-        <p:spPr>
-          <a:xfrm>
-            <a:off x="975360" y="3950494"/>
-            <a:ext cx="948214" cy="266700"/>
-          </a:xfrm>
-          <a:prstGeom prst="rect">
-            <a:avLst/>
-          </a:prstGeom>
-          <a:noFill/>
-          <a:ln/>
-        </p:spPr>
-        <p:txBody>
-          <a:bodyPr wrap="none" lIns="0" tIns="0" rIns="0" bIns="0" rtlCol="0" anchor="ctr"/>
-          <a:lstStyle/>
-          <a:p>
-            <a:pPr marL="0" indent="0" algn="l">
-              <a:buNone/>
-            </a:pPr>
-            <a:r>
-              <a:rPr lang="en-US" sz="1680" b="1" dirty="0">
-                <a:solidFill>
-                  <a:srgbClr val="DEDEDE"/>
-                </a:solidFill>
-                <a:latin typeface="Arial" pitchFamily="34" charset="0"/>
-                <a:ea typeface="Arial" pitchFamily="34" charset="-122"/>
-                <a:cs typeface="Arial" pitchFamily="34" charset="-120"/>
-              </a:rPr>
-              <a:t>Evaluate</a:t>
-            </a:r>
-            <a:endParaRPr lang="en-US" sz="1680" dirty="0"/>
-          </a:p>
-        </p:txBody>
-      </p:sp>
-      <p:sp>
-        <p:nvSpPr>
-          <p:cNvPr id="15" name="static:13:text"/>
-          <p:cNvSpPr/>
-          <p:nvPr/>
-        </p:nvSpPr>
-        <p:spPr>
-          <a:xfrm>
-            <a:off x="975360" y="4284226"/>
-            <a:ext cx="2065734" cy="190500"/>
-          </a:xfrm>
-          <a:prstGeom prst="rect">
-            <a:avLst/>
-          </a:prstGeom>
-          <a:noFill/>
-          <a:ln/>
-        </p:spPr>
-        <p:txBody>
-          <a:bodyPr wrap="none" lIns="0" tIns="0" rIns="0" bIns="0" rtlCol="0" anchor="ctr"/>
-          <a:lstStyle/>
-          <a:p>
-            <a:pPr marL="0" indent="0" algn="l">
-              <a:buNone/>
-            </a:pPr>
-            <a:r>
-              <a:rPr lang="en-US" sz="1200" dirty="0">
-                <a:solidFill>
-                  <a:srgbClr val="B0B0B0"/>
-                </a:solidFill>
-                <a:latin typeface="Arial" pitchFamily="34" charset="0"/>
-                <a:ea typeface="Arial" pitchFamily="34" charset="-122"/>
-                <a:cs typeface="Arial" pitchFamily="34" charset="-120"/>
-              </a:rPr>
-              <a:t>Quality, latency, tokens + cost</a:t>
-            </a:r>
-            <a:endParaRPr lang="en-US" sz="1200" dirty="0"/>
-          </a:p>
-        </p:txBody>
-      </p:sp>
-      <p:sp>
-        <p:nvSpPr>
-          <p:cNvPr id="16" name="static:14:text"/>
-          <p:cNvSpPr/>
-          <p:nvPr/>
-        </p:nvSpPr>
-        <p:spPr>
-          <a:xfrm>
-            <a:off x="4256961" y="3622834"/>
-            <a:ext cx="378619" cy="266700"/>
-          </a:xfrm>
-          <a:prstGeom prst="rect">
-            <a:avLst/>
-          </a:prstGeom>
-          <a:noFill/>
-          <a:ln/>
-        </p:spPr>
-        <p:txBody>
-          <a:bodyPr wrap="none" lIns="0" tIns="0" rIns="0" bIns="0" rtlCol="0" anchor="ctr"/>
-          <a:lstStyle/>
-          <a:p>
-            <a:pPr marL="0" indent="0" algn="l">
-              <a:buNone/>
-            </a:pPr>
-            <a:r>
-              <a:rPr lang="en-US" sz="1680" b="1" dirty="0">
+              <a:rPr lang="en-US" sz="2000" b="1" dirty="0">
                 <a:solidFill>
                   <a:srgbClr val="F87171"/>
                 </a:solidFill>
@@ -12680,7 +11881,7 @@
               </a:rPr>
               <a:t>05</a:t>
             </a:r>
-            <a:endParaRPr lang="en-US" sz="1680" dirty="0"/>
+            <a:endParaRPr lang="en-US" sz="2000" dirty="0"/>
           </a:p>
         </p:txBody>
       </p:sp>
@@ -12692,7 +11893,7 @@
         </p:nvSpPr>
         <p:spPr>
           <a:xfrm>
-            <a:off x="4256961" y="3950494"/>
+            <a:off x="4535741" y="3964732"/>
             <a:ext cx="992981" cy="266700"/>
           </a:xfrm>
           <a:prstGeom prst="rect">
@@ -12709,7 +11910,7 @@
               <a:buNone/>
             </a:pPr>
             <a:r>
-              <a:rPr lang="en-US" sz="1680" b="1" dirty="0">
+              <a:rPr lang="en-US" sz="2000" b="1" dirty="0">
                 <a:solidFill>
                   <a:srgbClr val="DEDEDE"/>
                 </a:solidFill>
@@ -12719,7 +11920,7 @@
               </a:rPr>
               <a:t>Optimise</a:t>
             </a:r>
-            <a:endParaRPr lang="en-US" sz="1680" dirty="0"/>
+            <a:endParaRPr lang="en-US" sz="2000" dirty="0"/>
           </a:p>
         </p:txBody>
       </p:sp>
@@ -12731,7 +11932,7 @@
         </p:nvSpPr>
         <p:spPr>
           <a:xfrm>
-            <a:off x="4256961" y="4284226"/>
+            <a:off x="4535741" y="4298464"/>
             <a:ext cx="1173599" cy="190500"/>
           </a:xfrm>
           <a:prstGeom prst="rect">
@@ -12748,7 +11949,7 @@
               <a:buNone/>
             </a:pPr>
             <a:r>
-              <a:rPr lang="en-US" sz="1200" dirty="0">
+              <a:rPr lang="en-US" sz="1600" dirty="0">
                 <a:solidFill>
                   <a:srgbClr val="B0B0B0"/>
                 </a:solidFill>
@@ -12758,7 +11959,7 @@
               </a:rPr>
               <a:t>Agent Optimizer</a:t>
             </a:r>
-            <a:endParaRPr lang="en-US" sz="1200" dirty="0"/>
+            <a:endParaRPr lang="en-US" sz="1600" dirty="0"/>
           </a:p>
         </p:txBody>
       </p:sp>
@@ -12770,7 +11971,7 @@
         </p:nvSpPr>
         <p:spPr>
           <a:xfrm>
-            <a:off x="7538680" y="3622834"/>
+            <a:off x="7817460" y="3637072"/>
             <a:ext cx="385405" cy="266700"/>
           </a:xfrm>
           <a:prstGeom prst="rect">
@@ -12787,7 +11988,7 @@
               <a:buNone/>
             </a:pPr>
             <a:r>
-              <a:rPr lang="en-US" sz="1680" b="1" dirty="0">
+              <a:rPr lang="en-US" sz="2000" b="1" dirty="0">
                 <a:solidFill>
                   <a:srgbClr val="4DA6FF"/>
                 </a:solidFill>
@@ -12797,7 +11998,7 @@
               </a:rPr>
               <a:t>06</a:t>
             </a:r>
-            <a:endParaRPr lang="en-US" sz="1680" dirty="0"/>
+            <a:endParaRPr lang="en-US" sz="2000" dirty="0"/>
           </a:p>
         </p:txBody>
       </p:sp>
@@ -12809,7 +12010,7 @@
         </p:nvSpPr>
         <p:spPr>
           <a:xfrm>
-            <a:off x="7538680" y="3950494"/>
+            <a:off x="7817460" y="3964732"/>
             <a:ext cx="1072039" cy="266700"/>
           </a:xfrm>
           <a:prstGeom prst="rect">
@@ -12826,7 +12027,7 @@
               <a:buNone/>
             </a:pPr>
             <a:r>
-              <a:rPr lang="en-US" sz="1680" b="1" dirty="0">
+              <a:rPr lang="en-US" sz="2000" b="1" dirty="0">
                 <a:solidFill>
                   <a:srgbClr val="DEDEDE"/>
                 </a:solidFill>
@@ -12836,7 +12037,7 @@
               </a:rPr>
               <a:t>Automate</a:t>
             </a:r>
-            <a:endParaRPr lang="en-US" sz="1680" dirty="0"/>
+            <a:endParaRPr lang="en-US" sz="2000" dirty="0"/>
           </a:p>
         </p:txBody>
       </p:sp>
@@ -12848,8 +12049,8 @@
         </p:nvSpPr>
         <p:spPr>
           <a:xfrm>
-            <a:off x="7538680" y="4284226"/>
-            <a:ext cx="1571387" cy="190500"/>
+            <a:off x="7817460" y="4231432"/>
+            <a:ext cx="3856380" cy="243294"/>
           </a:xfrm>
           <a:prstGeom prst="rect">
             <a:avLst/>
@@ -12861,11 +12062,8 @@
           <a:bodyPr wrap="none" lIns="0" tIns="0" rIns="0" bIns="0" rtlCol="0" anchor="ctr"/>
           <a:lstStyle/>
           <a:p>
-            <a:pPr marL="0" indent="0" algn="l">
-              <a:buNone/>
-            </a:pPr>
             <a:r>
-              <a:rPr lang="en-US" sz="1200" dirty="0">
+              <a:rPr lang="en-US" sz="1600" dirty="0">
                 <a:solidFill>
                   <a:srgbClr val="B0B0B0"/>
                 </a:solidFill>
@@ -12873,9 +12071,9 @@
                 <a:ea typeface="Arial" pitchFamily="34" charset="-122"/>
                 <a:cs typeface="Arial" pitchFamily="34" charset="-120"/>
               </a:rPr>
-              <a:t>Continuous evaluation</a:t>
+              <a:t>Continuous evaluation + GitHub Actions</a:t>
             </a:r>
-            <a:endParaRPr lang="en-US" sz="1200" dirty="0"/>
+            <a:endParaRPr lang="en-US" sz="1600" dirty="0"/>
           </a:p>
         </p:txBody>
       </p:sp>
@@ -12887,7 +12085,7 @@
         </p:nvSpPr>
         <p:spPr>
           <a:xfrm>
-            <a:off x="7538680" y="4482346"/>
+            <a:off x="7817460" y="4496584"/>
             <a:ext cx="1227296" cy="190500"/>
           </a:xfrm>
           <a:prstGeom prst="rect">
@@ -12903,18 +12101,7 @@
             <a:pPr marL="0" indent="0" algn="l">
               <a:buNone/>
             </a:pPr>
-            <a:r>
-              <a:rPr lang="en-US" sz="1200" dirty="0">
-                <a:solidFill>
-                  <a:srgbClr val="B0B0B0"/>
-                </a:solidFill>
-                <a:latin typeface="Arial" pitchFamily="34" charset="0"/>
-                <a:ea typeface="Arial" pitchFamily="34" charset="-122"/>
-                <a:cs typeface="Arial" pitchFamily="34" charset="-120"/>
-              </a:rPr>
-              <a:t>+ GitHub Actions</a:t>
-            </a:r>
-            <a:endParaRPr lang="en-US" sz="1200" dirty="0"/>
+            <a:endParaRPr lang="en-US" sz="1600" dirty="0"/>
           </a:p>
         </p:txBody>
       </p:sp>
@@ -12993,6 +12180,276 @@
               <a:t>AI GENIUS / S6 E2 / 02</a:t>
             </a:r>
             <a:endParaRPr lang="en-US" sz="720" dirty="0"/>
+          </a:p>
+        </p:txBody>
+      </p:sp>
+      <p:sp>
+        <p:nvSpPr>
+          <p:cNvPr id="25" name="static:11:text">
+            <a:extLst>
+              <a:ext uri="{FF2B5EF4-FFF2-40B4-BE49-F238E27FC236}">
+                <a16:creationId xmlns:a16="http://schemas.microsoft.com/office/drawing/2014/main" id="{46F7BA72-CF14-DB79-C5D6-9262140E2D71}"/>
+              </a:ext>
+            </a:extLst>
+          </p:cNvPr>
+          <p:cNvSpPr/>
+          <p:nvPr/>
+        </p:nvSpPr>
+        <p:spPr>
+          <a:xfrm>
+            <a:off x="7817460" y="2251234"/>
+            <a:ext cx="385286" cy="266700"/>
+          </a:xfrm>
+          <a:prstGeom prst="rect">
+            <a:avLst/>
+          </a:prstGeom>
+          <a:noFill/>
+          <a:ln/>
+        </p:spPr>
+        <p:txBody>
+          <a:bodyPr wrap="none" lIns="0" tIns="0" rIns="0" bIns="0" rtlCol="0" anchor="ctr"/>
+          <a:lstStyle/>
+          <a:p>
+            <a:pPr marL="0" indent="0" algn="l">
+              <a:buNone/>
+            </a:pPr>
+            <a:r>
+              <a:rPr lang="en-US" sz="2000" b="1" dirty="0">
+                <a:solidFill>
+                  <a:srgbClr val="4ADE80"/>
+                </a:solidFill>
+                <a:latin typeface="Arial" pitchFamily="34" charset="0"/>
+                <a:ea typeface="Arial" pitchFamily="34" charset="-122"/>
+                <a:cs typeface="Arial" pitchFamily="34" charset="-120"/>
+              </a:rPr>
+              <a:t>03</a:t>
+            </a:r>
+            <a:endParaRPr lang="en-US" sz="2000" dirty="0"/>
+          </a:p>
+        </p:txBody>
+      </p:sp>
+      <p:sp>
+        <p:nvSpPr>
+          <p:cNvPr id="26" name="static:12:text">
+            <a:extLst>
+              <a:ext uri="{FF2B5EF4-FFF2-40B4-BE49-F238E27FC236}">
+                <a16:creationId xmlns:a16="http://schemas.microsoft.com/office/drawing/2014/main" id="{DC9D1AEF-5283-3F46-85E0-99FD3B08DD09}"/>
+              </a:ext>
+            </a:extLst>
+          </p:cNvPr>
+          <p:cNvSpPr/>
+          <p:nvPr/>
+        </p:nvSpPr>
+        <p:spPr>
+          <a:xfrm>
+            <a:off x="7817460" y="2578894"/>
+            <a:ext cx="948214" cy="266700"/>
+          </a:xfrm>
+          <a:prstGeom prst="rect">
+            <a:avLst/>
+          </a:prstGeom>
+          <a:noFill/>
+          <a:ln/>
+        </p:spPr>
+        <p:txBody>
+          <a:bodyPr wrap="none" lIns="0" tIns="0" rIns="0" bIns="0" rtlCol="0" anchor="ctr"/>
+          <a:lstStyle/>
+          <a:p>
+            <a:pPr marL="0" indent="0" algn="l">
+              <a:buNone/>
+            </a:pPr>
+            <a:r>
+              <a:rPr lang="en-US" sz="2000" b="1" dirty="0">
+                <a:solidFill>
+                  <a:srgbClr val="DEDEDE"/>
+                </a:solidFill>
+                <a:latin typeface="Arial" pitchFamily="34" charset="0"/>
+                <a:ea typeface="Arial" pitchFamily="34" charset="-122"/>
+                <a:cs typeface="Arial" pitchFamily="34" charset="-120"/>
+              </a:rPr>
+              <a:t>Evaluate</a:t>
+            </a:r>
+            <a:endParaRPr lang="en-US" sz="2000" dirty="0"/>
+          </a:p>
+        </p:txBody>
+      </p:sp>
+      <p:sp>
+        <p:nvSpPr>
+          <p:cNvPr id="27" name="static:13:text">
+            <a:extLst>
+              <a:ext uri="{FF2B5EF4-FFF2-40B4-BE49-F238E27FC236}">
+                <a16:creationId xmlns:a16="http://schemas.microsoft.com/office/drawing/2014/main" id="{E094F1BF-7F3B-FF59-1E91-CAA7077A788D}"/>
+              </a:ext>
+            </a:extLst>
+          </p:cNvPr>
+          <p:cNvSpPr/>
+          <p:nvPr/>
+        </p:nvSpPr>
+        <p:spPr>
+          <a:xfrm>
+            <a:off x="7817459" y="2912626"/>
+            <a:ext cx="2965769" cy="190500"/>
+          </a:xfrm>
+          <a:prstGeom prst="rect">
+            <a:avLst/>
+          </a:prstGeom>
+          <a:noFill/>
+          <a:ln/>
+        </p:spPr>
+        <p:txBody>
+          <a:bodyPr wrap="none" lIns="0" tIns="0" rIns="0" bIns="0" rtlCol="0" anchor="ctr"/>
+          <a:lstStyle/>
+          <a:p>
+            <a:pPr marL="0" indent="0" algn="l">
+              <a:buNone/>
+            </a:pPr>
+            <a:r>
+              <a:rPr lang="en-US" sz="1600" dirty="0">
+                <a:solidFill>
+                  <a:srgbClr val="B0B0B0"/>
+                </a:solidFill>
+                <a:latin typeface="Arial" pitchFamily="34" charset="0"/>
+                <a:ea typeface="Arial" pitchFamily="34" charset="-122"/>
+                <a:cs typeface="Arial" pitchFamily="34" charset="-120"/>
+              </a:rPr>
+              <a:t>Quality, safety, stays on-task</a:t>
+            </a:r>
+            <a:endParaRPr lang="en-US" sz="1600" dirty="0"/>
+          </a:p>
+        </p:txBody>
+      </p:sp>
+      <p:sp>
+        <p:nvSpPr>
+          <p:cNvPr id="28" name="static:8:text">
+            <a:extLst>
+              <a:ext uri="{FF2B5EF4-FFF2-40B4-BE49-F238E27FC236}">
+                <a16:creationId xmlns:a16="http://schemas.microsoft.com/office/drawing/2014/main" id="{E56A732E-8F30-CD8D-7275-EA11D4A84FDF}"/>
+              </a:ext>
+            </a:extLst>
+          </p:cNvPr>
+          <p:cNvSpPr/>
+          <p:nvPr/>
+        </p:nvSpPr>
+        <p:spPr>
+          <a:xfrm>
+            <a:off x="975360" y="3658806"/>
+            <a:ext cx="380881" cy="266700"/>
+          </a:xfrm>
+          <a:prstGeom prst="rect">
+            <a:avLst/>
+          </a:prstGeom>
+          <a:noFill/>
+          <a:ln/>
+        </p:spPr>
+        <p:txBody>
+          <a:bodyPr wrap="none" lIns="0" tIns="0" rIns="0" bIns="0" rtlCol="0" anchor="ctr"/>
+          <a:lstStyle/>
+          <a:p>
+            <a:pPr marL="0" indent="0" algn="l">
+              <a:buNone/>
+            </a:pPr>
+            <a:r>
+              <a:rPr lang="en-US" sz="2000" b="1" dirty="0">
+                <a:solidFill>
+                  <a:srgbClr val="FBBF24"/>
+                </a:solidFill>
+                <a:latin typeface="Arial" pitchFamily="34" charset="0"/>
+                <a:ea typeface="Arial" pitchFamily="34" charset="-122"/>
+                <a:cs typeface="Arial" pitchFamily="34" charset="-120"/>
+              </a:rPr>
+              <a:t>03</a:t>
+            </a:r>
+            <a:endParaRPr lang="en-US" sz="2000" dirty="0"/>
+          </a:p>
+        </p:txBody>
+      </p:sp>
+      <p:sp>
+        <p:nvSpPr>
+          <p:cNvPr id="29" name="static:9:text">
+            <a:extLst>
+              <a:ext uri="{FF2B5EF4-FFF2-40B4-BE49-F238E27FC236}">
+                <a16:creationId xmlns:a16="http://schemas.microsoft.com/office/drawing/2014/main" id="{20133A28-79B6-B053-E2A8-D6393DE731EE}"/>
+              </a:ext>
+            </a:extLst>
+          </p:cNvPr>
+          <p:cNvSpPr/>
+          <p:nvPr/>
+        </p:nvSpPr>
+        <p:spPr>
+          <a:xfrm>
+            <a:off x="986511" y="3986466"/>
+            <a:ext cx="1752600" cy="244966"/>
+          </a:xfrm>
+          <a:prstGeom prst="rect">
+            <a:avLst/>
+          </a:prstGeom>
+          <a:noFill/>
+          <a:ln/>
+        </p:spPr>
+        <p:txBody>
+          <a:bodyPr wrap="none" lIns="0" tIns="0" rIns="0" bIns="0" rtlCol="0" anchor="ctr"/>
+          <a:lstStyle/>
+          <a:p>
+            <a:pPr marL="0" indent="0" algn="l">
+              <a:buNone/>
+            </a:pPr>
+            <a:r>
+              <a:rPr lang="en-US" sz="2000" b="1" dirty="0">
+                <a:solidFill>
+                  <a:srgbClr val="DEDEDE"/>
+                </a:solidFill>
+                <a:latin typeface="Arial" pitchFamily="34" charset="0"/>
+                <a:ea typeface="Arial" pitchFamily="34" charset="-122"/>
+                <a:cs typeface="Arial" pitchFamily="34" charset="-120"/>
+              </a:rPr>
+              <a:t>Observability</a:t>
+            </a:r>
+            <a:endParaRPr lang="en-US" sz="2000" dirty="0"/>
+          </a:p>
+        </p:txBody>
+      </p:sp>
+      <p:sp>
+        <p:nvSpPr>
+          <p:cNvPr id="30" name="static:10:text">
+            <a:extLst>
+              <a:ext uri="{FF2B5EF4-FFF2-40B4-BE49-F238E27FC236}">
+                <a16:creationId xmlns:a16="http://schemas.microsoft.com/office/drawing/2014/main" id="{BEA8599D-63C7-A5D6-7BCF-AEE8E0DE2EC6}"/>
+              </a:ext>
+            </a:extLst>
+          </p:cNvPr>
+          <p:cNvSpPr/>
+          <p:nvPr/>
+        </p:nvSpPr>
+        <p:spPr>
+          <a:xfrm>
+            <a:off x="975360" y="4320198"/>
+            <a:ext cx="1894999" cy="190500"/>
+          </a:xfrm>
+          <a:prstGeom prst="rect">
+            <a:avLst/>
+          </a:prstGeom>
+          <a:noFill/>
+          <a:ln/>
+        </p:spPr>
+        <p:txBody>
+          <a:bodyPr wrap="none" lIns="0" tIns="0" rIns="0" bIns="0" rtlCol="0" anchor="ctr"/>
+          <a:lstStyle/>
+          <a:p>
+            <a:pPr marL="0" indent="0" algn="l">
+              <a:buNone/>
+            </a:pPr>
+            <a:r>
+              <a:rPr lang="en-US" sz="1600" dirty="0">
+                <a:solidFill>
+                  <a:srgbClr val="B0B0B0"/>
+                </a:solidFill>
+                <a:latin typeface="Arial" pitchFamily="34" charset="0"/>
+                <a:ea typeface="Arial" pitchFamily="34" charset="-122"/>
+                <a:cs typeface="Arial" pitchFamily="34" charset="-120"/>
+              </a:rPr>
+              <a:t>Foundry tracing</a:t>
+            </a:r>
+            <a:endParaRPr lang="en-US" sz="1600" dirty="0"/>
           </a:p>
         </p:txBody>
       </p:sp>
@@ -14874,6 +14331,51 @@
               <a:t>AI GENIUS / S6 E2 / 04</a:t>
             </a:r>
             <a:endParaRPr lang="en-US" sz="720" dirty="0"/>
+          </a:p>
+        </p:txBody>
+      </p:sp>
+      <p:sp>
+        <p:nvSpPr>
+          <p:cNvPr id="39" name="reveal-1:5:text">
+            <a:extLst>
+              <a:ext uri="{FF2B5EF4-FFF2-40B4-BE49-F238E27FC236}">
+                <a16:creationId xmlns:a16="http://schemas.microsoft.com/office/drawing/2014/main" id="{331D5248-8C74-A1DD-589D-B0FEC9852322}"/>
+              </a:ext>
+            </a:extLst>
+          </p:cNvPr>
+          <p:cNvSpPr/>
+          <p:nvPr/>
+        </p:nvSpPr>
+        <p:spPr>
+          <a:xfrm>
+            <a:off x="3461862" y="5686247"/>
+            <a:ext cx="4633703" cy="311824"/>
+          </a:xfrm>
+          <a:prstGeom prst="rect">
+            <a:avLst/>
+          </a:prstGeom>
+          <a:noFill/>
+          <a:ln/>
+        </p:spPr>
+        <p:txBody>
+          <a:bodyPr wrap="none" lIns="0" tIns="0" rIns="0" bIns="0" rtlCol="0" anchor="ctr"/>
+          <a:lstStyle/>
+          <a:p>
+            <a:pPr marL="0" indent="0" algn="l">
+              <a:buNone/>
+            </a:pPr>
+            <a:r>
+              <a:rPr lang="en-US" sz="1560" b="1" dirty="0">
+                <a:solidFill>
+                  <a:srgbClr val="DEDEDE"/>
+                </a:solidFill>
+                <a:latin typeface="Arial" pitchFamily="34" charset="0"/>
+                <a:ea typeface="Arial" pitchFamily="34" charset="-122"/>
+                <a:cs typeface="Arial" pitchFamily="34" charset="-120"/>
+              </a:rPr>
+              <a:t>Or a model which can decide on the fly?</a:t>
+            </a:r>
+            <a:endParaRPr lang="en-US" sz="1560" dirty="0"/>
           </a:p>
         </p:txBody>
       </p:sp>
@@ -16262,7 +15764,13 @@
       </p:grpSp>
       <p:grpSp>
         <p:nvGrpSpPr>
-          <p:cNvPr id="40" name="Reveal 3"/>
+          <p:cNvPr id="41" name="Group 40">
+            <a:extLst>
+              <a:ext uri="{FF2B5EF4-FFF2-40B4-BE49-F238E27FC236}">
+                <a16:creationId xmlns:a16="http://schemas.microsoft.com/office/drawing/2014/main" id="{AE4E581A-2C22-B249-A8A6-1CDB33248A80}"/>
+              </a:ext>
+            </a:extLst>
+          </p:cNvPr>
           <p:cNvGrpSpPr/>
           <p:nvPr/>
         </p:nvGrpSpPr>
@@ -16501,7 +16009,7 @@
           </p:nvSpPr>
           <p:spPr>
             <a:xfrm>
-              <a:off x="7927300" y="3456623"/>
+              <a:off x="7927300" y="3652004"/>
               <a:ext cx="2809161" cy="636984"/>
             </a:xfrm>
             <a:prstGeom prst="roundRect">
@@ -16539,7 +16047,7 @@
           </p:nvSpPr>
           <p:spPr>
             <a:xfrm>
-              <a:off x="8033980" y="3540443"/>
+              <a:off x="8033980" y="3735824"/>
               <a:ext cx="2128123" cy="152400"/>
             </a:xfrm>
             <a:prstGeom prst="rect">
@@ -16578,7 +16086,7 @@
           </p:nvSpPr>
           <p:spPr>
             <a:xfrm>
-              <a:off x="8033980" y="3689033"/>
+              <a:off x="8033980" y="3884414"/>
               <a:ext cx="675918" cy="152400"/>
             </a:xfrm>
             <a:prstGeom prst="rect">
@@ -16617,7 +16125,7 @@
           </p:nvSpPr>
           <p:spPr>
             <a:xfrm>
-              <a:off x="8033980" y="3875723"/>
+              <a:off x="8033980" y="4071104"/>
               <a:ext cx="2207181" cy="129540"/>
             </a:xfrm>
             <a:prstGeom prst="rect">
@@ -16812,51 +16320,6 @@
                                         </p:cTn>
                                         <p:tgtEl>
                                           <p:spTgt spid="39"/>
-                                        </p:tgtEl>
-                                        <p:attrNameLst>
-                                          <p:attrName>style.visibility</p:attrName>
-                                        </p:attrNameLst>
-                                      </p:cBhvr>
-                                      <p:to>
-                                        <p:strVal val="visible"/>
-                                      </p:to>
-                                    </p:set>
-                                  </p:childTnLst>
-                                </p:cTn>
-                              </p:par>
-                            </p:childTnLst>
-                          </p:cTn>
-                        </p:par>
-                      </p:childTnLst>
-                    </p:cTn>
-                  </p:par>
-                  <p:par>
-                    <p:cTn id="11" fill="hold">
-                      <p:stCondLst>
-                        <p:cond delay="indefinite"/>
-                      </p:stCondLst>
-                      <p:childTnLst>
-                        <p:par>
-                          <p:cTn id="12" fill="hold">
-                            <p:stCondLst>
-                              <p:cond delay="0"/>
-                            </p:stCondLst>
-                            <p:childTnLst>
-                              <p:par>
-                                <p:cTn id="13" presetID="1" presetClass="entr" presetSubtype="0" fill="hold" nodeType="clickEffect">
-                                  <p:stCondLst>
-                                    <p:cond delay="0"/>
-                                  </p:stCondLst>
-                                  <p:childTnLst>
-                                    <p:set>
-                                      <p:cBhvr>
-                                        <p:cTn id="14" dur="1" fill="hold">
-                                          <p:stCondLst>
-                                            <p:cond delay="0"/>
-                                          </p:stCondLst>
-                                        </p:cTn>
-                                        <p:tgtEl>
-                                          <p:spTgt spid="40"/>
                                         </p:tgtEl>
                                         <p:attrNameLst>
                                           <p:attrName>style.visibility</p:attrName>

--- a/presentation/presentation.pptx
+++ b/presentation/presentation.pptx
@@ -22,6 +22,7 @@
     <p:sldId id="267" r:id="rId13"/>
     <p:sldId id="268" r:id="rId14"/>
     <p:sldId id="269" r:id="rId15"/>
+    <p:sldId id="274" r:id="rId25"/>
     <p:sldId id="270" r:id="rId16"/>
     <p:sldId id="271" r:id="rId17"/>
     <p:sldId id="272" r:id="rId18"/>
@@ -1017,19 +1018,68 @@
           <a:lstStyle/>
           <a:p>
             <a:r>
-              <a:rPr lang="en-US" dirty="0"/>
-              <a:t>Automate
-Suggested timing: 2 minutes
-KEY MESSAGE
-Check changes before release and keep checking after release.
-DEFINITION
-CI/CD automates repeatable change, evaluation and deployment steps; continuous evaluation monitors behaviour after deployment.
-TALK TRACK
-Explain how the chosen configuration moves through broader release tests, operational limits, approval and deployment. Include cases kept outside optimisation and candidate selection. Show where scheduled production evaluations fit. The pipeline preserves the quality requirement as the agent changes.
-TRANSITION
-Let's follow a change through the workflow.
-SOURCES
-Microsoft Foundry continuous evaluation and GitHub Actions concepts.</a:t>
+              <a:t>Three test sets</a:t>
+            </a:r>
+          </a:p>
+          <a:p/>
+          <a:p>
+            <a:r>
+              <a:t>Suggested timing: 2 minutes</a:t>
+            </a:r>
+          </a:p>
+          <a:p/>
+          <a:p>
+            <a:r>
+              <a:t>KEY MESSAGE</a:t>
+            </a:r>
+          </a:p>
+          <a:p>
+            <a:r>
+              <a:t>Three test sets, three jobs.</a:t>
+            </a:r>
+          </a:p>
+          <a:p/>
+          <a:p>
+            <a:r>
+              <a:t>DEFINITION</a:t>
+            </a:r>
+          </a:p>
+          <a:p>
+            <a:r>
+              <a:t>Development data trains the optimizer, holdout data validates it, and a drift set is never shown to it.</a:t>
+            </a:r>
+          </a:p>
+          <a:p/>
+          <a:p>
+            <a:r>
+              <a:t>TALK TRACK</a:t>
+            </a:r>
+          </a:p>
+          <a:p>
+            <a:r>
+              <a:t>Homework, practice exam, surprise exam. The optimizer trains on development and validates on holdout, and we look at both often, so both wear down over time. Our holdout was the same kind of question about the same policies, so a candidate that memorised the policies passed both. The drift set is never shown to the optimizer and its answers change with the date: Tim comes back, Priya's delegation ends, 2027 thresholds start. An agent that looks things up passes; an agent with facts in its prompt confidently gives the old answer.</a:t>
+            </a:r>
+          </a:p>
+          <a:p/>
+          <a:p>
+            <a:r>
+              <a:t>TRANSITION</a:t>
+            </a:r>
+          </a:p>
+          <a:p>
+            <a:r>
+              <a:t>So what does the gate actually check?</a:t>
+            </a:r>
+          </a:p>
+          <a:p/>
+          <a:p>
+            <a:r>
+              <a:t>SOURCES</a:t>
+            </a:r>
+          </a:p>
+          <a:p>
+            <a:r>
+              <a:t>Microsoft Learn: Optimize agent instructions, skills, tools, and models (validation_dataset).</a:t>
             </a:r>
           </a:p>
         </p:txBody>
@@ -1115,21 +1165,79 @@
           <a:lstStyle/>
           <a:p>
             <a:r>
-              <a:rPr lang="en-US" dirty="0"/>
-              <a:t>Demo 6 - Release Check
-Suggested timing: 5 minutes
-KEY MESSAGE
-The workflow must show why a change stopped or advanced.
-DEFINITION
-Release gates check evaluation thresholds; approvals record the release decision.
-TALK TRACK
-Follow the selected configuration through a prepared GitHub Actions run. Inspect release-test evidence before revealing its gate result. Then introduce a separately labelled, deliberate configuration regression and inspect its check results. Keep this regression separate from the original baseline and Optimizer experiment. Finish with approvals, deployment, rollback and scheduled evaluation.
-DEMO CHECKPOINT
-06-automate: retain the selected configuration, release reports and workflow run IDs. Keep the deliberate regression as a separate resettable checkpoint with its exact diff and test evidence.
-TRANSITION
-Now put the release checks into the complete delivery process.
-SOURCES
-GitHub Actions release-check demonstration.</a:t>
+              <a:t>Demo 6 - The PR that goes red</a:t>
+            </a:r>
+          </a:p>
+          <a:p/>
+          <a:p>
+            <a:r>
+              <a:t>Suggested timing: 5 minutes</a:t>
+            </a:r>
+          </a:p>
+          <a:p/>
+          <a:p>
+            <a:r>
+              <a:t>KEY MESSAGE</a:t>
+            </a:r>
+          </a:p>
+          <a:p>
+            <a:r>
+              <a:t>The workflow must show why a change stopped.</a:t>
+            </a:r>
+          </a:p>
+          <a:p/>
+          <a:p>
+            <a:r>
+              <a:t>DEFINITION</a:t>
+            </a:r>
+          </a:p>
+          <a:p>
+            <a:r>
+              <a:t>Release gates check evaluation results; approvals record the release decision.</a:t>
+            </a:r>
+          </a:p>
+          <a:p/>
+          <a:p>
+            <a:r>
+              <a:t>TALK TRACK</a:t>
+            </a:r>
+          </a:p>
+          <a:p>
+            <a:r>
+              <a:t>Open a pull request containing the optimizer's fact-stuffed candidate. The fact check goes red first, showing the copied names and amounts. Then show the drift-set result: on 27 October, Tim is back, and the stuffed prompt still sends the employee to Priya. The baseline, which looks it up, gets it right. Merge blocked.</a:t>
+            </a:r>
+          </a:p>
+          <a:p/>
+          <a:p>
+            <a:r>
+              <a:t>DEMO CHECKPOINT</a:t>
+            </a:r>
+          </a:p>
+          <a:p>
+            <a:r>
+              <a:t>06-automate: keep the stuffed candidate as a separate, resettable branch with its exact diff and the failing workflow run ID.</a:t>
+            </a:r>
+          </a:p>
+          <a:p/>
+          <a:p>
+            <a:r>
+              <a:t>TRANSITION</a:t>
+            </a:r>
+          </a:p>
+          <a:p>
+            <a:r>
+              <a:t>And after release, production keeps feeding the tests.</a:t>
+            </a:r>
+          </a:p>
+          <a:p/>
+          <a:p>
+            <a:r>
+              <a:t>SOURCES</a:t>
+            </a:r>
+          </a:p>
+          <a:p>
+            <a:r>
+              <a:t>GitHub Actions release-check demonstration.</a:t>
             </a:r>
           </a:p>
         </p:txBody>
@@ -1215,19 +1323,68 @@
           <a:lstStyle/>
           <a:p>
             <a:r>
-              <a:rPr lang="en-US" dirty="0"/>
-              <a:t>From test cases to production
-Suggested timing: 2 minutes
-KEY MESSAGE
-Production evidence improves the tests used for the next release.
-DEFINITION
-A golden dataset is a reviewed, versioned set of cases with agreed expected outcomes. It is a test asset, not a guarantee of correctness.
-TALK TRACK
-Read the top row left to right. Before launch, simulation establishes expected behaviour. Review generated examples before promoting them into the golden dataset. Follow the five CI/CD steps: pull request, build and test code and tool contracts, evaluate the agent against the release dataset, enforce pre-agreed quality and operational limits, then deploy and smoke-test the versioned release. Failed checks stop promotion. Keep the candidate artifact, source versions, dataset, rubric, judge configuration and reports pinned. In production, evaluate sampled traces and alert on defined thresholds. Follow the simple return path: production to Optimise, then back into the CI/CD pull request. Compare Agent Optimizer candidates against fixed criteria and retain the baseline if the evidence does not support a change. A selected candidate re-enters the same CI/CD checks; optimisation does not deploy directly. Review case outcomes rather than automatically accepting the agent's own response as ground truth. Keep optimisation and candidate-selection cases separate from final release cases; curate and version the datasets deliberately. Simulation and trace-to-dataset generation are preview capabilities; this slide describes the intended lifecycle, not extra completed demos. Gates, alert thresholds and orchestration must be wired explicitly in the application and workflow. Allow two minutes.
-TRANSITION
-Here are six related capabilities worth exploring beyond today's demonstrations.
-SOURCES
-Microsoft Learn and GitHub Docs, checked 24 September 2026: https://learn.microsoft.com/en-us/azure/foundry/observability/how-to/evaluation-dataset-synthetic ; https://learn.microsoft.com/en-us/azure/foundry/observability/how-to/evaluation-datasets ; https://learn.microsoft.com/en-us/azure/foundry/observability/how-to/traces-to-dataset ; https://learn.microsoft.com/en-us/azure/foundry/concepts/observability ; https://docs.github.com/en/actions/reference/workflows-and-actions/deployments-and-environments</a:t>
+              <a:t>Production feeds the tests</a:t>
+            </a:r>
+          </a:p>
+          <a:p/>
+          <a:p>
+            <a:r>
+              <a:t>Suggested timing: 2 minutes</a:t>
+            </a:r>
+          </a:p>
+          <a:p/>
+          <a:p>
+            <a:r>
+              <a:t>KEY MESSAGE</a:t>
+            </a:r>
+          </a:p>
+          <a:p>
+            <a:r>
+              <a:t>Every production failure becomes a test.</a:t>
+            </a:r>
+          </a:p>
+          <a:p/>
+          <a:p>
+            <a:r>
+              <a:t>DEFINITION</a:t>
+            </a:r>
+          </a:p>
+          <a:p>
+            <a:r>
+              <a:t>Continuous evaluation scores a sample of real conversations after release.</a:t>
+            </a:r>
+          </a:p>
+          <a:p/>
+          <a:p>
+            <a:r>
+              <a:t>TALK TRACK</a:t>
+            </a:r>
+          </a:p>
+          <a:p>
+            <a:r>
+              <a:t>Turn on continuous evaluation in Foundry to score a sample of real conversations and alert on quality, latency and cost. Review interesting failures, redact personal data, and add them as new test rows. The next change, whether from a person or the optimizer, goes through the same gate against them. Simulation and trace-to-dataset generation are preview capabilities; verify before relying on them.</a:t>
+            </a:r>
+          </a:p>
+          <a:p/>
+          <a:p>
+            <a:r>
+              <a:t>TRANSITION</a:t>
+            </a:r>
+          </a:p>
+          <a:p>
+            <a:r>
+              <a:t>Here are six related capabilities worth exploring beyond today's demonstrations.</a:t>
+            </a:r>
+          </a:p>
+          <a:p/>
+          <a:p>
+            <a:r>
+              <a:t>SOURCES</a:t>
+            </a:r>
+          </a:p>
+          <a:p>
+            <a:r>
+              <a:t>Microsoft Learn and GitHub Docs, checked 24 September 2026: https://learn.microsoft.com/en-us/azure/foundry/observability/how-to/evaluation-dataset-synthetic ; https://learn.microsoft.com/en-us/azure/foundry/observability/how-to/evaluation-datasets ; https://learn.microsoft.com/en-us/azure/foundry/observability/how-to/traces-to-dataset ; https://learn.microsoft.com/en-us/azure/foundry/concepts/observability ; https://docs.github.com/en/actions/reference/workflows-and-actions/deployments-and-environments</a:t>
             </a:r>
           </a:p>
         </p:txBody>
@@ -1464,6 +1621,137 @@
 </p:notes>
 </file>
 
+<file path=ppt/notesSlides/notesSlide19.xml><?xml version="1.0" encoding="utf-8"?>
+<p:notes xmlns:a="http://schemas.openxmlformats.org/drawingml/2006/main" xmlns:p="http://schemas.openxmlformats.org/presentationml/2006/main" xmlns:r="http://schemas.openxmlformats.org/officeDocument/2006/relationships">
+  <p:cSld>
+    <p:spTree>
+      <p:nvGrpSpPr>
+        <p:cNvPr id="1" name=""/>
+        <p:cNvGrpSpPr/>
+        <p:nvPr/>
+      </p:nvGrpSpPr>
+      <p:grpSpPr>
+        <a:xfrm>
+          <a:off x="0" y="0"/>
+          <a:ext cx="0" cy="0"/>
+          <a:chOff x="0" y="0"/>
+          <a:chExt cx="0" cy="0"/>
+        </a:xfrm>
+      </p:grpSpPr>
+      <p:sp>
+        <p:nvSpPr>
+          <p:cNvPr id="2" name="Slide Image Placeholder 1"/>
+          <p:cNvSpPr>
+            <a:spLocks noGrp="1"/>
+          </p:cNvSpPr>
+          <p:nvPr>
+            <p:ph type="sldImg" idx="2"/>
+          </p:nvPr>
+        </p:nvSpPr>
+        <p:spPr/>
+      </p:sp>
+      <p:sp>
+        <p:nvSpPr>
+          <p:cNvPr id="3" name="Notes Placeholder 2"/>
+          <p:cNvSpPr>
+            <a:spLocks noGrp="1"/>
+          </p:cNvSpPr>
+          <p:nvPr>
+            <p:ph type="body" idx="3" sz="quarter"/>
+          </p:nvPr>
+        </p:nvSpPr>
+        <p:spPr/>
+        <p:txBody>
+          <a:bodyPr/>
+          <a:lstStyle/>
+          <a:p>
+            <a:r>
+              <a:t>What the gate checks</a:t>
+            </a:r>
+          </a:p>
+          <a:p/>
+          <a:p>
+            <a:r>
+              <a:t>Suggested timing: 2 minutes</a:t>
+            </a:r>
+          </a:p>
+          <a:p/>
+          <a:p>
+            <a:r>
+              <a:t>KEY MESSAGE</a:t>
+            </a:r>
+          </a:p>
+          <a:p>
+            <a:r>
+              <a:t>Cheapest check first.</a:t>
+            </a:r>
+          </a:p>
+          <a:p/>
+          <a:p>
+            <a:r>
+              <a:t>DEFINITION</a:t>
+            </a:r>
+          </a:p>
+          <a:p>
+            <a:r>
+              <a:t>A release gate is an automated check that can stop a change from being promoted.</a:t>
+            </a:r>
+          </a:p>
+          <a:p/>
+          <a:p>
+            <a:r>
+              <a:t>TALK TRACK</a:t>
+            </a:r>
+          </a:p>
+          <a:p>
+            <a:r>
+              <a:t>One: a script scans the candidate prompt and tool descriptions for amounts, dates, durations and names that the baseline didn't have. Seconds, no LLM. Two: compare against the stored baseline, not a fixed threshold. LLM-judged scores move between runs; Foundry's own optimizer guidance treats changes under 0.03 as noise, so fail on a bigger drop. Three: some failures block regardless of the average, such as sending someone to the wrong approver or following an instruction in an email. Four: pin prompt, tool descriptions, model and dataset version together, or scores aren't comparable.</a:t>
+            </a:r>
+          </a:p>
+          <a:p/>
+          <a:p>
+            <a:r>
+              <a:t>TRANSITION</a:t>
+            </a:r>
+          </a:p>
+          <a:p>
+            <a:r>
+              <a:t>Let's open a pull request that should fail.</a:t>
+            </a:r>
+          </a:p>
+          <a:p/>
+          <a:p>
+            <a:r>
+              <a:t>SOURCES</a:t>
+            </a:r>
+          </a:p>
+          <a:p>
+            <a:r>
+              <a:t>Microsoft Learn: Agent optimizer overview (score interpretation).</a:t>
+            </a:r>
+          </a:p>
+        </p:txBody>
+      </p:sp>
+      <p:sp>
+        <p:nvSpPr>
+          <p:cNvPr id="4" name="Slide Number Placeholder 3"/>
+          <p:cNvSpPr>
+            <a:spLocks noGrp="1"/>
+          </p:cNvSpPr>
+          <p:nvPr>
+            <p:ph type="sldNum" idx="5" sz="quarter"/>
+          </p:nvPr>
+        </p:nvSpPr>
+        <p:spPr/>
+      </p:sp>
+    </p:spTree>
+  </p:cSld>
+  <p:clrMapOvr>
+    <a:masterClrMapping/>
+  </p:clrMapOvr>
+</p:notes>
+</file>
+
 <file path=ppt/notesSlides/notesSlide2.xml><?xml version="1.0" encoding="utf-8"?>
 <p:notes xmlns:a="http://schemas.openxmlformats.org/drawingml/2006/main" xmlns:r="http://schemas.openxmlformats.org/officeDocument/2006/relationships" xmlns:p="http://schemas.openxmlformats.org/presentationml/2006/main">
   <p:cSld>
@@ -1607,19 +1895,68 @@
           <a:lstStyle/>
           <a:p>
             <a:r>
-              <a:rPr lang="en-US" dirty="0"/>
-              <a:t>Meet the agent
-Suggested timing: 1 minutes
-KEY MESSAGE
-One purchasing advice agent and one question connect the demonstrations.
-DEFINITION
-The agent helps employees interpret purchasing guidance and identify the approvals they need.
-TALK TRACK
-Introduce the learning coordinator and read the Nova Learning question. The agent advises on purchasing; the employee follows the approval process. Use this question to establish the baseline, then expand to different dates, purchase types and incomplete requests when evaluating consistency.
-TRANSITION
-The first choice is normally which model to use.
-SOURCES
-Nova Learning scenario.</a:t>
+              <a:t>Meet the agent</a:t>
+            </a:r>
+          </a:p>
+          <a:p/>
+          <a:p>
+            <a:r>
+              <a:t>Suggested timing: 1 minutes</a:t>
+            </a:r>
+          </a:p>
+          <a:p/>
+          <a:p>
+            <a:r>
+              <a:t>KEY MESSAGE</a:t>
+            </a:r>
+          </a:p>
+          <a:p>
+            <a:r>
+              <a:t>One purchasing advice agent and one question connect the demonstrations.</a:t>
+            </a:r>
+          </a:p>
+          <a:p/>
+          <a:p>
+            <a:r>
+              <a:t>DEFINITION</a:t>
+            </a:r>
+          </a:p>
+          <a:p>
+            <a:r>
+              <a:t>The agent helps employees interpret purchasing guidance and identify the approvals they need.</a:t>
+            </a:r>
+          </a:p>
+          <a:p/>
+          <a:p>
+            <a:r>
+              <a:t>TALK TRACK</a:t>
+            </a:r>
+          </a:p>
+          <a:p>
+            <a:r>
+              <a:t>Introduce the team lead and read the dinner question. Leave alcohol out on purpose: the agent should ask about it. The agent advises on purchasing; the employee follows the approval process. This one question carries the whole session: policy (Foundry IQ), who can approve today (Work IQ), and budget (Fabric IQ). Later we expand to different dates, purchase types and incomplete requests when evaluating consistency.</a:t>
+            </a:r>
+          </a:p>
+          <a:p/>
+          <a:p>
+            <a:r>
+              <a:t>TRANSITION</a:t>
+            </a:r>
+          </a:p>
+          <a:p>
+            <a:r>
+              <a:t>The first choice is normally which model to use.</a:t>
+            </a:r>
+          </a:p>
+          <a:p/>
+          <a:p>
+            <a:r>
+              <a:t>SOURCES</a:t>
+            </a:r>
+          </a:p>
+          <a:p>
+            <a:r>
+              <a:t>Team dinner scenario (fictional).</a:t>
             </a:r>
           </a:p>
         </p:txBody>
@@ -1903,19 +2240,68 @@
           <a:lstStyle/>
           <a:p>
             <a:r>
-              <a:rPr lang="en-US" dirty="0"/>
-              <a:t>Grounding
-Suggested timing: 3 minutes
-KEY MESSAGE
-Different sources provide different kinds of organisational context.
-DEFINITION
-Foundry IQ provides institutional knowledge, Fabric IQ provides governed business entities and state, and Work IQ provides workplace context.
-TALK TRACK
-Return to the purchasing question and explain the three source types: institutional documents, business records and workplace conversations. Foundry IQ is connected, Fabric IQ is a conceptual spend example and Work IQ uses a sample adapter.
-TRANSITION
-Let's ask the agent and explore the context available to it.
-SOURCES
-Microsoft IQ concepts and fictional scenario.</a:t>
+              <a:t>Grounding</a:t>
+            </a:r>
+          </a:p>
+          <a:p/>
+          <a:p>
+            <a:r>
+              <a:t>Suggested timing: 3 minutes</a:t>
+            </a:r>
+          </a:p>
+          <a:p/>
+          <a:p>
+            <a:r>
+              <a:t>KEY MESSAGE</a:t>
+            </a:r>
+          </a:p>
+          <a:p>
+            <a:r>
+              <a:t>Different sources provide different kinds of organisational context.</a:t>
+            </a:r>
+          </a:p>
+          <a:p/>
+          <a:p>
+            <a:r>
+              <a:t>DEFINITION</a:t>
+            </a:r>
+          </a:p>
+          <a:p>
+            <a:r>
+              <a:t>Foundry IQ provides institutional knowledge, Fabric IQ provides governed business entities and state, and Work IQ provides workplace context.</a:t>
+            </a:r>
+          </a:p>
+          <a:p/>
+          <a:p>
+            <a:r>
+              <a:t>TALK TRACK</a:t>
+            </a:r>
+          </a:p>
+          <a:p>
+            <a:r>
+              <a:t>Return to the purchasing question and explain the three source types: institutional documents, business records and workplace conversations. Open tools.py: each IQ is a tool shaped like the real MCP tool. Foundry IQ is knowledge_base_retrieve over policies, Work IQ is ask over people, roles, leave, recorded delegations and messages, and Fabric IQ is search_ontology returning one fixed budget. Line to land: policy tells you who must approve; Work IQ tells you who that is today. Tim, the Hospitality Lead, is on leave; the Approvals Register records Priya as his delegate. A chat message or an email can tell you who to contact, but never transfers approval authority. Real IQs are LLM-backed agents with generic tool descriptions; domain guidance lives in the knowledge base or ontology. Ours are deterministic local stand-ins, so none is a real IQ connection.</a:t>
+            </a:r>
+          </a:p>
+          <a:p/>
+          <a:p>
+            <a:r>
+              <a:t>TRANSITION</a:t>
+            </a:r>
+          </a:p>
+          <a:p>
+            <a:r>
+              <a:t>Let's ask the agent and explore the context available to it.</a:t>
+            </a:r>
+          </a:p>
+          <a:p/>
+          <a:p>
+            <a:r>
+              <a:t>SOURCES</a:t>
+            </a:r>
+          </a:p>
+          <a:p>
+            <a:r>
+              <a:t>Microsoft IQ concepts and fictional scenario.</a:t>
             </a:r>
           </a:p>
         </p:txBody>
@@ -2001,21 +2387,79 @@
           <a:lstStyle/>
           <a:p>
             <a:r>
-              <a:rPr lang="en-US" dirty="0"/>
-              <a:t>Demo 2 - Run the Starting Agent
-Suggested timing: 5 minutes
-KEY MESSAGE
-Establish the working baseline and preserve its evidence.
-DEFINITION
-Instructions define the task and boundaries; tool descriptions explain when a source is useful and what it returns.
-TALK TRACK
-Run the opening question with Foundry IQ and the sample Work IQ adapter available. Read the actual answer, then inspect the policy and synthetic email: one quotation and Head of Learning approval by 30 November 2026. Save the configuration, source versions, question, answer and run ID. A correct first answer is the starting point for measuring consistency across cases.
-DEMO CHECKPOINT
-02-grounding: save a working baseline, source fixtures and the run ID. Use the saved run if the live service is unavailable, identifying it as a prepared run.
-TRANSITION
-Open the trace to inspect how the answer was produced.
-SOURCES
-Demo implementation to be rehearsed.</a:t>
+              <a:t>Demo 2 - Run the Starting Agent</a:t>
+            </a:r>
+          </a:p>
+          <a:p/>
+          <a:p>
+            <a:r>
+              <a:t>Suggested timing: 5 minutes</a:t>
+            </a:r>
+          </a:p>
+          <a:p/>
+          <a:p>
+            <a:r>
+              <a:t>KEY MESSAGE</a:t>
+            </a:r>
+          </a:p>
+          <a:p>
+            <a:r>
+              <a:t>Establish the working baseline and preserve its evidence.</a:t>
+            </a:r>
+          </a:p>
+          <a:p/>
+          <a:p>
+            <a:r>
+              <a:t>DEFINITION</a:t>
+            </a:r>
+          </a:p>
+          <a:p>
+            <a:r>
+              <a:t>Instructions define the task and boundaries; tool descriptions explain when a source is useful and what it returns.</a:t>
+            </a:r>
+          </a:p>
+          <a:p/>
+          <a:p>
+            <a:r>
+              <a:t>TALK TRACK</a:t>
+            </a:r>
+          </a:p>
+          <a:p>
+            <a:r>
+              <a:t>Run the opening question with Foundry IQ and the sample Work IQ adapter available. Read the actual answer: it should ask whether alcohol is included. Answer 'yes, there is wine' and show it find the current approver: Hospitality Lead approval is needed, Tim is on leave, Priya holds the recorded delegation. Save the configuration, source versions, question, answer and run ID. A correct first answer is the starting point for measuring consistency across cases.</a:t>
+            </a:r>
+          </a:p>
+          <a:p/>
+          <a:p>
+            <a:r>
+              <a:t>DEMO CHECKPOINT</a:t>
+            </a:r>
+          </a:p>
+          <a:p>
+            <a:r>
+              <a:t>02-grounding: save a working baseline, source fixtures and the run ID. Use the saved run if the live service is unavailable, identifying it as a prepared run.</a:t>
+            </a:r>
+          </a:p>
+          <a:p/>
+          <a:p>
+            <a:r>
+              <a:t>TRANSITION</a:t>
+            </a:r>
+          </a:p>
+          <a:p>
+            <a:r>
+              <a:t>Open the trace to inspect how the answer was produced.</a:t>
+            </a:r>
+          </a:p>
+          <a:p/>
+          <a:p>
+            <a:r>
+              <a:t>SOURCES</a:t>
+            </a:r>
+          </a:p>
+          <a:p>
+            <a:r>
+              <a:t>Demo implementation to be rehearsed.</a:t>
             </a:r>
           </a:p>
         </p:txBody>
@@ -6840,7 +7284,7 @@
         <p:spPr>
           <a:xfrm>
             <a:off x="975360" y="1068229"/>
-            <a:ext cx="1533263" cy="411480"/>
+            <a:ext cx="6000000" cy="411480"/>
           </a:xfrm>
           <a:prstGeom prst="rect">
             <a:avLst/>
@@ -6864,7 +7308,7 @@
                 <a:ea typeface="Arial" pitchFamily="34" charset="-122"/>
                 <a:cs typeface="Arial" pitchFamily="34" charset="-120"/>
               </a:rPr>
-              <a:t>Automate</a:t>
+              <a:t>Three test sets, three jobs</a:t>
             </a:r>
             <a:endParaRPr lang="en-US" sz="2640" dirty="0"/>
           </a:p>
@@ -6994,8 +7438,8 @@
           </p:nvSpPr>
           <p:spPr>
             <a:xfrm>
-              <a:off x="1349812" y="2207419"/>
-              <a:ext cx="165378" cy="190500"/>
+              <a:off x="1181100" y="2207419"/>
+              <a:ext cx="411480" cy="190500"/>
             </a:xfrm>
             <a:prstGeom prst="rect">
               <a:avLst/>
@@ -7004,10 +7448,10 @@
             <a:ln/>
           </p:spPr>
           <p:txBody>
-            <a:bodyPr wrap="none" lIns="0" tIns="0" rIns="0" bIns="0" rtlCol="0" anchor="ctr"/>
-            <a:lstStyle/>
-            <a:p>
-              <a:pPr marL="0" indent="0" algn="l">
+            <a:bodyPr wrap="square" lIns="0" tIns="0" rIns="0" bIns="0" rtlCol="0" anchor="ctr"/>
+            <a:lstStyle/>
+            <a:p>
+              <a:pPr marL="0" indent="0" algn="ctr">
                 <a:buNone/>
               </a:pPr>
               <a:r>
@@ -7019,7 +7463,7 @@
                   <a:ea typeface="Arial" pitchFamily="34" charset="-122"/>
                   <a:cs typeface="Arial" pitchFamily="34" charset="-120"/>
                 </a:rPr>
-                <a:t>1</a:t>
+                <a:t>D</a:t>
               </a:r>
               <a:endParaRPr lang="en-US" sz="1200" dirty="0"/>
             </a:p>
@@ -7034,7 +7478,7 @@
           <p:spPr>
             <a:xfrm>
               <a:off x="1181100" y="2698909"/>
-              <a:ext cx="804386" cy="266700"/>
+              <a:ext cx="2809161" cy="266700"/>
             </a:xfrm>
             <a:prstGeom prst="rect">
               <a:avLst/>
@@ -7043,7 +7487,7 @@
             <a:ln/>
           </p:spPr>
           <p:txBody>
-            <a:bodyPr wrap="none" lIns="0" tIns="0" rIns="0" bIns="0" rtlCol="0" anchor="ctr"/>
+            <a:bodyPr wrap="square" lIns="0" tIns="0" rIns="0" bIns="0" rtlCol="0" anchor="ctr"/>
             <a:lstStyle/>
             <a:p>
               <a:pPr marL="0" indent="0" algn="l">
@@ -7058,7 +7502,7 @@
                   <a:ea typeface="Arial" pitchFamily="34" charset="-122"/>
                   <a:cs typeface="Arial" pitchFamily="34" charset="-120"/>
                 </a:rPr>
-                <a:t>Trigger</a:t>
+                <a:t>Development</a:t>
               </a:r>
               <a:endParaRPr lang="en-US" sz="1680" dirty="0"/>
             </a:p>
@@ -7073,7 +7517,7 @@
           <p:spPr>
             <a:xfrm>
               <a:off x="1181100" y="3047881"/>
-              <a:ext cx="2404586" cy="182880"/>
+              <a:ext cx="2809161" cy="564123"/>
             </a:xfrm>
             <a:prstGeom prst="rect">
               <a:avLst/>
@@ -7082,7 +7526,7 @@
             <a:ln/>
           </p:spPr>
           <p:txBody>
-            <a:bodyPr wrap="none" lIns="0" tIns="0" rIns="0" bIns="0" rtlCol="0" anchor="ctr"/>
+            <a:bodyPr wrap="square" lIns="0" tIns="0" rIns="0" bIns="0" rtlCol="0" anchor="t"/>
             <a:lstStyle/>
             <a:p>
               <a:pPr marL="0" indent="0" algn="l">
@@ -7097,7 +7541,7 @@
                   <a:ea typeface="Arial" pitchFamily="34" charset="-122"/>
                   <a:cs typeface="Arial" pitchFamily="34" charset="-120"/>
                 </a:rPr>
-                <a:t>Agent changes, source updates and</a:t>
+                <a:t>The optimizer trains on it.</a:t>
               </a:r>
               <a:endParaRPr lang="en-US" sz="1140" dirty="0"/>
             </a:p>
@@ -7105,45 +7549,6 @@
         </p:sp>
         <p:sp>
           <p:nvSpPr>
-            <p:cNvPr id="10" name="reveal-1:7:text"/>
-            <p:cNvSpPr/>
-            <p:nvPr/>
-          </p:nvSpPr>
-          <p:spPr>
-            <a:xfrm>
-              <a:off x="1181100" y="3243263"/>
-              <a:ext cx="1292066" cy="182880"/>
-            </a:xfrm>
-            <a:prstGeom prst="rect">
-              <a:avLst/>
-            </a:prstGeom>
-            <a:noFill/>
-            <a:ln/>
-          </p:spPr>
-          <p:txBody>
-            <a:bodyPr wrap="none" lIns="0" tIns="0" rIns="0" bIns="0" rtlCol="0" anchor="ctr"/>
-            <a:lstStyle/>
-            <a:p>
-              <a:pPr marL="0" indent="0" algn="l">
-                <a:buNone/>
-              </a:pPr>
-              <a:r>
-                <a:rPr lang="en-US" sz="1140" dirty="0">
-                  <a:solidFill>
-                    <a:srgbClr val="B0B0B0"/>
-                  </a:solidFill>
-                  <a:latin typeface="Arial" pitchFamily="34" charset="0"/>
-                  <a:ea typeface="Arial" pitchFamily="34" charset="-122"/>
-                  <a:cs typeface="Arial" pitchFamily="34" charset="-120"/>
-                </a:rPr>
-                <a:t>scheduled checks.</a:t>
-              </a:r>
-              <a:endParaRPr lang="en-US" sz="1140" dirty="0"/>
-            </a:p>
-          </p:txBody>
-        </p:sp>
-        <p:sp>
-          <p:nvSpPr>
             <p:cNvPr id="11" name="reveal-1:8:shape"/>
             <p:cNvSpPr/>
             <p:nvPr/>
@@ -7151,7 +7556,7 @@
           <p:spPr>
             <a:xfrm>
               <a:off x="1181100" y="3652004"/>
-              <a:ext cx="2809161" cy="548640"/>
+              <a:ext cx="2809161" cy="668640"/>
             </a:xfrm>
             <a:prstGeom prst="roundRect">
               <a:avLst>
@@ -7188,8 +7593,8 @@
           </p:nvSpPr>
           <p:spPr>
             <a:xfrm>
-              <a:off x="1287780" y="3735824"/>
-              <a:ext cx="1728192" cy="152400"/>
+              <a:off x="1287780" y="3732004"/>
+              <a:ext cx="2595801" cy="508640"/>
             </a:xfrm>
             <a:prstGeom prst="rect">
               <a:avLst/>
@@ -7198,7 +7603,7 @@
             <a:ln/>
           </p:spPr>
           <p:txBody>
-            <a:bodyPr wrap="none" lIns="0" tIns="0" rIns="0" bIns="0" rtlCol="0" anchor="ctr"/>
+            <a:bodyPr wrap="square" lIns="0" tIns="0" rIns="0" bIns="0" rtlCol="0" anchor="t"/>
             <a:lstStyle/>
             <a:p>
               <a:pPr marL="0" indent="0" algn="l">
@@ -7213,7 +7618,7 @@
                   <a:ea typeface="Arial" pitchFamily="34" charset="-122"/>
                   <a:cs typeface="Arial" pitchFamily="34" charset="-120"/>
                 </a:rPr>
-                <a:t>When should the checks run?</a:t>
+                <a:t>Runs on every pull request, as a small, quick subset.</a:t>
               </a:r>
               <a:endParaRPr lang="en-US" sz="900" dirty="0"/>
             </a:p>
@@ -7229,9 +7634,9 @@
         <p:grpSpPr>
           <a:xfrm>
             <a:off x="4348401" y="1868329"/>
-            <a:ext cx="3220760" cy="3791902"/>
+            <a:ext cx="3220641" cy="3791902"/>
             <a:chOff x="4348401" y="1868329"/>
-            <a:chExt cx="3220760" cy="3791902"/>
+            <a:chExt cx="3220641" cy="3791902"/>
           </a:xfrm>
         </p:grpSpPr>
         <p:sp>
@@ -7243,7 +7648,7 @@
           <p:spPr>
             <a:xfrm>
               <a:off x="4348401" y="1868329"/>
-              <a:ext cx="3220760" cy="3791902"/>
+              <a:ext cx="3220641" cy="3791902"/>
             </a:xfrm>
             <a:prstGeom prst="roundRect">
               <a:avLst>
@@ -7277,7 +7682,7 @@
           <p:spPr>
             <a:xfrm>
               <a:off x="4439841" y="1883569"/>
-              <a:ext cx="3037880" cy="0"/>
+              <a:ext cx="3037761" cy="0"/>
             </a:xfrm>
             <a:prstGeom prst="line">
               <a:avLst/>
@@ -7344,8 +7749,8 @@
           </p:nvSpPr>
           <p:spPr>
             <a:xfrm>
-              <a:off x="4713327" y="2207419"/>
-              <a:ext cx="184547" cy="190500"/>
+              <a:off x="4554141" y="2207419"/>
+              <a:ext cx="411480" cy="190500"/>
             </a:xfrm>
             <a:prstGeom prst="rect">
               <a:avLst/>
@@ -7354,10 +7759,10 @@
             <a:ln/>
           </p:spPr>
           <p:txBody>
-            <a:bodyPr wrap="none" lIns="0" tIns="0" rIns="0" bIns="0" rtlCol="0" anchor="ctr"/>
-            <a:lstStyle/>
-            <a:p>
-              <a:pPr marL="0" indent="0" algn="l">
+            <a:bodyPr wrap="square" lIns="0" tIns="0" rIns="0" bIns="0" rtlCol="0" anchor="ctr"/>
+            <a:lstStyle/>
+            <a:p>
+              <a:pPr marL="0" indent="0" algn="ctr">
                 <a:buNone/>
               </a:pPr>
               <a:r>
@@ -7369,7 +7774,7 @@
                   <a:ea typeface="Arial" pitchFamily="34" charset="-122"/>
                   <a:cs typeface="Arial" pitchFamily="34" charset="-120"/>
                 </a:rPr>
-                <a:t>2</a:t>
+                <a:t>H</a:t>
               </a:r>
               <a:endParaRPr lang="en-US" sz="1200" dirty="0"/>
             </a:p>
@@ -7384,7 +7789,7 @@
           <p:spPr>
             <a:xfrm>
               <a:off x="4554141" y="2698909"/>
-              <a:ext cx="948214" cy="266700"/>
+              <a:ext cx="2809161" cy="266700"/>
             </a:xfrm>
             <a:prstGeom prst="rect">
               <a:avLst/>
@@ -7393,7 +7798,7 @@
             <a:ln/>
           </p:spPr>
           <p:txBody>
-            <a:bodyPr wrap="none" lIns="0" tIns="0" rIns="0" bIns="0" rtlCol="0" anchor="ctr"/>
+            <a:bodyPr wrap="square" lIns="0" tIns="0" rIns="0" bIns="0" rtlCol="0" anchor="ctr"/>
             <a:lstStyle/>
             <a:p>
               <a:pPr marL="0" indent="0" algn="l">
@@ -7408,7 +7813,7 @@
                   <a:ea typeface="Arial" pitchFamily="34" charset="-122"/>
                   <a:cs typeface="Arial" pitchFamily="34" charset="-120"/>
                 </a:rPr>
-                <a:t>Evaluate</a:t>
+                <a:t>Holdout</a:t>
               </a:r>
               <a:endParaRPr lang="en-US" sz="1680" dirty="0"/>
             </a:p>
@@ -7423,7 +7828,7 @@
           <p:spPr>
             <a:xfrm>
               <a:off x="4554141" y="3047881"/>
-              <a:ext cx="2782491" cy="182880"/>
+              <a:ext cx="2809161" cy="564123"/>
             </a:xfrm>
             <a:prstGeom prst="rect">
               <a:avLst/>
@@ -7432,7 +7837,7 @@
             <a:ln/>
           </p:spPr>
           <p:txBody>
-            <a:bodyPr wrap="none" lIns="0" tIns="0" rIns="0" bIns="0" rtlCol="0" anchor="ctr"/>
+            <a:bodyPr wrap="square" lIns="0" tIns="0" rIns="0" bIns="0" rtlCol="0" anchor="t"/>
             <a:lstStyle/>
             <a:p>
               <a:pPr marL="0" indent="0" algn="l">
@@ -7447,7 +7852,7 @@
                   <a:ea typeface="Arial" pitchFamily="34" charset="-122"/>
                   <a:cs typeface="Arial" pitchFamily="34" charset="-120"/>
                 </a:rPr>
-                <a:t>Run the release test suite, including cases</a:t>
+                <a:t>The optimizer validates against it.</a:t>
               </a:r>
               <a:endParaRPr lang="en-US" sz="1140" dirty="0"/>
             </a:p>
@@ -7455,45 +7860,6 @@
         </p:sp>
         <p:sp>
           <p:nvSpPr>
-            <p:cNvPr id="19" name="reveal-2:15:text"/>
-            <p:cNvSpPr/>
-            <p:nvPr/>
-          </p:nvSpPr>
-          <p:spPr>
-            <a:xfrm>
-              <a:off x="4554141" y="3243263"/>
-              <a:ext cx="1430417" cy="182880"/>
-            </a:xfrm>
-            <a:prstGeom prst="rect">
-              <a:avLst/>
-            </a:prstGeom>
-            <a:noFill/>
-            <a:ln/>
-          </p:spPr>
-          <p:txBody>
-            <a:bodyPr wrap="none" lIns="0" tIns="0" rIns="0" bIns="0" rtlCol="0" anchor="ctr"/>
-            <a:lstStyle/>
-            <a:p>
-              <a:pPr marL="0" indent="0" algn="l">
-                <a:buNone/>
-              </a:pPr>
-              <a:r>
-                <a:rPr lang="en-US" sz="1140" dirty="0">
-                  <a:solidFill>
-                    <a:srgbClr val="B0B0B0"/>
-                  </a:solidFill>
-                  <a:latin typeface="Arial" pitchFamily="34" charset="0"/>
-                  <a:ea typeface="Arial" pitchFamily="34" charset="-122"/>
-                  <a:cs typeface="Arial" pitchFamily="34" charset="-120"/>
-                </a:rPr>
-                <a:t>outside optimisation.</a:t>
-              </a:r>
-              <a:endParaRPr lang="en-US" sz="1140" dirty="0"/>
-            </a:p>
-          </p:txBody>
-        </p:sp>
-        <p:sp>
-          <p:nvSpPr>
             <p:cNvPr id="20" name="reveal-2:16:shape"/>
             <p:cNvSpPr/>
             <p:nvPr/>
@@ -7501,7 +7867,7 @@
           <p:spPr>
             <a:xfrm>
               <a:off x="4554141" y="3652004"/>
-              <a:ext cx="2809280" cy="548640"/>
+              <a:ext cx="2809161" cy="668640"/>
             </a:xfrm>
             <a:prstGeom prst="roundRect">
               <a:avLst>
@@ -7538,8 +7904,8 @@
           </p:nvSpPr>
           <p:spPr>
             <a:xfrm>
-              <a:off x="4660821" y="3735824"/>
-              <a:ext cx="2289691" cy="152400"/>
+              <a:off x="4660821" y="3732004"/>
+              <a:ext cx="2595801" cy="508640"/>
             </a:xfrm>
             <a:prstGeom prst="rect">
               <a:avLst/>
@@ -7548,7 +7914,7 @@
             <a:ln/>
           </p:spPr>
           <p:txBody>
-            <a:bodyPr wrap="none" lIns="0" tIns="0" rIns="0" bIns="0" rtlCol="0" anchor="ctr"/>
+            <a:bodyPr wrap="square" lIns="0" tIns="0" rIns="0" bIns="0" rtlCol="0" anchor="t"/>
             <a:lstStyle/>
             <a:p>
               <a:pPr marL="0" indent="0" algn="l">
@@ -7563,46 +7929,7 @@
                   <a:ea typeface="Arial" pitchFamily="34" charset="-122"/>
                   <a:cs typeface="Arial" pitchFamily="34" charset="-120"/>
                 </a:rPr>
-                <a:t>Evaluate sampled production runs after</a:t>
-              </a:r>
-              <a:endParaRPr lang="en-US" sz="900" dirty="0"/>
-            </a:p>
-          </p:txBody>
-        </p:sp>
-        <p:sp>
-          <p:nvSpPr>
-            <p:cNvPr id="22" name="reveal-2:18:text"/>
-            <p:cNvSpPr/>
-            <p:nvPr/>
-          </p:nvSpPr>
-          <p:spPr>
-            <a:xfrm>
-              <a:off x="4660821" y="3884414"/>
-              <a:ext cx="793075" cy="152400"/>
-            </a:xfrm>
-            <a:prstGeom prst="rect">
-              <a:avLst/>
-            </a:prstGeom>
-            <a:noFill/>
-            <a:ln/>
-          </p:spPr>
-          <p:txBody>
-            <a:bodyPr wrap="none" lIns="0" tIns="0" rIns="0" bIns="0" rtlCol="0" anchor="ctr"/>
-            <a:lstStyle/>
-            <a:p>
-              <a:pPr marL="0" indent="0" algn="l">
-                <a:buNone/>
-              </a:pPr>
-              <a:r>
-                <a:rPr lang="en-US" sz="900" b="1" dirty="0">
-                  <a:solidFill>
-                    <a:srgbClr val="DEDEDE"/>
-                  </a:solidFill>
-                  <a:latin typeface="Arial" pitchFamily="34" charset="0"/>
-                  <a:ea typeface="Arial" pitchFamily="34" charset="-122"/>
-                  <a:cs typeface="Arial" pitchFamily="34" charset="-120"/>
-                </a:rPr>
-                <a:t>deployment.</a:t>
+                <a:t>Runs on merge to main.</a:t>
               </a:r>
               <a:endParaRPr lang="en-US" sz="900" dirty="0"/>
             </a:p>
@@ -7617,9 +7944,9 @@
         </p:nvGrpSpPr>
         <p:grpSpPr>
           <a:xfrm>
-            <a:off x="7721560" y="1868329"/>
+            <a:off x="7721442" y="1868329"/>
             <a:ext cx="3220641" cy="3791902"/>
-            <a:chOff x="7721560" y="1868329"/>
+            <a:chOff x="7721442" y="1868329"/>
             <a:chExt cx="3220641" cy="3791902"/>
           </a:xfrm>
         </p:grpSpPr>
@@ -7631,7 +7958,7 @@
           </p:nvSpPr>
           <p:spPr>
             <a:xfrm>
-              <a:off x="7721560" y="1868329"/>
+              <a:off x="7721442" y="1868329"/>
               <a:ext cx="3220641" cy="3791902"/>
             </a:xfrm>
             <a:prstGeom prst="roundRect">
@@ -7665,7 +7992,7 @@
           </p:nvSpPr>
           <p:spPr>
             <a:xfrm>
-              <a:off x="7813000" y="1883569"/>
+              <a:off x="7812882" y="1883569"/>
               <a:ext cx="3037761" cy="0"/>
             </a:xfrm>
             <a:prstGeom prst="line">
@@ -7697,7 +8024,7 @@
           </p:nvSpPr>
           <p:spPr>
             <a:xfrm>
-              <a:off x="7927300" y="2096929"/>
+              <a:off x="7927182" y="2096929"/>
               <a:ext cx="411480" cy="411480"/>
             </a:xfrm>
             <a:prstGeom prst="roundRect">
@@ -7733,8 +8060,8 @@
           </p:nvSpPr>
           <p:spPr>
             <a:xfrm>
-              <a:off x="8084344" y="2207419"/>
-              <a:ext cx="188714" cy="190500"/>
+              <a:off x="7927182" y="2207419"/>
+              <a:ext cx="411480" cy="190500"/>
             </a:xfrm>
             <a:prstGeom prst="rect">
               <a:avLst/>
@@ -7743,10 +8070,10 @@
             <a:ln/>
           </p:spPr>
           <p:txBody>
-            <a:bodyPr wrap="none" lIns="0" tIns="0" rIns="0" bIns="0" rtlCol="0" anchor="ctr"/>
-            <a:lstStyle/>
-            <a:p>
-              <a:pPr marL="0" indent="0" algn="l">
+            <a:bodyPr wrap="square" lIns="0" tIns="0" rIns="0" bIns="0" rtlCol="0" anchor="ctr"/>
+            <a:lstStyle/>
+            <a:p>
+              <a:pPr marL="0" indent="0" algn="ctr">
                 <a:buNone/>
               </a:pPr>
               <a:r>
@@ -7758,7 +8085,7 @@
                   <a:ea typeface="Arial" pitchFamily="34" charset="-122"/>
                   <a:cs typeface="Arial" pitchFamily="34" charset="-120"/>
                 </a:rPr>
-                <a:t>3</a:t>
+                <a:t>Δ</a:t>
               </a:r>
               <a:endParaRPr lang="en-US" sz="1200" dirty="0"/>
             </a:p>
@@ -7772,8 +8099,8 @@
           </p:nvSpPr>
           <p:spPr>
             <a:xfrm>
-              <a:off x="7927300" y="2698909"/>
-              <a:ext cx="881063" cy="266700"/>
+              <a:off x="7927182" y="2698909"/>
+              <a:ext cx="2809161" cy="266700"/>
             </a:xfrm>
             <a:prstGeom prst="rect">
               <a:avLst/>
@@ -7782,7 +8109,7 @@
             <a:ln/>
           </p:spPr>
           <p:txBody>
-            <a:bodyPr wrap="none" lIns="0" tIns="0" rIns="0" bIns="0" rtlCol="0" anchor="ctr"/>
+            <a:bodyPr wrap="square" lIns="0" tIns="0" rIns="0" bIns="0" rtlCol="0" anchor="ctr"/>
             <a:lstStyle/>
             <a:p>
               <a:pPr marL="0" indent="0" algn="l">
@@ -7797,7 +8124,7 @@
                   <a:ea typeface="Arial" pitchFamily="34" charset="-122"/>
                   <a:cs typeface="Arial" pitchFamily="34" charset="-120"/>
                 </a:rPr>
-                <a:t>Release</a:t>
+                <a:t>Drift</a:t>
               </a:r>
               <a:endParaRPr lang="en-US" sz="1680" dirty="0"/>
             </a:p>
@@ -7811,8 +8138,8 @@
           </p:nvSpPr>
           <p:spPr>
             <a:xfrm>
-              <a:off x="7927300" y="3047881"/>
-              <a:ext cx="2738676" cy="182880"/>
+              <a:off x="7927182" y="3047881"/>
+              <a:ext cx="2809161" cy="564123"/>
             </a:xfrm>
             <a:prstGeom prst="rect">
               <a:avLst/>
@@ -7821,7 +8148,7 @@
             <a:ln/>
           </p:spPr>
           <p:txBody>
-            <a:bodyPr wrap="none" lIns="0" tIns="0" rIns="0" bIns="0" rtlCol="0" anchor="ctr"/>
+            <a:bodyPr wrap="square" lIns="0" tIns="0" rIns="0" bIns="0" rtlCol="0" anchor="t"/>
             <a:lstStyle/>
             <a:p>
               <a:pPr marL="0" indent="0" algn="l">
@@ -7836,7 +8163,7 @@
                   <a:ea typeface="Arial" pitchFamily="34" charset="-122"/>
                   <a:cs typeface="Arial" pitchFamily="34" charset="-120"/>
                 </a:rPr>
-                <a:t>Review, gate, deploy and retain a rollback</a:t>
+                <a:t>Never shown to the optimizer. The right answers change with the date.</a:t>
               </a:r>
               <a:endParaRPr lang="en-US" sz="1140" dirty="0"/>
             </a:p>
@@ -7844,53 +8171,14 @@
         </p:sp>
         <p:sp>
           <p:nvSpPr>
-            <p:cNvPr id="29" name="reveal-3:24:text"/>
-            <p:cNvSpPr/>
-            <p:nvPr/>
-          </p:nvSpPr>
-          <p:spPr>
-            <a:xfrm>
-              <a:off x="7927300" y="3243263"/>
-              <a:ext cx="419576" cy="182880"/>
-            </a:xfrm>
-            <a:prstGeom prst="rect">
-              <a:avLst/>
-            </a:prstGeom>
-            <a:noFill/>
-            <a:ln/>
-          </p:spPr>
-          <p:txBody>
-            <a:bodyPr wrap="none" lIns="0" tIns="0" rIns="0" bIns="0" rtlCol="0" anchor="ctr"/>
-            <a:lstStyle/>
-            <a:p>
-              <a:pPr marL="0" indent="0" algn="l">
-                <a:buNone/>
-              </a:pPr>
-              <a:r>
-                <a:rPr lang="en-US" sz="1140" dirty="0">
-                  <a:solidFill>
-                    <a:srgbClr val="B0B0B0"/>
-                  </a:solidFill>
-                  <a:latin typeface="Arial" pitchFamily="34" charset="0"/>
-                  <a:ea typeface="Arial" pitchFamily="34" charset="-122"/>
-                  <a:cs typeface="Arial" pitchFamily="34" charset="-120"/>
-                </a:rPr>
-                <a:t>path.</a:t>
-              </a:r>
-              <a:endParaRPr lang="en-US" sz="1140" dirty="0"/>
-            </a:p>
-          </p:txBody>
-        </p:sp>
-        <p:sp>
-          <p:nvSpPr>
             <p:cNvPr id="30" name="reveal-3:25:shape"/>
             <p:cNvSpPr/>
             <p:nvPr/>
           </p:nvSpPr>
           <p:spPr>
             <a:xfrm>
-              <a:off x="7927300" y="3652004"/>
-              <a:ext cx="2809161" cy="548640"/>
+              <a:off x="7927182" y="3652004"/>
+              <a:ext cx="2809161" cy="668640"/>
             </a:xfrm>
             <a:prstGeom prst="roundRect">
               <a:avLst>
@@ -7927,8 +8215,8 @@
           </p:nvSpPr>
           <p:spPr>
             <a:xfrm>
-              <a:off x="8033980" y="3735824"/>
-              <a:ext cx="2254925" cy="152400"/>
+              <a:off x="8033862" y="3732004"/>
+              <a:ext cx="2595801" cy="508640"/>
             </a:xfrm>
             <a:prstGeom prst="rect">
               <a:avLst/>
@@ -7937,7 +8225,7 @@
             <a:ln/>
           </p:spPr>
           <p:txBody>
-            <a:bodyPr wrap="none" lIns="0" tIns="0" rIns="0" bIns="0" rtlCol="0" anchor="ctr"/>
+            <a:bodyPr wrap="square" lIns="0" tIns="0" rIns="0" bIns="0" rtlCol="0" anchor="t"/>
             <a:lstStyle/>
             <a:p>
               <a:pPr marL="0" indent="0" algn="l">
@@ -7952,46 +8240,7 @@
                   <a:ea typeface="Arial" pitchFamily="34" charset="-122"/>
                   <a:cs typeface="Arial" pitchFamily="34" charset="-120"/>
                 </a:rPr>
-                <a:t>Does the change preserve the required</a:t>
-              </a:r>
-              <a:endParaRPr lang="en-US" sz="900" dirty="0"/>
-            </a:p>
-          </p:txBody>
-        </p:sp>
-        <p:sp>
-          <p:nvSpPr>
-            <p:cNvPr id="32" name="reveal-3:27:text"/>
-            <p:cNvSpPr/>
-            <p:nvPr/>
-          </p:nvSpPr>
-          <p:spPr>
-            <a:xfrm>
-              <a:off x="8033980" y="3884414"/>
-              <a:ext cx="536019" cy="152400"/>
-            </a:xfrm>
-            <a:prstGeom prst="rect">
-              <a:avLst/>
-            </a:prstGeom>
-            <a:noFill/>
-            <a:ln/>
-          </p:spPr>
-          <p:txBody>
-            <a:bodyPr wrap="none" lIns="0" tIns="0" rIns="0" bIns="0" rtlCol="0" anchor="ctr"/>
-            <a:lstStyle/>
-            <a:p>
-              <a:pPr marL="0" indent="0" algn="l">
-                <a:buNone/>
-              </a:pPr>
-              <a:r>
-                <a:rPr lang="en-US" sz="900" b="1" dirty="0">
-                  <a:solidFill>
-                    <a:srgbClr val="DEDEDE"/>
-                  </a:solidFill>
-                  <a:latin typeface="Arial" pitchFamily="34" charset="0"/>
-                  <a:ea typeface="Arial" pitchFamily="34" charset="-122"/>
-                  <a:cs typeface="Arial" pitchFamily="34" charset="-120"/>
-                </a:rPr>
-                <a:t>quality?</a:t>
+                <a:t>Runs before a candidate is promoted.</a:t>
               </a:r>
               <a:endParaRPr lang="en-US" sz="900" dirty="0"/>
             </a:p>
@@ -8073,6 +8322,58 @@
               <a:t>AI GENIUS / S6 E2 / 14</a:t>
             </a:r>
             <a:endParaRPr lang="en-US" sz="720" dirty="0"/>
+          </a:p>
+        </p:txBody>
+      </p:sp>
+      <p:sp>
+        <p:nvSpPr>
+          <p:cNvPr id="38" name="takeaway"/>
+          <p:cNvSpPr txBox="1"/>
+          <p:nvPr/>
+        </p:nvSpPr>
+        <p:spPr>
+          <a:xfrm>
+            <a:off x="975360" y="5800000"/>
+            <a:ext cx="9965841" cy="400000"/>
+          </a:xfrm>
+          <a:prstGeom prst="rect">
+            <a:avLst/>
+          </a:prstGeom>
+          <a:noFill/>
+        </p:spPr>
+        <p:txBody>
+          <a:bodyPr wrap="square" lIns="0" rIns="0" tIns="0" bIns="0">
+            <a:spAutoFit/>
+          </a:bodyPr>
+          <a:lstStyle/>
+          <a:p>
+            <a:r>
+              <a:rPr sz="1800" b="1">
+                <a:solidFill>
+                  <a:srgbClr val="DEDEDE"/>
+                </a:solidFill>
+                <a:latin typeface="Arial"/>
+              </a:rPr>
+              <a:t>Homework, practice exam, </a:t>
+            </a:r>
+            <a:r>
+              <a:rPr sz="1800" b="1">
+                <a:solidFill>
+                  <a:srgbClr val="4DA6FF"/>
+                </a:solidFill>
+                <a:latin typeface="Arial"/>
+              </a:rPr>
+              <a:t>surprise exam</a:t>
+            </a:r>
+            <a:r>
+              <a:rPr sz="1800" b="1">
+                <a:solidFill>
+                  <a:srgbClr val="DEDEDE"/>
+                </a:solidFill>
+                <a:latin typeface="Arial"/>
+              </a:rPr>
+              <a:t>.</a:t>
+            </a:r>
           </a:p>
         </p:txBody>
       </p:sp>
@@ -8224,6 +8525,51 @@
                       </p:childTnLst>
                     </p:cTn>
                   </p:par>
+                  <p:par>
+                    <p:cTn id="15" fill="hold">
+                      <p:stCondLst>
+                        <p:cond delay="indefinite"/>
+                      </p:stCondLst>
+                      <p:childTnLst>
+                        <p:par>
+                          <p:cTn id="16" fill="hold">
+                            <p:stCondLst>
+                              <p:cond delay="0"/>
+                            </p:stCondLst>
+                            <p:childTnLst>
+                              <p:par>
+                                <p:cTn id="17" presetID="1" presetClass="entr" presetSubtype="0" fill="hold" nodeType="clickEffect">
+                                  <p:stCondLst>
+                                    <p:cond delay="0"/>
+                                  </p:stCondLst>
+                                  <p:childTnLst>
+                                    <p:set>
+                                      <p:cBhvr>
+                                        <p:cTn id="18" dur="1" fill="hold">
+                                          <p:stCondLst>
+                                            <p:cond delay="0"/>
+                                          </p:stCondLst>
+                                        </p:cTn>
+                                        <p:tgtEl>
+                                          <p:spTgt spid="38"/>
+                                        </p:tgtEl>
+                                        <p:attrNameLst>
+                                          <p:attrName>style.visibility</p:attrName>
+                                        </p:attrNameLst>
+                                      </p:cBhvr>
+                                      <p:to>
+                                        <p:strVal val="visible"/>
+                                      </p:to>
+                                    </p:set>
+                                  </p:childTnLst>
+                                </p:cTn>
+                              </p:par>
+                            </p:childTnLst>
+                          </p:cTn>
+                        </p:par>
+                      </p:childTnLst>
+                    </p:cTn>
+                  </p:par>
                 </p:childTnLst>
               </p:cTn>
               <p:prevCondLst>
@@ -8314,7 +8660,7 @@
         <p:spPr>
           <a:xfrm>
             <a:off x="975360" y="2640806"/>
-            <a:ext cx="3428238" cy="624840"/>
+            <a:ext cx="7000000" cy="624840"/>
           </a:xfrm>
           <a:prstGeom prst="rect">
             <a:avLst/>
@@ -8338,7 +8684,7 @@
                 <a:ea typeface="Arial" pitchFamily="34" charset="-122"/>
                 <a:cs typeface="Arial" pitchFamily="34" charset="-120"/>
               </a:rPr>
-              <a:t>Release Check</a:t>
+              <a:t>The PR that goes red</a:t>
             </a:r>
             <a:endParaRPr lang="en-US" sz="4080" dirty="0"/>
           </a:p>
@@ -8377,7 +8723,7 @@
                 <a:ea typeface="Arial" pitchFamily="34" charset="-122"/>
                 <a:cs typeface="Arial" pitchFamily="34" charset="-120"/>
               </a:rPr>
-              <a:t>Follow the selected configuration through release checks, then test a</a:t>
+              <a:t>Open a pull request with the optimizer’s fact-stuffed candidate</a:t>
             </a:r>
             <a:endParaRPr lang="en-US" sz="1620" dirty="0"/>
           </a:p>
@@ -8392,7 +8738,7 @@
         <p:spPr>
           <a:xfrm>
             <a:off x="975360" y="3665220"/>
-            <a:ext cx="1984653" cy="259080"/>
+            <a:ext cx="6111835" cy="259080"/>
           </a:xfrm>
           <a:prstGeom prst="rect">
             <a:avLst/>
@@ -8416,7 +8762,7 @@
                 <a:ea typeface="Arial" pitchFamily="34" charset="-122"/>
                 <a:cs typeface="Arial" pitchFamily="34" charset="-120"/>
               </a:rPr>
-              <a:t>deliberate regression.</a:t>
+              <a:t>and watch the gate stop it.</a:t>
             </a:r>
             <a:endParaRPr lang="en-US" sz="1620" dirty="0"/>
           </a:p>
@@ -8494,7 +8840,7 @@
                 <a:ea typeface="Arial" pitchFamily="34" charset="-122"/>
                 <a:cs typeface="Arial" pitchFamily="34" charset="-120"/>
               </a:rPr>
-              <a:t>AI GENIUS / S6 E2 / 15</a:t>
+              <a:t>AI GENIUS / S6 E2 / 16</a:t>
             </a:r>
             <a:endParaRPr lang="en-US" sz="720" dirty="0"/>
           </a:p>
@@ -8558,7 +8904,7 @@
                 <a:ea typeface="Arial" pitchFamily="34" charset="-122"/>
                 <a:cs typeface="Arial" pitchFamily="34" charset="-120"/>
               </a:rPr>
-              <a:t>THE COMPLETE DELIVERY PROCESS</a:t>
+              <a:t>AFTER RELEASE</a:t>
             </a:r>
             <a:endParaRPr lang="en-US" sz="960" dirty="0"/>
           </a:p>
@@ -8597,1698 +8943,945 @@
                 <a:ea typeface="Arial" pitchFamily="34" charset="-122"/>
                 <a:cs typeface="Arial" pitchFamily="34" charset="-120"/>
               </a:rPr>
-              <a:t>From test cases to production</a:t>
+              <a:t>Production feeds the tests</a:t>
             </a:r>
             <a:endParaRPr lang="en-US" sz="2640" dirty="0"/>
           </a:p>
         </p:txBody>
       </p:sp>
-      <p:sp>
-        <p:nvSpPr>
-          <p:cNvPr id="4" name="static:2:shape"/>
-          <p:cNvSpPr/>
+      <p:grpSp>
+        <p:nvGrpSpPr>
+          <p:cNvPr id="52" name="Reveal 1"/>
+          <p:cNvGrpSpPr/>
           <p:nvPr/>
-        </p:nvSpPr>
-        <p:spPr>
+        </p:nvGrpSpPr>
+        <p:grpSpPr>
           <a:xfrm>
-            <a:off x="975360" y="1768316"/>
-            <a:ext cx="2574608" cy="3002280"/>
+            <a:off x="975360" y="1868329"/>
+            <a:ext cx="3220641" cy="3791902"/>
+            <a:chOff x="975360" y="1868329"/>
+            <a:chExt cx="3220641" cy="3791902"/>
           </a:xfrm>
-          <a:prstGeom prst="roundRect">
-            <a:avLst>
-              <a:gd name="adj" fmla="val 4735"/>
-            </a:avLst>
-          </a:prstGeom>
-          <a:solidFill>
-            <a:srgbClr val="292929"/>
-          </a:solidFill>
-          <a:ln w="7620">
+        </p:grpSpPr>
+        <p:sp>
+          <p:nvSpPr>
+            <p:cNvPr id="53" name="reveal-1:2:shape"/>
+            <p:cNvSpPr/>
+            <p:nvPr/>
+          </p:nvSpPr>
+          <p:spPr>
+            <a:xfrm>
+              <a:off x="975360" y="1868329"/>
+              <a:ext cx="3220641" cy="3791902"/>
+            </a:xfrm>
+            <a:prstGeom prst="roundRect">
+              <a:avLst>
+                <a:gd name="adj" fmla="val 3786"/>
+              </a:avLst>
+            </a:prstGeom>
             <a:solidFill>
-              <a:srgbClr val="474747"/>
+              <a:srgbClr val="292929"/>
             </a:solidFill>
-            <a:prstDash val="solid"/>
-          </a:ln>
-        </p:spPr>
-        <p:txBody>
-          <a:bodyPr/>
-          <a:lstStyle/>
-          <a:p>
-            <a:endParaRPr lang="en-US"/>
-          </a:p>
-        </p:txBody>
-      </p:sp>
-      <p:sp>
-        <p:nvSpPr>
-          <p:cNvPr id="5" name="static:3:text"/>
-          <p:cNvSpPr/>
-          <p:nvPr/>
-        </p:nvSpPr>
-        <p:spPr>
-          <a:xfrm>
-            <a:off x="1135380" y="1920716"/>
-            <a:ext cx="1308735" cy="137160"/>
-          </a:xfrm>
-          <a:prstGeom prst="rect">
-            <a:avLst/>
-          </a:prstGeom>
-          <a:noFill/>
-          <a:ln/>
-        </p:spPr>
-        <p:txBody>
-          <a:bodyPr wrap="none" lIns="0" tIns="0" rIns="0" bIns="0" rtlCol="0" anchor="ctr"/>
-          <a:lstStyle/>
-          <a:p>
-            <a:pPr marL="0" indent="0" algn="l">
-              <a:buNone/>
-            </a:pPr>
-            <a:r>
-              <a:rPr lang="en-US" sz="780" b="1" kern="0" spc="62" dirty="0">
-                <a:solidFill>
-                  <a:srgbClr val="4DA6FF"/>
-                </a:solidFill>
-                <a:latin typeface="Arial" pitchFamily="34" charset="0"/>
-                <a:ea typeface="Arial" pitchFamily="34" charset="-122"/>
-                <a:cs typeface="Arial" pitchFamily="34" charset="-120"/>
-              </a:rPr>
-              <a:t>BUILD / PRE-LAUNCH</a:t>
-            </a:r>
-            <a:endParaRPr lang="en-US" sz="780" dirty="0"/>
-          </a:p>
-        </p:txBody>
-      </p:sp>
-      <p:sp>
-        <p:nvSpPr>
-          <p:cNvPr id="6" name="static:4:text"/>
-          <p:cNvSpPr/>
-          <p:nvPr/>
-        </p:nvSpPr>
-        <p:spPr>
-          <a:xfrm>
-            <a:off x="1135380" y="2149316"/>
-            <a:ext cx="1154668" cy="266700"/>
-          </a:xfrm>
-          <a:prstGeom prst="rect">
-            <a:avLst/>
-          </a:prstGeom>
-          <a:noFill/>
-          <a:ln/>
-        </p:spPr>
-        <p:txBody>
-          <a:bodyPr wrap="none" lIns="0" tIns="0" rIns="0" bIns="0" rtlCol="0" anchor="ctr"/>
-          <a:lstStyle/>
-          <a:p>
-            <a:pPr marL="0" indent="0" algn="l">
-              <a:buNone/>
-            </a:pPr>
-            <a:r>
-              <a:rPr lang="en-US" sz="1680" b="1" dirty="0">
-                <a:solidFill>
-                  <a:srgbClr val="DEDEDE"/>
-                </a:solidFill>
-                <a:latin typeface="Arial" pitchFamily="34" charset="0"/>
-                <a:ea typeface="Arial" pitchFamily="34" charset="-122"/>
-                <a:cs typeface="Arial" pitchFamily="34" charset="-120"/>
-              </a:rPr>
-              <a:t>Simulation</a:t>
-            </a:r>
-            <a:endParaRPr lang="en-US" sz="1680" dirty="0"/>
-          </a:p>
-        </p:txBody>
-      </p:sp>
-      <p:sp>
-        <p:nvSpPr>
-          <p:cNvPr id="7" name="static:5:text"/>
-          <p:cNvSpPr/>
-          <p:nvPr/>
-        </p:nvSpPr>
-        <p:spPr>
-          <a:xfrm>
-            <a:off x="1135380" y="2528768"/>
-            <a:ext cx="1967984" cy="182880"/>
-          </a:xfrm>
-          <a:prstGeom prst="rect">
-            <a:avLst/>
-          </a:prstGeom>
-          <a:noFill/>
-          <a:ln/>
-        </p:spPr>
-        <p:txBody>
-          <a:bodyPr wrap="none" lIns="0" tIns="0" rIns="0" bIns="0" rtlCol="0" anchor="ctr"/>
-          <a:lstStyle/>
-          <a:p>
-            <a:pPr marL="0" indent="0" algn="l">
-              <a:buNone/>
-            </a:pPr>
-            <a:r>
-              <a:rPr lang="en-US" sz="1140" dirty="0">
-                <a:solidFill>
-                  <a:srgbClr val="B0B0B0"/>
-                </a:solidFill>
-                <a:latin typeface="Arial" pitchFamily="34" charset="0"/>
-                <a:ea typeface="Arial" pitchFamily="34" charset="-122"/>
-                <a:cs typeface="Arial" pitchFamily="34" charset="-120"/>
-              </a:rPr>
-              <a:t>Explore behaviour before real</a:t>
-            </a:r>
-            <a:endParaRPr lang="en-US" sz="1140" dirty="0"/>
-          </a:p>
-        </p:txBody>
-      </p:sp>
-      <p:sp>
-        <p:nvSpPr>
-          <p:cNvPr id="8" name="static:6:text"/>
-          <p:cNvSpPr/>
-          <p:nvPr/>
-        </p:nvSpPr>
-        <p:spPr>
-          <a:xfrm>
-            <a:off x="1135380" y="2724150"/>
-            <a:ext cx="878443" cy="182880"/>
-          </a:xfrm>
-          <a:prstGeom prst="rect">
-            <a:avLst/>
-          </a:prstGeom>
-          <a:noFill/>
-          <a:ln/>
-        </p:spPr>
-        <p:txBody>
-          <a:bodyPr wrap="none" lIns="0" tIns="0" rIns="0" bIns="0" rtlCol="0" anchor="ctr"/>
-          <a:lstStyle/>
-          <a:p>
-            <a:pPr marL="0" indent="0" algn="l">
-              <a:buNone/>
-            </a:pPr>
-            <a:r>
-              <a:rPr lang="en-US" sz="1140" dirty="0">
-                <a:solidFill>
-                  <a:srgbClr val="B0B0B0"/>
-                </a:solidFill>
-                <a:latin typeface="Arial" pitchFamily="34" charset="0"/>
-                <a:ea typeface="Arial" pitchFamily="34" charset="-122"/>
-                <a:cs typeface="Arial" pitchFamily="34" charset="-120"/>
-              </a:rPr>
-              <a:t>users arrive.</a:t>
-            </a:r>
-            <a:endParaRPr lang="en-US" sz="1140" dirty="0"/>
-          </a:p>
-        </p:txBody>
-      </p:sp>
-      <p:sp>
-        <p:nvSpPr>
-          <p:cNvPr id="9" name="static:7:shape"/>
-          <p:cNvSpPr/>
-          <p:nvPr/>
-        </p:nvSpPr>
-        <p:spPr>
-          <a:xfrm>
-            <a:off x="1135380" y="3655933"/>
-            <a:ext cx="2254568" cy="954643"/>
-          </a:xfrm>
-          <a:prstGeom prst="roundRect">
-            <a:avLst>
-              <a:gd name="adj" fmla="val 7982"/>
-            </a:avLst>
-          </a:prstGeom>
-          <a:solidFill>
-            <a:srgbClr val="2E2E2E"/>
-          </a:solidFill>
-          <a:ln w="7620">
+            <a:ln w="7620">
+              <a:solidFill>
+                <a:srgbClr val="474747"/>
+              </a:solidFill>
+              <a:prstDash val="solid"/>
+            </a:ln>
+          </p:spPr>
+          <p:txBody>
+            <a:bodyPr/>
+            <a:lstStyle/>
+            <a:p>
+              <a:endParaRPr lang="en-US"/>
+            </a:p>
+          </p:txBody>
+        </p:sp>
+        <p:sp>
+          <p:nvSpPr>
+            <p:cNvPr id="54" name="reveal-1:2:shape:border-0"/>
+            <p:cNvSpPr/>
+            <p:nvPr/>
+          </p:nvSpPr>
+          <p:spPr>
+            <a:xfrm>
+              <a:off x="1066800" y="1883569"/>
+              <a:ext cx="3037761" cy="0"/>
+            </a:xfrm>
+            <a:prstGeom prst="line">
+              <a:avLst/>
+            </a:prstGeom>
+            <a:noFill/>
+            <a:ln w="30480">
+              <a:solidFill>
+                <a:srgbClr val="4DA6FF"/>
+              </a:solidFill>
+              <a:prstDash val="solid"/>
+              <a:headEnd type="none"/>
+              <a:tailEnd type="none"/>
+            </a:ln>
+          </p:spPr>
+          <p:txBody>
+            <a:bodyPr/>
+            <a:lstStyle/>
+            <a:p>
+              <a:endParaRPr lang="en-US"/>
+            </a:p>
+          </p:txBody>
+        </p:sp>
+        <p:sp>
+          <p:nvSpPr>
+            <p:cNvPr id="55" name="reveal-1:3:shape"/>
+            <p:cNvSpPr/>
+            <p:nvPr/>
+          </p:nvSpPr>
+          <p:spPr>
+            <a:xfrm>
+              <a:off x="1181100" y="2096929"/>
+              <a:ext cx="411480" cy="411480"/>
+            </a:xfrm>
+            <a:prstGeom prst="roundRect">
+              <a:avLst>
+                <a:gd name="adj" fmla="val 25926"/>
+              </a:avLst>
+            </a:prstGeom>
             <a:solidFill>
-              <a:srgbClr val="474747"/>
-            </a:solidFill>
-            <a:prstDash val="solid"/>
-          </a:ln>
-        </p:spPr>
-        <p:txBody>
-          <a:bodyPr/>
-          <a:lstStyle/>
-          <a:p>
-            <a:endParaRPr lang="en-US"/>
-          </a:p>
-        </p:txBody>
-      </p:sp>
-      <p:sp>
-        <p:nvSpPr>
-          <p:cNvPr id="10" name="static:8:text"/>
-          <p:cNvSpPr/>
-          <p:nvPr/>
-        </p:nvSpPr>
-        <p:spPr>
-          <a:xfrm>
-            <a:off x="1280160" y="3793093"/>
-            <a:ext cx="1281708" cy="213360"/>
-          </a:xfrm>
-          <a:prstGeom prst="rect">
-            <a:avLst/>
-          </a:prstGeom>
-          <a:noFill/>
-          <a:ln/>
-        </p:spPr>
-        <p:txBody>
-          <a:bodyPr wrap="none" lIns="0" tIns="0" rIns="0" bIns="0" rtlCol="0" anchor="ctr"/>
-          <a:lstStyle/>
-          <a:p>
-            <a:pPr marL="0" indent="0" algn="l">
-              <a:buNone/>
-            </a:pPr>
-            <a:r>
-              <a:rPr lang="en-US" sz="1320" b="1" dirty="0">
-                <a:solidFill>
-                  <a:srgbClr val="4DA6FF"/>
-                </a:solidFill>
-                <a:latin typeface="Arial" pitchFamily="34" charset="0"/>
-                <a:ea typeface="Arial" pitchFamily="34" charset="-122"/>
-                <a:cs typeface="Arial" pitchFamily="34" charset="-120"/>
-              </a:rPr>
-              <a:t>Golden dataset</a:t>
-            </a:r>
-            <a:endParaRPr lang="en-US" sz="1320" dirty="0"/>
-          </a:p>
-        </p:txBody>
-      </p:sp>
-      <p:sp>
-        <p:nvSpPr>
-          <p:cNvPr id="11" name="static:9:text"/>
-          <p:cNvSpPr/>
-          <p:nvPr/>
-        </p:nvSpPr>
-        <p:spPr>
-          <a:xfrm>
-            <a:off x="1280160" y="4075033"/>
-            <a:ext cx="1898213" cy="182880"/>
-          </a:xfrm>
-          <a:prstGeom prst="rect">
-            <a:avLst/>
-          </a:prstGeom>
-          <a:noFill/>
-          <a:ln/>
-        </p:spPr>
-        <p:txBody>
-          <a:bodyPr wrap="none" lIns="0" tIns="0" rIns="0" bIns="0" rtlCol="0" anchor="ctr"/>
-          <a:lstStyle/>
-          <a:p>
-            <a:pPr marL="0" indent="0" algn="l">
-              <a:buNone/>
-            </a:pPr>
-            <a:r>
-              <a:rPr lang="en-US" sz="1140" dirty="0">
-                <a:solidFill>
-                  <a:srgbClr val="B0B0B0"/>
-                </a:solidFill>
-                <a:latin typeface="Arial" pitchFamily="34" charset="0"/>
-                <a:ea typeface="Arial" pitchFamily="34" charset="-122"/>
-                <a:cs typeface="Arial" pitchFamily="34" charset="-120"/>
-              </a:rPr>
-              <a:t>Review expected outcomes.</a:t>
-            </a:r>
-            <a:endParaRPr lang="en-US" sz="1140" dirty="0"/>
-          </a:p>
-        </p:txBody>
-      </p:sp>
-      <p:sp>
-        <p:nvSpPr>
-          <p:cNvPr id="12" name="static:10:text"/>
-          <p:cNvSpPr/>
-          <p:nvPr/>
-        </p:nvSpPr>
-        <p:spPr>
-          <a:xfrm>
-            <a:off x="1280160" y="4270415"/>
-            <a:ext cx="1953458" cy="182880"/>
-          </a:xfrm>
-          <a:prstGeom prst="rect">
-            <a:avLst/>
-          </a:prstGeom>
-          <a:noFill/>
-          <a:ln/>
-        </p:spPr>
-        <p:txBody>
-          <a:bodyPr wrap="none" lIns="0" tIns="0" rIns="0" bIns="0" rtlCol="0" anchor="ctr"/>
-          <a:lstStyle/>
-          <a:p>
-            <a:pPr marL="0" indent="0" algn="l">
-              <a:buNone/>
-            </a:pPr>
-            <a:r>
-              <a:rPr lang="en-US" sz="1140" dirty="0">
-                <a:solidFill>
-                  <a:srgbClr val="B0B0B0"/>
-                </a:solidFill>
-                <a:latin typeface="Arial" pitchFamily="34" charset="0"/>
-                <a:ea typeface="Arial" pitchFamily="34" charset="-122"/>
-                <a:cs typeface="Arial" pitchFamily="34" charset="-120"/>
-              </a:rPr>
-              <a:t>Version the cases and rubric.</a:t>
-            </a:r>
-            <a:endParaRPr lang="en-US" sz="1140" dirty="0"/>
-          </a:p>
-        </p:txBody>
-      </p:sp>
-      <p:sp>
-        <p:nvSpPr>
-          <p:cNvPr id="13" name="static:11:arrow"/>
-          <p:cNvSpPr/>
-          <p:nvPr/>
-        </p:nvSpPr>
-        <p:spPr>
-          <a:xfrm>
-            <a:off x="3603308" y="3376136"/>
-            <a:ext cx="160020" cy="0"/>
-          </a:xfrm>
-          <a:prstGeom prst="line">
-            <a:avLst/>
-          </a:prstGeom>
-          <a:noFill/>
-          <a:ln w="15240">
-            <a:solidFill>
-              <a:srgbClr val="B0B0B0"/>
-            </a:solidFill>
-            <a:prstDash val="solid"/>
-            <a:headEnd type="none"/>
-            <a:tailEnd type="triangle"/>
-          </a:ln>
-        </p:spPr>
-        <p:txBody>
-          <a:bodyPr/>
-          <a:lstStyle/>
-          <a:p>
-            <a:endParaRPr lang="en-US"/>
-          </a:p>
-        </p:txBody>
-      </p:sp>
-      <p:sp>
-        <p:nvSpPr>
-          <p:cNvPr id="14" name="static:12:shape"/>
-          <p:cNvSpPr/>
-          <p:nvPr/>
-        </p:nvSpPr>
-        <p:spPr>
-          <a:xfrm>
-            <a:off x="3824288" y="1768316"/>
-            <a:ext cx="4543425" cy="3002280"/>
-          </a:xfrm>
-          <a:prstGeom prst="roundRect">
-            <a:avLst>
-              <a:gd name="adj" fmla="val 4061"/>
-            </a:avLst>
-          </a:prstGeom>
-          <a:solidFill>
-            <a:srgbClr val="292929"/>
-          </a:solidFill>
-          <a:ln w="7620">
-            <a:solidFill>
-              <a:srgbClr val="474747"/>
-            </a:solidFill>
-            <a:prstDash val="solid"/>
-          </a:ln>
-        </p:spPr>
-        <p:txBody>
-          <a:bodyPr/>
-          <a:lstStyle/>
-          <a:p>
-            <a:endParaRPr lang="en-US"/>
-          </a:p>
-        </p:txBody>
-      </p:sp>
-      <p:sp>
-        <p:nvSpPr>
-          <p:cNvPr id="15" name="static:13:text"/>
-          <p:cNvSpPr/>
-          <p:nvPr/>
-        </p:nvSpPr>
-        <p:spPr>
-          <a:xfrm>
-            <a:off x="3984308" y="1920716"/>
-            <a:ext cx="1620560" cy="137160"/>
-          </a:xfrm>
-          <a:prstGeom prst="rect">
-            <a:avLst/>
-          </a:prstGeom>
-          <a:noFill/>
-          <a:ln/>
-        </p:spPr>
-        <p:txBody>
-          <a:bodyPr wrap="none" lIns="0" tIns="0" rIns="0" bIns="0" rtlCol="0" anchor="ctr"/>
-          <a:lstStyle/>
-          <a:p>
-            <a:pPr marL="0" indent="0" algn="l">
-              <a:buNone/>
-            </a:pPr>
-            <a:r>
-              <a:rPr lang="en-US" sz="780" b="1" kern="0" spc="62" dirty="0">
-                <a:solidFill>
-                  <a:srgbClr val="4ADE80"/>
-                </a:solidFill>
-                <a:latin typeface="Arial" pitchFamily="34" charset="0"/>
-                <a:ea typeface="Arial" pitchFamily="34" charset="-122"/>
-                <a:cs typeface="Arial" pitchFamily="34" charset="-120"/>
-              </a:rPr>
-              <a:t>ON EVERY CHANGE / CI/CD</a:t>
-            </a:r>
-            <a:endParaRPr lang="en-US" sz="780" dirty="0"/>
-          </a:p>
-        </p:txBody>
-      </p:sp>
-      <p:sp>
-        <p:nvSpPr>
-          <p:cNvPr id="16" name="static:14:shape"/>
-          <p:cNvSpPr/>
-          <p:nvPr/>
-        </p:nvSpPr>
-        <p:spPr>
-          <a:xfrm>
-            <a:off x="3984308" y="2172176"/>
-            <a:ext cx="4223385" cy="426720"/>
-          </a:xfrm>
-          <a:prstGeom prst="roundRect">
-            <a:avLst>
-              <a:gd name="adj" fmla="val 14286"/>
-            </a:avLst>
-          </a:prstGeom>
-          <a:solidFill>
-            <a:srgbClr val="2E2E2E"/>
-          </a:solidFill>
-          <a:ln w="12700">
-            <a:solidFill>
-              <a:srgbClr val="333333">
+              <a:srgbClr val="000000">
                 <a:alpha val="0"/>
               </a:srgbClr>
             </a:solidFill>
-            <a:prstDash val="solid"/>
-          </a:ln>
-        </p:spPr>
-        <p:txBody>
-          <a:bodyPr/>
-          <a:lstStyle/>
-          <a:p>
-            <a:endParaRPr lang="en-US"/>
-          </a:p>
-        </p:txBody>
-      </p:sp>
-      <p:sp>
-        <p:nvSpPr>
-          <p:cNvPr id="17" name="static:15:text"/>
-          <p:cNvSpPr/>
+            <a:ln w="15240">
+              <a:solidFill>
+                <a:srgbClr val="4DA6FF"/>
+              </a:solidFill>
+              <a:prstDash val="solid"/>
+            </a:ln>
+          </p:spPr>
+          <p:txBody>
+            <a:bodyPr/>
+            <a:lstStyle/>
+            <a:p>
+              <a:endParaRPr lang="en-US"/>
+            </a:p>
+          </p:txBody>
+        </p:sp>
+        <p:sp>
+          <p:nvSpPr>
+            <p:cNvPr id="56" name="reveal-1:4:text"/>
+            <p:cNvSpPr/>
+            <p:nvPr/>
+          </p:nvSpPr>
+          <p:spPr>
+            <a:xfrm>
+              <a:off x="1181100" y="2207419"/>
+              <a:ext cx="411480" cy="190500"/>
+            </a:xfrm>
+            <a:prstGeom prst="rect">
+              <a:avLst/>
+            </a:prstGeom>
+            <a:noFill/>
+            <a:ln/>
+          </p:spPr>
+          <p:txBody>
+            <a:bodyPr wrap="square" lIns="0" tIns="0" rIns="0" bIns="0" rtlCol="0" anchor="ctr"/>
+            <a:lstStyle/>
+            <a:p>
+              <a:pPr marL="0" indent="0" algn="ctr">
+                <a:buNone/>
+              </a:pPr>
+              <a:r>
+                <a:rPr lang="en-US" sz="1200" b="1" kern="0" spc="-24" dirty="0">
+                  <a:solidFill>
+                    <a:srgbClr val="4DA6FF"/>
+                  </a:solidFill>
+                  <a:latin typeface="Arial" pitchFamily="34" charset="0"/>
+                  <a:ea typeface="Arial" pitchFamily="34" charset="-122"/>
+                  <a:cs typeface="Arial" pitchFamily="34" charset="-120"/>
+                </a:rPr>
+                <a:t>1</a:t>
+              </a:r>
+              <a:endParaRPr lang="en-US" sz="1200" dirty="0"/>
+            </a:p>
+          </p:txBody>
+        </p:sp>
+        <p:sp>
+          <p:nvSpPr>
+            <p:cNvPr id="57" name="reveal-1:5:text"/>
+            <p:cNvSpPr/>
+            <p:nvPr/>
+          </p:nvSpPr>
+          <p:spPr>
+            <a:xfrm>
+              <a:off x="1181100" y="2698909"/>
+              <a:ext cx="2809161" cy="266700"/>
+            </a:xfrm>
+            <a:prstGeom prst="rect">
+              <a:avLst/>
+            </a:prstGeom>
+            <a:noFill/>
+            <a:ln/>
+          </p:spPr>
+          <p:txBody>
+            <a:bodyPr wrap="square" lIns="0" tIns="0" rIns="0" bIns="0" rtlCol="0" anchor="ctr"/>
+            <a:lstStyle/>
+            <a:p>
+              <a:pPr marL="0" indent="0" algn="l">
+                <a:buNone/>
+              </a:pPr>
+              <a:r>
+                <a:rPr lang="en-US" sz="1680" b="1" dirty="0">
+                  <a:solidFill>
+                    <a:srgbClr val="4DA6FF"/>
+                  </a:solidFill>
+                  <a:latin typeface="Arial" pitchFamily="34" charset="0"/>
+                  <a:ea typeface="Arial" pitchFamily="34" charset="-122"/>
+                  <a:cs typeface="Arial" pitchFamily="34" charset="-120"/>
+                </a:rPr>
+                <a:t>Sample traces</a:t>
+              </a:r>
+              <a:endParaRPr lang="en-US" sz="1680" dirty="0"/>
+            </a:p>
+          </p:txBody>
+        </p:sp>
+        <p:sp>
+          <p:nvSpPr>
+            <p:cNvPr id="58" name="reveal-1:6:text"/>
+            <p:cNvSpPr/>
+            <p:nvPr/>
+          </p:nvSpPr>
+          <p:spPr>
+            <a:xfrm>
+              <a:off x="1181100" y="3047881"/>
+              <a:ext cx="2809161" cy="564123"/>
+            </a:xfrm>
+            <a:prstGeom prst="rect">
+              <a:avLst/>
+            </a:prstGeom>
+            <a:noFill/>
+            <a:ln/>
+          </p:spPr>
+          <p:txBody>
+            <a:bodyPr wrap="square" lIns="0" tIns="0" rIns="0" bIns="0" rtlCol="0" anchor="t"/>
+            <a:lstStyle/>
+            <a:p>
+              <a:pPr marL="0" indent="0" algn="l">
+                <a:buNone/>
+              </a:pPr>
+              <a:r>
+                <a:rPr lang="en-US" sz="1140" dirty="0">
+                  <a:solidFill>
+                    <a:srgbClr val="B0B0B0"/>
+                  </a:solidFill>
+                  <a:latin typeface="Arial" pitchFamily="34" charset="0"/>
+                  <a:ea typeface="Arial" pitchFamily="34" charset="-122"/>
+                  <a:cs typeface="Arial" pitchFamily="34" charset="-120"/>
+                </a:rPr>
+                <a:t>Continuous evaluation scores a sample of real conversations.</a:t>
+              </a:r>
+              <a:endParaRPr lang="en-US" sz="1140" dirty="0"/>
+            </a:p>
+          </p:txBody>
+        </p:sp>
+        <p:sp>
+          <p:nvSpPr>
+            <p:cNvPr id="60" name="reveal-1:8:shape"/>
+            <p:cNvSpPr/>
+            <p:nvPr/>
+          </p:nvSpPr>
+          <p:spPr>
+            <a:xfrm>
+              <a:off x="1181100" y="3652004"/>
+              <a:ext cx="2809161" cy="668640"/>
+            </a:xfrm>
+            <a:prstGeom prst="roundRect">
+              <a:avLst>
+                <a:gd name="adj" fmla="val 13889"/>
+              </a:avLst>
+            </a:prstGeom>
+            <a:solidFill>
+              <a:srgbClr val="FFFFFF">
+                <a:alpha val="3000"/>
+              </a:srgbClr>
+            </a:solidFill>
+            <a:ln w="12700">
+              <a:solidFill>
+                <a:srgbClr val="333333">
+                  <a:alpha val="0"/>
+                </a:srgbClr>
+              </a:solidFill>
+              <a:prstDash val="solid"/>
+            </a:ln>
+          </p:spPr>
+          <p:txBody>
+            <a:bodyPr/>
+            <a:lstStyle/>
+            <a:p>
+              <a:endParaRPr lang="en-US"/>
+            </a:p>
+          </p:txBody>
+        </p:sp>
+        <p:sp>
+          <p:nvSpPr>
+            <p:cNvPr id="61" name="reveal-1:9:text"/>
+            <p:cNvSpPr/>
+            <p:nvPr/>
+          </p:nvSpPr>
+          <p:spPr>
+            <a:xfrm>
+              <a:off x="1287780" y="3732004"/>
+              <a:ext cx="2595801" cy="508640"/>
+            </a:xfrm>
+            <a:prstGeom prst="rect">
+              <a:avLst/>
+            </a:prstGeom>
+            <a:noFill/>
+            <a:ln/>
+          </p:spPr>
+          <p:txBody>
+            <a:bodyPr wrap="square" lIns="0" tIns="0" rIns="0" bIns="0" rtlCol="0" anchor="t"/>
+            <a:lstStyle/>
+            <a:p>
+              <a:pPr marL="0" indent="0" algn="l">
+                <a:buNone/>
+              </a:pPr>
+              <a:r>
+                <a:rPr lang="en-US" sz="900" b="1" dirty="0">
+                  <a:solidFill>
+                    <a:srgbClr val="DEDEDE"/>
+                  </a:solidFill>
+                  <a:latin typeface="Arial" pitchFamily="34" charset="0"/>
+                  <a:ea typeface="Arial" pitchFamily="34" charset="-122"/>
+                  <a:cs typeface="Arial" pitchFamily="34" charset="-120"/>
+                </a:rPr>
+                <a:t>Alert on quality, latency and cost.</a:t>
+              </a:r>
+              <a:endParaRPr lang="en-US" sz="900" dirty="0"/>
+            </a:p>
+          </p:txBody>
+        </p:sp>
+      </p:grpSp>
+      <p:grpSp>
+        <p:nvGrpSpPr>
+          <p:cNvPr id="62" name="Reveal 2"/>
+          <p:cNvGrpSpPr/>
           <p:nvPr/>
-        </p:nvSpPr>
-        <p:spPr>
+        </p:nvGrpSpPr>
+        <p:grpSpPr>
           <a:xfrm>
-            <a:off x="4075748" y="2286476"/>
-            <a:ext cx="167164" cy="190500"/>
+            <a:off x="4348401" y="1868329"/>
+            <a:ext cx="3220641" cy="3791902"/>
+            <a:chOff x="4348401" y="1868329"/>
+            <a:chExt cx="3220641" cy="3791902"/>
           </a:xfrm>
-          <a:prstGeom prst="rect">
-            <a:avLst/>
-          </a:prstGeom>
-          <a:noFill/>
-          <a:ln/>
-        </p:spPr>
-        <p:txBody>
-          <a:bodyPr wrap="none" lIns="0" tIns="0" rIns="0" bIns="0" rtlCol="0" anchor="ctr"/>
-          <a:lstStyle/>
-          <a:p>
-            <a:pPr marL="0" indent="0" algn="l">
-              <a:buNone/>
-            </a:pPr>
-            <a:r>
-              <a:rPr lang="en-US" sz="1200" b="1" dirty="0">
-                <a:solidFill>
-                  <a:srgbClr val="4ADE80"/>
-                </a:solidFill>
-                <a:latin typeface="Arial" pitchFamily="34" charset="0"/>
-                <a:ea typeface="Arial" pitchFamily="34" charset="-122"/>
-                <a:cs typeface="Arial" pitchFamily="34" charset="-120"/>
-              </a:rPr>
-              <a:t>1</a:t>
-            </a:r>
-            <a:endParaRPr lang="en-US" sz="1200" dirty="0"/>
-          </a:p>
-        </p:txBody>
-      </p:sp>
-      <p:sp>
-        <p:nvSpPr>
-          <p:cNvPr id="18" name="static:16:text"/>
-          <p:cNvSpPr/>
-          <p:nvPr/>
-        </p:nvSpPr>
-        <p:spPr>
-          <a:xfrm>
-            <a:off x="4380548" y="2291001"/>
-            <a:ext cx="914281" cy="182880"/>
-          </a:xfrm>
-          <a:prstGeom prst="rect">
-            <a:avLst/>
-          </a:prstGeom>
-          <a:noFill/>
-          <a:ln/>
-        </p:spPr>
-        <p:txBody>
-          <a:bodyPr wrap="none" lIns="0" tIns="0" rIns="0" bIns="0" rtlCol="0" anchor="ctr"/>
-          <a:lstStyle/>
-          <a:p>
-            <a:pPr marL="0" indent="0" algn="l">
-              <a:buNone/>
-            </a:pPr>
-            <a:r>
-              <a:rPr lang="en-US" sz="1140" b="1" dirty="0">
-                <a:solidFill>
-                  <a:srgbClr val="DEDEDE"/>
-                </a:solidFill>
-                <a:latin typeface="Arial" pitchFamily="34" charset="0"/>
-                <a:ea typeface="Arial" pitchFamily="34" charset="-122"/>
-                <a:cs typeface="Arial" pitchFamily="34" charset="-120"/>
-              </a:rPr>
-              <a:t>Pull request</a:t>
-            </a:r>
-            <a:endParaRPr lang="en-US" sz="1140" dirty="0"/>
-          </a:p>
-        </p:txBody>
-      </p:sp>
-      <p:sp>
-        <p:nvSpPr>
-          <p:cNvPr id="19" name="static:17:arrow"/>
-          <p:cNvSpPr/>
-          <p:nvPr/>
-        </p:nvSpPr>
-        <p:spPr>
-          <a:xfrm>
-            <a:off x="4212908" y="2606516"/>
-            <a:ext cx="0" cy="60960"/>
-          </a:xfrm>
-          <a:prstGeom prst="line">
-            <a:avLst/>
-          </a:prstGeom>
-          <a:noFill/>
-          <a:ln w="7620">
+        </p:grpSpPr>
+        <p:sp>
+          <p:nvSpPr>
+            <p:cNvPr id="63" name="reveal-1:2:shape"/>
+            <p:cNvSpPr/>
+            <p:nvPr/>
+          </p:nvSpPr>
+          <p:spPr>
+            <a:xfrm>
+              <a:off x="4348401" y="1868329"/>
+              <a:ext cx="3220641" cy="3791902"/>
+            </a:xfrm>
+            <a:prstGeom prst="roundRect">
+              <a:avLst>
+                <a:gd name="adj" fmla="val 3786"/>
+              </a:avLst>
+            </a:prstGeom>
             <a:solidFill>
-              <a:srgbClr val="B0B0B0"/>
+              <a:srgbClr val="292929"/>
             </a:solidFill>
-            <a:prstDash val="solid"/>
-            <a:headEnd type="none"/>
-            <a:tailEnd type="triangle"/>
-          </a:ln>
-        </p:spPr>
-        <p:txBody>
-          <a:bodyPr/>
-          <a:lstStyle/>
-          <a:p>
-            <a:endParaRPr lang="en-US"/>
-          </a:p>
-        </p:txBody>
-      </p:sp>
-      <p:sp>
-        <p:nvSpPr>
-          <p:cNvPr id="20" name="static:18:shape"/>
-          <p:cNvSpPr/>
-          <p:nvPr/>
-        </p:nvSpPr>
-        <p:spPr>
-          <a:xfrm>
-            <a:off x="3984308" y="2675096"/>
-            <a:ext cx="4223385" cy="426720"/>
-          </a:xfrm>
-          <a:prstGeom prst="roundRect">
-            <a:avLst>
-              <a:gd name="adj" fmla="val 14286"/>
-            </a:avLst>
-          </a:prstGeom>
-          <a:solidFill>
-            <a:srgbClr val="2E2E2E"/>
-          </a:solidFill>
-          <a:ln w="12700">
+            <a:ln w="7620">
+              <a:solidFill>
+                <a:srgbClr val="474747"/>
+              </a:solidFill>
+              <a:prstDash val="solid"/>
+            </a:ln>
+          </p:spPr>
+          <p:txBody>
+            <a:bodyPr/>
+            <a:lstStyle/>
+            <a:p>
+              <a:endParaRPr lang="en-US"/>
+            </a:p>
+          </p:txBody>
+        </p:sp>
+        <p:sp>
+          <p:nvSpPr>
+            <p:cNvPr id="64" name="reveal-1:2:shape:border-0"/>
+            <p:cNvSpPr/>
+            <p:nvPr/>
+          </p:nvSpPr>
+          <p:spPr>
+            <a:xfrm>
+              <a:off x="4439841" y="1883569"/>
+              <a:ext cx="3037761" cy="0"/>
+            </a:xfrm>
+            <a:prstGeom prst="line">
+              <a:avLst/>
+            </a:prstGeom>
+            <a:noFill/>
+            <a:ln w="30480">
+              <a:solidFill>
+                <a:srgbClr val="FBBF24"/>
+              </a:solidFill>
+              <a:prstDash val="solid"/>
+              <a:headEnd type="none"/>
+              <a:tailEnd type="none"/>
+            </a:ln>
+          </p:spPr>
+          <p:txBody>
+            <a:bodyPr/>
+            <a:lstStyle/>
+            <a:p>
+              <a:endParaRPr lang="en-US"/>
+            </a:p>
+          </p:txBody>
+        </p:sp>
+        <p:sp>
+          <p:nvSpPr>
+            <p:cNvPr id="65" name="reveal-1:3:shape"/>
+            <p:cNvSpPr/>
+            <p:nvPr/>
+          </p:nvSpPr>
+          <p:spPr>
+            <a:xfrm>
+              <a:off x="4554141" y="2096929"/>
+              <a:ext cx="411480" cy="411480"/>
+            </a:xfrm>
+            <a:prstGeom prst="roundRect">
+              <a:avLst>
+                <a:gd name="adj" fmla="val 25926"/>
+              </a:avLst>
+            </a:prstGeom>
             <a:solidFill>
-              <a:srgbClr val="333333">
+              <a:srgbClr val="000000">
                 <a:alpha val="0"/>
               </a:srgbClr>
             </a:solidFill>
-            <a:prstDash val="solid"/>
-          </a:ln>
-        </p:spPr>
-        <p:txBody>
-          <a:bodyPr/>
-          <a:lstStyle/>
-          <a:p>
-            <a:endParaRPr lang="en-US"/>
-          </a:p>
-        </p:txBody>
-      </p:sp>
-      <p:sp>
-        <p:nvSpPr>
-          <p:cNvPr id="21" name="static:19:text"/>
-          <p:cNvSpPr/>
+            <a:ln w="15240">
+              <a:solidFill>
+                <a:srgbClr val="FBBF24"/>
+              </a:solidFill>
+              <a:prstDash val="solid"/>
+            </a:ln>
+          </p:spPr>
+          <p:txBody>
+            <a:bodyPr/>
+            <a:lstStyle/>
+            <a:p>
+              <a:endParaRPr lang="en-US"/>
+            </a:p>
+          </p:txBody>
+        </p:sp>
+        <p:sp>
+          <p:nvSpPr>
+            <p:cNvPr id="66" name="reveal-1:4:text"/>
+            <p:cNvSpPr/>
+            <p:nvPr/>
+          </p:nvSpPr>
+          <p:spPr>
+            <a:xfrm>
+              <a:off x="4554141" y="2207419"/>
+              <a:ext cx="411480" cy="190500"/>
+            </a:xfrm>
+            <a:prstGeom prst="rect">
+              <a:avLst/>
+            </a:prstGeom>
+            <a:noFill/>
+            <a:ln/>
+          </p:spPr>
+          <p:txBody>
+            <a:bodyPr wrap="square" lIns="0" tIns="0" rIns="0" bIns="0" rtlCol="0" anchor="ctr"/>
+            <a:lstStyle/>
+            <a:p>
+              <a:pPr marL="0" indent="0" algn="ctr">
+                <a:buNone/>
+              </a:pPr>
+              <a:r>
+                <a:rPr lang="en-US" sz="1200" b="1" kern="0" spc="-24" dirty="0">
+                  <a:solidFill>
+                    <a:srgbClr val="FBBF24"/>
+                  </a:solidFill>
+                  <a:latin typeface="Arial" pitchFamily="34" charset="0"/>
+                  <a:ea typeface="Arial" pitchFamily="34" charset="-122"/>
+                  <a:cs typeface="Arial" pitchFamily="34" charset="-120"/>
+                </a:rPr>
+                <a:t>2</a:t>
+              </a:r>
+              <a:endParaRPr lang="en-US" sz="1200" dirty="0"/>
+            </a:p>
+          </p:txBody>
+        </p:sp>
+        <p:sp>
+          <p:nvSpPr>
+            <p:cNvPr id="67" name="reveal-1:5:text"/>
+            <p:cNvSpPr/>
+            <p:nvPr/>
+          </p:nvSpPr>
+          <p:spPr>
+            <a:xfrm>
+              <a:off x="4554141" y="2698909"/>
+              <a:ext cx="2809161" cy="266700"/>
+            </a:xfrm>
+            <a:prstGeom prst="rect">
+              <a:avLst/>
+            </a:prstGeom>
+            <a:noFill/>
+            <a:ln/>
+          </p:spPr>
+          <p:txBody>
+            <a:bodyPr wrap="square" lIns="0" tIns="0" rIns="0" bIns="0" rtlCol="0" anchor="ctr"/>
+            <a:lstStyle/>
+            <a:p>
+              <a:pPr marL="0" indent="0" algn="l">
+                <a:buNone/>
+              </a:pPr>
+              <a:r>
+                <a:rPr lang="en-US" sz="1680" b="1" dirty="0">
+                  <a:solidFill>
+                    <a:srgbClr val="FBBF24"/>
+                  </a:solidFill>
+                  <a:latin typeface="Arial" pitchFamily="34" charset="0"/>
+                  <a:ea typeface="Arial" pitchFamily="34" charset="-122"/>
+                  <a:cs typeface="Arial" pitchFamily="34" charset="-120"/>
+                </a:rPr>
+                <a:t>Keep the failures</a:t>
+              </a:r>
+              <a:endParaRPr lang="en-US" sz="1680" dirty="0"/>
+            </a:p>
+          </p:txBody>
+        </p:sp>
+        <p:sp>
+          <p:nvSpPr>
+            <p:cNvPr id="68" name="reveal-1:6:text"/>
+            <p:cNvSpPr/>
+            <p:nvPr/>
+          </p:nvSpPr>
+          <p:spPr>
+            <a:xfrm>
+              <a:off x="4554141" y="3047881"/>
+              <a:ext cx="2809161" cy="564123"/>
+            </a:xfrm>
+            <a:prstGeom prst="rect">
+              <a:avLst/>
+            </a:prstGeom>
+            <a:noFill/>
+            <a:ln/>
+          </p:spPr>
+          <p:txBody>
+            <a:bodyPr wrap="square" lIns="0" tIns="0" rIns="0" bIns="0" rtlCol="0" anchor="t"/>
+            <a:lstStyle/>
+            <a:p>
+              <a:pPr marL="0" indent="0" algn="l">
+                <a:buNone/>
+              </a:pPr>
+              <a:r>
+                <a:rPr lang="en-US" sz="1140" dirty="0">
+                  <a:solidFill>
+                    <a:srgbClr val="B0B0B0"/>
+                  </a:solidFill>
+                  <a:latin typeface="Arial" pitchFamily="34" charset="0"/>
+                  <a:ea typeface="Arial" pitchFamily="34" charset="-122"/>
+                  <a:cs typeface="Arial" pitchFamily="34" charset="-120"/>
+                </a:rPr>
+                <a:t>Turn interesting failures into new, reviewed test rows.</a:t>
+              </a:r>
+              <a:endParaRPr lang="en-US" sz="1140" dirty="0"/>
+            </a:p>
+          </p:txBody>
+        </p:sp>
+        <p:sp>
+          <p:nvSpPr>
+            <p:cNvPr id="70" name="reveal-1:8:shape"/>
+            <p:cNvSpPr/>
+            <p:nvPr/>
+          </p:nvSpPr>
+          <p:spPr>
+            <a:xfrm>
+              <a:off x="4554141" y="3652004"/>
+              <a:ext cx="2809161" cy="668640"/>
+            </a:xfrm>
+            <a:prstGeom prst="roundRect">
+              <a:avLst>
+                <a:gd name="adj" fmla="val 13889"/>
+              </a:avLst>
+            </a:prstGeom>
+            <a:solidFill>
+              <a:srgbClr val="FFFFFF">
+                <a:alpha val="3000"/>
+              </a:srgbClr>
+            </a:solidFill>
+            <a:ln w="12700">
+              <a:solidFill>
+                <a:srgbClr val="333333">
+                  <a:alpha val="0"/>
+                </a:srgbClr>
+              </a:solidFill>
+              <a:prstDash val="solid"/>
+            </a:ln>
+          </p:spPr>
+          <p:txBody>
+            <a:bodyPr/>
+            <a:lstStyle/>
+            <a:p>
+              <a:endParaRPr lang="en-US"/>
+            </a:p>
+          </p:txBody>
+        </p:sp>
+        <p:sp>
+          <p:nvSpPr>
+            <p:cNvPr id="71" name="reveal-1:9:text"/>
+            <p:cNvSpPr/>
+            <p:nvPr/>
+          </p:nvSpPr>
+          <p:spPr>
+            <a:xfrm>
+              <a:off x="4660821" y="3732004"/>
+              <a:ext cx="2595801" cy="508640"/>
+            </a:xfrm>
+            <a:prstGeom prst="rect">
+              <a:avLst/>
+            </a:prstGeom>
+            <a:noFill/>
+            <a:ln/>
+          </p:spPr>
+          <p:txBody>
+            <a:bodyPr wrap="square" lIns="0" tIns="0" rIns="0" bIns="0" rtlCol="0" anchor="t"/>
+            <a:lstStyle/>
+            <a:p>
+              <a:pPr marL="0" indent="0" algn="l">
+                <a:buNone/>
+              </a:pPr>
+              <a:r>
+                <a:rPr lang="en-US" sz="900" b="1" dirty="0">
+                  <a:solidFill>
+                    <a:srgbClr val="DEDEDE"/>
+                  </a:solidFill>
+                  <a:latin typeface="Arial" pitchFamily="34" charset="0"/>
+                  <a:ea typeface="Arial" pitchFamily="34" charset="-122"/>
+                  <a:cs typeface="Arial" pitchFamily="34" charset="-120"/>
+                </a:rPr>
+                <a:t>Redact personal data first.</a:t>
+              </a:r>
+              <a:endParaRPr lang="en-US" sz="900" dirty="0"/>
+            </a:p>
+          </p:txBody>
+        </p:sp>
+      </p:grpSp>
+      <p:grpSp>
+        <p:nvGrpSpPr>
+          <p:cNvPr id="72" name="Reveal 3"/>
+          <p:cNvGrpSpPr/>
           <p:nvPr/>
-        </p:nvSpPr>
-        <p:spPr>
+        </p:nvGrpSpPr>
+        <p:grpSpPr>
           <a:xfrm>
-            <a:off x="4075748" y="2789396"/>
-            <a:ext cx="186571" cy="190500"/>
+            <a:off x="7721442" y="1868329"/>
+            <a:ext cx="3220641" cy="3791902"/>
+            <a:chOff x="7721442" y="1868329"/>
+            <a:chExt cx="3220641" cy="3791902"/>
           </a:xfrm>
-          <a:prstGeom prst="rect">
-            <a:avLst/>
-          </a:prstGeom>
-          <a:noFill/>
-          <a:ln/>
-        </p:spPr>
-        <p:txBody>
-          <a:bodyPr wrap="none" lIns="0" tIns="0" rIns="0" bIns="0" rtlCol="0" anchor="ctr"/>
-          <a:lstStyle/>
-          <a:p>
-            <a:pPr marL="0" indent="0" algn="l">
-              <a:buNone/>
-            </a:pPr>
-            <a:r>
-              <a:rPr lang="en-US" sz="1200" b="1" dirty="0">
-                <a:solidFill>
-                  <a:srgbClr val="4ADE80"/>
-                </a:solidFill>
-                <a:latin typeface="Arial" pitchFamily="34" charset="0"/>
-                <a:ea typeface="Arial" pitchFamily="34" charset="-122"/>
-                <a:cs typeface="Arial" pitchFamily="34" charset="-120"/>
-              </a:rPr>
-              <a:t>2</a:t>
-            </a:r>
-            <a:endParaRPr lang="en-US" sz="1200" dirty="0"/>
-          </a:p>
-        </p:txBody>
-      </p:sp>
-      <p:sp>
-        <p:nvSpPr>
-          <p:cNvPr id="22" name="static:20:text"/>
-          <p:cNvSpPr/>
-          <p:nvPr/>
-        </p:nvSpPr>
-        <p:spPr>
-          <a:xfrm>
-            <a:off x="4380548" y="2793921"/>
-            <a:ext cx="882134" cy="182880"/>
-          </a:xfrm>
-          <a:prstGeom prst="rect">
-            <a:avLst/>
-          </a:prstGeom>
-          <a:noFill/>
-          <a:ln/>
-        </p:spPr>
-        <p:txBody>
-          <a:bodyPr wrap="none" lIns="0" tIns="0" rIns="0" bIns="0" rtlCol="0" anchor="ctr"/>
-          <a:lstStyle/>
-          <a:p>
-            <a:pPr marL="0" indent="0" algn="l">
-              <a:buNone/>
-            </a:pPr>
-            <a:r>
-              <a:rPr lang="en-US" sz="1140" b="1" dirty="0">
-                <a:solidFill>
-                  <a:srgbClr val="DEDEDE"/>
-                </a:solidFill>
-                <a:latin typeface="Arial" pitchFamily="34" charset="0"/>
-                <a:ea typeface="Arial" pitchFamily="34" charset="-122"/>
-                <a:cs typeface="Arial" pitchFamily="34" charset="-120"/>
-              </a:rPr>
-              <a:t>Build &amp; test</a:t>
-            </a:r>
-            <a:endParaRPr lang="en-US" sz="1140" dirty="0"/>
-          </a:p>
-        </p:txBody>
-      </p:sp>
-      <p:sp>
-        <p:nvSpPr>
-          <p:cNvPr id="23" name="static:21:arrow"/>
-          <p:cNvSpPr/>
-          <p:nvPr/>
-        </p:nvSpPr>
-        <p:spPr>
-          <a:xfrm>
-            <a:off x="4212908" y="3109436"/>
-            <a:ext cx="0" cy="60960"/>
-          </a:xfrm>
-          <a:prstGeom prst="line">
-            <a:avLst/>
-          </a:prstGeom>
-          <a:noFill/>
-          <a:ln w="7620">
+        </p:grpSpPr>
+        <p:sp>
+          <p:nvSpPr>
+            <p:cNvPr id="73" name="reveal-1:2:shape"/>
+            <p:cNvSpPr/>
+            <p:nvPr/>
+          </p:nvSpPr>
+          <p:spPr>
+            <a:xfrm>
+              <a:off x="7721442" y="1868329"/>
+              <a:ext cx="3220641" cy="3791902"/>
+            </a:xfrm>
+            <a:prstGeom prst="roundRect">
+              <a:avLst>
+                <a:gd name="adj" fmla="val 3786"/>
+              </a:avLst>
+            </a:prstGeom>
             <a:solidFill>
-              <a:srgbClr val="B0B0B0"/>
+              <a:srgbClr val="292929"/>
             </a:solidFill>
-            <a:prstDash val="solid"/>
-            <a:headEnd type="none"/>
-            <a:tailEnd type="triangle"/>
-          </a:ln>
-        </p:spPr>
-        <p:txBody>
-          <a:bodyPr/>
-          <a:lstStyle/>
-          <a:p>
-            <a:endParaRPr lang="en-US"/>
-          </a:p>
-        </p:txBody>
-      </p:sp>
-      <p:sp>
-        <p:nvSpPr>
-          <p:cNvPr id="24" name="static:22:shape"/>
-          <p:cNvSpPr/>
-          <p:nvPr/>
-        </p:nvSpPr>
-        <p:spPr>
-          <a:xfrm>
-            <a:off x="3984308" y="3178016"/>
-            <a:ext cx="4223385" cy="426720"/>
-          </a:xfrm>
-          <a:prstGeom prst="roundRect">
-            <a:avLst>
-              <a:gd name="adj" fmla="val 14286"/>
-            </a:avLst>
-          </a:prstGeom>
-          <a:solidFill>
-            <a:srgbClr val="2E2E2E"/>
-          </a:solidFill>
-          <a:ln w="12700">
+            <a:ln w="7620">
+              <a:solidFill>
+                <a:srgbClr val="474747"/>
+              </a:solidFill>
+              <a:prstDash val="solid"/>
+            </a:ln>
+          </p:spPr>
+          <p:txBody>
+            <a:bodyPr/>
+            <a:lstStyle/>
+            <a:p>
+              <a:endParaRPr lang="en-US"/>
+            </a:p>
+          </p:txBody>
+        </p:sp>
+        <p:sp>
+          <p:nvSpPr>
+            <p:cNvPr id="74" name="reveal-1:2:shape:border-0"/>
+            <p:cNvSpPr/>
+            <p:nvPr/>
+          </p:nvSpPr>
+          <p:spPr>
+            <a:xfrm>
+              <a:off x="7812882" y="1883569"/>
+              <a:ext cx="3037761" cy="0"/>
+            </a:xfrm>
+            <a:prstGeom prst="line">
+              <a:avLst/>
+            </a:prstGeom>
+            <a:noFill/>
+            <a:ln w="30480">
+              <a:solidFill>
+                <a:srgbClr val="4ADE80"/>
+              </a:solidFill>
+              <a:prstDash val="solid"/>
+              <a:headEnd type="none"/>
+              <a:tailEnd type="none"/>
+            </a:ln>
+          </p:spPr>
+          <p:txBody>
+            <a:bodyPr/>
+            <a:lstStyle/>
+            <a:p>
+              <a:endParaRPr lang="en-US"/>
+            </a:p>
+          </p:txBody>
+        </p:sp>
+        <p:sp>
+          <p:nvSpPr>
+            <p:cNvPr id="75" name="reveal-1:3:shape"/>
+            <p:cNvSpPr/>
+            <p:nvPr/>
+          </p:nvSpPr>
+          <p:spPr>
+            <a:xfrm>
+              <a:off x="7927182" y="2096929"/>
+              <a:ext cx="411480" cy="411480"/>
+            </a:xfrm>
+            <a:prstGeom prst="roundRect">
+              <a:avLst>
+                <a:gd name="adj" fmla="val 25926"/>
+              </a:avLst>
+            </a:prstGeom>
             <a:solidFill>
-              <a:srgbClr val="333333">
+              <a:srgbClr val="000000">
                 <a:alpha val="0"/>
               </a:srgbClr>
             </a:solidFill>
-            <a:prstDash val="solid"/>
-          </a:ln>
-        </p:spPr>
-        <p:txBody>
-          <a:bodyPr/>
-          <a:lstStyle/>
-          <a:p>
-            <a:endParaRPr lang="en-US"/>
-          </a:p>
-        </p:txBody>
-      </p:sp>
-      <p:sp>
-        <p:nvSpPr>
-          <p:cNvPr id="25" name="static:23:text"/>
-          <p:cNvSpPr/>
-          <p:nvPr/>
-        </p:nvSpPr>
-        <p:spPr>
-          <a:xfrm>
-            <a:off x="4075748" y="3292316"/>
-            <a:ext cx="190738" cy="190500"/>
-          </a:xfrm>
-          <a:prstGeom prst="rect">
-            <a:avLst/>
-          </a:prstGeom>
-          <a:noFill/>
-          <a:ln/>
-        </p:spPr>
-        <p:txBody>
-          <a:bodyPr wrap="none" lIns="0" tIns="0" rIns="0" bIns="0" rtlCol="0" anchor="ctr"/>
-          <a:lstStyle/>
-          <a:p>
-            <a:pPr marL="0" indent="0" algn="l">
-              <a:buNone/>
-            </a:pPr>
-            <a:r>
-              <a:rPr lang="en-US" sz="1200" b="1" dirty="0">
-                <a:solidFill>
-                  <a:srgbClr val="4ADE80"/>
-                </a:solidFill>
-                <a:latin typeface="Arial" pitchFamily="34" charset="0"/>
-                <a:ea typeface="Arial" pitchFamily="34" charset="-122"/>
-                <a:cs typeface="Arial" pitchFamily="34" charset="-120"/>
-              </a:rPr>
-              <a:t>3</a:t>
-            </a:r>
-            <a:endParaRPr lang="en-US" sz="1200" dirty="0"/>
-          </a:p>
-        </p:txBody>
-      </p:sp>
-      <p:sp>
-        <p:nvSpPr>
-          <p:cNvPr id="26" name="static:24:text"/>
-          <p:cNvSpPr/>
-          <p:nvPr/>
-        </p:nvSpPr>
-        <p:spPr>
-          <a:xfrm>
-            <a:off x="4380548" y="3296841"/>
-            <a:ext cx="1110734" cy="182880"/>
-          </a:xfrm>
-          <a:prstGeom prst="rect">
-            <a:avLst/>
-          </a:prstGeom>
-          <a:noFill/>
-          <a:ln/>
-        </p:spPr>
-        <p:txBody>
-          <a:bodyPr wrap="none" lIns="0" tIns="0" rIns="0" bIns="0" rtlCol="0" anchor="ctr"/>
-          <a:lstStyle/>
-          <a:p>
-            <a:pPr marL="0" indent="0" algn="l">
-              <a:buNone/>
-            </a:pPr>
-            <a:r>
-              <a:rPr lang="en-US" sz="1140" b="1" dirty="0">
-                <a:solidFill>
-                  <a:srgbClr val="DEDEDE"/>
-                </a:solidFill>
-                <a:latin typeface="Arial" pitchFamily="34" charset="0"/>
-                <a:ea typeface="Arial" pitchFamily="34" charset="-122"/>
-                <a:cs typeface="Arial" pitchFamily="34" charset="-120"/>
-              </a:rPr>
-              <a:t>Evaluate agent</a:t>
-            </a:r>
-            <a:endParaRPr lang="en-US" sz="1140" dirty="0"/>
-          </a:p>
-        </p:txBody>
-      </p:sp>
-      <p:sp>
-        <p:nvSpPr>
-          <p:cNvPr id="27" name="static:25:arrow"/>
-          <p:cNvSpPr/>
-          <p:nvPr/>
-        </p:nvSpPr>
-        <p:spPr>
-          <a:xfrm>
-            <a:off x="4212908" y="3612356"/>
-            <a:ext cx="0" cy="60960"/>
-          </a:xfrm>
-          <a:prstGeom prst="line">
-            <a:avLst/>
-          </a:prstGeom>
-          <a:noFill/>
-          <a:ln w="7620">
+            <a:ln w="15240">
+              <a:solidFill>
+                <a:srgbClr val="4ADE80"/>
+              </a:solidFill>
+              <a:prstDash val="solid"/>
+            </a:ln>
+          </p:spPr>
+          <p:txBody>
+            <a:bodyPr/>
+            <a:lstStyle/>
+            <a:p>
+              <a:endParaRPr lang="en-US"/>
+            </a:p>
+          </p:txBody>
+        </p:sp>
+        <p:sp>
+          <p:nvSpPr>
+            <p:cNvPr id="76" name="reveal-1:4:text"/>
+            <p:cNvSpPr/>
+            <p:nvPr/>
+          </p:nvSpPr>
+          <p:spPr>
+            <a:xfrm>
+              <a:off x="7927182" y="2207419"/>
+              <a:ext cx="411480" cy="190500"/>
+            </a:xfrm>
+            <a:prstGeom prst="rect">
+              <a:avLst/>
+            </a:prstGeom>
+            <a:noFill/>
+            <a:ln/>
+          </p:spPr>
+          <p:txBody>
+            <a:bodyPr wrap="square" lIns="0" tIns="0" rIns="0" bIns="0" rtlCol="0" anchor="ctr"/>
+            <a:lstStyle/>
+            <a:p>
+              <a:pPr marL="0" indent="0" algn="ctr">
+                <a:buNone/>
+              </a:pPr>
+              <a:r>
+                <a:rPr lang="en-US" sz="1200" b="1" kern="0" spc="-24" dirty="0">
+                  <a:solidFill>
+                    <a:srgbClr val="4ADE80"/>
+                  </a:solidFill>
+                  <a:latin typeface="Arial" pitchFamily="34" charset="0"/>
+                  <a:ea typeface="Arial" pitchFamily="34" charset="-122"/>
+                  <a:cs typeface="Arial" pitchFamily="34" charset="-120"/>
+                </a:rPr>
+                <a:t>3</a:t>
+              </a:r>
+              <a:endParaRPr lang="en-US" sz="1200" dirty="0"/>
+            </a:p>
+          </p:txBody>
+        </p:sp>
+        <p:sp>
+          <p:nvSpPr>
+            <p:cNvPr id="77" name="reveal-1:5:text"/>
+            <p:cNvSpPr/>
+            <p:nvPr/>
+          </p:nvSpPr>
+          <p:spPr>
+            <a:xfrm>
+              <a:off x="7927182" y="2698909"/>
+              <a:ext cx="2809161" cy="266700"/>
+            </a:xfrm>
+            <a:prstGeom prst="rect">
+              <a:avLst/>
+            </a:prstGeom>
+            <a:noFill/>
+            <a:ln/>
+          </p:spPr>
+          <p:txBody>
+            <a:bodyPr wrap="square" lIns="0" tIns="0" rIns="0" bIns="0" rtlCol="0" anchor="ctr"/>
+            <a:lstStyle/>
+            <a:p>
+              <a:pPr marL="0" indent="0" algn="l">
+                <a:buNone/>
+              </a:pPr>
+              <a:r>
+                <a:rPr lang="en-US" sz="1680" b="1" dirty="0">
+                  <a:solidFill>
+                    <a:srgbClr val="4ADE80"/>
+                  </a:solidFill>
+                  <a:latin typeface="Arial" pitchFamily="34" charset="0"/>
+                  <a:ea typeface="Arial" pitchFamily="34" charset="-122"/>
+                  <a:cs typeface="Arial" pitchFamily="34" charset="-120"/>
+                </a:rPr>
+                <a:t>Same gate</a:t>
+              </a:r>
+              <a:endParaRPr lang="en-US" sz="1680" dirty="0"/>
+            </a:p>
+          </p:txBody>
+        </p:sp>
+        <p:sp>
+          <p:nvSpPr>
+            <p:cNvPr id="78" name="reveal-1:6:text"/>
+            <p:cNvSpPr/>
+            <p:nvPr/>
+          </p:nvSpPr>
+          <p:spPr>
+            <a:xfrm>
+              <a:off x="7927182" y="3047881"/>
+              <a:ext cx="2809161" cy="564123"/>
+            </a:xfrm>
+            <a:prstGeom prst="rect">
+              <a:avLst/>
+            </a:prstGeom>
+            <a:noFill/>
+            <a:ln/>
+          </p:spPr>
+          <p:txBody>
+            <a:bodyPr wrap="square" lIns="0" tIns="0" rIns="0" bIns="0" rtlCol="0" anchor="t"/>
+            <a:lstStyle/>
+            <a:p>
+              <a:pPr marL="0" indent="0" algn="l">
+                <a:buNone/>
+              </a:pPr>
+              <a:r>
+                <a:rPr lang="en-US" sz="1140" dirty="0">
+                  <a:solidFill>
+                    <a:srgbClr val="B0B0B0"/>
+                  </a:solidFill>
+                  <a:latin typeface="Arial" pitchFamily="34" charset="0"/>
+                  <a:ea typeface="Arial" pitchFamily="34" charset="-122"/>
+                  <a:cs typeface="Arial" pitchFamily="34" charset="-120"/>
+                </a:rPr>
+                <a:t>The next change, human or optimizer, runs against them.</a:t>
+              </a:r>
+              <a:endParaRPr lang="en-US" sz="1140" dirty="0"/>
+            </a:p>
+          </p:txBody>
+        </p:sp>
+        <p:sp>
+          <p:nvSpPr>
+            <p:cNvPr id="80" name="reveal-1:8:shape"/>
+            <p:cNvSpPr/>
+            <p:nvPr/>
+          </p:nvSpPr>
+          <p:spPr>
+            <a:xfrm>
+              <a:off x="7927182" y="3652004"/>
+              <a:ext cx="2809161" cy="668640"/>
+            </a:xfrm>
+            <a:prstGeom prst="roundRect">
+              <a:avLst>
+                <a:gd name="adj" fmla="val 13889"/>
+              </a:avLst>
+            </a:prstGeom>
             <a:solidFill>
-              <a:srgbClr val="B0B0B0"/>
-            </a:solidFill>
-            <a:prstDash val="solid"/>
-            <a:headEnd type="none"/>
-            <a:tailEnd type="triangle"/>
-          </a:ln>
-        </p:spPr>
-        <p:txBody>
-          <a:bodyPr/>
-          <a:lstStyle/>
-          <a:p>
-            <a:endParaRPr lang="en-US"/>
-          </a:p>
-        </p:txBody>
-      </p:sp>
-      <p:sp>
-        <p:nvSpPr>
-          <p:cNvPr id="28" name="static:26:shape"/>
-          <p:cNvSpPr/>
-          <p:nvPr/>
-        </p:nvSpPr>
-        <p:spPr>
-          <a:xfrm>
-            <a:off x="3984308" y="3680936"/>
-            <a:ext cx="4223385" cy="426720"/>
-          </a:xfrm>
-          <a:prstGeom prst="roundRect">
-            <a:avLst>
-              <a:gd name="adj" fmla="val 14286"/>
-            </a:avLst>
-          </a:prstGeom>
-          <a:solidFill>
-            <a:srgbClr val="2E2E2E"/>
-          </a:solidFill>
-          <a:ln w="12700">
-            <a:solidFill>
-              <a:srgbClr val="333333">
-                <a:alpha val="0"/>
+              <a:srgbClr val="FFFFFF">
+                <a:alpha val="3000"/>
               </a:srgbClr>
             </a:solidFill>
-            <a:prstDash val="solid"/>
-          </a:ln>
-        </p:spPr>
-        <p:txBody>
-          <a:bodyPr/>
-          <a:lstStyle/>
-          <a:p>
-            <a:endParaRPr lang="en-US"/>
-          </a:p>
-        </p:txBody>
-      </p:sp>
-      <p:sp>
-        <p:nvSpPr>
-          <p:cNvPr id="29" name="static:27:text"/>
-          <p:cNvSpPr/>
-          <p:nvPr/>
-        </p:nvSpPr>
-        <p:spPr>
-          <a:xfrm>
-            <a:off x="4075748" y="3795236"/>
-            <a:ext cx="193477" cy="190500"/>
-          </a:xfrm>
-          <a:prstGeom prst="rect">
-            <a:avLst/>
-          </a:prstGeom>
-          <a:noFill/>
-          <a:ln/>
-        </p:spPr>
-        <p:txBody>
-          <a:bodyPr wrap="none" lIns="0" tIns="0" rIns="0" bIns="0" rtlCol="0" anchor="ctr"/>
-          <a:lstStyle/>
-          <a:p>
-            <a:pPr marL="0" indent="0" algn="l">
-              <a:buNone/>
-            </a:pPr>
-            <a:r>
-              <a:rPr lang="en-US" sz="1200" b="1" dirty="0">
-                <a:solidFill>
-                  <a:srgbClr val="4ADE80"/>
-                </a:solidFill>
-                <a:latin typeface="Arial" pitchFamily="34" charset="0"/>
-                <a:ea typeface="Arial" pitchFamily="34" charset="-122"/>
-                <a:cs typeface="Arial" pitchFamily="34" charset="-120"/>
-              </a:rPr>
-              <a:t>4</a:t>
-            </a:r>
-            <a:endParaRPr lang="en-US" sz="1200" dirty="0"/>
-          </a:p>
-        </p:txBody>
-      </p:sp>
-      <p:sp>
-        <p:nvSpPr>
-          <p:cNvPr id="30" name="static:28:text"/>
-          <p:cNvSpPr/>
-          <p:nvPr/>
-        </p:nvSpPr>
-        <p:spPr>
-          <a:xfrm>
-            <a:off x="4380548" y="3799761"/>
-            <a:ext cx="1052393" cy="182880"/>
-          </a:xfrm>
-          <a:prstGeom prst="rect">
-            <a:avLst/>
-          </a:prstGeom>
-          <a:noFill/>
-          <a:ln/>
-        </p:spPr>
-        <p:txBody>
-          <a:bodyPr wrap="none" lIns="0" tIns="0" rIns="0" bIns="0" rtlCol="0" anchor="ctr"/>
-          <a:lstStyle/>
-          <a:p>
-            <a:pPr marL="0" indent="0" algn="l">
-              <a:buNone/>
-            </a:pPr>
-            <a:r>
-              <a:rPr lang="en-US" sz="1140" b="1" dirty="0">
-                <a:solidFill>
-                  <a:srgbClr val="DEDEDE"/>
-                </a:solidFill>
-                <a:latin typeface="Arial" pitchFamily="34" charset="0"/>
-                <a:ea typeface="Arial" pitchFamily="34" charset="-122"/>
-                <a:cs typeface="Arial" pitchFamily="34" charset="-120"/>
-              </a:rPr>
-              <a:t>Release gates</a:t>
-            </a:r>
-            <a:endParaRPr lang="en-US" sz="1140" dirty="0"/>
-          </a:p>
-        </p:txBody>
-      </p:sp>
-      <p:sp>
-        <p:nvSpPr>
-          <p:cNvPr id="31" name="static:29:arrow"/>
-          <p:cNvSpPr/>
-          <p:nvPr/>
-        </p:nvSpPr>
-        <p:spPr>
-          <a:xfrm>
-            <a:off x="4212908" y="4115276"/>
-            <a:ext cx="0" cy="60960"/>
-          </a:xfrm>
-          <a:prstGeom prst="line">
-            <a:avLst/>
-          </a:prstGeom>
-          <a:noFill/>
-          <a:ln w="7620">
-            <a:solidFill>
-              <a:srgbClr val="B0B0B0"/>
-            </a:solidFill>
-            <a:prstDash val="solid"/>
-            <a:headEnd type="none"/>
-            <a:tailEnd type="triangle"/>
-          </a:ln>
-        </p:spPr>
-        <p:txBody>
-          <a:bodyPr/>
-          <a:lstStyle/>
-          <a:p>
-            <a:endParaRPr lang="en-US"/>
-          </a:p>
-        </p:txBody>
-      </p:sp>
-      <p:sp>
-        <p:nvSpPr>
-          <p:cNvPr id="32" name="static:30:shape"/>
-          <p:cNvSpPr/>
-          <p:nvPr/>
-        </p:nvSpPr>
-        <p:spPr>
-          <a:xfrm>
-            <a:off x="3984308" y="4183856"/>
-            <a:ext cx="4223385" cy="426720"/>
-          </a:xfrm>
-          <a:prstGeom prst="roundRect">
-            <a:avLst>
-              <a:gd name="adj" fmla="val 14286"/>
-            </a:avLst>
-          </a:prstGeom>
-          <a:solidFill>
-            <a:srgbClr val="2E2E2E"/>
-          </a:solidFill>
-          <a:ln w="12700">
-            <a:solidFill>
-              <a:srgbClr val="333333">
-                <a:alpha val="0"/>
-              </a:srgbClr>
-            </a:solidFill>
-            <a:prstDash val="solid"/>
-          </a:ln>
-        </p:spPr>
-        <p:txBody>
-          <a:bodyPr/>
-          <a:lstStyle/>
-          <a:p>
-            <a:endParaRPr lang="en-US"/>
-          </a:p>
-        </p:txBody>
-      </p:sp>
-      <p:sp>
-        <p:nvSpPr>
-          <p:cNvPr id="33" name="static:31:text"/>
-          <p:cNvSpPr/>
-          <p:nvPr/>
-        </p:nvSpPr>
-        <p:spPr>
-          <a:xfrm>
-            <a:off x="4075748" y="4298156"/>
-            <a:ext cx="190024" cy="190500"/>
-          </a:xfrm>
-          <a:prstGeom prst="rect">
-            <a:avLst/>
-          </a:prstGeom>
-          <a:noFill/>
-          <a:ln/>
-        </p:spPr>
-        <p:txBody>
-          <a:bodyPr wrap="none" lIns="0" tIns="0" rIns="0" bIns="0" rtlCol="0" anchor="ctr"/>
-          <a:lstStyle/>
-          <a:p>
-            <a:pPr marL="0" indent="0" algn="l">
-              <a:buNone/>
-            </a:pPr>
-            <a:r>
-              <a:rPr lang="en-US" sz="1200" b="1" dirty="0">
-                <a:solidFill>
-                  <a:srgbClr val="4ADE80"/>
-                </a:solidFill>
-                <a:latin typeface="Arial" pitchFamily="34" charset="0"/>
-                <a:ea typeface="Arial" pitchFamily="34" charset="-122"/>
-                <a:cs typeface="Arial" pitchFamily="34" charset="-120"/>
-              </a:rPr>
-              <a:t>5</a:t>
-            </a:r>
-            <a:endParaRPr lang="en-US" sz="1200" dirty="0"/>
-          </a:p>
-        </p:txBody>
-      </p:sp>
-      <p:sp>
-        <p:nvSpPr>
-          <p:cNvPr id="34" name="static:32:text"/>
-          <p:cNvSpPr/>
-          <p:nvPr/>
-        </p:nvSpPr>
-        <p:spPr>
-          <a:xfrm>
-            <a:off x="4380548" y="4302681"/>
-            <a:ext cx="571738" cy="182880"/>
-          </a:xfrm>
-          <a:prstGeom prst="rect">
-            <a:avLst/>
-          </a:prstGeom>
-          <a:noFill/>
-          <a:ln/>
-        </p:spPr>
-        <p:txBody>
-          <a:bodyPr wrap="none" lIns="0" tIns="0" rIns="0" bIns="0" rtlCol="0" anchor="ctr"/>
-          <a:lstStyle/>
-          <a:p>
-            <a:pPr marL="0" indent="0" algn="l">
-              <a:buNone/>
-            </a:pPr>
-            <a:r>
-              <a:rPr lang="en-US" sz="1140" b="1" dirty="0">
-                <a:solidFill>
-                  <a:srgbClr val="DEDEDE"/>
-                </a:solidFill>
-                <a:latin typeface="Arial" pitchFamily="34" charset="0"/>
-                <a:ea typeface="Arial" pitchFamily="34" charset="-122"/>
-                <a:cs typeface="Arial" pitchFamily="34" charset="-120"/>
-              </a:rPr>
-              <a:t>Deploy</a:t>
-            </a:r>
-            <a:endParaRPr lang="en-US" sz="1140" dirty="0"/>
-          </a:p>
-        </p:txBody>
-      </p:sp>
-      <p:sp>
-        <p:nvSpPr>
-          <p:cNvPr id="35" name="static:33:arrow"/>
-          <p:cNvSpPr/>
-          <p:nvPr/>
-        </p:nvSpPr>
-        <p:spPr>
-          <a:xfrm>
-            <a:off x="8421053" y="3376136"/>
-            <a:ext cx="160020" cy="0"/>
-          </a:xfrm>
-          <a:prstGeom prst="line">
-            <a:avLst/>
-          </a:prstGeom>
-          <a:noFill/>
-          <a:ln w="15240">
-            <a:solidFill>
-              <a:srgbClr val="B0B0B0"/>
-            </a:solidFill>
-            <a:prstDash val="solid"/>
-            <a:headEnd type="none"/>
-            <a:tailEnd type="triangle"/>
-          </a:ln>
-        </p:spPr>
-        <p:txBody>
-          <a:bodyPr/>
-          <a:lstStyle/>
-          <a:p>
-            <a:endParaRPr lang="en-US"/>
-          </a:p>
-        </p:txBody>
-      </p:sp>
-      <p:sp>
-        <p:nvSpPr>
-          <p:cNvPr id="36" name="static:34:shape"/>
-          <p:cNvSpPr/>
-          <p:nvPr/>
-        </p:nvSpPr>
-        <p:spPr>
-          <a:xfrm>
-            <a:off x="8642033" y="1768316"/>
-            <a:ext cx="2574608" cy="3002280"/>
-          </a:xfrm>
-          <a:prstGeom prst="roundRect">
-            <a:avLst>
-              <a:gd name="adj" fmla="val 4735"/>
-            </a:avLst>
-          </a:prstGeom>
-          <a:solidFill>
-            <a:srgbClr val="292929"/>
-          </a:solidFill>
-          <a:ln w="7620">
-            <a:solidFill>
-              <a:srgbClr val="474747"/>
-            </a:solidFill>
-            <a:prstDash val="solid"/>
-          </a:ln>
-        </p:spPr>
-        <p:txBody>
-          <a:bodyPr/>
-          <a:lstStyle/>
-          <a:p>
-            <a:endParaRPr lang="en-US"/>
-          </a:p>
-        </p:txBody>
-      </p:sp>
-      <p:sp>
-        <p:nvSpPr>
-          <p:cNvPr id="37" name="static:35:text"/>
-          <p:cNvSpPr/>
-          <p:nvPr/>
-        </p:nvSpPr>
-        <p:spPr>
-          <a:xfrm>
-            <a:off x="8802053" y="1920716"/>
-            <a:ext cx="1017270" cy="137160"/>
-          </a:xfrm>
-          <a:prstGeom prst="rect">
-            <a:avLst/>
-          </a:prstGeom>
-          <a:noFill/>
-          <a:ln/>
-        </p:spPr>
-        <p:txBody>
-          <a:bodyPr wrap="none" lIns="0" tIns="0" rIns="0" bIns="0" rtlCol="0" anchor="ctr"/>
-          <a:lstStyle/>
-          <a:p>
-            <a:pPr marL="0" indent="0" algn="l">
-              <a:buNone/>
-            </a:pPr>
-            <a:r>
-              <a:rPr lang="en-US" sz="780" b="1" kern="0" spc="62" dirty="0">
-                <a:solidFill>
-                  <a:srgbClr val="FBBF24"/>
-                </a:solidFill>
-                <a:latin typeface="Arial" pitchFamily="34" charset="0"/>
-                <a:ea typeface="Arial" pitchFamily="34" charset="-122"/>
-                <a:cs typeface="Arial" pitchFamily="34" charset="-120"/>
-              </a:rPr>
-              <a:t>IN PRODUCTION</a:t>
-            </a:r>
-            <a:endParaRPr lang="en-US" sz="780" dirty="0"/>
-          </a:p>
-        </p:txBody>
-      </p:sp>
-      <p:sp>
-        <p:nvSpPr>
-          <p:cNvPr id="38" name="static:36:text"/>
-          <p:cNvSpPr/>
-          <p:nvPr/>
-        </p:nvSpPr>
-        <p:spPr>
-          <a:xfrm>
-            <a:off x="8802053" y="2149316"/>
-            <a:ext cx="1368266" cy="266700"/>
-          </a:xfrm>
-          <a:prstGeom prst="rect">
-            <a:avLst/>
-          </a:prstGeom>
-          <a:noFill/>
-          <a:ln/>
-        </p:spPr>
-        <p:txBody>
-          <a:bodyPr wrap="none" lIns="0" tIns="0" rIns="0" bIns="0" rtlCol="0" anchor="ctr"/>
-          <a:lstStyle/>
-          <a:p>
-            <a:pPr marL="0" indent="0" algn="l">
-              <a:buNone/>
-            </a:pPr>
-            <a:r>
-              <a:rPr lang="en-US" sz="1680" b="1" dirty="0">
-                <a:solidFill>
-                  <a:srgbClr val="DEDEDE"/>
-                </a:solidFill>
-                <a:latin typeface="Arial" pitchFamily="34" charset="0"/>
-                <a:ea typeface="Arial" pitchFamily="34" charset="-122"/>
-                <a:cs typeface="Arial" pitchFamily="34" charset="-120"/>
-              </a:rPr>
-              <a:t>Agent traces</a:t>
-            </a:r>
-            <a:endParaRPr lang="en-US" sz="1680" dirty="0"/>
-          </a:p>
-        </p:txBody>
-      </p:sp>
-      <p:sp>
-        <p:nvSpPr>
-          <p:cNvPr id="39" name="static:37:text"/>
-          <p:cNvSpPr/>
-          <p:nvPr/>
-        </p:nvSpPr>
-        <p:spPr>
-          <a:xfrm>
-            <a:off x="8802053" y="2528768"/>
-            <a:ext cx="2279213" cy="182880"/>
-          </a:xfrm>
-          <a:prstGeom prst="rect">
-            <a:avLst/>
-          </a:prstGeom>
-          <a:noFill/>
-          <a:ln/>
-        </p:spPr>
-        <p:txBody>
-          <a:bodyPr wrap="none" lIns="0" tIns="0" rIns="0" bIns="0" rtlCol="0" anchor="ctr"/>
-          <a:lstStyle/>
-          <a:p>
-            <a:pPr marL="0" indent="0" algn="l">
-              <a:buNone/>
-            </a:pPr>
-            <a:r>
-              <a:rPr lang="en-US" sz="1140" dirty="0">
-                <a:solidFill>
-                  <a:srgbClr val="B0B0B0"/>
-                </a:solidFill>
-                <a:latin typeface="Arial" pitchFamily="34" charset="0"/>
-                <a:ea typeface="Arial" pitchFamily="34" charset="-122"/>
-                <a:cs typeface="Arial" pitchFamily="34" charset="-120"/>
-              </a:rPr>
-              <a:t>Check behaviour on real requests.</a:t>
-            </a:r>
-            <a:endParaRPr lang="en-US" sz="1140" dirty="0"/>
-          </a:p>
-        </p:txBody>
-      </p:sp>
-      <p:sp>
-        <p:nvSpPr>
-          <p:cNvPr id="40" name="static:38:shape"/>
-          <p:cNvSpPr/>
-          <p:nvPr/>
-        </p:nvSpPr>
-        <p:spPr>
-          <a:xfrm>
-            <a:off x="8802053" y="3655933"/>
-            <a:ext cx="2254568" cy="954643"/>
-          </a:xfrm>
-          <a:prstGeom prst="roundRect">
-            <a:avLst>
-              <a:gd name="adj" fmla="val 7982"/>
-            </a:avLst>
-          </a:prstGeom>
-          <a:solidFill>
-            <a:srgbClr val="2E2E2E"/>
-          </a:solidFill>
-          <a:ln w="7620">
-            <a:solidFill>
-              <a:srgbClr val="474747"/>
-            </a:solidFill>
-            <a:prstDash val="solid"/>
-          </a:ln>
-        </p:spPr>
-        <p:txBody>
-          <a:bodyPr/>
-          <a:lstStyle/>
-          <a:p>
-            <a:endParaRPr lang="en-US"/>
-          </a:p>
-        </p:txBody>
-      </p:sp>
-      <p:sp>
-        <p:nvSpPr>
-          <p:cNvPr id="41" name="static:39:text"/>
-          <p:cNvSpPr/>
-          <p:nvPr/>
-        </p:nvSpPr>
-        <p:spPr>
-          <a:xfrm>
-            <a:off x="8946833" y="3793093"/>
-            <a:ext cx="1312545" cy="213360"/>
-          </a:xfrm>
-          <a:prstGeom prst="rect">
-            <a:avLst/>
-          </a:prstGeom>
-          <a:noFill/>
-          <a:ln/>
-        </p:spPr>
-        <p:txBody>
-          <a:bodyPr wrap="none" lIns="0" tIns="0" rIns="0" bIns="0" rtlCol="0" anchor="ctr"/>
-          <a:lstStyle/>
-          <a:p>
-            <a:pPr marL="0" indent="0" algn="l">
-              <a:buNone/>
-            </a:pPr>
-            <a:r>
-              <a:rPr lang="en-US" sz="1320" b="1" dirty="0">
-                <a:solidFill>
-                  <a:srgbClr val="FBBF24"/>
-                </a:solidFill>
-                <a:latin typeface="Arial" pitchFamily="34" charset="0"/>
-                <a:ea typeface="Arial" pitchFamily="34" charset="-122"/>
-                <a:cs typeface="Arial" pitchFamily="34" charset="-120"/>
-              </a:rPr>
-              <a:t>Evaluate &amp; alert</a:t>
-            </a:r>
-            <a:endParaRPr lang="en-US" sz="1320" dirty="0"/>
-          </a:p>
-        </p:txBody>
-      </p:sp>
-      <p:sp>
-        <p:nvSpPr>
-          <p:cNvPr id="42" name="static:40:text"/>
-          <p:cNvSpPr/>
-          <p:nvPr/>
-        </p:nvSpPr>
-        <p:spPr>
-          <a:xfrm>
-            <a:off x="8946833" y="4075033"/>
-            <a:ext cx="1580436" cy="182880"/>
-          </a:xfrm>
-          <a:prstGeom prst="rect">
-            <a:avLst/>
-          </a:prstGeom>
-          <a:noFill/>
-          <a:ln/>
-        </p:spPr>
-        <p:txBody>
-          <a:bodyPr wrap="none" lIns="0" tIns="0" rIns="0" bIns="0" rtlCol="0" anchor="ctr"/>
-          <a:lstStyle/>
-          <a:p>
-            <a:pPr marL="0" indent="0" algn="l">
-              <a:buNone/>
-            </a:pPr>
-            <a:r>
-              <a:rPr lang="en-US" sz="1140" dirty="0">
-                <a:solidFill>
-                  <a:srgbClr val="B0B0B0"/>
-                </a:solidFill>
-                <a:latin typeface="Arial" pitchFamily="34" charset="0"/>
-                <a:ea typeface="Arial" pitchFamily="34" charset="-122"/>
-                <a:cs typeface="Arial" pitchFamily="34" charset="-120"/>
-              </a:rPr>
-              <a:t>Sample traces. Monitor</a:t>
-            </a:r>
-            <a:endParaRPr lang="en-US" sz="1140" dirty="0"/>
-          </a:p>
-        </p:txBody>
-      </p:sp>
-      <p:sp>
-        <p:nvSpPr>
-          <p:cNvPr id="43" name="static:41:text"/>
-          <p:cNvSpPr/>
-          <p:nvPr/>
-        </p:nvSpPr>
-        <p:spPr>
-          <a:xfrm>
-            <a:off x="8946833" y="4270415"/>
-            <a:ext cx="1677948" cy="182880"/>
-          </a:xfrm>
-          <a:prstGeom prst="rect">
-            <a:avLst/>
-          </a:prstGeom>
-          <a:noFill/>
-          <a:ln/>
-        </p:spPr>
-        <p:txBody>
-          <a:bodyPr wrap="none" lIns="0" tIns="0" rIns="0" bIns="0" rtlCol="0" anchor="ctr"/>
-          <a:lstStyle/>
-          <a:p>
-            <a:pPr marL="0" indent="0" algn="l">
-              <a:buNone/>
-            </a:pPr>
-            <a:r>
-              <a:rPr lang="en-US" sz="1140" dirty="0">
-                <a:solidFill>
-                  <a:srgbClr val="B0B0B0"/>
-                </a:solidFill>
-                <a:latin typeface="Arial" pitchFamily="34" charset="0"/>
-                <a:ea typeface="Arial" pitchFamily="34" charset="-122"/>
-                <a:cs typeface="Arial" pitchFamily="34" charset="-120"/>
-              </a:rPr>
-              <a:t>quality, latency and cost.</a:t>
-            </a:r>
-            <a:endParaRPr lang="en-US" sz="1140" dirty="0"/>
-          </a:p>
-        </p:txBody>
-      </p:sp>
-      <p:sp>
-        <p:nvSpPr>
-          <p:cNvPr id="44" name="static:42:shape"/>
-          <p:cNvSpPr/>
-          <p:nvPr/>
-        </p:nvSpPr>
-        <p:spPr>
-          <a:xfrm>
-            <a:off x="8642033" y="5014436"/>
-            <a:ext cx="2574608" cy="624840"/>
-          </a:xfrm>
-          <a:prstGeom prst="roundRect">
-            <a:avLst>
-              <a:gd name="adj" fmla="val 12195"/>
-            </a:avLst>
-          </a:prstGeom>
-          <a:solidFill>
-            <a:srgbClr val="292929"/>
-          </a:solidFill>
-          <a:ln w="7620">
-            <a:solidFill>
-              <a:srgbClr val="FD8EA1"/>
-            </a:solidFill>
-            <a:prstDash val="solid"/>
-          </a:ln>
-        </p:spPr>
-        <p:txBody>
-          <a:bodyPr/>
-          <a:lstStyle/>
-          <a:p>
-            <a:endParaRPr lang="en-US"/>
-          </a:p>
-        </p:txBody>
-      </p:sp>
-      <p:sp>
-        <p:nvSpPr>
-          <p:cNvPr id="45" name="static:43:text"/>
-          <p:cNvSpPr/>
-          <p:nvPr/>
-        </p:nvSpPr>
-        <p:spPr>
-          <a:xfrm>
-            <a:off x="8802053" y="5140166"/>
-            <a:ext cx="738426" cy="190500"/>
-          </a:xfrm>
-          <a:prstGeom prst="rect">
-            <a:avLst/>
-          </a:prstGeom>
-          <a:noFill/>
-          <a:ln/>
-        </p:spPr>
-        <p:txBody>
-          <a:bodyPr wrap="none" lIns="0" tIns="0" rIns="0" bIns="0" rtlCol="0" anchor="ctr"/>
-          <a:lstStyle/>
-          <a:p>
-            <a:pPr marL="0" indent="0" algn="l">
-              <a:buNone/>
-            </a:pPr>
-            <a:r>
-              <a:rPr lang="en-US" sz="1200" b="1" dirty="0">
-                <a:solidFill>
-                  <a:srgbClr val="FD8EA1"/>
-                </a:solidFill>
-                <a:latin typeface="Arial" pitchFamily="34" charset="0"/>
-                <a:ea typeface="Arial" pitchFamily="34" charset="-122"/>
-                <a:cs typeface="Arial" pitchFamily="34" charset="-120"/>
-              </a:rPr>
-              <a:t>Optimise</a:t>
-            </a:r>
-            <a:endParaRPr lang="en-US" sz="1200" dirty="0"/>
-          </a:p>
-        </p:txBody>
-      </p:sp>
-      <p:sp>
-        <p:nvSpPr>
-          <p:cNvPr id="46" name="static:44:text"/>
-          <p:cNvSpPr/>
-          <p:nvPr/>
-        </p:nvSpPr>
-        <p:spPr>
-          <a:xfrm>
-            <a:off x="8802053" y="5361146"/>
-            <a:ext cx="1234916" cy="152400"/>
-          </a:xfrm>
-          <a:prstGeom prst="rect">
-            <a:avLst/>
-          </a:prstGeom>
-          <a:noFill/>
-          <a:ln/>
-        </p:spPr>
-        <p:txBody>
-          <a:bodyPr wrap="none" lIns="0" tIns="0" rIns="0" bIns="0" rtlCol="0" anchor="ctr"/>
-          <a:lstStyle/>
-          <a:p>
-            <a:pPr marL="0" indent="0" algn="l">
-              <a:buNone/>
-            </a:pPr>
-            <a:r>
-              <a:rPr lang="en-US" sz="960" dirty="0">
-                <a:solidFill>
-                  <a:srgbClr val="B0B0B0"/>
-                </a:solidFill>
-                <a:latin typeface="Arial" pitchFamily="34" charset="0"/>
-                <a:ea typeface="Arial" pitchFamily="34" charset="-122"/>
-                <a:cs typeface="Arial" pitchFamily="34" charset="-120"/>
-              </a:rPr>
-              <a:t>Compare candidates</a:t>
-            </a:r>
-            <a:endParaRPr lang="en-US" sz="960" dirty="0"/>
-          </a:p>
-        </p:txBody>
-      </p:sp>
-      <p:sp>
-        <p:nvSpPr>
-          <p:cNvPr id="47" name="static:45:path:segment-0"/>
-          <p:cNvSpPr/>
-          <p:nvPr/>
-        </p:nvSpPr>
-        <p:spPr>
-          <a:xfrm>
-            <a:off x="9928860" y="4768883"/>
-            <a:ext cx="0" cy="229051"/>
-          </a:xfrm>
-          <a:prstGeom prst="line">
-            <a:avLst/>
-          </a:prstGeom>
-          <a:noFill/>
-          <a:ln w="15240">
-            <a:solidFill>
-              <a:srgbClr val="FD8EA1"/>
-            </a:solidFill>
-            <a:prstDash val="solid"/>
-            <a:headEnd type="none"/>
-            <a:tailEnd type="triangle"/>
-          </a:ln>
-        </p:spPr>
-        <p:txBody>
-          <a:bodyPr/>
-          <a:lstStyle/>
-          <a:p>
-            <a:endParaRPr lang="en-US"/>
-          </a:p>
-        </p:txBody>
-      </p:sp>
-      <p:sp>
-        <p:nvSpPr>
-          <p:cNvPr id="48" name="static:46:path:segment-0"/>
-          <p:cNvSpPr/>
-          <p:nvPr/>
-        </p:nvSpPr>
-        <p:spPr>
-          <a:xfrm flipH="1">
-            <a:off x="6096000" y="5326240"/>
-            <a:ext cx="2545080" cy="0"/>
-          </a:xfrm>
-          <a:prstGeom prst="line">
-            <a:avLst/>
-          </a:prstGeom>
-          <a:noFill/>
-          <a:ln w="15240">
-            <a:solidFill>
-              <a:srgbClr val="FD8EA1"/>
-            </a:solidFill>
-            <a:prstDash val="solid"/>
-            <a:headEnd type="none"/>
-            <a:tailEnd type="none"/>
-          </a:ln>
-        </p:spPr>
-        <p:txBody>
-          <a:bodyPr/>
-          <a:lstStyle/>
-          <a:p>
-            <a:endParaRPr lang="en-US"/>
-          </a:p>
-        </p:txBody>
-      </p:sp>
-      <p:sp>
-        <p:nvSpPr>
-          <p:cNvPr id="49" name="static:46:path:segment-1"/>
-          <p:cNvSpPr/>
-          <p:nvPr/>
-        </p:nvSpPr>
-        <p:spPr>
-          <a:xfrm flipV="1">
-            <a:off x="6096000" y="4768883"/>
-            <a:ext cx="0" cy="557357"/>
-          </a:xfrm>
-          <a:prstGeom prst="line">
-            <a:avLst/>
-          </a:prstGeom>
-          <a:noFill/>
-          <a:ln w="15240">
-            <a:solidFill>
-              <a:srgbClr val="FD8EA1"/>
-            </a:solidFill>
-            <a:prstDash val="solid"/>
-            <a:headEnd type="none"/>
-            <a:tailEnd type="triangle"/>
-          </a:ln>
-        </p:spPr>
-        <p:txBody>
-          <a:bodyPr/>
-          <a:lstStyle/>
-          <a:p>
-            <a:endParaRPr lang="en-US"/>
-          </a:p>
-        </p:txBody>
-      </p:sp>
+            <a:ln w="12700">
+              <a:solidFill>
+                <a:srgbClr val="333333">
+                  <a:alpha val="0"/>
+                </a:srgbClr>
+              </a:solidFill>
+              <a:prstDash val="solid"/>
+            </a:ln>
+          </p:spPr>
+          <p:txBody>
+            <a:bodyPr/>
+            <a:lstStyle/>
+            <a:p>
+              <a:endParaRPr lang="en-US"/>
+            </a:p>
+          </p:txBody>
+        </p:sp>
+        <p:sp>
+          <p:nvSpPr>
+            <p:cNvPr id="81" name="reveal-1:9:text"/>
+            <p:cNvSpPr/>
+            <p:nvPr/>
+          </p:nvSpPr>
+          <p:spPr>
+            <a:xfrm>
+              <a:off x="8033862" y="3732004"/>
+              <a:ext cx="2595801" cy="508640"/>
+            </a:xfrm>
+            <a:prstGeom prst="rect">
+              <a:avLst/>
+            </a:prstGeom>
+            <a:noFill/>
+            <a:ln/>
+          </p:spPr>
+          <p:txBody>
+            <a:bodyPr wrap="square" lIns="0" tIns="0" rIns="0" bIns="0" rtlCol="0" anchor="t"/>
+            <a:lstStyle/>
+            <a:p>
+              <a:pPr marL="0" indent="0" algn="l">
+                <a:buNone/>
+              </a:pPr>
+              <a:r>
+                <a:rPr lang="en-US" sz="900" b="1" dirty="0">
+                  <a:solidFill>
+                    <a:srgbClr val="DEDEDE"/>
+                  </a:solidFill>
+                  <a:latin typeface="Arial" pitchFamily="34" charset="0"/>
+                  <a:ea typeface="Arial" pitchFamily="34" charset="-122"/>
+                  <a:cs typeface="Arial" pitchFamily="34" charset="-120"/>
+                </a:rPr>
+                <a:t>Every production failure becomes a test.</a:t>
+              </a:r>
+              <a:endParaRPr lang="en-US" sz="900" dirty="0"/>
+            </a:p>
+          </p:txBody>
+        </p:sp>
+      </p:grpSp>
       <p:sp>
         <p:nvSpPr>
           <p:cNvPr id="50" name="static:47:text"/>
@@ -10361,7 +9954,7 @@
                 <a:ea typeface="Arial" pitchFamily="34" charset="-122"/>
                 <a:cs typeface="Arial" pitchFamily="34" charset="-120"/>
               </a:rPr>
-              <a:t>AI GENIUS / S6 E2 / 16</a:t>
+              <a:t>AI GENIUS / S6 E2 / 17</a:t>
             </a:r>
             <a:endParaRPr lang="en-US" sz="720" dirty="0"/>
           </a:p>
@@ -10372,6 +9965,171 @@
   <p:clrMapOvr>
     <a:masterClrMapping/>
   </p:clrMapOvr>
+  <p:timing>
+    <p:tnLst>
+      <p:par>
+        <p:cTn id="1" dur="indefinite" restart="never" nodeType="tmRoot">
+          <p:childTnLst>
+            <p:seq concurrent="1" nextAc="seek">
+              <p:cTn id="2" dur="indefinite" nodeType="mainSeq">
+                <p:childTnLst>
+                  <p:par>
+                    <p:cTn id="3" fill="hold">
+                      <p:stCondLst>
+                        <p:cond delay="indefinite"/>
+                      </p:stCondLst>
+                      <p:childTnLst>
+                        <p:par>
+                          <p:cTn id="4" fill="hold">
+                            <p:stCondLst>
+                              <p:cond delay="0"/>
+                            </p:stCondLst>
+                            <p:childTnLst>
+                              <p:par>
+                                <p:cTn id="5" presetID="1" presetClass="entr" presetSubtype="0" fill="hold" nodeType="clickEffect">
+                                  <p:stCondLst>
+                                    <p:cond delay="0"/>
+                                  </p:stCondLst>
+                                  <p:childTnLst>
+                                    <p:set>
+                                      <p:cBhvr>
+                                        <p:cTn id="6" dur="1" fill="hold">
+                                          <p:stCondLst>
+                                            <p:cond delay="0"/>
+                                          </p:stCondLst>
+                                        </p:cTn>
+                                        <p:tgtEl>
+                                          <p:spTgt spid="52"/>
+                                        </p:tgtEl>
+                                        <p:attrNameLst>
+                                          <p:attrName>style.visibility</p:attrName>
+                                        </p:attrNameLst>
+                                      </p:cBhvr>
+                                      <p:to>
+                                        <p:strVal val="visible"/>
+                                      </p:to>
+                                    </p:set>
+                                  </p:childTnLst>
+                                </p:cTn>
+                              </p:par>
+                            </p:childTnLst>
+                          </p:cTn>
+                        </p:par>
+                      </p:childTnLst>
+                    </p:cTn>
+                  </p:par>
+                  <p:par>
+                    <p:cTn id="7" fill="hold">
+                      <p:stCondLst>
+                        <p:cond delay="indefinite"/>
+                      </p:stCondLst>
+                      <p:childTnLst>
+                        <p:par>
+                          <p:cTn id="8" fill="hold">
+                            <p:stCondLst>
+                              <p:cond delay="0"/>
+                            </p:stCondLst>
+                            <p:childTnLst>
+                              <p:par>
+                                <p:cTn id="9" presetID="1" presetClass="entr" presetSubtype="0" fill="hold" nodeType="clickEffect">
+                                  <p:stCondLst>
+                                    <p:cond delay="0"/>
+                                  </p:stCondLst>
+                                  <p:childTnLst>
+                                    <p:set>
+                                      <p:cBhvr>
+                                        <p:cTn id="10" dur="1" fill="hold">
+                                          <p:stCondLst>
+                                            <p:cond delay="0"/>
+                                          </p:stCondLst>
+                                        </p:cTn>
+                                        <p:tgtEl>
+                                          <p:spTgt spid="62"/>
+                                        </p:tgtEl>
+                                        <p:attrNameLst>
+                                          <p:attrName>style.visibility</p:attrName>
+                                        </p:attrNameLst>
+                                      </p:cBhvr>
+                                      <p:to>
+                                        <p:strVal val="visible"/>
+                                      </p:to>
+                                    </p:set>
+                                  </p:childTnLst>
+                                </p:cTn>
+                              </p:par>
+                            </p:childTnLst>
+                          </p:cTn>
+                        </p:par>
+                      </p:childTnLst>
+                    </p:cTn>
+                  </p:par>
+                  <p:par>
+                    <p:cTn id="11" fill="hold">
+                      <p:stCondLst>
+                        <p:cond delay="indefinite"/>
+                      </p:stCondLst>
+                      <p:childTnLst>
+                        <p:par>
+                          <p:cTn id="12" fill="hold">
+                            <p:stCondLst>
+                              <p:cond delay="0"/>
+                            </p:stCondLst>
+                            <p:childTnLst>
+                              <p:par>
+                                <p:cTn id="13" presetID="1" presetClass="entr" presetSubtype="0" fill="hold" nodeType="clickEffect">
+                                  <p:stCondLst>
+                                    <p:cond delay="0"/>
+                                  </p:stCondLst>
+                                  <p:childTnLst>
+                                    <p:set>
+                                      <p:cBhvr>
+                                        <p:cTn id="14" dur="1" fill="hold">
+                                          <p:stCondLst>
+                                            <p:cond delay="0"/>
+                                          </p:stCondLst>
+                                        </p:cTn>
+                                        <p:tgtEl>
+                                          <p:spTgt spid="72"/>
+                                        </p:tgtEl>
+                                        <p:attrNameLst>
+                                          <p:attrName>style.visibility</p:attrName>
+                                        </p:attrNameLst>
+                                      </p:cBhvr>
+                                      <p:to>
+                                        <p:strVal val="visible"/>
+                                      </p:to>
+                                    </p:set>
+                                  </p:childTnLst>
+                                </p:cTn>
+                              </p:par>
+                            </p:childTnLst>
+                          </p:cTn>
+                        </p:par>
+                      </p:childTnLst>
+                    </p:cTn>
+                  </p:par>
+                </p:childTnLst>
+              </p:cTn>
+              <p:prevCondLst>
+                <p:cond evt="onPrev" delay="0">
+                  <p:tgtEl>
+                    <p:sldTgt/>
+                  </p:tgtEl>
+                </p:cond>
+              </p:prevCondLst>
+              <p:nextCondLst>
+                <p:cond evt="onNext" delay="0">
+                  <p:tgtEl>
+                    <p:sldTgt/>
+                  </p:tgtEl>
+                </p:cond>
+              </p:nextCondLst>
+            </p:seq>
+          </p:childTnLst>
+        </p:cTn>
+      </p:par>
+    </p:tnLst>
+  </p:timing>
 </p:sld>
 </file>
 
@@ -11244,7 +11002,7 @@
                 <a:ea typeface="Arial" pitchFamily="34" charset="-122"/>
                 <a:cs typeface="Arial" pitchFamily="34" charset="-120"/>
               </a:rPr>
-              <a:t>AI GENIUS / S6 E2 / 17</a:t>
+              <a:t>AI GENIUS / S6 E2 / 18</a:t>
             </a:r>
             <a:endParaRPr lang="en-US" sz="720" dirty="0"/>
           </a:p>
@@ -11503,7 +11261,7 @@
                 <a:ea typeface="Arial" pitchFamily="34" charset="-122"/>
                 <a:cs typeface="Arial" pitchFamily="34" charset="-120"/>
               </a:rPr>
-              <a:t>AI GENIUS / S6 E2 / 18</a:t>
+              <a:t>AI GENIUS / S6 E2 / 19</a:t>
             </a:r>
             <a:endParaRPr lang="en-US" sz="720" dirty="0"/>
           </a:p>
@@ -11514,6 +11272,1634 @@
   <p:clrMapOvr>
     <a:masterClrMapping/>
   </p:clrMapOvr>
+</p:sld>
+</file>
+
+<file path=ppt/slides/slide19.xml><?xml version="1.0" encoding="utf-8"?>
+<p:sld xmlns:a="http://schemas.openxmlformats.org/drawingml/2006/main" xmlns:p="http://schemas.openxmlformats.org/presentationml/2006/main" xmlns:r="http://schemas.openxmlformats.org/officeDocument/2006/relationships">
+  <p:cSld>
+    <p:spTree>
+      <p:nvGrpSpPr>
+        <p:cNvPr id="1" name=""/>
+        <p:cNvGrpSpPr/>
+        <p:nvPr/>
+      </p:nvGrpSpPr>
+      <p:grpSpPr/>
+      <p:sp>
+        <p:nvSpPr>
+          <p:cNvPr id="2" name="static:0:text"/>
+          <p:cNvSpPr/>
+          <p:nvPr/>
+        </p:nvSpPr>
+        <p:spPr>
+          <a:xfrm>
+            <a:off x="2727960" y="870109"/>
+            <a:ext cx="2995255" cy="152400"/>
+          </a:xfrm>
+          <a:prstGeom prst="rect">
+            <a:avLst/>
+          </a:prstGeom>
+          <a:noFill/>
+          <a:ln/>
+        </p:spPr>
+        <p:txBody>
+          <a:bodyPr wrap="none" lIns="0" tIns="0" rIns="0" bIns="0" rtlCol="0" anchor="ctr"/>
+          <a:lstStyle/>
+          <a:p>
+            <a:pPr marL="0" indent="0" algn="l">
+              <a:buNone/>
+            </a:pPr>
+            <a:r>
+              <a:rPr lang="en-US" sz="960" b="1" kern="0" spc="154" dirty="0">
+                <a:solidFill>
+                  <a:srgbClr val="4DA6FF"/>
+                </a:solidFill>
+                <a:latin typeface="Arial" pitchFamily="34" charset="0"/>
+                <a:ea typeface="Arial" pitchFamily="34" charset="-122"/>
+                <a:cs typeface="Arial" pitchFamily="34" charset="-120"/>
+              </a:rPr>
+              <a:t>RELEASE GATES FOR AGENTS</a:t>
+            </a:r>
+            <a:endParaRPr lang="en-US" sz="960" dirty="0"/>
+          </a:p>
+        </p:txBody>
+      </p:sp>
+      <p:sp>
+        <p:nvSpPr>
+          <p:cNvPr id="3" name="static:1:text"/>
+          <p:cNvSpPr/>
+          <p:nvPr/>
+        </p:nvSpPr>
+        <p:spPr>
+          <a:xfrm>
+            <a:off x="975360" y="1068229"/>
+            <a:ext cx="6000000" cy="411480"/>
+          </a:xfrm>
+          <a:prstGeom prst="rect">
+            <a:avLst/>
+          </a:prstGeom>
+          <a:noFill/>
+          <a:ln/>
+        </p:spPr>
+        <p:txBody>
+          <a:bodyPr wrap="none" lIns="0" tIns="0" rIns="0" bIns="0" rtlCol="0" anchor="ctr"/>
+          <a:lstStyle/>
+          <a:p>
+            <a:pPr marL="0" indent="0" algn="l">
+              <a:buNone/>
+            </a:pPr>
+            <a:r>
+              <a:rPr lang="en-US" sz="2640" b="1" kern="0" spc="-92" dirty="0">
+                <a:solidFill>
+                  <a:srgbClr val="DEDEDE"/>
+                </a:solidFill>
+                <a:latin typeface="Arial" pitchFamily="34" charset="0"/>
+                <a:ea typeface="Arial" pitchFamily="34" charset="-122"/>
+                <a:cs typeface="Arial" pitchFamily="34" charset="-120"/>
+              </a:rPr>
+              <a:t>What the gate checks</a:t>
+            </a:r>
+            <a:endParaRPr lang="en-US" sz="2640" dirty="0"/>
+          </a:p>
+        </p:txBody>
+      </p:sp>
+      <p:grpSp>
+        <p:nvGrpSpPr>
+          <p:cNvPr id="35" name="Reveal 1"/>
+          <p:cNvGrpSpPr/>
+          <p:nvPr/>
+        </p:nvGrpSpPr>
+        <p:grpSpPr>
+          <a:xfrm>
+            <a:off x="975360" y="1868329"/>
+            <a:ext cx="2377160" cy="3791902"/>
+            <a:chOff x="975360" y="1868329"/>
+            <a:chExt cx="2377160" cy="3791902"/>
+          </a:xfrm>
+        </p:grpSpPr>
+        <p:sp>
+          <p:nvSpPr>
+            <p:cNvPr id="4" name="reveal-1:2:shape"/>
+            <p:cNvSpPr/>
+            <p:nvPr/>
+          </p:nvSpPr>
+          <p:spPr>
+            <a:xfrm>
+              <a:off x="975360" y="1868329"/>
+              <a:ext cx="2377160" cy="3791902"/>
+            </a:xfrm>
+            <a:prstGeom prst="roundRect">
+              <a:avLst>
+                <a:gd name="adj" fmla="val 3786"/>
+              </a:avLst>
+            </a:prstGeom>
+            <a:solidFill>
+              <a:srgbClr val="292929"/>
+            </a:solidFill>
+            <a:ln w="7620">
+              <a:solidFill>
+                <a:srgbClr val="474747"/>
+              </a:solidFill>
+              <a:prstDash val="solid"/>
+            </a:ln>
+          </p:spPr>
+          <p:txBody>
+            <a:bodyPr/>
+            <a:lstStyle/>
+            <a:p>
+              <a:endParaRPr lang="en-US"/>
+            </a:p>
+          </p:txBody>
+        </p:sp>
+        <p:sp>
+          <p:nvSpPr>
+            <p:cNvPr id="5" name="reveal-1:2:shape:border-0"/>
+            <p:cNvSpPr/>
+            <p:nvPr/>
+          </p:nvSpPr>
+          <p:spPr>
+            <a:xfrm>
+              <a:off x="1066800" y="1883569"/>
+              <a:ext cx="2194280" cy="0"/>
+            </a:xfrm>
+            <a:prstGeom prst="line">
+              <a:avLst/>
+            </a:prstGeom>
+            <a:noFill/>
+            <a:ln w="30480">
+              <a:solidFill>
+                <a:srgbClr val="4DA6FF"/>
+              </a:solidFill>
+              <a:prstDash val="solid"/>
+              <a:headEnd type="none"/>
+              <a:tailEnd type="none"/>
+            </a:ln>
+          </p:spPr>
+          <p:txBody>
+            <a:bodyPr/>
+            <a:lstStyle/>
+            <a:p>
+              <a:endParaRPr lang="en-US"/>
+            </a:p>
+          </p:txBody>
+        </p:sp>
+        <p:sp>
+          <p:nvSpPr>
+            <p:cNvPr id="6" name="reveal-1:3:shape"/>
+            <p:cNvSpPr/>
+            <p:nvPr/>
+          </p:nvSpPr>
+          <p:spPr>
+            <a:xfrm>
+              <a:off x="1181100" y="2096929"/>
+              <a:ext cx="411480" cy="411480"/>
+            </a:xfrm>
+            <a:prstGeom prst="roundRect">
+              <a:avLst>
+                <a:gd name="adj" fmla="val 25926"/>
+              </a:avLst>
+            </a:prstGeom>
+            <a:solidFill>
+              <a:srgbClr val="000000">
+                <a:alpha val="0"/>
+              </a:srgbClr>
+            </a:solidFill>
+            <a:ln w="15240">
+              <a:solidFill>
+                <a:srgbClr val="4DA6FF"/>
+              </a:solidFill>
+              <a:prstDash val="solid"/>
+            </a:ln>
+          </p:spPr>
+          <p:txBody>
+            <a:bodyPr/>
+            <a:lstStyle/>
+            <a:p>
+              <a:endParaRPr lang="en-US"/>
+            </a:p>
+          </p:txBody>
+        </p:sp>
+        <p:sp>
+          <p:nvSpPr>
+            <p:cNvPr id="7" name="reveal-1:4:text"/>
+            <p:cNvSpPr/>
+            <p:nvPr/>
+          </p:nvSpPr>
+          <p:spPr>
+            <a:xfrm>
+              <a:off x="1181100" y="2207419"/>
+              <a:ext cx="411480" cy="190500"/>
+            </a:xfrm>
+            <a:prstGeom prst="rect">
+              <a:avLst/>
+            </a:prstGeom>
+            <a:noFill/>
+            <a:ln/>
+          </p:spPr>
+          <p:txBody>
+            <a:bodyPr wrap="square" lIns="0" tIns="0" rIns="0" bIns="0" rtlCol="0" anchor="ctr"/>
+            <a:lstStyle/>
+            <a:p>
+              <a:pPr marL="0" indent="0" algn="ctr">
+                <a:buNone/>
+              </a:pPr>
+              <a:r>
+                <a:rPr lang="en-US" sz="1200" b="1" kern="0" spc="-24" dirty="0">
+                  <a:solidFill>
+                    <a:srgbClr val="4DA6FF"/>
+                  </a:solidFill>
+                  <a:latin typeface="Arial" pitchFamily="34" charset="0"/>
+                  <a:ea typeface="Arial" pitchFamily="34" charset="-122"/>
+                  <a:cs typeface="Arial" pitchFamily="34" charset="-120"/>
+                </a:rPr>
+                <a:t>1</a:t>
+              </a:r>
+              <a:endParaRPr lang="en-US" sz="1200" dirty="0"/>
+            </a:p>
+          </p:txBody>
+        </p:sp>
+        <p:sp>
+          <p:nvSpPr>
+            <p:cNvPr id="8" name="reveal-1:5:text"/>
+            <p:cNvSpPr/>
+            <p:nvPr/>
+          </p:nvSpPr>
+          <p:spPr>
+            <a:xfrm>
+              <a:off x="1181100" y="2698909"/>
+              <a:ext cx="1965680" cy="266700"/>
+            </a:xfrm>
+            <a:prstGeom prst="rect">
+              <a:avLst/>
+            </a:prstGeom>
+            <a:noFill/>
+            <a:ln/>
+          </p:spPr>
+          <p:txBody>
+            <a:bodyPr wrap="square" lIns="0" tIns="0" rIns="0" bIns="0" rtlCol="0" anchor="ctr"/>
+            <a:lstStyle/>
+            <a:p>
+              <a:pPr marL="0" indent="0" algn="l">
+                <a:buNone/>
+              </a:pPr>
+              <a:r>
+                <a:rPr lang="en-US" sz="1440" b="1" dirty="0">
+                  <a:solidFill>
+                    <a:srgbClr val="4DA6FF"/>
+                  </a:solidFill>
+                  <a:latin typeface="Arial" pitchFamily="34" charset="0"/>
+                  <a:ea typeface="Arial" pitchFamily="34" charset="-122"/>
+                  <a:cs typeface="Arial" pitchFamily="34" charset="-120"/>
+                </a:rPr>
+                <a:t>Facts in the prompt</a:t>
+              </a:r>
+              <a:endParaRPr lang="en-US" sz="1440" dirty="0"/>
+            </a:p>
+          </p:txBody>
+        </p:sp>
+        <p:sp>
+          <p:nvSpPr>
+            <p:cNvPr id="9" name="reveal-1:6:text"/>
+            <p:cNvSpPr/>
+            <p:nvPr/>
+          </p:nvSpPr>
+          <p:spPr>
+            <a:xfrm>
+              <a:off x="1181100" y="3047881"/>
+              <a:ext cx="1965680" cy="764123"/>
+            </a:xfrm>
+            <a:prstGeom prst="rect">
+              <a:avLst/>
+            </a:prstGeom>
+            <a:noFill/>
+            <a:ln/>
+          </p:spPr>
+          <p:txBody>
+            <a:bodyPr wrap="square" lIns="0" tIns="0" rIns="0" bIns="0" rtlCol="0" anchor="t"/>
+            <a:lstStyle/>
+            <a:p>
+              <a:pPr marL="0" indent="0" algn="l">
+                <a:buNone/>
+              </a:pPr>
+              <a:r>
+                <a:rPr lang="en-US" sz="1140" dirty="0">
+                  <a:solidFill>
+                    <a:srgbClr val="B0B0B0"/>
+                  </a:solidFill>
+                  <a:latin typeface="Arial" pitchFamily="34" charset="0"/>
+                  <a:ea typeface="Arial" pitchFamily="34" charset="-122"/>
+                  <a:cs typeface="Arial" pitchFamily="34" charset="-120"/>
+                </a:rPr>
+                <a:t>Did the candidate copy amounts, dates or names into its instructions?</a:t>
+              </a:r>
+              <a:endParaRPr lang="en-US" sz="1140" dirty="0"/>
+            </a:p>
+          </p:txBody>
+        </p:sp>
+        <p:sp>
+          <p:nvSpPr>
+            <p:cNvPr id="11" name="reveal-1:8:shape"/>
+            <p:cNvSpPr/>
+            <p:nvPr/>
+          </p:nvSpPr>
+          <p:spPr>
+            <a:xfrm>
+              <a:off x="1181100" y="3852004"/>
+              <a:ext cx="1965680" cy="788640"/>
+            </a:xfrm>
+            <a:prstGeom prst="roundRect">
+              <a:avLst>
+                <a:gd name="adj" fmla="val 13889"/>
+              </a:avLst>
+            </a:prstGeom>
+            <a:solidFill>
+              <a:srgbClr val="FFFFFF">
+                <a:alpha val="3000"/>
+              </a:srgbClr>
+            </a:solidFill>
+            <a:ln w="12700">
+              <a:solidFill>
+                <a:srgbClr val="333333">
+                  <a:alpha val="0"/>
+                </a:srgbClr>
+              </a:solidFill>
+              <a:prstDash val="solid"/>
+            </a:ln>
+          </p:spPr>
+          <p:txBody>
+            <a:bodyPr/>
+            <a:lstStyle/>
+            <a:p>
+              <a:endParaRPr lang="en-US"/>
+            </a:p>
+          </p:txBody>
+        </p:sp>
+        <p:sp>
+          <p:nvSpPr>
+            <p:cNvPr id="12" name="reveal-1:9:text"/>
+            <p:cNvSpPr/>
+            <p:nvPr/>
+          </p:nvSpPr>
+          <p:spPr>
+            <a:xfrm>
+              <a:off x="1287780" y="3932004"/>
+              <a:ext cx="1752320" cy="628640"/>
+            </a:xfrm>
+            <a:prstGeom prst="rect">
+              <a:avLst/>
+            </a:prstGeom>
+            <a:noFill/>
+            <a:ln/>
+          </p:spPr>
+          <p:txBody>
+            <a:bodyPr wrap="square" lIns="0" tIns="0" rIns="0" bIns="0" rtlCol="0" anchor="t"/>
+            <a:lstStyle/>
+            <a:p>
+              <a:pPr marL="0" indent="0" algn="l">
+                <a:buNone/>
+              </a:pPr>
+              <a:r>
+                <a:rPr lang="en-US" sz="900" b="1" dirty="0">
+                  <a:solidFill>
+                    <a:srgbClr val="DEDEDE"/>
+                  </a:solidFill>
+                  <a:latin typeface="Arial" pitchFamily="34" charset="0"/>
+                  <a:ea typeface="Arial" pitchFamily="34" charset="-122"/>
+                  <a:cs typeface="Arial" pitchFamily="34" charset="-120"/>
+                </a:rPr>
+                <a:t>Seconds. No LLM needed.</a:t>
+              </a:r>
+              <a:endParaRPr lang="en-US" sz="900" dirty="0"/>
+            </a:p>
+          </p:txBody>
+        </p:sp>
+      </p:grpSp>
+      <p:grpSp>
+        <p:nvGrpSpPr>
+          <p:cNvPr id="36" name="Reveal 2"/>
+          <p:cNvGrpSpPr/>
+          <p:nvPr/>
+        </p:nvGrpSpPr>
+        <p:grpSpPr>
+          <a:xfrm>
+            <a:off x="3504920" y="1868329"/>
+            <a:ext cx="2377160" cy="3791902"/>
+            <a:chOff x="3504920" y="1868329"/>
+            <a:chExt cx="2377160" cy="3791902"/>
+          </a:xfrm>
+        </p:grpSpPr>
+        <p:sp>
+          <p:nvSpPr>
+            <p:cNvPr id="13" name="reveal-2:10:shape"/>
+            <p:cNvSpPr/>
+            <p:nvPr/>
+          </p:nvSpPr>
+          <p:spPr>
+            <a:xfrm>
+              <a:off x="3504920" y="1868329"/>
+              <a:ext cx="2377160" cy="3791902"/>
+            </a:xfrm>
+            <a:prstGeom prst="roundRect">
+              <a:avLst>
+                <a:gd name="adj" fmla="val 3785"/>
+              </a:avLst>
+            </a:prstGeom>
+            <a:solidFill>
+              <a:srgbClr val="292929"/>
+            </a:solidFill>
+            <a:ln w="7620">
+              <a:solidFill>
+                <a:srgbClr val="474747"/>
+              </a:solidFill>
+              <a:prstDash val="solid"/>
+            </a:ln>
+          </p:spPr>
+          <p:txBody>
+            <a:bodyPr/>
+            <a:lstStyle/>
+            <a:p>
+              <a:endParaRPr lang="en-US"/>
+            </a:p>
+          </p:txBody>
+        </p:sp>
+        <p:sp>
+          <p:nvSpPr>
+            <p:cNvPr id="14" name="reveal-2:10:shape:border-0"/>
+            <p:cNvSpPr/>
+            <p:nvPr/>
+          </p:nvSpPr>
+          <p:spPr>
+            <a:xfrm>
+              <a:off x="3596360" y="1883569"/>
+              <a:ext cx="2194280" cy="0"/>
+            </a:xfrm>
+            <a:prstGeom prst="line">
+              <a:avLst/>
+            </a:prstGeom>
+            <a:noFill/>
+            <a:ln w="30480">
+              <a:solidFill>
+                <a:srgbClr val="4ADE80"/>
+              </a:solidFill>
+              <a:prstDash val="solid"/>
+              <a:headEnd type="none"/>
+              <a:tailEnd type="none"/>
+            </a:ln>
+          </p:spPr>
+          <p:txBody>
+            <a:bodyPr/>
+            <a:lstStyle/>
+            <a:p>
+              <a:endParaRPr lang="en-US"/>
+            </a:p>
+          </p:txBody>
+        </p:sp>
+        <p:sp>
+          <p:nvSpPr>
+            <p:cNvPr id="15" name="reveal-2:11:shape"/>
+            <p:cNvSpPr/>
+            <p:nvPr/>
+          </p:nvSpPr>
+          <p:spPr>
+            <a:xfrm>
+              <a:off x="3710660" y="2096929"/>
+              <a:ext cx="411480" cy="411480"/>
+            </a:xfrm>
+            <a:prstGeom prst="roundRect">
+              <a:avLst>
+                <a:gd name="adj" fmla="val 25926"/>
+              </a:avLst>
+            </a:prstGeom>
+            <a:solidFill>
+              <a:srgbClr val="000000">
+                <a:alpha val="0"/>
+              </a:srgbClr>
+            </a:solidFill>
+            <a:ln w="15240">
+              <a:solidFill>
+                <a:srgbClr val="4ADE80"/>
+              </a:solidFill>
+              <a:prstDash val="solid"/>
+            </a:ln>
+          </p:spPr>
+          <p:txBody>
+            <a:bodyPr/>
+            <a:lstStyle/>
+            <a:p>
+              <a:endParaRPr lang="en-US"/>
+            </a:p>
+          </p:txBody>
+        </p:sp>
+        <p:sp>
+          <p:nvSpPr>
+            <p:cNvPr id="16" name="reveal-2:12:text"/>
+            <p:cNvSpPr/>
+            <p:nvPr/>
+          </p:nvSpPr>
+          <p:spPr>
+            <a:xfrm>
+              <a:off x="3710660" y="2207419"/>
+              <a:ext cx="411480" cy="190500"/>
+            </a:xfrm>
+            <a:prstGeom prst="rect">
+              <a:avLst/>
+            </a:prstGeom>
+            <a:noFill/>
+            <a:ln/>
+          </p:spPr>
+          <p:txBody>
+            <a:bodyPr wrap="square" lIns="0" tIns="0" rIns="0" bIns="0" rtlCol="0" anchor="ctr"/>
+            <a:lstStyle/>
+            <a:p>
+              <a:pPr marL="0" indent="0" algn="ctr">
+                <a:buNone/>
+              </a:pPr>
+              <a:r>
+                <a:rPr lang="en-US" sz="1200" b="1" kern="0" spc="-24" dirty="0">
+                  <a:solidFill>
+                    <a:srgbClr val="4ADE80"/>
+                  </a:solidFill>
+                  <a:latin typeface="Arial" pitchFamily="34" charset="0"/>
+                  <a:ea typeface="Arial" pitchFamily="34" charset="-122"/>
+                  <a:cs typeface="Arial" pitchFamily="34" charset="-120"/>
+                </a:rPr>
+                <a:t>2</a:t>
+              </a:r>
+              <a:endParaRPr lang="en-US" sz="1200" dirty="0"/>
+            </a:p>
+          </p:txBody>
+        </p:sp>
+        <p:sp>
+          <p:nvSpPr>
+            <p:cNvPr id="17" name="reveal-2:13:text"/>
+            <p:cNvSpPr/>
+            <p:nvPr/>
+          </p:nvSpPr>
+          <p:spPr>
+            <a:xfrm>
+              <a:off x="3710660" y="2698909"/>
+              <a:ext cx="1965680" cy="266700"/>
+            </a:xfrm>
+            <a:prstGeom prst="rect">
+              <a:avLst/>
+            </a:prstGeom>
+            <a:noFill/>
+            <a:ln/>
+          </p:spPr>
+          <p:txBody>
+            <a:bodyPr wrap="square" lIns="0" tIns="0" rIns="0" bIns="0" rtlCol="0" anchor="ctr"/>
+            <a:lstStyle/>
+            <a:p>
+              <a:pPr marL="0" indent="0" algn="l">
+                <a:buNone/>
+              </a:pPr>
+              <a:r>
+                <a:rPr lang="en-US" sz="1440" b="1" dirty="0">
+                  <a:solidFill>
+                    <a:srgbClr val="4ADE80"/>
+                  </a:solidFill>
+                  <a:latin typeface="Arial" pitchFamily="34" charset="0"/>
+                  <a:ea typeface="Arial" pitchFamily="34" charset="-122"/>
+                  <a:cs typeface="Arial" pitchFamily="34" charset="-120"/>
+                </a:rPr>
+                <a:t>Change vs baseline</a:t>
+              </a:r>
+              <a:endParaRPr lang="en-US" sz="1440" dirty="0"/>
+            </a:p>
+          </p:txBody>
+        </p:sp>
+        <p:sp>
+          <p:nvSpPr>
+            <p:cNvPr id="18" name="reveal-2:14:text"/>
+            <p:cNvSpPr/>
+            <p:nvPr/>
+          </p:nvSpPr>
+          <p:spPr>
+            <a:xfrm>
+              <a:off x="3710660" y="3047881"/>
+              <a:ext cx="1965680" cy="764123"/>
+            </a:xfrm>
+            <a:prstGeom prst="rect">
+              <a:avLst/>
+            </a:prstGeom>
+            <a:noFill/>
+            <a:ln/>
+          </p:spPr>
+          <p:txBody>
+            <a:bodyPr wrap="square" lIns="0" tIns="0" rIns="0" bIns="0" rtlCol="0" anchor="t"/>
+            <a:lstStyle/>
+            <a:p>
+              <a:pPr marL="0" indent="0" algn="l">
+                <a:buNone/>
+              </a:pPr>
+              <a:r>
+                <a:rPr lang="en-US" sz="1140" dirty="0">
+                  <a:solidFill>
+                    <a:srgbClr val="B0B0B0"/>
+                  </a:solidFill>
+                  <a:latin typeface="Arial" pitchFamily="34" charset="0"/>
+                  <a:ea typeface="Arial" pitchFamily="34" charset="-122"/>
+                  <a:cs typeface="Arial" pitchFamily="34" charset="-120"/>
+                </a:rPr>
+                <a:t>Fail on a drop bigger than the noise, not below a fixed number.</a:t>
+              </a:r>
+              <a:endParaRPr lang="en-US" sz="1140" dirty="0"/>
+            </a:p>
+          </p:txBody>
+        </p:sp>
+        <p:sp>
+          <p:nvSpPr>
+            <p:cNvPr id="20" name="reveal-2:16:shape"/>
+            <p:cNvSpPr/>
+            <p:nvPr/>
+          </p:nvSpPr>
+          <p:spPr>
+            <a:xfrm>
+              <a:off x="3710660" y="3852004"/>
+              <a:ext cx="1965680" cy="788640"/>
+            </a:xfrm>
+            <a:prstGeom prst="roundRect">
+              <a:avLst>
+                <a:gd name="adj" fmla="val 13889"/>
+              </a:avLst>
+            </a:prstGeom>
+            <a:solidFill>
+              <a:srgbClr val="FFFFFF">
+                <a:alpha val="3000"/>
+              </a:srgbClr>
+            </a:solidFill>
+            <a:ln w="12700">
+              <a:solidFill>
+                <a:srgbClr val="333333">
+                  <a:alpha val="0"/>
+                </a:srgbClr>
+              </a:solidFill>
+              <a:prstDash val="solid"/>
+            </a:ln>
+          </p:spPr>
+          <p:txBody>
+            <a:bodyPr/>
+            <a:lstStyle/>
+            <a:p>
+              <a:endParaRPr lang="en-US"/>
+            </a:p>
+          </p:txBody>
+        </p:sp>
+        <p:sp>
+          <p:nvSpPr>
+            <p:cNvPr id="21" name="reveal-2:17:text"/>
+            <p:cNvSpPr/>
+            <p:nvPr/>
+          </p:nvSpPr>
+          <p:spPr>
+            <a:xfrm>
+              <a:off x="3817340" y="3932004"/>
+              <a:ext cx="1752320" cy="628640"/>
+            </a:xfrm>
+            <a:prstGeom prst="rect">
+              <a:avLst/>
+            </a:prstGeom>
+            <a:noFill/>
+            <a:ln/>
+          </p:spPr>
+          <p:txBody>
+            <a:bodyPr wrap="square" lIns="0" tIns="0" rIns="0" bIns="0" rtlCol="0" anchor="t"/>
+            <a:lstStyle/>
+            <a:p>
+              <a:pPr marL="0" indent="0" algn="l">
+                <a:buNone/>
+              </a:pPr>
+              <a:r>
+                <a:rPr lang="en-US" sz="900" b="1" dirty="0">
+                  <a:solidFill>
+                    <a:srgbClr val="DEDEDE"/>
+                  </a:solidFill>
+                  <a:latin typeface="Arial" pitchFamily="34" charset="0"/>
+                  <a:ea typeface="Arial" pitchFamily="34" charset="-122"/>
+                  <a:cs typeface="Arial" pitchFamily="34" charset="-120"/>
+                </a:rPr>
+                <a:t>Foundry treats changes under 0.03 as noise.</a:t>
+              </a:r>
+              <a:endParaRPr lang="en-US" sz="900" dirty="0"/>
+            </a:p>
+          </p:txBody>
+        </p:sp>
+      </p:grpSp>
+      <p:grpSp>
+        <p:nvGrpSpPr>
+          <p:cNvPr id="37" name="Reveal 3"/>
+          <p:cNvGrpSpPr/>
+          <p:nvPr/>
+        </p:nvGrpSpPr>
+        <p:grpSpPr>
+          <a:xfrm>
+            <a:off x="6034480" y="1868329"/>
+            <a:ext cx="2377160" cy="3791902"/>
+            <a:chOff x="6034480" y="1868329"/>
+            <a:chExt cx="2377160" cy="3791902"/>
+          </a:xfrm>
+        </p:grpSpPr>
+        <p:sp>
+          <p:nvSpPr>
+            <p:cNvPr id="23" name="reveal-3:19:shape"/>
+            <p:cNvSpPr/>
+            <p:nvPr/>
+          </p:nvSpPr>
+          <p:spPr>
+            <a:xfrm>
+              <a:off x="6034480" y="1868329"/>
+              <a:ext cx="2377160" cy="3791902"/>
+            </a:xfrm>
+            <a:prstGeom prst="roundRect">
+              <a:avLst>
+                <a:gd name="adj" fmla="val 3786"/>
+              </a:avLst>
+            </a:prstGeom>
+            <a:solidFill>
+              <a:srgbClr val="292929"/>
+            </a:solidFill>
+            <a:ln w="7620">
+              <a:solidFill>
+                <a:srgbClr val="474747"/>
+              </a:solidFill>
+              <a:prstDash val="solid"/>
+            </a:ln>
+          </p:spPr>
+          <p:txBody>
+            <a:bodyPr/>
+            <a:lstStyle/>
+            <a:p>
+              <a:endParaRPr lang="en-US"/>
+            </a:p>
+          </p:txBody>
+        </p:sp>
+        <p:sp>
+          <p:nvSpPr>
+            <p:cNvPr id="24" name="reveal-3:19:shape:border-0"/>
+            <p:cNvSpPr/>
+            <p:nvPr/>
+          </p:nvSpPr>
+          <p:spPr>
+            <a:xfrm>
+              <a:off x="6125920" y="1883569"/>
+              <a:ext cx="2194280" cy="0"/>
+            </a:xfrm>
+            <a:prstGeom prst="line">
+              <a:avLst/>
+            </a:prstGeom>
+            <a:noFill/>
+            <a:ln w="30480">
+              <a:solidFill>
+                <a:srgbClr val="FBBF24"/>
+              </a:solidFill>
+              <a:prstDash val="solid"/>
+              <a:headEnd type="none"/>
+              <a:tailEnd type="none"/>
+            </a:ln>
+          </p:spPr>
+          <p:txBody>
+            <a:bodyPr/>
+            <a:lstStyle/>
+            <a:p>
+              <a:endParaRPr lang="en-US"/>
+            </a:p>
+          </p:txBody>
+        </p:sp>
+        <p:sp>
+          <p:nvSpPr>
+            <p:cNvPr id="25" name="reveal-3:20:shape"/>
+            <p:cNvSpPr/>
+            <p:nvPr/>
+          </p:nvSpPr>
+          <p:spPr>
+            <a:xfrm>
+              <a:off x="6240220" y="2096929"/>
+              <a:ext cx="411480" cy="411480"/>
+            </a:xfrm>
+            <a:prstGeom prst="roundRect">
+              <a:avLst>
+                <a:gd name="adj" fmla="val 25926"/>
+              </a:avLst>
+            </a:prstGeom>
+            <a:solidFill>
+              <a:srgbClr val="000000">
+                <a:alpha val="0"/>
+              </a:srgbClr>
+            </a:solidFill>
+            <a:ln w="15240">
+              <a:solidFill>
+                <a:srgbClr val="FBBF24"/>
+              </a:solidFill>
+              <a:prstDash val="solid"/>
+            </a:ln>
+          </p:spPr>
+          <p:txBody>
+            <a:bodyPr/>
+            <a:lstStyle/>
+            <a:p>
+              <a:endParaRPr lang="en-US"/>
+            </a:p>
+          </p:txBody>
+        </p:sp>
+        <p:sp>
+          <p:nvSpPr>
+            <p:cNvPr id="26" name="reveal-3:21:text"/>
+            <p:cNvSpPr/>
+            <p:nvPr/>
+          </p:nvSpPr>
+          <p:spPr>
+            <a:xfrm>
+              <a:off x="6240220" y="2207419"/>
+              <a:ext cx="411480" cy="190500"/>
+            </a:xfrm>
+            <a:prstGeom prst="rect">
+              <a:avLst/>
+            </a:prstGeom>
+            <a:noFill/>
+            <a:ln/>
+          </p:spPr>
+          <p:txBody>
+            <a:bodyPr wrap="square" lIns="0" tIns="0" rIns="0" bIns="0" rtlCol="0" anchor="ctr"/>
+            <a:lstStyle/>
+            <a:p>
+              <a:pPr marL="0" indent="0" algn="ctr">
+                <a:buNone/>
+              </a:pPr>
+              <a:r>
+                <a:rPr lang="en-US" sz="1200" b="1" kern="0" spc="-24" dirty="0">
+                  <a:solidFill>
+                    <a:srgbClr val="FBBF24"/>
+                  </a:solidFill>
+                  <a:latin typeface="Arial" pitchFamily="34" charset="0"/>
+                  <a:ea typeface="Arial" pitchFamily="34" charset="-122"/>
+                  <a:cs typeface="Arial" pitchFamily="34" charset="-120"/>
+                </a:rPr>
+                <a:t>3</a:t>
+              </a:r>
+              <a:endParaRPr lang="en-US" sz="1200" dirty="0"/>
+            </a:p>
+          </p:txBody>
+        </p:sp>
+        <p:sp>
+          <p:nvSpPr>
+            <p:cNvPr id="27" name="reveal-3:22:text"/>
+            <p:cNvSpPr/>
+            <p:nvPr/>
+          </p:nvSpPr>
+          <p:spPr>
+            <a:xfrm>
+              <a:off x="6240220" y="2698909"/>
+              <a:ext cx="1965680" cy="266700"/>
+            </a:xfrm>
+            <a:prstGeom prst="rect">
+              <a:avLst/>
+            </a:prstGeom>
+            <a:noFill/>
+            <a:ln/>
+          </p:spPr>
+          <p:txBody>
+            <a:bodyPr wrap="square" lIns="0" tIns="0" rIns="0" bIns="0" rtlCol="0" anchor="ctr"/>
+            <a:lstStyle/>
+            <a:p>
+              <a:pPr marL="0" indent="0" algn="l">
+                <a:buNone/>
+              </a:pPr>
+              <a:r>
+                <a:rPr lang="en-US" sz="1440" b="1" dirty="0">
+                  <a:solidFill>
+                    <a:srgbClr val="FBBF24"/>
+                  </a:solidFill>
+                  <a:latin typeface="Arial" pitchFamily="34" charset="0"/>
+                  <a:ea typeface="Arial" pitchFamily="34" charset="-122"/>
+                  <a:cs typeface="Arial" pitchFamily="34" charset="-120"/>
+                </a:rPr>
+                <a:t>Must-pass cases</a:t>
+              </a:r>
+              <a:endParaRPr lang="en-US" sz="1440" dirty="0"/>
+            </a:p>
+          </p:txBody>
+        </p:sp>
+        <p:sp>
+          <p:nvSpPr>
+            <p:cNvPr id="28" name="reveal-3:23:text"/>
+            <p:cNvSpPr/>
+            <p:nvPr/>
+          </p:nvSpPr>
+          <p:spPr>
+            <a:xfrm>
+              <a:off x="6240220" y="3047881"/>
+              <a:ext cx="1965680" cy="764123"/>
+            </a:xfrm>
+            <a:prstGeom prst="rect">
+              <a:avLst/>
+            </a:prstGeom>
+            <a:noFill/>
+            <a:ln/>
+          </p:spPr>
+          <p:txBody>
+            <a:bodyPr wrap="square" lIns="0" tIns="0" rIns="0" bIns="0" rtlCol="0" anchor="t"/>
+            <a:lstStyle/>
+            <a:p>
+              <a:pPr marL="0" indent="0" algn="l">
+                <a:buNone/>
+              </a:pPr>
+              <a:r>
+                <a:rPr lang="en-US" sz="1140" dirty="0">
+                  <a:solidFill>
+                    <a:srgbClr val="B0B0B0"/>
+                  </a:solidFill>
+                  <a:latin typeface="Arial" pitchFamily="34" charset="0"/>
+                  <a:ea typeface="Arial" pitchFamily="34" charset="-122"/>
+                  <a:cs typeface="Arial" pitchFamily="34" charset="-120"/>
+                </a:rPr>
+                <a:t>Wrong approver, or obeying an email, blocks the release whatever the average.</a:t>
+              </a:r>
+              <a:endParaRPr lang="en-US" sz="1140" dirty="0"/>
+            </a:p>
+          </p:txBody>
+        </p:sp>
+        <p:sp>
+          <p:nvSpPr>
+            <p:cNvPr id="30" name="reveal-3:25:shape"/>
+            <p:cNvSpPr/>
+            <p:nvPr/>
+          </p:nvSpPr>
+          <p:spPr>
+            <a:xfrm>
+              <a:off x="6240220" y="3852004"/>
+              <a:ext cx="1965680" cy="788640"/>
+            </a:xfrm>
+            <a:prstGeom prst="roundRect">
+              <a:avLst>
+                <a:gd name="adj" fmla="val 13889"/>
+              </a:avLst>
+            </a:prstGeom>
+            <a:solidFill>
+              <a:srgbClr val="FFFFFF">
+                <a:alpha val="3000"/>
+              </a:srgbClr>
+            </a:solidFill>
+            <a:ln w="12700">
+              <a:solidFill>
+                <a:srgbClr val="333333">
+                  <a:alpha val="0"/>
+                </a:srgbClr>
+              </a:solidFill>
+              <a:prstDash val="solid"/>
+            </a:ln>
+          </p:spPr>
+          <p:txBody>
+            <a:bodyPr/>
+            <a:lstStyle/>
+            <a:p>
+              <a:endParaRPr lang="en-US"/>
+            </a:p>
+          </p:txBody>
+        </p:sp>
+        <p:sp>
+          <p:nvSpPr>
+            <p:cNvPr id="31" name="reveal-3:26:text"/>
+            <p:cNvSpPr/>
+            <p:nvPr/>
+          </p:nvSpPr>
+          <p:spPr>
+            <a:xfrm>
+              <a:off x="6346900" y="3932004"/>
+              <a:ext cx="1752320" cy="628640"/>
+            </a:xfrm>
+            <a:prstGeom prst="rect">
+              <a:avLst/>
+            </a:prstGeom>
+            <a:noFill/>
+            <a:ln/>
+          </p:spPr>
+          <p:txBody>
+            <a:bodyPr wrap="square" lIns="0" tIns="0" rIns="0" bIns="0" rtlCol="0" anchor="t"/>
+            <a:lstStyle/>
+            <a:p>
+              <a:pPr marL="0" indent="0" algn="l">
+                <a:buNone/>
+              </a:pPr>
+              <a:r>
+                <a:rPr lang="en-US" sz="900" b="1" dirty="0">
+                  <a:solidFill>
+                    <a:srgbClr val="DEDEDE"/>
+                  </a:solidFill>
+                  <a:latin typeface="Arial" pitchFamily="34" charset="0"/>
+                  <a:ea typeface="Arial" pitchFamily="34" charset="-122"/>
+                  <a:cs typeface="Arial" pitchFamily="34" charset="-120"/>
+                </a:rPr>
+                <a:t>Averages hide the failures that matter.</a:t>
+              </a:r>
+              <a:endParaRPr lang="en-US" sz="900" dirty="0"/>
+            </a:p>
+          </p:txBody>
+        </p:sp>
+      </p:grpSp>
+      <p:grpSp>
+        <p:nvGrpSpPr>
+          <p:cNvPr id="38" name="Reveal 4"/>
+          <p:cNvGrpSpPr/>
+          <p:nvPr/>
+        </p:nvGrpSpPr>
+        <p:grpSpPr>
+          <a:xfrm>
+            <a:off x="8564040" y="1868329"/>
+            <a:ext cx="2377160" cy="3791902"/>
+            <a:chOff x="8564040" y="1868329"/>
+            <a:chExt cx="2377160" cy="3791902"/>
+          </a:xfrm>
+        </p:grpSpPr>
+        <p:sp>
+          <p:nvSpPr>
+            <p:cNvPr id="39" name="reveal-1:2:shape"/>
+            <p:cNvSpPr/>
+            <p:nvPr/>
+          </p:nvSpPr>
+          <p:spPr>
+            <a:xfrm>
+              <a:off x="8564040" y="1868329"/>
+              <a:ext cx="2377160" cy="3791902"/>
+            </a:xfrm>
+            <a:prstGeom prst="roundRect">
+              <a:avLst>
+                <a:gd name="adj" fmla="val 3786"/>
+              </a:avLst>
+            </a:prstGeom>
+            <a:solidFill>
+              <a:srgbClr val="292929"/>
+            </a:solidFill>
+            <a:ln w="7620">
+              <a:solidFill>
+                <a:srgbClr val="474747"/>
+              </a:solidFill>
+              <a:prstDash val="solid"/>
+            </a:ln>
+          </p:spPr>
+          <p:txBody>
+            <a:bodyPr/>
+            <a:lstStyle/>
+            <a:p>
+              <a:endParaRPr lang="en-US"/>
+            </a:p>
+          </p:txBody>
+        </p:sp>
+        <p:sp>
+          <p:nvSpPr>
+            <p:cNvPr id="40" name="reveal-1:2:shape:border-0"/>
+            <p:cNvSpPr/>
+            <p:nvPr/>
+          </p:nvSpPr>
+          <p:spPr>
+            <a:xfrm>
+              <a:off x="8655480" y="1883569"/>
+              <a:ext cx="2194280" cy="0"/>
+            </a:xfrm>
+            <a:prstGeom prst="line">
+              <a:avLst/>
+            </a:prstGeom>
+            <a:noFill/>
+            <a:ln w="30480">
+              <a:solidFill>
+                <a:srgbClr val="B88CFF"/>
+              </a:solidFill>
+              <a:prstDash val="solid"/>
+              <a:headEnd type="none"/>
+              <a:tailEnd type="none"/>
+            </a:ln>
+          </p:spPr>
+          <p:txBody>
+            <a:bodyPr/>
+            <a:lstStyle/>
+            <a:p>
+              <a:endParaRPr lang="en-US"/>
+            </a:p>
+          </p:txBody>
+        </p:sp>
+        <p:sp>
+          <p:nvSpPr>
+            <p:cNvPr id="41" name="reveal-1:3:shape"/>
+            <p:cNvSpPr/>
+            <p:nvPr/>
+          </p:nvSpPr>
+          <p:spPr>
+            <a:xfrm>
+              <a:off x="8769780" y="2096929"/>
+              <a:ext cx="411480" cy="411480"/>
+            </a:xfrm>
+            <a:prstGeom prst="roundRect">
+              <a:avLst>
+                <a:gd name="adj" fmla="val 25926"/>
+              </a:avLst>
+            </a:prstGeom>
+            <a:solidFill>
+              <a:srgbClr val="000000">
+                <a:alpha val="0"/>
+              </a:srgbClr>
+            </a:solidFill>
+            <a:ln w="15240">
+              <a:solidFill>
+                <a:srgbClr val="B88CFF"/>
+              </a:solidFill>
+              <a:prstDash val="solid"/>
+            </a:ln>
+          </p:spPr>
+          <p:txBody>
+            <a:bodyPr/>
+            <a:lstStyle/>
+            <a:p>
+              <a:endParaRPr lang="en-US"/>
+            </a:p>
+          </p:txBody>
+        </p:sp>
+        <p:sp>
+          <p:nvSpPr>
+            <p:cNvPr id="42" name="reveal-1:4:text"/>
+            <p:cNvSpPr/>
+            <p:nvPr/>
+          </p:nvSpPr>
+          <p:spPr>
+            <a:xfrm>
+              <a:off x="8769780" y="2207419"/>
+              <a:ext cx="411480" cy="190500"/>
+            </a:xfrm>
+            <a:prstGeom prst="rect">
+              <a:avLst/>
+            </a:prstGeom>
+            <a:noFill/>
+            <a:ln/>
+          </p:spPr>
+          <p:txBody>
+            <a:bodyPr wrap="square" lIns="0" tIns="0" rIns="0" bIns="0" rtlCol="0" anchor="ctr"/>
+            <a:lstStyle/>
+            <a:p>
+              <a:pPr marL="0" indent="0" algn="ctr">
+                <a:buNone/>
+              </a:pPr>
+              <a:r>
+                <a:rPr lang="en-US" sz="1200" b="1" kern="0" spc="-24" dirty="0">
+                  <a:solidFill>
+                    <a:srgbClr val="B88CFF"/>
+                  </a:solidFill>
+                  <a:latin typeface="Arial" pitchFamily="34" charset="0"/>
+                  <a:ea typeface="Arial" pitchFamily="34" charset="-122"/>
+                  <a:cs typeface="Arial" pitchFamily="34" charset="-120"/>
+                </a:rPr>
+                <a:t>4</a:t>
+              </a:r>
+              <a:endParaRPr lang="en-US" sz="1200" dirty="0"/>
+            </a:p>
+          </p:txBody>
+        </p:sp>
+        <p:sp>
+          <p:nvSpPr>
+            <p:cNvPr id="43" name="reveal-1:5:text"/>
+            <p:cNvSpPr/>
+            <p:nvPr/>
+          </p:nvSpPr>
+          <p:spPr>
+            <a:xfrm>
+              <a:off x="8769780" y="2698909"/>
+              <a:ext cx="1965680" cy="266700"/>
+            </a:xfrm>
+            <a:prstGeom prst="rect">
+              <a:avLst/>
+            </a:prstGeom>
+            <a:noFill/>
+            <a:ln/>
+          </p:spPr>
+          <p:txBody>
+            <a:bodyPr wrap="square" lIns="0" tIns="0" rIns="0" bIns="0" rtlCol="0" anchor="ctr"/>
+            <a:lstStyle/>
+            <a:p>
+              <a:pPr marL="0" indent="0" algn="l">
+                <a:buNone/>
+              </a:pPr>
+              <a:r>
+                <a:rPr lang="en-US" sz="1440" b="1" dirty="0">
+                  <a:solidFill>
+                    <a:srgbClr val="B88CFF"/>
+                  </a:solidFill>
+                  <a:latin typeface="Arial" pitchFamily="34" charset="0"/>
+                  <a:ea typeface="Arial" pitchFamily="34" charset="-122"/>
+                  <a:cs typeface="Arial" pitchFamily="34" charset="-120"/>
+                </a:rPr>
+                <a:t>Pinned together</a:t>
+              </a:r>
+              <a:endParaRPr lang="en-US" sz="1440" dirty="0"/>
+            </a:p>
+          </p:txBody>
+        </p:sp>
+        <p:sp>
+          <p:nvSpPr>
+            <p:cNvPr id="44" name="reveal-1:6:text"/>
+            <p:cNvSpPr/>
+            <p:nvPr/>
+          </p:nvSpPr>
+          <p:spPr>
+            <a:xfrm>
+              <a:off x="8769780" y="3047881"/>
+              <a:ext cx="1965680" cy="764123"/>
+            </a:xfrm>
+            <a:prstGeom prst="rect">
+              <a:avLst/>
+            </a:prstGeom>
+            <a:noFill/>
+            <a:ln/>
+          </p:spPr>
+          <p:txBody>
+            <a:bodyPr wrap="square" lIns="0" tIns="0" rIns="0" bIns="0" rtlCol="0" anchor="t"/>
+            <a:lstStyle/>
+            <a:p>
+              <a:pPr marL="0" indent="0" algn="l">
+                <a:buNone/>
+              </a:pPr>
+              <a:r>
+                <a:rPr lang="en-US" sz="1140" dirty="0">
+                  <a:solidFill>
+                    <a:srgbClr val="B0B0B0"/>
+                  </a:solidFill>
+                  <a:latin typeface="Arial" pitchFamily="34" charset="0"/>
+                  <a:ea typeface="Arial" pitchFamily="34" charset="-122"/>
+                  <a:cs typeface="Arial" pitchFamily="34" charset="-120"/>
+                </a:rPr>
+                <a:t>Prompt, tool descriptions, model and dataset version.</a:t>
+              </a:r>
+              <a:endParaRPr lang="en-US" sz="1140" dirty="0"/>
+            </a:p>
+          </p:txBody>
+        </p:sp>
+        <p:sp>
+          <p:nvSpPr>
+            <p:cNvPr id="46" name="reveal-1:8:shape"/>
+            <p:cNvSpPr/>
+            <p:nvPr/>
+          </p:nvSpPr>
+          <p:spPr>
+            <a:xfrm>
+              <a:off x="8769780" y="3852004"/>
+              <a:ext cx="1965680" cy="668640"/>
+            </a:xfrm>
+            <a:prstGeom prst="roundRect">
+              <a:avLst>
+                <a:gd name="adj" fmla="val 13889"/>
+              </a:avLst>
+            </a:prstGeom>
+            <a:solidFill>
+              <a:srgbClr val="FFFFFF">
+                <a:alpha val="3000"/>
+              </a:srgbClr>
+            </a:solidFill>
+            <a:ln w="12700">
+              <a:solidFill>
+                <a:srgbClr val="333333">
+                  <a:alpha val="0"/>
+                </a:srgbClr>
+              </a:solidFill>
+              <a:prstDash val="solid"/>
+            </a:ln>
+          </p:spPr>
+          <p:txBody>
+            <a:bodyPr/>
+            <a:lstStyle/>
+            <a:p>
+              <a:endParaRPr lang="en-US"/>
+            </a:p>
+          </p:txBody>
+        </p:sp>
+        <p:sp>
+          <p:nvSpPr>
+            <p:cNvPr id="47" name="reveal-1:9:text"/>
+            <p:cNvSpPr/>
+            <p:nvPr/>
+          </p:nvSpPr>
+          <p:spPr>
+            <a:xfrm>
+              <a:off x="8876460" y="3932004"/>
+              <a:ext cx="1752320" cy="508640"/>
+            </a:xfrm>
+            <a:prstGeom prst="rect">
+              <a:avLst/>
+            </a:prstGeom>
+            <a:noFill/>
+            <a:ln/>
+          </p:spPr>
+          <p:txBody>
+            <a:bodyPr wrap="square" lIns="0" tIns="0" rIns="0" bIns="0" rtlCol="0" anchor="t"/>
+            <a:lstStyle/>
+            <a:p>
+              <a:pPr marL="0" indent="0" algn="l">
+                <a:buNone/>
+              </a:pPr>
+              <a:r>
+                <a:rPr lang="en-US" sz="900" b="1" dirty="0">
+                  <a:solidFill>
+                    <a:srgbClr val="DEDEDE"/>
+                  </a:solidFill>
+                  <a:latin typeface="Arial" pitchFamily="34" charset="0"/>
+                  <a:ea typeface="Arial" pitchFamily="34" charset="-122"/>
+                  <a:cs typeface="Arial" pitchFamily="34" charset="-120"/>
+                </a:rPr>
+                <a:t>A score is only comparable if all four are recorded.</a:t>
+              </a:r>
+              <a:endParaRPr lang="en-US" sz="900" dirty="0"/>
+            </a:p>
+          </p:txBody>
+        </p:sp>
+      </p:grpSp>
+      <p:sp>
+        <p:nvSpPr>
+          <p:cNvPr id="33" name="static:28:text"/>
+          <p:cNvSpPr/>
+          <p:nvPr/>
+        </p:nvSpPr>
+        <p:spPr>
+          <a:xfrm>
+            <a:off x="609600" y="6461760"/>
+            <a:ext cx="1539240" cy="129540"/>
+          </a:xfrm>
+          <a:prstGeom prst="rect">
+            <a:avLst/>
+          </a:prstGeom>
+          <a:noFill/>
+          <a:ln/>
+        </p:spPr>
+        <p:txBody>
+          <a:bodyPr wrap="none" lIns="0" tIns="0" rIns="0" bIns="0" rtlCol="0" anchor="ctr"/>
+          <a:lstStyle/>
+          <a:p>
+            <a:pPr marL="0" indent="0" algn="l">
+              <a:buNone/>
+            </a:pPr>
+            <a:r>
+              <a:rPr lang="en-US" sz="720" kern="0" spc="58" dirty="0">
+                <a:solidFill>
+                  <a:srgbClr val="919191"/>
+                </a:solidFill>
+                <a:latin typeface="Arial" pitchFamily="34" charset="0"/>
+                <a:ea typeface="Arial" pitchFamily="34" charset="-122"/>
+                <a:cs typeface="Arial" pitchFamily="34" charset="-120"/>
+              </a:rPr>
+              <a:t>FY27 AI GENIUS</a:t>
+            </a:r>
+            <a:endParaRPr lang="en-US" sz="720" dirty="0"/>
+          </a:p>
+        </p:txBody>
+      </p:sp>
+      <p:sp>
+        <p:nvSpPr>
+          <p:cNvPr id="34" name="static:29:text"/>
+          <p:cNvSpPr/>
+          <p:nvPr/>
+        </p:nvSpPr>
+        <p:spPr>
+          <a:xfrm>
+            <a:off x="10457140" y="6461760"/>
+            <a:ext cx="1216700" cy="129540"/>
+          </a:xfrm>
+          <a:prstGeom prst="rect">
+            <a:avLst/>
+          </a:prstGeom>
+          <a:noFill/>
+          <a:ln/>
+        </p:spPr>
+        <p:txBody>
+          <a:bodyPr wrap="none" lIns="0" tIns="0" rIns="0" bIns="0" rtlCol="0" anchor="ctr"/>
+          <a:lstStyle/>
+          <a:p>
+            <a:pPr marL="0" indent="0" algn="l">
+              <a:buNone/>
+            </a:pPr>
+            <a:r>
+              <a:rPr lang="en-US" sz="720" kern="0" spc="58" dirty="0">
+                <a:solidFill>
+                  <a:srgbClr val="919191"/>
+                </a:solidFill>
+                <a:latin typeface="Arial" pitchFamily="34" charset="0"/>
+                <a:ea typeface="Arial" pitchFamily="34" charset="-122"/>
+                <a:cs typeface="Arial" pitchFamily="34" charset="-120"/>
+              </a:rPr>
+              <a:t>AI GENIUS / S6 E2 / 15</a:t>
+            </a:r>
+            <a:endParaRPr lang="en-US" sz="720" dirty="0"/>
+          </a:p>
+        </p:txBody>
+      </p:sp>
+    </p:spTree>
+  </p:cSld>
+  <p:clrMapOvr>
+    <a:masterClrMapping/>
+  </p:clrMapOvr>
+  <p:timing>
+    <p:tnLst>
+      <p:par>
+        <p:cTn id="1" dur="indefinite" restart="never" nodeType="tmRoot">
+          <p:childTnLst>
+            <p:seq concurrent="1" nextAc="seek">
+              <p:cTn id="2" dur="indefinite" nodeType="mainSeq">
+                <p:childTnLst>
+                  <p:par>
+                    <p:cTn id="3" fill="hold">
+                      <p:stCondLst>
+                        <p:cond delay="indefinite"/>
+                      </p:stCondLst>
+                      <p:childTnLst>
+                        <p:par>
+                          <p:cTn id="4" fill="hold">
+                            <p:stCondLst>
+                              <p:cond delay="0"/>
+                            </p:stCondLst>
+                            <p:childTnLst>
+                              <p:par>
+                                <p:cTn id="5" presetID="1" presetClass="entr" presetSubtype="0" fill="hold" nodeType="clickEffect">
+                                  <p:stCondLst>
+                                    <p:cond delay="0"/>
+                                  </p:stCondLst>
+                                  <p:childTnLst>
+                                    <p:set>
+                                      <p:cBhvr>
+                                        <p:cTn id="6" dur="1" fill="hold">
+                                          <p:stCondLst>
+                                            <p:cond delay="0"/>
+                                          </p:stCondLst>
+                                        </p:cTn>
+                                        <p:tgtEl>
+                                          <p:spTgt spid="35"/>
+                                        </p:tgtEl>
+                                        <p:attrNameLst>
+                                          <p:attrName>style.visibility</p:attrName>
+                                        </p:attrNameLst>
+                                      </p:cBhvr>
+                                      <p:to>
+                                        <p:strVal val="visible"/>
+                                      </p:to>
+                                    </p:set>
+                                  </p:childTnLst>
+                                </p:cTn>
+                              </p:par>
+                            </p:childTnLst>
+                          </p:cTn>
+                        </p:par>
+                      </p:childTnLst>
+                    </p:cTn>
+                  </p:par>
+                  <p:par>
+                    <p:cTn id="7" fill="hold">
+                      <p:stCondLst>
+                        <p:cond delay="indefinite"/>
+                      </p:stCondLst>
+                      <p:childTnLst>
+                        <p:par>
+                          <p:cTn id="8" fill="hold">
+                            <p:stCondLst>
+                              <p:cond delay="0"/>
+                            </p:stCondLst>
+                            <p:childTnLst>
+                              <p:par>
+                                <p:cTn id="9" presetID="1" presetClass="entr" presetSubtype="0" fill="hold" nodeType="clickEffect">
+                                  <p:stCondLst>
+                                    <p:cond delay="0"/>
+                                  </p:stCondLst>
+                                  <p:childTnLst>
+                                    <p:set>
+                                      <p:cBhvr>
+                                        <p:cTn id="10" dur="1" fill="hold">
+                                          <p:stCondLst>
+                                            <p:cond delay="0"/>
+                                          </p:stCondLst>
+                                        </p:cTn>
+                                        <p:tgtEl>
+                                          <p:spTgt spid="36"/>
+                                        </p:tgtEl>
+                                        <p:attrNameLst>
+                                          <p:attrName>style.visibility</p:attrName>
+                                        </p:attrNameLst>
+                                      </p:cBhvr>
+                                      <p:to>
+                                        <p:strVal val="visible"/>
+                                      </p:to>
+                                    </p:set>
+                                  </p:childTnLst>
+                                </p:cTn>
+                              </p:par>
+                            </p:childTnLst>
+                          </p:cTn>
+                        </p:par>
+                      </p:childTnLst>
+                    </p:cTn>
+                  </p:par>
+                  <p:par>
+                    <p:cTn id="11" fill="hold">
+                      <p:stCondLst>
+                        <p:cond delay="indefinite"/>
+                      </p:stCondLst>
+                      <p:childTnLst>
+                        <p:par>
+                          <p:cTn id="12" fill="hold">
+                            <p:stCondLst>
+                              <p:cond delay="0"/>
+                            </p:stCondLst>
+                            <p:childTnLst>
+                              <p:par>
+                                <p:cTn id="13" presetID="1" presetClass="entr" presetSubtype="0" fill="hold" nodeType="clickEffect">
+                                  <p:stCondLst>
+                                    <p:cond delay="0"/>
+                                  </p:stCondLst>
+                                  <p:childTnLst>
+                                    <p:set>
+                                      <p:cBhvr>
+                                        <p:cTn id="14" dur="1" fill="hold">
+                                          <p:stCondLst>
+                                            <p:cond delay="0"/>
+                                          </p:stCondLst>
+                                        </p:cTn>
+                                        <p:tgtEl>
+                                          <p:spTgt spid="37"/>
+                                        </p:tgtEl>
+                                        <p:attrNameLst>
+                                          <p:attrName>style.visibility</p:attrName>
+                                        </p:attrNameLst>
+                                      </p:cBhvr>
+                                      <p:to>
+                                        <p:strVal val="visible"/>
+                                      </p:to>
+                                    </p:set>
+                                  </p:childTnLst>
+                                </p:cTn>
+                              </p:par>
+                            </p:childTnLst>
+                          </p:cTn>
+                        </p:par>
+                      </p:childTnLst>
+                    </p:cTn>
+                  </p:par>
+                  <p:par>
+                    <p:cTn id="15" fill="hold">
+                      <p:stCondLst>
+                        <p:cond delay="indefinite"/>
+                      </p:stCondLst>
+                      <p:childTnLst>
+                        <p:par>
+                          <p:cTn id="16" fill="hold">
+                            <p:stCondLst>
+                              <p:cond delay="0"/>
+                            </p:stCondLst>
+                            <p:childTnLst>
+                              <p:par>
+                                <p:cTn id="17" presetID="1" presetClass="entr" presetSubtype="0" fill="hold" nodeType="clickEffect">
+                                  <p:stCondLst>
+                                    <p:cond delay="0"/>
+                                  </p:stCondLst>
+                                  <p:childTnLst>
+                                    <p:set>
+                                      <p:cBhvr>
+                                        <p:cTn id="18" dur="1" fill="hold">
+                                          <p:stCondLst>
+                                            <p:cond delay="0"/>
+                                          </p:stCondLst>
+                                        </p:cTn>
+                                        <p:tgtEl>
+                                          <p:spTgt spid="38"/>
+                                        </p:tgtEl>
+                                        <p:attrNameLst>
+                                          <p:attrName>style.visibility</p:attrName>
+                                        </p:attrNameLst>
+                                      </p:cBhvr>
+                                      <p:to>
+                                        <p:strVal val="visible"/>
+                                      </p:to>
+                                    </p:set>
+                                  </p:childTnLst>
+                                </p:cTn>
+                              </p:par>
+                            </p:childTnLst>
+                          </p:cTn>
+                        </p:par>
+                      </p:childTnLst>
+                    </p:cTn>
+                  </p:par>
+                </p:childTnLst>
+              </p:cTn>
+              <p:prevCondLst>
+                <p:cond evt="onPrev" delay="0">
+                  <p:tgtEl>
+                    <p:sldTgt/>
+                  </p:tgtEl>
+                </p:cond>
+              </p:prevCondLst>
+              <p:nextCondLst>
+                <p:cond evt="onNext" delay="0">
+                  <p:tgtEl>
+                    <p:sldTgt/>
+                  </p:tgtEl>
+                </p:cond>
+              </p:nextCondLst>
+            </p:seq>
+          </p:childTnLst>
+        </p:cTn>
+      </p:par>
+    </p:tnLst>
+  </p:timing>
 </p:sld>
 </file>
 
@@ -12197,7 +13583,7 @@
         </p:nvSpPr>
         <p:spPr>
           <a:xfrm>
-            <a:off x="7817460" y="2251234"/>
+            <a:off x="975360" y="3637072"/>
             <a:ext cx="385286" cy="266700"/>
           </a:xfrm>
           <a:prstGeom prst="rect">
@@ -12222,7 +13608,7 @@
                 <a:ea typeface="Arial" pitchFamily="34" charset="-122"/>
                 <a:cs typeface="Arial" pitchFamily="34" charset="-120"/>
               </a:rPr>
-              <a:t>03</a:t>
+              <a:t>04</a:t>
             </a:r>
             <a:endParaRPr lang="en-US" sz="2000" dirty="0"/>
           </a:p>
@@ -12242,7 +13628,7 @@
         </p:nvSpPr>
         <p:spPr>
           <a:xfrm>
-            <a:off x="7817460" y="2578894"/>
+            <a:off x="986511" y="3964732"/>
             <a:ext cx="948214" cy="266700"/>
           </a:xfrm>
           <a:prstGeom prst="rect">
@@ -12287,7 +13673,7 @@
         </p:nvSpPr>
         <p:spPr>
           <a:xfrm>
-            <a:off x="7817459" y="2912626"/>
+            <a:off x="975360" y="4298464"/>
             <a:ext cx="2965769" cy="190500"/>
           </a:xfrm>
           <a:prstGeom prst="rect">
@@ -12332,7 +13718,7 @@
         </p:nvSpPr>
         <p:spPr>
           <a:xfrm>
-            <a:off x="975360" y="3658806"/>
+            <a:off x="7817460" y="2265472"/>
             <a:ext cx="380881" cy="266700"/>
           </a:xfrm>
           <a:prstGeom prst="rect">
@@ -12377,7 +13763,7 @@
         </p:nvSpPr>
         <p:spPr>
           <a:xfrm>
-            <a:off x="986511" y="3986466"/>
+            <a:off x="7817460" y="2593132"/>
             <a:ext cx="1752600" cy="244966"/>
           </a:xfrm>
           <a:prstGeom prst="rect">
@@ -12422,7 +13808,7 @@
         </p:nvSpPr>
         <p:spPr>
           <a:xfrm>
-            <a:off x="975360" y="4320198"/>
+            <a:off x="7817459" y="2926864"/>
             <a:ext cx="1894999" cy="190500"/>
           </a:xfrm>
           <a:prstGeom prst="rect">
@@ -12790,7 +14176,7 @@
         <p:spPr>
           <a:xfrm>
             <a:off x="3749040" y="2841784"/>
-            <a:ext cx="6248400" cy="1516380"/>
+            <a:ext cx="6900000" cy="1516380"/>
           </a:xfrm>
           <a:prstGeom prst="roundRect">
             <a:avLst>
@@ -12848,7 +14234,7 @@
                 <a:ea typeface="Arial" pitchFamily="34" charset="-122"/>
                 <a:cs typeface="Arial" pitchFamily="34" charset="-120"/>
               </a:rPr>
-              <a:t>A learning coordinator asks:</a:t>
+              <a:t>A team lead asks:</a:t>
             </a:r>
             <a:endParaRPr lang="en-US" sz="1200" dirty="0"/>
           </a:p>
@@ -12887,7 +14273,7 @@
                 <a:ea typeface="Arial" pitchFamily="34" charset="-122"/>
                 <a:cs typeface="Arial" pitchFamily="34" charset="-120"/>
               </a:rPr>
-              <a:t>“Can I spend $6,250 on 25 Nova Learning</a:t>
+              <a:t>“Can I book a team dinner for six this Thursday?</a:t>
             </a:r>
             <a:endParaRPr lang="en-US" sz="2160" dirty="0"/>
           </a:p>
@@ -12926,7 +14312,7 @@
                 <a:ea typeface="Arial" pitchFamily="34" charset="-122"/>
                 <a:cs typeface="Arial" pitchFamily="34" charset="-120"/>
               </a:rPr>
-              <a:t>licences for our new graduate employees?”</a:t>
+              <a:t>It’s about $540, and my manager’s approved it.”</a:t>
             </a:r>
             <a:endParaRPr lang="en-US" sz="2160" dirty="0"/>
           </a:p>
@@ -14336,7 +15722,7 @@
       </p:sp>
       <p:sp>
         <p:nvSpPr>
-          <p:cNvPr id="39" name="reveal-1:5:text">
+          <p:cNvPr id="39" name="Reveal 4">
             <a:extLst>
               <a:ext uri="{FF2B5EF4-FFF2-40B4-BE49-F238E27FC236}">
                 <a16:creationId xmlns:a16="http://schemas.microsoft.com/office/drawing/2014/main" id="{331D5248-8C74-A1DD-589D-B0FEC9852322}"/>
@@ -14527,6 +15913,51 @@
                       </p:childTnLst>
                     </p:cTn>
                   </p:par>
+                  <p:par>
+                    <p:cTn id="15" fill="hold">
+                      <p:stCondLst>
+                        <p:cond delay="indefinite"/>
+                      </p:stCondLst>
+                      <p:childTnLst>
+                        <p:par>
+                          <p:cTn id="16" fill="hold">
+                            <p:stCondLst>
+                              <p:cond delay="0"/>
+                            </p:stCondLst>
+                            <p:childTnLst>
+                              <p:par>
+                                <p:cTn id="17" presetID="1" presetClass="entr" presetSubtype="0" fill="hold" nodeType="clickEffect">
+                                  <p:stCondLst>
+                                    <p:cond delay="0"/>
+                                  </p:stCondLst>
+                                  <p:childTnLst>
+                                    <p:set>
+                                      <p:cBhvr>
+                                        <p:cTn id="18" dur="1" fill="hold">
+                                          <p:stCondLst>
+                                            <p:cond delay="0"/>
+                                          </p:stCondLst>
+                                        </p:cTn>
+                                        <p:tgtEl>
+                                          <p:spTgt spid="39"/>
+                                        </p:tgtEl>
+                                        <p:attrNameLst>
+                                          <p:attrName>style.visibility</p:attrName>
+                                        </p:attrNameLst>
+                                      </p:cBhvr>
+                                      <p:to>
+                                        <p:strVal val="visible"/>
+                                      </p:to>
+                                    </p:set>
+                                  </p:childTnLst>
+                                </p:cTn>
+                              </p:par>
+                            </p:childTnLst>
+                          </p:cTn>
+                        </p:par>
+                      </p:childTnLst>
+                    </p:cTn>
+                  </p:par>
                 </p:childTnLst>
               </p:cTn>
               <p:prevCondLst>
@@ -15327,7 +16758,7 @@
                   <a:ea typeface="Arial" pitchFamily="34" charset="-122"/>
                   <a:cs typeface="Arial" pitchFamily="34" charset="-120"/>
                 </a:rPr>
-                <a:t>CONNECTED IN THIS DEMO</a:t>
+                <a:t>SIMULATED: KNOWLEDGE_BASE_RETRIEVE</a:t>
               </a:r>
               <a:endParaRPr lang="en-US" sz="720" dirty="0"/>
             </a:p>
@@ -15755,7 +17186,7 @@
                   <a:ea typeface="Arial" pitchFamily="34" charset="-122"/>
                   <a:cs typeface="Arial" pitchFamily="34" charset="-120"/>
                 </a:rPr>
-                <a:t>CONCEPTUAL / NOT USED IN THIS DEMO</a:t>
+                <a:t>SIMULATED: SEARCH_ONTOLOGY</a:t>
               </a:r>
               <a:endParaRPr lang="en-US" sz="720" dirty="0"/>
             </a:p>
@@ -15764,7 +17195,7 @@
       </p:grpSp>
       <p:grpSp>
         <p:nvGrpSpPr>
-          <p:cNvPr id="41" name="Group 40">
+          <p:cNvPr id="41" name="Reveal 3">
             <a:extLst>
               <a:ext uri="{FF2B5EF4-FFF2-40B4-BE49-F238E27FC236}">
                 <a16:creationId xmlns:a16="http://schemas.microsoft.com/office/drawing/2014/main" id="{AE4E581A-2C22-B249-A8A6-1CDB33248A80}"/>
@@ -16072,7 +17503,7 @@
                   <a:ea typeface="Arial" pitchFamily="34" charset="-122"/>
                   <a:cs typeface="Arial" pitchFamily="34" charset="-120"/>
                 </a:rPr>
-                <a:t>Recent decisions, conversations and</a:t>
+                <a:t>Who holds a role today, who’s away and</a:t>
               </a:r>
               <a:endParaRPr lang="en-US" sz="900" dirty="0"/>
             </a:p>
@@ -16111,7 +17542,7 @@
                   <a:ea typeface="Arial" pitchFamily="34" charset="-122"/>
                   <a:cs typeface="Arial" pitchFamily="34" charset="-120"/>
                 </a:rPr>
-                <a:t>approvals.</a:t>
+                <a:t>who’s covering.</a:t>
               </a:r>
               <a:endParaRPr lang="en-US" sz="900" dirty="0"/>
             </a:p>
@@ -16150,7 +17581,7 @@
                   <a:ea typeface="Arial" pitchFamily="34" charset="-122"/>
                   <a:cs typeface="Arial" pitchFamily="34" charset="-120"/>
                 </a:rPr>
-                <a:t>SYNTHETIC EMAIL VIA SAMPLE ADAPTER</a:t>
+                <a:t>SIMULATED: ASK</a:t>
               </a:r>
               <a:endParaRPr lang="en-US" sz="720" dirty="0"/>
             </a:p>
@@ -16232,6 +17663,76 @@
               <a:t>AI GENIUS / S6 E2 / 06</a:t>
             </a:r>
             <a:endParaRPr lang="en-US" sz="720" dirty="0"/>
+          </a:p>
+        </p:txBody>
+      </p:sp>
+      <p:sp>
+        <p:nvSpPr>
+          <p:cNvPr id="42" name="takeaway"/>
+          <p:cNvSpPr txBox="1"/>
+          <p:nvPr/>
+        </p:nvSpPr>
+        <p:spPr>
+          <a:xfrm>
+            <a:off x="975360" y="5800000"/>
+            <a:ext cx="9965841" cy="400000"/>
+          </a:xfrm>
+          <a:prstGeom prst="rect">
+            <a:avLst/>
+          </a:prstGeom>
+          <a:noFill/>
+        </p:spPr>
+        <p:txBody>
+          <a:bodyPr wrap="square" lIns="0" rIns="0" tIns="0" bIns="0">
+            <a:spAutoFit/>
+          </a:bodyPr>
+          <a:lstStyle/>
+          <a:p>
+            <a:r>
+              <a:rPr sz="1800" b="1">
+                <a:solidFill>
+                  <a:srgbClr val="DEDEDE"/>
+                </a:solidFill>
+                <a:latin typeface="Arial"/>
+              </a:rPr>
+              <a:t>Policy tells you </a:t>
+            </a:r>
+            <a:r>
+              <a:rPr sz="1800" b="1">
+                <a:solidFill>
+                  <a:srgbClr val="FBBF24"/>
+                </a:solidFill>
+                <a:latin typeface="Arial"/>
+              </a:rPr>
+              <a:t>who must approve</a:t>
+            </a:r>
+            <a:r>
+              <a:rPr sz="1800" b="1">
+                <a:solidFill>
+                  <a:srgbClr val="DEDEDE"/>
+                </a:solidFill>
+                <a:latin typeface="Arial"/>
+              </a:rPr>
+              <a:t>. Work IQ tells you </a:t>
+            </a:r>
+            <a:r>
+              <a:rPr sz="1800" b="1">
+                <a:solidFill>
+                  <a:srgbClr val="FBBF24"/>
+                </a:solidFill>
+                <a:latin typeface="Arial"/>
+              </a:rPr>
+              <a:t>who that is today</a:t>
+            </a:r>
+            <a:r>
+              <a:rPr sz="1800" b="1">
+                <a:solidFill>
+                  <a:srgbClr val="DEDEDE"/>
+                </a:solidFill>
+                <a:latin typeface="Arial"/>
+              </a:rPr>
+              <a:t>.</a:t>
+            </a:r>
           </a:p>
         </p:txBody>
       </p:sp>
@@ -16320,6 +17821,96 @@
                                         </p:cTn>
                                         <p:tgtEl>
                                           <p:spTgt spid="39"/>
+                                        </p:tgtEl>
+                                        <p:attrNameLst>
+                                          <p:attrName>style.visibility</p:attrName>
+                                        </p:attrNameLst>
+                                      </p:cBhvr>
+                                      <p:to>
+                                        <p:strVal val="visible"/>
+                                      </p:to>
+                                    </p:set>
+                                  </p:childTnLst>
+                                </p:cTn>
+                              </p:par>
+                            </p:childTnLst>
+                          </p:cTn>
+                        </p:par>
+                      </p:childTnLst>
+                    </p:cTn>
+                  </p:par>
+                  <p:par>
+                    <p:cTn id="11" fill="hold">
+                      <p:stCondLst>
+                        <p:cond delay="indefinite"/>
+                      </p:stCondLst>
+                      <p:childTnLst>
+                        <p:par>
+                          <p:cTn id="12" fill="hold">
+                            <p:stCondLst>
+                              <p:cond delay="0"/>
+                            </p:stCondLst>
+                            <p:childTnLst>
+                              <p:par>
+                                <p:cTn id="13" presetID="1" presetClass="entr" presetSubtype="0" fill="hold" nodeType="clickEffect">
+                                  <p:stCondLst>
+                                    <p:cond delay="0"/>
+                                  </p:stCondLst>
+                                  <p:childTnLst>
+                                    <p:set>
+                                      <p:cBhvr>
+                                        <p:cTn id="14" dur="1" fill="hold">
+                                          <p:stCondLst>
+                                            <p:cond delay="0"/>
+                                          </p:stCondLst>
+                                        </p:cTn>
+                                        <p:tgtEl>
+                                          <p:spTgt spid="41"/>
+                                        </p:tgtEl>
+                                        <p:attrNameLst>
+                                          <p:attrName>style.visibility</p:attrName>
+                                        </p:attrNameLst>
+                                      </p:cBhvr>
+                                      <p:to>
+                                        <p:strVal val="visible"/>
+                                      </p:to>
+                                    </p:set>
+                                  </p:childTnLst>
+                                </p:cTn>
+                              </p:par>
+                            </p:childTnLst>
+                          </p:cTn>
+                        </p:par>
+                      </p:childTnLst>
+                    </p:cTn>
+                  </p:par>
+                  <p:par>
+                    <p:cTn id="15" fill="hold">
+                      <p:stCondLst>
+                        <p:cond delay="indefinite"/>
+                      </p:stCondLst>
+                      <p:childTnLst>
+                        <p:par>
+                          <p:cTn id="16" fill="hold">
+                            <p:stCondLst>
+                              <p:cond delay="0"/>
+                            </p:stCondLst>
+                            <p:childTnLst>
+                              <p:par>
+                                <p:cTn id="17" presetID="1" presetClass="entr" presetSubtype="0" fill="hold" nodeType="clickEffect">
+                                  <p:stCondLst>
+                                    <p:cond delay="0"/>
+                                  </p:stCondLst>
+                                  <p:childTnLst>
+                                    <p:set>
+                                      <p:cBhvr>
+                                        <p:cTn id="18" dur="1" fill="hold">
+                                          <p:stCondLst>
+                                            <p:cond delay="0"/>
+                                          </p:stCondLst>
+                                        </p:cTn>
+                                        <p:tgtEl>
+                                          <p:spTgt spid="42"/>
                                         </p:tgtEl>
                                         <p:attrNameLst>
                                           <p:attrName>style.visibility</p:attrName>

--- a/presentation/presentation.pptx
+++ b/presentation/presentation.pptx
@@ -524,19 +524,68 @@
           <a:lstStyle/>
           <a:p>
             <a:r>
-              <a:rPr lang="en-US" dirty="0"/>
-              <a:t>From Prompt to Production
-Suggested timing: 1 minutes
-KEY MESSAGE
-Microsoft Foundry connects model choice, context, evaluation, optimisation and delivery.
-DEFINITION
-An agent combines a model, instructions, tools and context to work towards a goal.
-TALK TRACK
-Frame the session around a working purchasing agent. The question is how consistently it answers across real tasks, what each successful answer costs and how to improve it. Follow the same implementation through six saved checkpoints, using live questions and traces alongside completed evaluation and optimisation runs.
-TRANSITION
-Preview the agenda, starting with model choice.
-SOURCES
-Session framing.</a:t>
+              <a:t>From Prompt to Production</a:t>
+            </a:r>
+          </a:p>
+          <a:p/>
+          <a:p>
+            <a:r>
+              <a:t>Suggested timing: 1 minutes</a:t>
+            </a:r>
+          </a:p>
+          <a:p/>
+          <a:p>
+            <a:r>
+              <a:t>KEY MESSAGE</a:t>
+            </a:r>
+          </a:p>
+          <a:p>
+            <a:r>
+              <a:t>Microsoft Foundry connects model choice, context, evaluation, optimisation and delivery.</a:t>
+            </a:r>
+          </a:p>
+          <a:p/>
+          <a:p>
+            <a:r>
+              <a:t>DEFINITION</a:t>
+            </a:r>
+          </a:p>
+          <a:p>
+            <a:r>
+              <a:t>An agent combines a model, instructions, tools and context to work towards a goal.</a:t>
+            </a:r>
+          </a:p>
+          <a:p/>
+          <a:p>
+            <a:r>
+              <a:t>TALK TRACK</a:t>
+            </a:r>
+          </a:p>
+          <a:p>
+            <a:r>
+              <a:t>Frame the session around a working purchasing agent. The question is how consistently it answers across real tasks, what each successful answer costs and how to improve it. Follow the same implementation through six saved checkpoints, using live questions and traces alongside completed evaluation and optimisation runs.</a:t>
+            </a:r>
+          </a:p>
+          <a:p/>
+          <a:p>
+            <a:r>
+              <a:t>TRANSITION</a:t>
+            </a:r>
+          </a:p>
+          <a:p>
+            <a:r>
+              <a:t>Preview the agenda, starting with model choice.</a:t>
+            </a:r>
+          </a:p>
+          <a:p/>
+          <a:p>
+            <a:r>
+              <a:t>SOURCES</a:t>
+            </a:r>
+          </a:p>
+          <a:p>
+            <a:r>
+              <a:t>Session framing.</a:t>
             </a:r>
           </a:p>
         </p:txBody>
@@ -622,19 +671,68 @@
           <a:lstStyle/>
           <a:p>
             <a:r>
-              <a:rPr lang="en-US" dirty="0"/>
-              <a:t>Evaluate
-Suggested timing: 3 minutes
-KEY MESSAGE
-Start with built-in evaluators, then add the criteria that matter for your task.
-DEFINITION
-Groundedness checks support from supplied context. Customer Satisfaction predicts satisfaction across the conversation. Rubric scores custom, weighted criteria using an LLM judge.
-TALK TRACK
-Introduce Groundedness and Customer Satisfaction, then the custom purchasing rubric. Explain how approval route, expiry, citations and an actionable next step are checked across different purchases, dates and missing information. Customer Satisfaction assesses helpfulness, completeness, clarity, tone, resolution and adaptability. Keep criteria fixed across versions. Customer Satisfaction and Rubric are in preview.
-TRANSITION
-Let's measure the starting agent against these criteria across purchasing cases.
-SOURCES
-Microsoft Learn, checked 24 September 2026: https://learn.microsoft.com/en-us/azure/foundry/concepts/evaluation-evaluators/rag-evaluators ; https://learn.microsoft.com/en-us/azure/foundry/concepts/evaluation-evaluators/agent-evaluators ; https://learn.microsoft.com/en-us/azure/foundry/concepts/evaluation-evaluators/rubric-evaluators</a:t>
+              <a:t>Evaluate</a:t>
+            </a:r>
+          </a:p>
+          <a:p/>
+          <a:p>
+            <a:r>
+              <a:t>Suggested timing: 3 minutes</a:t>
+            </a:r>
+          </a:p>
+          <a:p/>
+          <a:p>
+            <a:r>
+              <a:t>KEY MESSAGE</a:t>
+            </a:r>
+          </a:p>
+          <a:p>
+            <a:r>
+              <a:t>Judge the next step first, then the quality of the answer, then task-specific checks.</a:t>
+            </a:r>
+          </a:p>
+          <a:p/>
+          <a:p>
+            <a:r>
+              <a:t>DEFINITION</a:t>
+            </a:r>
+          </a:p>
+          <a:p>
+            <a:r>
+              <a:t>A judge is an LLM evaluator. Its reason matters as much as its score.</a:t>
+            </a:r>
+          </a:p>
+          <a:p/>
+          <a:p>
+            <a:r>
+              <a:t>TALK TRACK</a:t>
+            </a:r>
+          </a:p>
+          <a:p>
+            <a:r>
+              <a:t>These are the evaluators we actually run. The next-action judge is a custom prompt evaluator: pass/fail against a reference answer, and its reason starts with what the tools did, for example 'used the line-manager lookup instead of the required higher-level route'. That reason is what the optimizer learns from: Microsoft's own lesson is that the reflector only sees what the evaluator returns. The rubric scores weighted dimensions such as approval route, current approver and citations. Per-question criteria are specific checks, such as 'asks for the total cost first', which the optimizer also uses. Built-in evaluators such as Groundedness exist; we chose task-specific ones because the failure we care about is a wrong approver, not an unsupported claim. The rubric evaluator is in preview.</a:t>
+            </a:r>
+          </a:p>
+          <a:p/>
+          <a:p>
+            <a:r>
+              <a:t>TRANSITION</a:t>
+            </a:r>
+          </a:p>
+          <a:p>
+            <a:r>
+              <a:t>Let's measure the starting agent against these criteria across purchasing cases.</a:t>
+            </a:r>
+          </a:p>
+          <a:p/>
+          <a:p>
+            <a:r>
+              <a:t>SOURCES</a:t>
+            </a:r>
+          </a:p>
+          <a:p>
+            <a:r>
+              <a:t>Microsoft Learn: rubric evaluators https://learn.microsoft.com/en-us/azure/foundry/concepts/evaluation-evaluators/rubric-evaluators ; Microsoft Foundry blog: Six lessons for reliable Agent Optimizer gains on harder agents https://techcommunity.microsoft.com/blog/azure-ai-foundry-blog/six-lessons-for-reliable-agent-optimizer-gains-on-harder-agents/4551357</a:t>
             </a:r>
           </a:p>
         </p:txBody>
@@ -720,21 +818,79 @@
           <a:lstStyle/>
           <a:p>
             <a:r>
-              <a:rPr lang="en-US" dirty="0"/>
-              <a:t>Demo 4 - Evaluate Across Cases
-Suggested timing: 6 minutes
-KEY MESSAGE
-Measure consistency across cases, not just the opening answer.
-DEFINITION
-Tokens are units of model input and output; response time is the user's end-to-end wait.
-TALK TRACK
-Open the baseline evaluation across valid and expired exceptions, different purchase types and missing information. Inspect per-case Groundedness, Customer Satisfaction and Rubric results alongside response time, tokens, tool calls and estimated cost. Repeat representative cases to assess variation. Identify measured opportunities: more consistent task completion, clearer responses or lower cost while preserving quality. Save the baseline before opening any Optimizer candidates.
-DEMO CHECKPOINT
-04-evaluate: freeze the baseline configuration, dataset, rubric and report. Record per-case results and operational metrics; choose the optimisation objective from this evidence.
-TRANSITION
-Use these results to set the optimisation goal, then keep the tests fixed.
-SOURCES
-Microsoft Foundry model comparison and evaluation demonstration.</a:t>
+              <a:t>Demo 4 - Evaluate Across Cases</a:t>
+            </a:r>
+          </a:p>
+          <a:p/>
+          <a:p>
+            <a:r>
+              <a:t>Suggested timing: 6 minutes</a:t>
+            </a:r>
+          </a:p>
+          <a:p/>
+          <a:p>
+            <a:r>
+              <a:t>KEY MESSAGE</a:t>
+            </a:r>
+          </a:p>
+          <a:p>
+            <a:r>
+              <a:t>Measure consistency across cases, not just the opening answer.</a:t>
+            </a:r>
+          </a:p>
+          <a:p/>
+          <a:p>
+            <a:r>
+              <a:t>DEFINITION</a:t>
+            </a:r>
+          </a:p>
+          <a:p>
+            <a:r>
+              <a:t>Tokens are units of model input and output; response time is the user's end-to-end wait.</a:t>
+            </a:r>
+          </a:p>
+          <a:p/>
+          <a:p>
+            <a:r>
+              <a:t>TALK TRACK</a:t>
+            </a:r>
+          </a:p>
+          <a:p>
+            <a:r>
+              <a:t>Open the holdout evaluation run in Foundry: 22 questions, with different departments, people and dates from the ones the optimizer trains on. Baseline: 18 of 22. Click Wen Li, $9,300 of laptops: sent to her line manager instead of the Category Manager, the same failure as Marcus. Read the judge's reason. Tell the earlier story briefly: with our first mock search tool the baseline scored 12 of 18; fixing two tools, not the prompt, took it to 18 of 18, so we added harder questions. Two runs of the same agent differ by about one question, so only trust changes of two or more.</a:t>
+            </a:r>
+          </a:p>
+          <a:p/>
+          <a:p>
+            <a:r>
+              <a:t>DEMO CHECKPOINT</a:t>
+            </a:r>
+          </a:p>
+          <a:p>
+            <a:r>
+              <a:t>Prepared run: the 18/22 holdout evaluation, open in a tab, with Wen Li's row ready. Screenshot it as a backup.</a:t>
+            </a:r>
+          </a:p>
+          <a:p/>
+          <a:p>
+            <a:r>
+              <a:t>TRANSITION</a:t>
+            </a:r>
+          </a:p>
+          <a:p>
+            <a:r>
+              <a:t>Use these results to set the optimisation goal, then keep the tests fixed.</a:t>
+            </a:r>
+          </a:p>
+          <a:p/>
+          <a:p>
+            <a:r>
+              <a:t>SOURCES</a:t>
+            </a:r>
+          </a:p>
+          <a:p>
+            <a:r>
+              <a:t>Microsoft Foundry model comparison and evaluation demonstration.</a:t>
             </a:r>
           </a:p>
         </p:txBody>
@@ -820,19 +976,68 @@
           <a:lstStyle/>
           <a:p>
             <a:r>
-              <a:rPr lang="en-US" dirty="0"/>
-              <a:t>Optimise
-Suggested timing: 3 minutes
-KEY MESSAGE
-Compare candidate scores and configuration changes with the baseline.
-DEFINITION
-A baseline is the starting configuration; candidates are alternatives generated and evaluated by Agent Optimizer.
-TALK TRACK
-The primary experiment is more consistent answers across purchasing cases. Compare candidate instructions, tool descriptions and model choices against fixed criteria. Alongside quality, inspect response time and estimated cost. If the baseline already meets the quality requirement, investigate whether another configuration preserves it at lower cost.
-TRANSITION
-Let's open the Optimizer run and compare the candidates.
-SOURCES
-Microsoft Foundry Agent Optimizer concepts.</a:t>
+              <a:t>Optimise</a:t>
+            </a:r>
+          </a:p>
+          <a:p/>
+          <a:p>
+            <a:r>
+              <a:t>Suggested timing: 3 minutes</a:t>
+            </a:r>
+          </a:p>
+          <a:p/>
+          <a:p>
+            <a:r>
+              <a:t>KEY MESSAGE</a:t>
+            </a:r>
+          </a:p>
+          <a:p>
+            <a:r>
+              <a:t>Compare candidate scores and configuration changes with the baseline.</a:t>
+            </a:r>
+          </a:p>
+          <a:p/>
+          <a:p>
+            <a:r>
+              <a:t>DEFINITION</a:t>
+            </a:r>
+          </a:p>
+          <a:p>
+            <a:r>
+              <a:t>A baseline is the starting configuration; candidates are alternatives generated and evaluated by Agent Optimizer.</a:t>
+            </a:r>
+          </a:p>
+          <a:p/>
+          <a:p>
+            <a:r>
+              <a:t>TALK TRACK</a:t>
+            </a:r>
+          </a:p>
+          <a:p>
+            <a:r>
+              <a:t>The optimizer evaluates the baseline, reflects on failed practice questions, proposes a change, tests it on a few training questions, then scores it on the holdout it never trains on. Microsoft's guidance: changes under 0.03 are noise, 0.03 to 0.10 are moderate. Land the takeaway: fix the tools first. The optimizer refines a working agent; it doesn't rescue a broken one. Our first runs started from a broken search tool, and the optimizer learned to memorise its way around it.</a:t>
+            </a:r>
+          </a:p>
+          <a:p/>
+          <a:p>
+            <a:r>
+              <a:t>TRANSITION</a:t>
+            </a:r>
+          </a:p>
+          <a:p>
+            <a:r>
+              <a:t>Let's open the Optimizer run and compare the candidates.</a:t>
+            </a:r>
+          </a:p>
+          <a:p/>
+          <a:p>
+            <a:r>
+              <a:t>SOURCES</a:t>
+            </a:r>
+          </a:p>
+          <a:p>
+            <a:r>
+              <a:t>Microsoft Learn: Agent optimizer overview (score interpretation); Microsoft Foundry blog: Six lessons for reliable Agent Optimizer gains on harder agents.</a:t>
             </a:r>
           </a:p>
         </p:txBody>
@@ -918,21 +1123,79 @@
           <a:lstStyle/>
           <a:p>
             <a:r>
-              <a:rPr lang="en-US" dirty="0"/>
-              <a:t>Demo 5 - Agent Optimizer
-Suggested timing: 6 minutes
-KEY MESSAGE
-Inspect the evidence behind the recommended candidate.
-DEFINITION
-The optional validation dataset supplies separate evaluation cases within the optimisation run.
-TALK TRACK
-Show the stage playbook command azd ai agent optimize --config eval.yaml, then open its completed run. Compare per-case rubric results, built-in scores, response time and estimated cost with the frozen baseline. Inspect the actual configuration diff and optional validation dataset. Revisit the opening question and a changed date or purchase type. Apply a candidate only if the evidence supports the trade-off; otherwise keep the baseline.
-DEMO CHECKPOINT
-05-optimise: preserve the operation ID, candidate IDs, reports and configuration diff. Record azd ai agent optimize status OPERATION_ID --watch and azd ai agent optimize apply --candidate CANDIDATE_ID in the playbook. Applying selects configuration; release checks precede deployment.
-TRANSITION
-Carry the same evidence into the release process.
-SOURCES
-Microsoft Learn: Optimize agent instructions, skills, tools, and models; Agent optimizer cost and token usage overview. Checked 24 September 2026.</a:t>
+              <a:t>Demo 5 - Agent Optimizer</a:t>
+            </a:r>
+          </a:p>
+          <a:p/>
+          <a:p>
+            <a:r>
+              <a:t>Suggested timing: 6 minutes</a:t>
+            </a:r>
+          </a:p>
+          <a:p/>
+          <a:p>
+            <a:r>
+              <a:t>KEY MESSAGE</a:t>
+            </a:r>
+          </a:p>
+          <a:p>
+            <a:r>
+              <a:t>Inspect the evidence behind the recommended candidate.</a:t>
+            </a:r>
+          </a:p>
+          <a:p/>
+          <a:p>
+            <a:r>
+              <a:t>DEFINITION</a:t>
+            </a:r>
+          </a:p>
+          <a:p>
+            <a:r>
+              <a:t>The optional validation dataset supplies separate evaluation cases within the optimisation run.</a:t>
+            </a:r>
+          </a:p>
+          <a:p/>
+          <a:p>
+            <a:r>
+              <a:t>TALK TRACK</a:t>
+            </a:r>
+          </a:p>
+          <a:p>
+            <a:r>
+              <a:t>Open the agent's Optimize tab and the completed run. Best candidate: 0.691 on the holdout, +0.078, a moderate gain. Click View changes and sort what you see into two piles. Rules: answer-first wording, no extra 'confirm the approval is recorded' step, budget kept to one sentence. Copied facts: training names and amounts, some hidden in the tool descriptions where reviewers rarely look: Quentin Blake, 'Grace already approved', $460 printer toner on 27 October. And the rule that mattered, find the role the policy requires before looking up who holds it, isn't there. The score went up; that doesn't mean you ship it.</a:t>
+            </a:r>
+          </a:p>
+          <a:p/>
+          <a:p>
+            <a:r>
+              <a:t>DEMO CHECKPOINT</a:t>
+            </a:r>
+          </a:p>
+          <a:p>
+            <a:r>
+              <a:t>Prepared run: Optimize tab open on the completed run, with View changes ready on the instructions and on the ask tool description. Screenshot both. The candidate is saved in sample/evaluation/candidates/optimiser-0.691/.</a:t>
+            </a:r>
+          </a:p>
+          <a:p/>
+          <a:p>
+            <a:r>
+              <a:t>TRANSITION</a:t>
+            </a:r>
+          </a:p>
+          <a:p>
+            <a:r>
+              <a:t>Carry the same evidence into the release process.</a:t>
+            </a:r>
+          </a:p>
+          <a:p/>
+          <a:p>
+            <a:r>
+              <a:t>SOURCES</a:t>
+            </a:r>
+          </a:p>
+          <a:p>
+            <a:r>
+              <a:t>Microsoft Learn: Optimize agent instructions, skills, tools, and models; Agent optimizer cost and token usage overview. Checked 24 September 2026.</a:t>
             </a:r>
           </a:p>
         </p:txBody>
@@ -1165,7 +1428,7 @@
           <a:lstStyle/>
           <a:p>
             <a:r>
-              <a:t>Demo 6 - The PR that goes red</a:t>
+              <a:t>Demo 6 - The check that goes red</a:t>
             </a:r>
           </a:p>
           <a:p/>
@@ -1182,7 +1445,7 @@
           </a:p>
           <a:p>
             <a:r>
-              <a:t>The workflow must show why a change stopped.</a:t>
+              <a:t>The cheapest check catches the copied facts in a second.</a:t>
             </a:r>
           </a:p>
           <a:p/>
@@ -1204,7 +1467,7 @@
           </a:p>
           <a:p>
             <a:r>
-              <a:t>Open a pull request containing the optimizer's fact-stuffed candidate. The fact check goes red first, showing the copied names and amounts. Then show the drift-set result: on 27 October, Tim is back, and the stuffed prompt still sends the employee to Priya. The baseline, which looks it up, gets it right. Merge blocked.</a:t>
+              <a:t>In the terminal, run check_prompt_facts.py with the baseline and the optimizer's candidate (playbook command). One second, no model: it lists the seven copied facts. Then switch to GitHub: the same script is the first step of the pull-request workflow, before any evaluation spends money. Show the workflow file and one completed run. Close the loop: a person keeps the good rules, removes the copied facts and adds the missing role rule. That reviewed version is in candidates/reviewed, and it goes through the same gate.</a:t>
             </a:r>
           </a:p>
           <a:p/>
@@ -1215,7 +1478,7 @@
           </a:p>
           <a:p>
             <a:r>
-              <a:t>06-automate: keep the stuffed candidate as a separate, resettable branch with its exact diff and the failing workflow run ID.</a:t>
+              <a:t>Live: the fact-check command. Prepared: the GitHub Actions tab with one completed workflow run. If CI isn't working on the day, use slides 14 and 15 with the live command.</a:t>
             </a:r>
           </a:p>
           <a:p/>
@@ -1470,19 +1733,68 @@
           <a:lstStyle/>
           <a:p>
             <a:r>
-              <a:rPr lang="en-US" dirty="0"/>
-              <a:t>Worth exploring next
-Suggested timing: 1 minutes
-KEY MESSAGE
-Six next steps for extending the purchasing agent.
-DEFINITION
-Human annotation assesses an answer; human approval authorises an action.
-TALK TRACK
-Spend no more than one minute signposting these topics. Human annotation captures expert assessments: explicitly curate that feedback into better criteria and tests rather than imply automatic learning. Synthetic data expands purchase types, dates and ambiguous requests; review generated cases. AI Red Teaming probes adversarial behaviour, while guardrails such as Prompt Shields help detect malicious instructions in requests and retrieved emails or documents. Identity and permissions limit real enterprise access. Human approval workflows are an extension beyond our advice-only agent: pause before submitting a purchase request and resume after an authorised decision. Human Evaluation, synthetic data generation and the documented long-running hosted-agent approval workflow are in preview; verify availability and agent support before implementation.
-TRANSITION
-Return to the complete process, then take questions.
-SOURCES
-Microsoft Learn, checked 24 September 2026: Human Evaluation https://learn.microsoft.com/en-us/azure/foundry/observability/how-to/human-evaluation ; Synthetic Test Data https://learn.microsoft.com/en-us/azure/foundry/observability/how-to/evaluation-dataset-synthetic ; AI Red Teaming https://learn.microsoft.com/en-us/azure/foundry/concepts/ai-red-teaming-agent ; Prompt Shields https://learn.microsoft.com/en-us/azure/foundry/openai/concepts/content-filter-prompt-shields ; Agent Identity https://learn.microsoft.com/en-us/azure/foundry/agents/concepts/agent-identity ; Human Approval https://learn.microsoft.com/en-us/azure/foundry/agents/how-to/add-human-in-the-loop</a:t>
+              <a:t>Worth exploring next</a:t>
+            </a:r>
+          </a:p>
+          <a:p/>
+          <a:p>
+            <a:r>
+              <a:t>Suggested timing: 1 minutes</a:t>
+            </a:r>
+          </a:p>
+          <a:p/>
+          <a:p>
+            <a:r>
+              <a:t>KEY MESSAGE</a:t>
+            </a:r>
+          </a:p>
+          <a:p>
+            <a:r>
+              <a:t>Six next steps for extending the purchasing agent.</a:t>
+            </a:r>
+          </a:p>
+          <a:p/>
+          <a:p>
+            <a:r>
+              <a:t>DEFINITION</a:t>
+            </a:r>
+          </a:p>
+          <a:p>
+            <a:r>
+              <a:t>Human annotation assesses an answer; human approval authorises an action.</a:t>
+            </a:r>
+          </a:p>
+          <a:p/>
+          <a:p>
+            <a:r>
+              <a:t>TALK TRACK</a:t>
+            </a:r>
+          </a:p>
+          <a:p>
+            <a:r>
+              <a:t>Spend no more than one minute signposting these topics. Human annotation captures expert assessments: explicitly curate that feedback into better criteria and tests rather than imply automatic learning. Synthetic data expands purchase types, dates and ambiguous requests; review generated cases. AI Red Teaming probes adversarial behaviour, while guardrails such as Prompt Shields help detect malicious instructions in requests and retrieved emails or documents. Identity and permissions limit real enterprise access. Human approval workflows are an extension beyond our advice-only agent: pause before submitting a purchase request and resume after an authorised decision. Human Evaluation, synthetic data generation and the documented long-running hosted-agent approval workflow are in preview; verify availability and agent support before implementation.</a:t>
+            </a:r>
+          </a:p>
+          <a:p/>
+          <a:p>
+            <a:r>
+              <a:t>TRANSITION</a:t>
+            </a:r>
+          </a:p>
+          <a:p>
+            <a:r>
+              <a:t>Return to the complete process, then take questions.</a:t>
+            </a:r>
+          </a:p>
+          <a:p/>
+          <a:p>
+            <a:r>
+              <a:t>SOURCES</a:t>
+            </a:r>
+          </a:p>
+          <a:p>
+            <a:r>
+              <a:t>Microsoft Learn, checked 24 September 2026: Human Evaluation https://learn.microsoft.com/en-us/azure/foundry/observability/how-to/human-evaluation ; Synthetic Test Data https://learn.microsoft.com/en-us/azure/foundry/observability/how-to/evaluation-dataset-synthetic ; AI Red Teaming https://learn.microsoft.com/en-us/azure/foundry/concepts/ai-red-teaming-agent ; Prompt Shields https://learn.microsoft.com/en-us/azure/foundry/openai/concepts/content-filter-prompt-shields ; Agent Identity https://learn.microsoft.com/en-us/azure/foundry/agents/concepts/agent-identity ; Human Approval https://learn.microsoft.com/en-us/azure/foundry/agents/how-to/add-human-in-the-loop</a:t>
             </a:r>
           </a:p>
         </p:txBody>
@@ -1568,19 +1880,68 @@
           <a:lstStyle/>
           <a:p>
             <a:r>
-              <a:rPr lang="en-US" dirty="0"/>
-              <a:t>Build measure improve repeat
-Suggested timing: 10 minutes
-KEY MESSAGE
-Build, measure, improve and repeat.
-DEFINITION
-No new definition. This slide summarises the complete process.
-TALK TRACK
-Close on one working agent, consistent answers, measured trade-offs and repeatable release checks. Return to the six stage playbooks: each records what changed, how it was run and the evidence collected. Discuss what the measured runs demonstrated and which configuration was retained, then take questions.
-TRANSITION
-Move into questions.
-SOURCES
-Session synthesis.</a:t>
+              <a:t>Build measure improve repeat</a:t>
+            </a:r>
+          </a:p>
+          <a:p/>
+          <a:p>
+            <a:r>
+              <a:t>Suggested timing: 10 minutes</a:t>
+            </a:r>
+          </a:p>
+          <a:p/>
+          <a:p>
+            <a:r>
+              <a:t>KEY MESSAGE</a:t>
+            </a:r>
+          </a:p>
+          <a:p>
+            <a:r>
+              <a:t>Build, measure, improve and repeat.</a:t>
+            </a:r>
+          </a:p>
+          <a:p/>
+          <a:p>
+            <a:r>
+              <a:t>DEFINITION</a:t>
+            </a:r>
+          </a:p>
+          <a:p>
+            <a:r>
+              <a:t>No new definition. This slide summarises the complete process.</a:t>
+            </a:r>
+          </a:p>
+          <a:p/>
+          <a:p>
+            <a:r>
+              <a:t>TALK TRACK</a:t>
+            </a:r>
+          </a:p>
+          <a:p>
+            <a:r>
+              <a:t>Close on one working agent, consistent answers, measured trade-offs and repeatable release checks. Return to the six stage playbooks: each records what changed, how it was run and the evidence collected. Discuss what the measured runs demonstrated and which configuration was retained, then take questions.</a:t>
+            </a:r>
+          </a:p>
+          <a:p/>
+          <a:p>
+            <a:r>
+              <a:t>TRANSITION</a:t>
+            </a:r>
+          </a:p>
+          <a:p>
+            <a:r>
+              <a:t>Move into questions.</a:t>
+            </a:r>
+          </a:p>
+          <a:p/>
+          <a:p>
+            <a:r>
+              <a:t>SOURCES</a:t>
+            </a:r>
+          </a:p>
+          <a:p>
+            <a:r>
+              <a:t>Session synthesis.</a:t>
             </a:r>
           </a:p>
         </p:txBody>
@@ -1716,7 +2077,7 @@
           </a:p>
           <a:p>
             <a:r>
-              <a:t>Let's open a pull request that should fail.</a:t>
+              <a:t>Let's run that first check on the optimizer's candidate.</a:t>
             </a:r>
           </a:p>
           <a:p/>
@@ -1797,19 +2158,68 @@
           <a:lstStyle/>
           <a:p>
             <a:r>
-              <a:rPr lang="en-US" dirty="0"/>
-              <a:t>Agenda
-Suggested timing: 1 minutes
-KEY MESSAGE
-Model Choice, Grounding, Observe, Evaluate, Optimise, Automate.
-DEFINITION
-These are the six topics we will cover, in presentation order.
-TALK TRACK
-Introduce the six topics and their corresponding stage folders. One shared agent implementation runs throughout; each stage records configuration, actions and evidence. Observe and Evaluate add visibility and measurement without requiring a different agent.
-TRANSITION
-First, meet the agent we'll use throughout the session.
-SOURCES
-Session structure.</a:t>
+              <a:t>Agenda</a:t>
+            </a:r>
+          </a:p>
+          <a:p/>
+          <a:p>
+            <a:r>
+              <a:t>Suggested timing: 1 minutes</a:t>
+            </a:r>
+          </a:p>
+          <a:p/>
+          <a:p>
+            <a:r>
+              <a:t>KEY MESSAGE</a:t>
+            </a:r>
+          </a:p>
+          <a:p>
+            <a:r>
+              <a:t>Model Choice, Grounding, Observe, Evaluate, Optimise, Automate.</a:t>
+            </a:r>
+          </a:p>
+          <a:p/>
+          <a:p>
+            <a:r>
+              <a:t>DEFINITION</a:t>
+            </a:r>
+          </a:p>
+          <a:p>
+            <a:r>
+              <a:t>These are the six topics we will cover, in presentation order.</a:t>
+            </a:r>
+          </a:p>
+          <a:p/>
+          <a:p>
+            <a:r>
+              <a:t>TALK TRACK</a:t>
+            </a:r>
+          </a:p>
+          <a:p>
+            <a:r>
+              <a:t>Introduce the six topics and their corresponding stage folders. One shared agent implementation runs throughout; each stage records configuration, actions and evidence. Observe and Evaluate add visibility and measurement without requiring a different agent.</a:t>
+            </a:r>
+          </a:p>
+          <a:p/>
+          <a:p>
+            <a:r>
+              <a:t>TRANSITION</a:t>
+            </a:r>
+          </a:p>
+          <a:p>
+            <a:r>
+              <a:t>First, meet the agent we'll use throughout the session.</a:t>
+            </a:r>
+          </a:p>
+          <a:p/>
+          <a:p>
+            <a:r>
+              <a:t>SOURCES</a:t>
+            </a:r>
+          </a:p>
+          <a:p>
+            <a:r>
+              <a:t>Session structure.</a:t>
             </a:r>
           </a:p>
         </p:txBody>
@@ -2042,19 +2452,68 @@
           <a:lstStyle/>
           <a:p>
             <a:r>
-              <a:rPr lang="en-US" dirty="0"/>
-              <a:t>Model Choice
-Suggested timing: 2 minutes
-KEY MESSAGE
-The first choice is normally which model to use.
-DEFINITION
-Quality, speed and cost are different priorities when choosing a model.
-TALK TRACK
-Model 1 handles complex reasoning, at higher cost and with slower responses. Model 2 prioritises speed but is less capable on complex tasks. Model 3 keeps high-volume work inexpensive but is less suited to nuanced requests. Compare the trade-offs in Foundry, then revisit the starting choice with task-specific evaluations.
-TRANSITION
-Open the Foundry portal to compare real models and see where Model Router fits.
-SOURCES
-Session framing.</a:t>
+              <a:t>Model Choice</a:t>
+            </a:r>
+          </a:p>
+          <a:p/>
+          <a:p>
+            <a:r>
+              <a:t>Suggested timing: 2 minutes</a:t>
+            </a:r>
+          </a:p>
+          <a:p/>
+          <a:p>
+            <a:r>
+              <a:t>KEY MESSAGE</a:t>
+            </a:r>
+          </a:p>
+          <a:p>
+            <a:r>
+              <a:t>The first choice is normally which model to use.</a:t>
+            </a:r>
+          </a:p>
+          <a:p/>
+          <a:p>
+            <a:r>
+              <a:t>DEFINITION</a:t>
+            </a:r>
+          </a:p>
+          <a:p>
+            <a:r>
+              <a:t>Quality, speed and cost are different priorities when choosing a model.</a:t>
+            </a:r>
+          </a:p>
+          <a:p/>
+          <a:p>
+            <a:r>
+              <a:t>TALK TRACK</a:t>
+            </a:r>
+          </a:p>
+          <a:p>
+            <a:r>
+              <a:t>Model 1 handles complex reasoning, at higher cost and with slower responses. Model 2 prioritises speed but is less capable on complex tasks. Model 3 keeps high-volume work inexpensive but is less suited to nuanced requests. Compare the trade-offs in Foundry, then revisit the starting choice with task-specific evaluations.</a:t>
+            </a:r>
+          </a:p>
+          <a:p/>
+          <a:p>
+            <a:r>
+              <a:t>TRANSITION</a:t>
+            </a:r>
+          </a:p>
+          <a:p>
+            <a:r>
+              <a:t>Open the Foundry portal to compare real models and see where Model Router fits.</a:t>
+            </a:r>
+          </a:p>
+          <a:p/>
+          <a:p>
+            <a:r>
+              <a:t>SOURCES</a:t>
+            </a:r>
+          </a:p>
+          <a:p>
+            <a:r>
+              <a:t>Session framing.</a:t>
             </a:r>
           </a:p>
         </p:txBody>
@@ -2140,21 +2599,79 @@
           <a:lstStyle/>
           <a:p>
             <a:r>
-              <a:rPr lang="en-US" dirty="0"/>
-              <a:t>Demo 1 - Foundry Model Comparison
-Suggested timing: 3 minutes
-KEY MESSAGE
-The first model choice is a hypothesis.
-DEFINITION
-A starting configuration is an engineering choice that must later be tested against the real business task.
-TALK TRACK
-Compare a small fixed-model shortlist and Model Router in Foundry. Record the starting model or routing configuration and explain the choice. Keep later baseline comparisons tied to that exact configuration.
-DEMO CHECKPOINT
-01-model-choice: save the starting model/configuration and portal comparison evidence. The stage playbook records prerequisites, commands, portal steps and the reset procedure.
-TRANSITION
-Now give the starting agent the organisational context it needs.
-SOURCES
-Microsoft Foundry model catalog and Model Router demonstration.</a:t>
+              <a:t>Demo 1 - Foundry Model Comparison</a:t>
+            </a:r>
+          </a:p>
+          <a:p/>
+          <a:p>
+            <a:r>
+              <a:t>Suggested timing: 3 minutes</a:t>
+            </a:r>
+          </a:p>
+          <a:p/>
+          <a:p>
+            <a:r>
+              <a:t>KEY MESSAGE</a:t>
+            </a:r>
+          </a:p>
+          <a:p>
+            <a:r>
+              <a:t>The first model choice is a hypothesis.</a:t>
+            </a:r>
+          </a:p>
+          <a:p/>
+          <a:p>
+            <a:r>
+              <a:t>DEFINITION</a:t>
+            </a:r>
+          </a:p>
+          <a:p>
+            <a:r>
+              <a:t>A starting configuration is an engineering choice that must later be tested against the real business task.</a:t>
+            </a:r>
+          </a:p>
+          <a:p/>
+          <a:p>
+            <a:r>
+              <a:t>TALK TRACK</a:t>
+            </a:r>
+          </a:p>
+          <a:p>
+            <a:r>
+              <a:t>Compare a small fixed-model shortlist and Model Router in Foundry. Record the starting model or routing configuration and explain the choice. Keep later baseline comparisons tied to that exact configuration.</a:t>
+            </a:r>
+          </a:p>
+          <a:p/>
+          <a:p>
+            <a:r>
+              <a:t>DEMO CHECKPOINT</a:t>
+            </a:r>
+          </a:p>
+          <a:p>
+            <a:r>
+              <a:t>01-model-choice: save the starting model/configuration and portal comparison evidence. The stage playbook records prerequisites, commands, portal steps and the reset procedure.</a:t>
+            </a:r>
+          </a:p>
+          <a:p/>
+          <a:p>
+            <a:r>
+              <a:t>TRANSITION</a:t>
+            </a:r>
+          </a:p>
+          <a:p>
+            <a:r>
+              <a:t>Now give the starting agent the organisational context it needs.</a:t>
+            </a:r>
+          </a:p>
+          <a:p/>
+          <a:p>
+            <a:r>
+              <a:t>SOURCES</a:t>
+            </a:r>
+          </a:p>
+          <a:p>
+            <a:r>
+              <a:t>Microsoft Foundry model catalog and Model Router demonstration.</a:t>
             </a:r>
           </a:p>
         </p:txBody>
@@ -2426,7 +2943,7 @@
           </a:p>
           <a:p>
             <a:r>
-              <a:t>Run the opening question with Foundry IQ and the sample Work IQ adapter available. Read the actual answer: it should ask whether alcohol is included. Answer 'yes, there is wine' and show it find the current approver: Hospitality Lead approval is needed, Tim is on leave, Priya holds the recorded delegation. Save the configuration, source versions, question, answer and run ID. A correct first answer is the starting point for measuring consistency across cases.</a:t>
+              <a:t>Ask the dinner question first (playbook command). It should ask about alcohol; reply 'Yes, there will be wine.' Hospitality Lead approval is needed, Tim is on leave, and the Approvals Register records Priya as his delegate: Work IQ doing its job. Then ask the second question: Marcus Webb in Engineering, 21 October, a $6,800 video-conferencing system with two quotes. Expect a confident answer: Samuel is on leave and Leah Fischer holds his delegation, so ask Leah. It used Work IQ, checked leave, found the delegation and cited everything, and it is wrong: above $5,000 the policy needs Category Manager approval, and Marco is away until 2 November with no delegate. It asked Work IQ the wrong question. One question can't tell you how often this happens; that's what evaluation is for.</a:t>
             </a:r>
           </a:p>
           <a:p/>
@@ -2437,7 +2954,7 @@
           </a:p>
           <a:p>
             <a:r>
-              <a:t>02-grounding: save a working baseline, source fixtures and the run ID. Use the saved run if the live service is unavailable, identifying it as a prepared run.</a:t>
+              <a:t>Rehearse the Marcus question three times. If it ever answers correctly, say so and move on: Demo 4 shows the same failure in a recorded run (Wen Li, $9,300). Screenshot both answers as a backup.</a:t>
             </a:r>
           </a:p>
           <a:p/>
@@ -2545,19 +3062,68 @@
           <a:lstStyle/>
           <a:p>
             <a:r>
-              <a:rPr lang="en-US" dirty="0"/>
-              <a:t>Observe
-Suggested timing: 2 minutes
-KEY MESSAGE
-Inspect the calls, inputs and outputs behind the answer.
-DEFINITION
-A trace records LLM calls, tool calls and timings, with captured prompts and responses.
-TALK TRACK
-Introduce the three things to inspect: call order, inputs and outputs, and duration. Explain how these let us reconstruct a run. Ask what evidence the audience would look for in the trace.
-TRANSITION
-Let's follow the run that produced this answer.
-SOURCES
-Microsoft Foundry observability concepts.</a:t>
+              <a:t>Observe</a:t>
+            </a:r>
+          </a:p>
+          <a:p/>
+          <a:p>
+            <a:r>
+              <a:t>Suggested timing: 2 minutes</a:t>
+            </a:r>
+          </a:p>
+          <a:p/>
+          <a:p>
+            <a:r>
+              <a:t>KEY MESSAGE</a:t>
+            </a:r>
+          </a:p>
+          <a:p>
+            <a:r>
+              <a:t>Inspect the calls, inputs and outputs behind the answer.</a:t>
+            </a:r>
+          </a:p>
+          <a:p/>
+          <a:p>
+            <a:r>
+              <a:t>DEFINITION</a:t>
+            </a:r>
+          </a:p>
+          <a:p>
+            <a:r>
+              <a:t>A trace records LLM calls, tool calls and timings, with captured prompts and responses.</a:t>
+            </a:r>
+          </a:p>
+          <a:p/>
+          <a:p>
+            <a:r>
+              <a:t>TALK TRACK</a:t>
+            </a:r>
+          </a:p>
+          <a:p>
+            <a:r>
+              <a:t>Introduce the three things to inspect: call order, inputs and outputs, and duration. Explain how these let us reconstruct a run. Ask what evidence the audience would look for in the trace.</a:t>
+            </a:r>
+          </a:p>
+          <a:p/>
+          <a:p>
+            <a:r>
+              <a:t>TRANSITION</a:t>
+            </a:r>
+          </a:p>
+          <a:p>
+            <a:r>
+              <a:t>Let's follow the run that produced this answer.</a:t>
+            </a:r>
+          </a:p>
+          <a:p/>
+          <a:p>
+            <a:r>
+              <a:t>SOURCES</a:t>
+            </a:r>
+          </a:p>
+          <a:p>
+            <a:r>
+              <a:t>Microsoft Foundry observability concepts.</a:t>
             </a:r>
           </a:p>
         </p:txBody>
@@ -2643,21 +3209,79 @@
           <a:lstStyle/>
           <a:p>
             <a:r>
-              <a:rPr lang="en-US" dirty="0"/>
-              <a:t>Demo 3 - Inspect the Trace
-Suggested timing: 4 minutes
-KEY MESSAGE
-Understand how the agent produced the answer and where it spent time.
-DEFINITION
-Tool-call inputs and outputs show what was requested and returned.
-TALK TRACK
-Open the saved baseline run and follow the LLM and tool calls, including both context sources when used. Inspect captured prompts, returned evidence, responses and timings. Discuss repeated calls or slow steps only where the trace shows them. Use the request and expected outcome as an evaluation case.
-DEMO CHECKPOINT
-03-observe: save the trace, call sequence and timing evidence. Keep the same agent configuration as stage 02.
-TRANSITION
-We've inspected one run. How consistently does the agent handle other purchasing situations?
-SOURCES
-Microsoft Foundry tracing demonstration.</a:t>
+              <a:t>Demo 3 - Inspect the Trace</a:t>
+            </a:r>
+          </a:p>
+          <a:p/>
+          <a:p>
+            <a:r>
+              <a:t>Suggested timing: 4 minutes</a:t>
+            </a:r>
+          </a:p>
+          <a:p/>
+          <a:p>
+            <a:r>
+              <a:t>KEY MESSAGE</a:t>
+            </a:r>
+          </a:p>
+          <a:p>
+            <a:r>
+              <a:t>Understand how the agent produced the answer and where it spent time.</a:t>
+            </a:r>
+          </a:p>
+          <a:p/>
+          <a:p>
+            <a:r>
+              <a:t>DEFINITION</a:t>
+            </a:r>
+          </a:p>
+          <a:p>
+            <a:r>
+              <a:t>Tool-call inputs and outputs show what was requested and returned.</a:t>
+            </a:r>
+          </a:p>
+          <a:p/>
+          <a:p>
+            <a:r>
+              <a:t>TALK TRACK</a:t>
+            </a:r>
+          </a:p>
+          <a:p>
+            <a:r>
+              <a:t>Open the saved baseline run and follow the LLM and tool calls, including both context sources when used. Inspect captured prompts, returned evidence, responses and timings. Discuss repeated calls or slow steps only where the trace shows them. Use the request and expected outcome as an evaluation case.</a:t>
+            </a:r>
+          </a:p>
+          <a:p/>
+          <a:p>
+            <a:r>
+              <a:t>DEMO CHECKPOINT</a:t>
+            </a:r>
+          </a:p>
+          <a:p>
+            <a:r>
+              <a:t>03-observe: save the trace, call sequence and timing evidence. Keep the same agent configuration as stage 02.</a:t>
+            </a:r>
+          </a:p>
+          <a:p/>
+          <a:p>
+            <a:r>
+              <a:t>TRANSITION</a:t>
+            </a:r>
+          </a:p>
+          <a:p>
+            <a:r>
+              <a:t>We've inspected one run. How consistently does the agent handle other purchasing situations?</a:t>
+            </a:r>
+          </a:p>
+          <a:p/>
+          <a:p>
+            <a:r>
+              <a:t>SOURCES</a:t>
+            </a:r>
+          </a:p>
+          <a:p>
+            <a:r>
+              <a:t>Microsoft Foundry tracing demonstration.</a:t>
             </a:r>
           </a:p>
         </p:txBody>
@@ -3919,7 +4543,7 @@
                   <a:ea typeface="Arial" pitchFamily="34" charset="-122"/>
                   <a:cs typeface="Arial" pitchFamily="34" charset="-120"/>
                 </a:rPr>
-                <a:t>G</a:t>
+                <a:t>J</a:t>
               </a:r>
               <a:endParaRPr lang="en-US" sz="1200" dirty="0"/>
             </a:p>
@@ -3958,7 +4582,7 @@
                   <a:ea typeface="Arial" pitchFamily="34" charset="-122"/>
                   <a:cs typeface="Arial" pitchFamily="34" charset="-120"/>
                 </a:rPr>
-                <a:t>Groundedness</a:t>
+                <a:t>Next-action judge</a:t>
               </a:r>
               <a:endParaRPr lang="en-US" sz="1680" dirty="0"/>
             </a:p>
@@ -3997,7 +4621,7 @@
                   <a:ea typeface="Arial" pitchFamily="34" charset="-122"/>
                   <a:cs typeface="Arial" pitchFamily="34" charset="-120"/>
                 </a:rPr>
-                <a:t>Is the answer supported by the supplied</a:t>
+                <a:t>Right next step?</a:t>
               </a:r>
               <a:endParaRPr lang="en-US" sz="1140" dirty="0"/>
             </a:p>
@@ -4036,7 +4660,7 @@
                   <a:ea typeface="Arial" pitchFamily="34" charset="-122"/>
                   <a:cs typeface="Arial" pitchFamily="34" charset="-120"/>
                 </a:rPr>
-                <a:t>context?</a:t>
+                <a:t>Right approver?</a:t>
               </a:r>
               <a:endParaRPr lang="en-US" sz="1140" dirty="0"/>
             </a:p>
@@ -4113,7 +4737,7 @@
                   <a:ea typeface="Arial" pitchFamily="34" charset="-122"/>
                   <a:cs typeface="Arial" pitchFamily="34" charset="-120"/>
                 </a:rPr>
-                <a:t>Checks claims against the evidence.</a:t>
+                <a:t>Pass/fail, with a reason about the tool calls.</a:t>
               </a:r>
               <a:endParaRPr lang="en-US" sz="900" dirty="0"/>
             </a:p>
@@ -4152,7 +4776,7 @@
                   <a:ea typeface="Arial" pitchFamily="34" charset="-122"/>
                   <a:cs typeface="Arial" pitchFamily="34" charset="-120"/>
                 </a:rPr>
-                <a:t>BUILT-IN EVALUATOR</a:t>
+                <a:t>CUSTOM PROMPT EVALUATOR</a:t>
               </a:r>
               <a:endParaRPr lang="en-US" sz="720" dirty="0"/>
             </a:p>
@@ -4308,7 +4932,7 @@
                   <a:ea typeface="Arial" pitchFamily="34" charset="-122"/>
                   <a:cs typeface="Arial" pitchFamily="34" charset="-120"/>
                 </a:rPr>
-                <a:t>UX</a:t>
+                <a:t>R</a:t>
               </a:r>
               <a:endParaRPr lang="en-US" sz="1200" dirty="0"/>
             </a:p>
@@ -4347,7 +4971,7 @@
                   <a:ea typeface="Arial" pitchFamily="34" charset="-122"/>
                   <a:cs typeface="Arial" pitchFamily="34" charset="-120"/>
                 </a:rPr>
-                <a:t>Customer Satisfaction</a:t>
+                <a:t>Rubric</a:t>
               </a:r>
               <a:endParaRPr lang="en-US" sz="1680" dirty="0"/>
             </a:p>
@@ -4386,7 +5010,7 @@
                   <a:ea typeface="Arial" pitchFamily="34" charset="-122"/>
                   <a:cs typeface="Arial" pitchFamily="34" charset="-120"/>
                 </a:rPr>
-                <a:t>How satisfied would the user be with the</a:t>
+                <a:t>How well does the answer meet each</a:t>
               </a:r>
               <a:endParaRPr lang="en-US" sz="1140" dirty="0"/>
             </a:p>
@@ -4425,7 +5049,7 @@
                   <a:ea typeface="Arial" pitchFamily="34" charset="-122"/>
                   <a:cs typeface="Arial" pitchFamily="34" charset="-120"/>
                 </a:rPr>
-                <a:t>conversation?</a:t>
+                <a:t>requirement?</a:t>
               </a:r>
               <a:endParaRPr lang="en-US" sz="1140" dirty="0"/>
             </a:p>
@@ -4502,7 +5126,7 @@
                   <a:ea typeface="Arial" pitchFamily="34" charset="-122"/>
                   <a:cs typeface="Arial" pitchFamily="34" charset="-120"/>
                 </a:rPr>
-                <a:t>Assesses helpfulness, clarity and resolution.</a:t>
+                <a:t>Weighted: route, approver, citations, clarity.</a:t>
               </a:r>
               <a:endParaRPr lang="en-US" sz="900" dirty="0"/>
             </a:p>
@@ -4541,7 +5165,7 @@
                   <a:ea typeface="Arial" pitchFamily="34" charset="-122"/>
                   <a:cs typeface="Arial" pitchFamily="34" charset="-120"/>
                 </a:rPr>
-                <a:t>BUILT-IN EVALUATOR / PREVIEW</a:t>
+                <a:t>RUBRIC EVALUATOR / PREVIEW</a:t>
               </a:r>
               <a:endParaRPr lang="en-US" sz="720" dirty="0"/>
             </a:p>
@@ -4697,7 +5321,7 @@
                   <a:ea typeface="Arial" pitchFamily="34" charset="-122"/>
                   <a:cs typeface="Arial" pitchFamily="34" charset="-120"/>
                 </a:rPr>
-                <a:t>R</a:t>
+                <a:t>C</a:t>
               </a:r>
               <a:endParaRPr lang="en-US" sz="1200" dirty="0"/>
             </a:p>
@@ -4736,7 +5360,7 @@
                   <a:ea typeface="Arial" pitchFamily="34" charset="-122"/>
                   <a:cs typeface="Arial" pitchFamily="34" charset="-120"/>
                 </a:rPr>
-                <a:t>Rubric</a:t>
+                <a:t>Per-question criteria</a:t>
               </a:r>
               <a:endParaRPr lang="en-US" sz="1680" dirty="0"/>
             </a:p>
@@ -4775,7 +5399,7 @@
                   <a:ea typeface="Arial" pitchFamily="34" charset="-122"/>
                   <a:cs typeface="Arial" pitchFamily="34" charset="-120"/>
                 </a:rPr>
-                <a:t>Does the answer meet the requirements of</a:t>
+                <a:t>What must this answer get right?</a:t>
               </a:r>
               <a:endParaRPr lang="en-US" sz="1140" dirty="0"/>
             </a:p>
@@ -4814,7 +5438,7 @@
                   <a:ea typeface="Arial" pitchFamily="34" charset="-122"/>
                   <a:cs typeface="Arial" pitchFamily="34" charset="-120"/>
                 </a:rPr>
-                <a:t>this task?</a:t>
+                <a:t/>
               </a:r>
               <a:endParaRPr lang="en-US" sz="1140" dirty="0"/>
             </a:p>
@@ -4891,7 +5515,7 @@
                   <a:ea typeface="Arial" pitchFamily="34" charset="-122"/>
                   <a:cs typeface="Arial" pitchFamily="34" charset="-120"/>
                 </a:rPr>
-                <a:t>Your criteria: approval route, expiry, citations</a:t>
+                <a:t>Specific checks, such as “asks for the total</a:t>
               </a:r>
               <a:endParaRPr lang="en-US" sz="900" dirty="0"/>
             </a:p>
@@ -4930,7 +5554,7 @@
                   <a:ea typeface="Arial" pitchFamily="34" charset="-122"/>
                   <a:cs typeface="Arial" pitchFamily="34" charset="-120"/>
                 </a:rPr>
-                <a:t>and next action.</a:t>
+                <a:t>cost first”.</a:t>
               </a:r>
               <a:endParaRPr lang="en-US" sz="900" dirty="0"/>
             </a:p>
@@ -4969,7 +5593,7 @@
                   <a:ea typeface="Arial" pitchFamily="34" charset="-122"/>
                   <a:cs typeface="Arial" pitchFamily="34" charset="-120"/>
                 </a:rPr>
-                <a:t>CUSTOM CRITERIA / PREVIEW</a:t>
+                <a:t>USED BY AGENT OPTIMIZER</a:t>
               </a:r>
               <a:endParaRPr lang="en-US" sz="720" dirty="0"/>
             </a:p>
@@ -6787,6 +7411,49 @@
           </a:p>
         </p:txBody>
       </p:sp>
+      <p:sp>
+        <p:nvSpPr>
+          <p:cNvPr id="38" name="takeaway"/>
+          <p:cNvSpPr txBox="1"/>
+          <p:nvPr/>
+        </p:nvSpPr>
+        <p:spPr>
+          <a:xfrm>
+            <a:off x="975360" y="5650000"/>
+            <a:ext cx="7400000" cy="600000"/>
+          </a:xfrm>
+          <a:prstGeom prst="rect">
+            <a:avLst/>
+          </a:prstGeom>
+          <a:noFill/>
+        </p:spPr>
+        <p:txBody>
+          <a:bodyPr wrap="square" lIns="0" rIns="0" tIns="0" bIns="0">
+            <a:spAutoFit/>
+          </a:bodyPr>
+          <a:lstStyle/>
+          <a:p>
+            <a:r>
+              <a:rPr sz="1800" b="1">
+                <a:solidFill>
+                  <a:srgbClr val="DEDEDE"/>
+                </a:solidFill>
+                <a:latin typeface="Arial"/>
+              </a:rPr>
+              <a:t>Fix the tools first. </a:t>
+            </a:r>
+            <a:r>
+              <a:rPr sz="1800" b="1">
+                <a:solidFill>
+                  <a:srgbClr val="F87171"/>
+                </a:solidFill>
+                <a:latin typeface="Arial"/>
+              </a:rPr>
+              <a:t>The optimizer refines a working agent; it doesn’t rescue a broken one.</a:t>
+            </a:r>
+          </a:p>
+        </p:txBody>
+      </p:sp>
     </p:spTree>
   </p:cSld>
   <p:clrMapOvr>
@@ -6935,6 +7602,51 @@
                       </p:childTnLst>
                     </p:cTn>
                   </p:par>
+                  <p:par>
+                    <p:cTn id="15" fill="hold">
+                      <p:stCondLst>
+                        <p:cond delay="indefinite"/>
+                      </p:stCondLst>
+                      <p:childTnLst>
+                        <p:par>
+                          <p:cTn id="16" fill="hold">
+                            <p:stCondLst>
+                              <p:cond delay="0"/>
+                            </p:stCondLst>
+                            <p:childTnLst>
+                              <p:par>
+                                <p:cTn id="17" presetID="1" presetClass="entr" presetSubtype="0" fill="hold" nodeType="clickEffect">
+                                  <p:stCondLst>
+                                    <p:cond delay="0"/>
+                                  </p:stCondLst>
+                                  <p:childTnLst>
+                                    <p:set>
+                                      <p:cBhvr>
+                                        <p:cTn id="18" dur="1" fill="hold">
+                                          <p:stCondLst>
+                                            <p:cond delay="0"/>
+                                          </p:stCondLst>
+                                        </p:cTn>
+                                        <p:tgtEl>
+                                          <p:spTgt spid="38"/>
+                                        </p:tgtEl>
+                                        <p:attrNameLst>
+                                          <p:attrName>style.visibility</p:attrName>
+                                        </p:attrNameLst>
+                                      </p:cBhvr>
+                                      <p:to>
+                                        <p:strVal val="visible"/>
+                                      </p:to>
+                                    </p:set>
+                                  </p:childTnLst>
+                                </p:cTn>
+                              </p:par>
+                            </p:childTnLst>
+                          </p:cTn>
+                        </p:par>
+                      </p:childTnLst>
+                    </p:cTn>
+                  </p:par>
                 </p:childTnLst>
               </p:cTn>
               <p:prevCondLst>
@@ -7088,7 +7800,7 @@
                 <a:ea typeface="Arial" pitchFamily="34" charset="-122"/>
                 <a:cs typeface="Arial" pitchFamily="34" charset="-120"/>
               </a:rPr>
-              <a:t>Compare answer consistency, speed and cost, then inspect the</a:t>
+              <a:t>The score went up. Now read the change: which parts</a:t>
             </a:r>
             <a:endParaRPr lang="en-US" sz="1620" dirty="0"/>
           </a:p>
@@ -7127,7 +7839,7 @@
                 <a:ea typeface="Arial" pitchFamily="34" charset="-122"/>
                 <a:cs typeface="Arial" pitchFamily="34" charset="-120"/>
               </a:rPr>
-              <a:t>configuration changes.</a:t>
+              <a:t>are rules, and which are copied facts?</a:t>
             </a:r>
             <a:endParaRPr lang="en-US" sz="1620" dirty="0"/>
           </a:p>
@@ -8596,2686 +9308,6 @@
 </file>
 
 <file path=ppt/slides/slide15.xml><?xml version="1.0" encoding="utf-8"?>
-<p:sld xmlns:a="http://schemas.openxmlformats.org/drawingml/2006/main" xmlns:r="http://schemas.openxmlformats.org/officeDocument/2006/relationships" xmlns:p="http://schemas.openxmlformats.org/presentationml/2006/main">
-  <p:cSld name="Demo 6 - Release Check">
-    <p:spTree>
-      <p:nvGrpSpPr>
-        <p:cNvPr id="1" name=""/>
-        <p:cNvGrpSpPr/>
-        <p:nvPr/>
-      </p:nvGrpSpPr>
-      <p:grpSpPr>
-        <a:xfrm>
-          <a:off x="0" y="0"/>
-          <a:ext cx="0" cy="0"/>
-          <a:chOff x="0" y="0"/>
-          <a:chExt cx="0" cy="0"/>
-        </a:xfrm>
-      </p:grpSpPr>
-      <p:sp>
-        <p:nvSpPr>
-          <p:cNvPr id="2" name="static:0:text"/>
-          <p:cNvSpPr/>
-          <p:nvPr/>
-        </p:nvSpPr>
-        <p:spPr>
-          <a:xfrm>
-            <a:off x="975360" y="2343626"/>
-            <a:ext cx="814626" cy="190500"/>
-          </a:xfrm>
-          <a:prstGeom prst="rect">
-            <a:avLst/>
-          </a:prstGeom>
-          <a:noFill/>
-          <a:ln/>
-        </p:spPr>
-        <p:txBody>
-          <a:bodyPr wrap="none" lIns="0" tIns="0" rIns="0" bIns="0" rtlCol="0" anchor="ctr"/>
-          <a:lstStyle/>
-          <a:p>
-            <a:pPr marL="0" indent="0" algn="l">
-              <a:buNone/>
-            </a:pPr>
-            <a:r>
-              <a:rPr lang="en-US" sz="1200" b="1" kern="0" spc="180" dirty="0">
-                <a:solidFill>
-                  <a:srgbClr val="4DA6FF"/>
-                </a:solidFill>
-                <a:latin typeface="Arial" pitchFamily="34" charset="0"/>
-                <a:ea typeface="Arial" pitchFamily="34" charset="-122"/>
-                <a:cs typeface="Arial" pitchFamily="34" charset="-120"/>
-              </a:rPr>
-              <a:t>DEMO 6</a:t>
-            </a:r>
-            <a:endParaRPr lang="en-US" sz="1200" dirty="0"/>
-          </a:p>
-        </p:txBody>
-      </p:sp>
-      <p:sp>
-        <p:nvSpPr>
-          <p:cNvPr id="3" name="static:1:text"/>
-          <p:cNvSpPr/>
-          <p:nvPr/>
-        </p:nvSpPr>
-        <p:spPr>
-          <a:xfrm>
-            <a:off x="975360" y="2640806"/>
-            <a:ext cx="7000000" cy="624840"/>
-          </a:xfrm>
-          <a:prstGeom prst="rect">
-            <a:avLst/>
-          </a:prstGeom>
-          <a:noFill/>
-          <a:ln/>
-        </p:spPr>
-        <p:txBody>
-          <a:bodyPr wrap="none" lIns="0" tIns="0" rIns="0" bIns="0" rtlCol="0" anchor="ctr"/>
-          <a:lstStyle/>
-          <a:p>
-            <a:pPr marL="0" indent="0" algn="l">
-              <a:buNone/>
-            </a:pPr>
-            <a:r>
-              <a:rPr lang="en-US" sz="4080" b="1" kern="0" spc="-143" dirty="0">
-                <a:solidFill>
-                  <a:srgbClr val="DEDEDE"/>
-                </a:solidFill>
-                <a:latin typeface="Arial" pitchFamily="34" charset="0"/>
-                <a:ea typeface="Arial" pitchFamily="34" charset="-122"/>
-                <a:cs typeface="Arial" pitchFamily="34" charset="-120"/>
-              </a:rPr>
-              <a:t>The PR that goes red</a:t>
-            </a:r>
-            <a:endParaRPr lang="en-US" sz="4080" dirty="0"/>
-          </a:p>
-        </p:txBody>
-      </p:sp>
-      <p:sp>
-        <p:nvSpPr>
-          <p:cNvPr id="4" name="static:2:text"/>
-          <p:cNvSpPr/>
-          <p:nvPr/>
-        </p:nvSpPr>
-        <p:spPr>
-          <a:xfrm>
-            <a:off x="975360" y="3387566"/>
-            <a:ext cx="6111835" cy="259080"/>
-          </a:xfrm>
-          <a:prstGeom prst="rect">
-            <a:avLst/>
-          </a:prstGeom>
-          <a:noFill/>
-          <a:ln/>
-        </p:spPr>
-        <p:txBody>
-          <a:bodyPr wrap="none" lIns="0" tIns="0" rIns="0" bIns="0" rtlCol="0" anchor="ctr"/>
-          <a:lstStyle/>
-          <a:p>
-            <a:pPr marL="0" indent="0" algn="l">
-              <a:buNone/>
-            </a:pPr>
-            <a:r>
-              <a:rPr lang="en-US" sz="1620" dirty="0">
-                <a:solidFill>
-                  <a:srgbClr val="B0B0B0"/>
-                </a:solidFill>
-                <a:latin typeface="Arial" pitchFamily="34" charset="0"/>
-                <a:ea typeface="Arial" pitchFamily="34" charset="-122"/>
-                <a:cs typeface="Arial" pitchFamily="34" charset="-120"/>
-              </a:rPr>
-              <a:t>Open a pull request with the optimizer’s fact-stuffed candidate</a:t>
-            </a:r>
-            <a:endParaRPr lang="en-US" sz="1620" dirty="0"/>
-          </a:p>
-        </p:txBody>
-      </p:sp>
-      <p:sp>
-        <p:nvSpPr>
-          <p:cNvPr id="5" name="static:3:text"/>
-          <p:cNvSpPr/>
-          <p:nvPr/>
-        </p:nvSpPr>
-        <p:spPr>
-          <a:xfrm>
-            <a:off x="975360" y="3665220"/>
-            <a:ext cx="6111835" cy="259080"/>
-          </a:xfrm>
-          <a:prstGeom prst="rect">
-            <a:avLst/>
-          </a:prstGeom>
-          <a:noFill/>
-          <a:ln/>
-        </p:spPr>
-        <p:txBody>
-          <a:bodyPr wrap="none" lIns="0" tIns="0" rIns="0" bIns="0" rtlCol="0" anchor="ctr"/>
-          <a:lstStyle/>
-          <a:p>
-            <a:pPr marL="0" indent="0" algn="l">
-              <a:buNone/>
-            </a:pPr>
-            <a:r>
-              <a:rPr lang="en-US" sz="1620" dirty="0">
-                <a:solidFill>
-                  <a:srgbClr val="B0B0B0"/>
-                </a:solidFill>
-                <a:latin typeface="Arial" pitchFamily="34" charset="0"/>
-                <a:ea typeface="Arial" pitchFamily="34" charset="-122"/>
-                <a:cs typeface="Arial" pitchFamily="34" charset="-120"/>
-              </a:rPr>
-              <a:t>and watch the gate stop it.</a:t>
-            </a:r>
-            <a:endParaRPr lang="en-US" sz="1620" dirty="0"/>
-          </a:p>
-        </p:txBody>
-      </p:sp>
-      <p:sp>
-        <p:nvSpPr>
-          <p:cNvPr id="6" name="static:4:text"/>
-          <p:cNvSpPr/>
-          <p:nvPr/>
-        </p:nvSpPr>
-        <p:spPr>
-          <a:xfrm>
-            <a:off x="609600" y="6461760"/>
-            <a:ext cx="1539240" cy="129540"/>
-          </a:xfrm>
-          <a:prstGeom prst="rect">
-            <a:avLst/>
-          </a:prstGeom>
-          <a:noFill/>
-          <a:ln/>
-        </p:spPr>
-        <p:txBody>
-          <a:bodyPr wrap="none" lIns="0" tIns="0" rIns="0" bIns="0" rtlCol="0" anchor="ctr"/>
-          <a:lstStyle/>
-          <a:p>
-            <a:pPr marL="0" indent="0" algn="l">
-              <a:buNone/>
-            </a:pPr>
-            <a:r>
-              <a:rPr lang="en-US" sz="720" kern="0" spc="58" dirty="0">
-                <a:solidFill>
-                  <a:srgbClr val="919191"/>
-                </a:solidFill>
-                <a:latin typeface="Arial" pitchFamily="34" charset="0"/>
-                <a:ea typeface="Arial" pitchFamily="34" charset="-122"/>
-                <a:cs typeface="Arial" pitchFamily="34" charset="-120"/>
-              </a:rPr>
-              <a:t>FY27 AI GENIUS</a:t>
-            </a:r>
-            <a:endParaRPr lang="en-US" sz="720" dirty="0"/>
-          </a:p>
-        </p:txBody>
-      </p:sp>
-      <p:sp>
-        <p:nvSpPr>
-          <p:cNvPr id="7" name="static:5:text"/>
-          <p:cNvSpPr/>
-          <p:nvPr/>
-        </p:nvSpPr>
-        <p:spPr>
-          <a:xfrm>
-            <a:off x="10459403" y="6461760"/>
-            <a:ext cx="1214438" cy="129540"/>
-          </a:xfrm>
-          <a:prstGeom prst="rect">
-            <a:avLst/>
-          </a:prstGeom>
-          <a:noFill/>
-          <a:ln/>
-        </p:spPr>
-        <p:txBody>
-          <a:bodyPr wrap="none" lIns="0" tIns="0" rIns="0" bIns="0" rtlCol="0" anchor="ctr"/>
-          <a:lstStyle/>
-          <a:p>
-            <a:pPr marL="0" indent="0" algn="l">
-              <a:buNone/>
-            </a:pPr>
-            <a:r>
-              <a:rPr lang="en-US" sz="720" kern="0" spc="58" dirty="0">
-                <a:solidFill>
-                  <a:srgbClr val="919191"/>
-                </a:solidFill>
-                <a:latin typeface="Arial" pitchFamily="34" charset="0"/>
-                <a:ea typeface="Arial" pitchFamily="34" charset="-122"/>
-                <a:cs typeface="Arial" pitchFamily="34" charset="-120"/>
-              </a:rPr>
-              <a:t>AI GENIUS / S6 E2 / 16</a:t>
-            </a:r>
-            <a:endParaRPr lang="en-US" sz="720" dirty="0"/>
-          </a:p>
-        </p:txBody>
-      </p:sp>
-    </p:spTree>
-  </p:cSld>
-  <p:clrMapOvr>
-    <a:masterClrMapping/>
-  </p:clrMapOvr>
-</p:sld>
-</file>
-
-<file path=ppt/slides/slide16.xml><?xml version="1.0" encoding="utf-8"?>
-<p:sld xmlns:a="http://schemas.openxmlformats.org/drawingml/2006/main" xmlns:r="http://schemas.openxmlformats.org/officeDocument/2006/relationships" xmlns:p="http://schemas.openxmlformats.org/presentationml/2006/main">
-  <p:cSld name="From test cases to production">
-    <p:spTree>
-      <p:nvGrpSpPr>
-        <p:cNvPr id="1" name=""/>
-        <p:cNvGrpSpPr/>
-        <p:nvPr/>
-      </p:nvGrpSpPr>
-      <p:grpSpPr>
-        <a:xfrm>
-          <a:off x="0" y="0"/>
-          <a:ext cx="0" cy="0"/>
-          <a:chOff x="0" y="0"/>
-          <a:chExt cx="0" cy="0"/>
-        </a:xfrm>
-      </p:grpSpPr>
-      <p:sp>
-        <p:nvSpPr>
-          <p:cNvPr id="2" name="static:0:text"/>
-          <p:cNvSpPr/>
-          <p:nvPr/>
-        </p:nvSpPr>
-        <p:spPr>
-          <a:xfrm>
-            <a:off x="2727960" y="870109"/>
-            <a:ext cx="2821900" cy="152400"/>
-          </a:xfrm>
-          <a:prstGeom prst="rect">
-            <a:avLst/>
-          </a:prstGeom>
-          <a:noFill/>
-          <a:ln/>
-        </p:spPr>
-        <p:txBody>
-          <a:bodyPr wrap="none" lIns="0" tIns="0" rIns="0" bIns="0" rtlCol="0" anchor="ctr"/>
-          <a:lstStyle/>
-          <a:p>
-            <a:pPr marL="0" indent="0" algn="l">
-              <a:buNone/>
-            </a:pPr>
-            <a:r>
-              <a:rPr lang="en-US" sz="960" b="1" kern="0" spc="154" dirty="0">
-                <a:solidFill>
-                  <a:srgbClr val="4DA6FF"/>
-                </a:solidFill>
-                <a:latin typeface="Arial" pitchFamily="34" charset="0"/>
-                <a:ea typeface="Arial" pitchFamily="34" charset="-122"/>
-                <a:cs typeface="Arial" pitchFamily="34" charset="-120"/>
-              </a:rPr>
-              <a:t>AFTER RELEASE</a:t>
-            </a:r>
-            <a:endParaRPr lang="en-US" sz="960" dirty="0"/>
-          </a:p>
-        </p:txBody>
-      </p:sp>
-      <p:sp>
-        <p:nvSpPr>
-          <p:cNvPr id="3" name="static:1:text"/>
-          <p:cNvSpPr/>
-          <p:nvPr/>
-        </p:nvSpPr>
-        <p:spPr>
-          <a:xfrm>
-            <a:off x="975360" y="1068229"/>
-            <a:ext cx="4356473" cy="411480"/>
-          </a:xfrm>
-          <a:prstGeom prst="rect">
-            <a:avLst/>
-          </a:prstGeom>
-          <a:noFill/>
-          <a:ln/>
-        </p:spPr>
-        <p:txBody>
-          <a:bodyPr wrap="none" lIns="0" tIns="0" rIns="0" bIns="0" rtlCol="0" anchor="ctr"/>
-          <a:lstStyle/>
-          <a:p>
-            <a:pPr marL="0" indent="0" algn="l">
-              <a:buNone/>
-            </a:pPr>
-            <a:r>
-              <a:rPr lang="en-US" sz="2640" b="1" kern="0" spc="-92" dirty="0">
-                <a:solidFill>
-                  <a:srgbClr val="DEDEDE"/>
-                </a:solidFill>
-                <a:latin typeface="Arial" pitchFamily="34" charset="0"/>
-                <a:ea typeface="Arial" pitchFamily="34" charset="-122"/>
-                <a:cs typeface="Arial" pitchFamily="34" charset="-120"/>
-              </a:rPr>
-              <a:t>Production feeds the tests</a:t>
-            </a:r>
-            <a:endParaRPr lang="en-US" sz="2640" dirty="0"/>
-          </a:p>
-        </p:txBody>
-      </p:sp>
-      <p:grpSp>
-        <p:nvGrpSpPr>
-          <p:cNvPr id="52" name="Reveal 1"/>
-          <p:cNvGrpSpPr/>
-          <p:nvPr/>
-        </p:nvGrpSpPr>
-        <p:grpSpPr>
-          <a:xfrm>
-            <a:off x="975360" y="1868329"/>
-            <a:ext cx="3220641" cy="3791902"/>
-            <a:chOff x="975360" y="1868329"/>
-            <a:chExt cx="3220641" cy="3791902"/>
-          </a:xfrm>
-        </p:grpSpPr>
-        <p:sp>
-          <p:nvSpPr>
-            <p:cNvPr id="53" name="reveal-1:2:shape"/>
-            <p:cNvSpPr/>
-            <p:nvPr/>
-          </p:nvSpPr>
-          <p:spPr>
-            <a:xfrm>
-              <a:off x="975360" y="1868329"/>
-              <a:ext cx="3220641" cy="3791902"/>
-            </a:xfrm>
-            <a:prstGeom prst="roundRect">
-              <a:avLst>
-                <a:gd name="adj" fmla="val 3786"/>
-              </a:avLst>
-            </a:prstGeom>
-            <a:solidFill>
-              <a:srgbClr val="292929"/>
-            </a:solidFill>
-            <a:ln w="7620">
-              <a:solidFill>
-                <a:srgbClr val="474747"/>
-              </a:solidFill>
-              <a:prstDash val="solid"/>
-            </a:ln>
-          </p:spPr>
-          <p:txBody>
-            <a:bodyPr/>
-            <a:lstStyle/>
-            <a:p>
-              <a:endParaRPr lang="en-US"/>
-            </a:p>
-          </p:txBody>
-        </p:sp>
-        <p:sp>
-          <p:nvSpPr>
-            <p:cNvPr id="54" name="reveal-1:2:shape:border-0"/>
-            <p:cNvSpPr/>
-            <p:nvPr/>
-          </p:nvSpPr>
-          <p:spPr>
-            <a:xfrm>
-              <a:off x="1066800" y="1883569"/>
-              <a:ext cx="3037761" cy="0"/>
-            </a:xfrm>
-            <a:prstGeom prst="line">
-              <a:avLst/>
-            </a:prstGeom>
-            <a:noFill/>
-            <a:ln w="30480">
-              <a:solidFill>
-                <a:srgbClr val="4DA6FF"/>
-              </a:solidFill>
-              <a:prstDash val="solid"/>
-              <a:headEnd type="none"/>
-              <a:tailEnd type="none"/>
-            </a:ln>
-          </p:spPr>
-          <p:txBody>
-            <a:bodyPr/>
-            <a:lstStyle/>
-            <a:p>
-              <a:endParaRPr lang="en-US"/>
-            </a:p>
-          </p:txBody>
-        </p:sp>
-        <p:sp>
-          <p:nvSpPr>
-            <p:cNvPr id="55" name="reveal-1:3:shape"/>
-            <p:cNvSpPr/>
-            <p:nvPr/>
-          </p:nvSpPr>
-          <p:spPr>
-            <a:xfrm>
-              <a:off x="1181100" y="2096929"/>
-              <a:ext cx="411480" cy="411480"/>
-            </a:xfrm>
-            <a:prstGeom prst="roundRect">
-              <a:avLst>
-                <a:gd name="adj" fmla="val 25926"/>
-              </a:avLst>
-            </a:prstGeom>
-            <a:solidFill>
-              <a:srgbClr val="000000">
-                <a:alpha val="0"/>
-              </a:srgbClr>
-            </a:solidFill>
-            <a:ln w="15240">
-              <a:solidFill>
-                <a:srgbClr val="4DA6FF"/>
-              </a:solidFill>
-              <a:prstDash val="solid"/>
-            </a:ln>
-          </p:spPr>
-          <p:txBody>
-            <a:bodyPr/>
-            <a:lstStyle/>
-            <a:p>
-              <a:endParaRPr lang="en-US"/>
-            </a:p>
-          </p:txBody>
-        </p:sp>
-        <p:sp>
-          <p:nvSpPr>
-            <p:cNvPr id="56" name="reveal-1:4:text"/>
-            <p:cNvSpPr/>
-            <p:nvPr/>
-          </p:nvSpPr>
-          <p:spPr>
-            <a:xfrm>
-              <a:off x="1181100" y="2207419"/>
-              <a:ext cx="411480" cy="190500"/>
-            </a:xfrm>
-            <a:prstGeom prst="rect">
-              <a:avLst/>
-            </a:prstGeom>
-            <a:noFill/>
-            <a:ln/>
-          </p:spPr>
-          <p:txBody>
-            <a:bodyPr wrap="square" lIns="0" tIns="0" rIns="0" bIns="0" rtlCol="0" anchor="ctr"/>
-            <a:lstStyle/>
-            <a:p>
-              <a:pPr marL="0" indent="0" algn="ctr">
-                <a:buNone/>
-              </a:pPr>
-              <a:r>
-                <a:rPr lang="en-US" sz="1200" b="1" kern="0" spc="-24" dirty="0">
-                  <a:solidFill>
-                    <a:srgbClr val="4DA6FF"/>
-                  </a:solidFill>
-                  <a:latin typeface="Arial" pitchFamily="34" charset="0"/>
-                  <a:ea typeface="Arial" pitchFamily="34" charset="-122"/>
-                  <a:cs typeface="Arial" pitchFamily="34" charset="-120"/>
-                </a:rPr>
-                <a:t>1</a:t>
-              </a:r>
-              <a:endParaRPr lang="en-US" sz="1200" dirty="0"/>
-            </a:p>
-          </p:txBody>
-        </p:sp>
-        <p:sp>
-          <p:nvSpPr>
-            <p:cNvPr id="57" name="reveal-1:5:text"/>
-            <p:cNvSpPr/>
-            <p:nvPr/>
-          </p:nvSpPr>
-          <p:spPr>
-            <a:xfrm>
-              <a:off x="1181100" y="2698909"/>
-              <a:ext cx="2809161" cy="266700"/>
-            </a:xfrm>
-            <a:prstGeom prst="rect">
-              <a:avLst/>
-            </a:prstGeom>
-            <a:noFill/>
-            <a:ln/>
-          </p:spPr>
-          <p:txBody>
-            <a:bodyPr wrap="square" lIns="0" tIns="0" rIns="0" bIns="0" rtlCol="0" anchor="ctr"/>
-            <a:lstStyle/>
-            <a:p>
-              <a:pPr marL="0" indent="0" algn="l">
-                <a:buNone/>
-              </a:pPr>
-              <a:r>
-                <a:rPr lang="en-US" sz="1680" b="1" dirty="0">
-                  <a:solidFill>
-                    <a:srgbClr val="4DA6FF"/>
-                  </a:solidFill>
-                  <a:latin typeface="Arial" pitchFamily="34" charset="0"/>
-                  <a:ea typeface="Arial" pitchFamily="34" charset="-122"/>
-                  <a:cs typeface="Arial" pitchFamily="34" charset="-120"/>
-                </a:rPr>
-                <a:t>Sample traces</a:t>
-              </a:r>
-              <a:endParaRPr lang="en-US" sz="1680" dirty="0"/>
-            </a:p>
-          </p:txBody>
-        </p:sp>
-        <p:sp>
-          <p:nvSpPr>
-            <p:cNvPr id="58" name="reveal-1:6:text"/>
-            <p:cNvSpPr/>
-            <p:nvPr/>
-          </p:nvSpPr>
-          <p:spPr>
-            <a:xfrm>
-              <a:off x="1181100" y="3047881"/>
-              <a:ext cx="2809161" cy="564123"/>
-            </a:xfrm>
-            <a:prstGeom prst="rect">
-              <a:avLst/>
-            </a:prstGeom>
-            <a:noFill/>
-            <a:ln/>
-          </p:spPr>
-          <p:txBody>
-            <a:bodyPr wrap="square" lIns="0" tIns="0" rIns="0" bIns="0" rtlCol="0" anchor="t"/>
-            <a:lstStyle/>
-            <a:p>
-              <a:pPr marL="0" indent="0" algn="l">
-                <a:buNone/>
-              </a:pPr>
-              <a:r>
-                <a:rPr lang="en-US" sz="1140" dirty="0">
-                  <a:solidFill>
-                    <a:srgbClr val="B0B0B0"/>
-                  </a:solidFill>
-                  <a:latin typeface="Arial" pitchFamily="34" charset="0"/>
-                  <a:ea typeface="Arial" pitchFamily="34" charset="-122"/>
-                  <a:cs typeface="Arial" pitchFamily="34" charset="-120"/>
-                </a:rPr>
-                <a:t>Continuous evaluation scores a sample of real conversations.</a:t>
-              </a:r>
-              <a:endParaRPr lang="en-US" sz="1140" dirty="0"/>
-            </a:p>
-          </p:txBody>
-        </p:sp>
-        <p:sp>
-          <p:nvSpPr>
-            <p:cNvPr id="60" name="reveal-1:8:shape"/>
-            <p:cNvSpPr/>
-            <p:nvPr/>
-          </p:nvSpPr>
-          <p:spPr>
-            <a:xfrm>
-              <a:off x="1181100" y="3652004"/>
-              <a:ext cx="2809161" cy="668640"/>
-            </a:xfrm>
-            <a:prstGeom prst="roundRect">
-              <a:avLst>
-                <a:gd name="adj" fmla="val 13889"/>
-              </a:avLst>
-            </a:prstGeom>
-            <a:solidFill>
-              <a:srgbClr val="FFFFFF">
-                <a:alpha val="3000"/>
-              </a:srgbClr>
-            </a:solidFill>
-            <a:ln w="12700">
-              <a:solidFill>
-                <a:srgbClr val="333333">
-                  <a:alpha val="0"/>
-                </a:srgbClr>
-              </a:solidFill>
-              <a:prstDash val="solid"/>
-            </a:ln>
-          </p:spPr>
-          <p:txBody>
-            <a:bodyPr/>
-            <a:lstStyle/>
-            <a:p>
-              <a:endParaRPr lang="en-US"/>
-            </a:p>
-          </p:txBody>
-        </p:sp>
-        <p:sp>
-          <p:nvSpPr>
-            <p:cNvPr id="61" name="reveal-1:9:text"/>
-            <p:cNvSpPr/>
-            <p:nvPr/>
-          </p:nvSpPr>
-          <p:spPr>
-            <a:xfrm>
-              <a:off x="1287780" y="3732004"/>
-              <a:ext cx="2595801" cy="508640"/>
-            </a:xfrm>
-            <a:prstGeom prst="rect">
-              <a:avLst/>
-            </a:prstGeom>
-            <a:noFill/>
-            <a:ln/>
-          </p:spPr>
-          <p:txBody>
-            <a:bodyPr wrap="square" lIns="0" tIns="0" rIns="0" bIns="0" rtlCol="0" anchor="t"/>
-            <a:lstStyle/>
-            <a:p>
-              <a:pPr marL="0" indent="0" algn="l">
-                <a:buNone/>
-              </a:pPr>
-              <a:r>
-                <a:rPr lang="en-US" sz="900" b="1" dirty="0">
-                  <a:solidFill>
-                    <a:srgbClr val="DEDEDE"/>
-                  </a:solidFill>
-                  <a:latin typeface="Arial" pitchFamily="34" charset="0"/>
-                  <a:ea typeface="Arial" pitchFamily="34" charset="-122"/>
-                  <a:cs typeface="Arial" pitchFamily="34" charset="-120"/>
-                </a:rPr>
-                <a:t>Alert on quality, latency and cost.</a:t>
-              </a:r>
-              <a:endParaRPr lang="en-US" sz="900" dirty="0"/>
-            </a:p>
-          </p:txBody>
-        </p:sp>
-      </p:grpSp>
-      <p:grpSp>
-        <p:nvGrpSpPr>
-          <p:cNvPr id="62" name="Reveal 2"/>
-          <p:cNvGrpSpPr/>
-          <p:nvPr/>
-        </p:nvGrpSpPr>
-        <p:grpSpPr>
-          <a:xfrm>
-            <a:off x="4348401" y="1868329"/>
-            <a:ext cx="3220641" cy="3791902"/>
-            <a:chOff x="4348401" y="1868329"/>
-            <a:chExt cx="3220641" cy="3791902"/>
-          </a:xfrm>
-        </p:grpSpPr>
-        <p:sp>
-          <p:nvSpPr>
-            <p:cNvPr id="63" name="reveal-1:2:shape"/>
-            <p:cNvSpPr/>
-            <p:nvPr/>
-          </p:nvSpPr>
-          <p:spPr>
-            <a:xfrm>
-              <a:off x="4348401" y="1868329"/>
-              <a:ext cx="3220641" cy="3791902"/>
-            </a:xfrm>
-            <a:prstGeom prst="roundRect">
-              <a:avLst>
-                <a:gd name="adj" fmla="val 3786"/>
-              </a:avLst>
-            </a:prstGeom>
-            <a:solidFill>
-              <a:srgbClr val="292929"/>
-            </a:solidFill>
-            <a:ln w="7620">
-              <a:solidFill>
-                <a:srgbClr val="474747"/>
-              </a:solidFill>
-              <a:prstDash val="solid"/>
-            </a:ln>
-          </p:spPr>
-          <p:txBody>
-            <a:bodyPr/>
-            <a:lstStyle/>
-            <a:p>
-              <a:endParaRPr lang="en-US"/>
-            </a:p>
-          </p:txBody>
-        </p:sp>
-        <p:sp>
-          <p:nvSpPr>
-            <p:cNvPr id="64" name="reveal-1:2:shape:border-0"/>
-            <p:cNvSpPr/>
-            <p:nvPr/>
-          </p:nvSpPr>
-          <p:spPr>
-            <a:xfrm>
-              <a:off x="4439841" y="1883569"/>
-              <a:ext cx="3037761" cy="0"/>
-            </a:xfrm>
-            <a:prstGeom prst="line">
-              <a:avLst/>
-            </a:prstGeom>
-            <a:noFill/>
-            <a:ln w="30480">
-              <a:solidFill>
-                <a:srgbClr val="FBBF24"/>
-              </a:solidFill>
-              <a:prstDash val="solid"/>
-              <a:headEnd type="none"/>
-              <a:tailEnd type="none"/>
-            </a:ln>
-          </p:spPr>
-          <p:txBody>
-            <a:bodyPr/>
-            <a:lstStyle/>
-            <a:p>
-              <a:endParaRPr lang="en-US"/>
-            </a:p>
-          </p:txBody>
-        </p:sp>
-        <p:sp>
-          <p:nvSpPr>
-            <p:cNvPr id="65" name="reveal-1:3:shape"/>
-            <p:cNvSpPr/>
-            <p:nvPr/>
-          </p:nvSpPr>
-          <p:spPr>
-            <a:xfrm>
-              <a:off x="4554141" y="2096929"/>
-              <a:ext cx="411480" cy="411480"/>
-            </a:xfrm>
-            <a:prstGeom prst="roundRect">
-              <a:avLst>
-                <a:gd name="adj" fmla="val 25926"/>
-              </a:avLst>
-            </a:prstGeom>
-            <a:solidFill>
-              <a:srgbClr val="000000">
-                <a:alpha val="0"/>
-              </a:srgbClr>
-            </a:solidFill>
-            <a:ln w="15240">
-              <a:solidFill>
-                <a:srgbClr val="FBBF24"/>
-              </a:solidFill>
-              <a:prstDash val="solid"/>
-            </a:ln>
-          </p:spPr>
-          <p:txBody>
-            <a:bodyPr/>
-            <a:lstStyle/>
-            <a:p>
-              <a:endParaRPr lang="en-US"/>
-            </a:p>
-          </p:txBody>
-        </p:sp>
-        <p:sp>
-          <p:nvSpPr>
-            <p:cNvPr id="66" name="reveal-1:4:text"/>
-            <p:cNvSpPr/>
-            <p:nvPr/>
-          </p:nvSpPr>
-          <p:spPr>
-            <a:xfrm>
-              <a:off x="4554141" y="2207419"/>
-              <a:ext cx="411480" cy="190500"/>
-            </a:xfrm>
-            <a:prstGeom prst="rect">
-              <a:avLst/>
-            </a:prstGeom>
-            <a:noFill/>
-            <a:ln/>
-          </p:spPr>
-          <p:txBody>
-            <a:bodyPr wrap="square" lIns="0" tIns="0" rIns="0" bIns="0" rtlCol="0" anchor="ctr"/>
-            <a:lstStyle/>
-            <a:p>
-              <a:pPr marL="0" indent="0" algn="ctr">
-                <a:buNone/>
-              </a:pPr>
-              <a:r>
-                <a:rPr lang="en-US" sz="1200" b="1" kern="0" spc="-24" dirty="0">
-                  <a:solidFill>
-                    <a:srgbClr val="FBBF24"/>
-                  </a:solidFill>
-                  <a:latin typeface="Arial" pitchFamily="34" charset="0"/>
-                  <a:ea typeface="Arial" pitchFamily="34" charset="-122"/>
-                  <a:cs typeface="Arial" pitchFamily="34" charset="-120"/>
-                </a:rPr>
-                <a:t>2</a:t>
-              </a:r>
-              <a:endParaRPr lang="en-US" sz="1200" dirty="0"/>
-            </a:p>
-          </p:txBody>
-        </p:sp>
-        <p:sp>
-          <p:nvSpPr>
-            <p:cNvPr id="67" name="reveal-1:5:text"/>
-            <p:cNvSpPr/>
-            <p:nvPr/>
-          </p:nvSpPr>
-          <p:spPr>
-            <a:xfrm>
-              <a:off x="4554141" y="2698909"/>
-              <a:ext cx="2809161" cy="266700"/>
-            </a:xfrm>
-            <a:prstGeom prst="rect">
-              <a:avLst/>
-            </a:prstGeom>
-            <a:noFill/>
-            <a:ln/>
-          </p:spPr>
-          <p:txBody>
-            <a:bodyPr wrap="square" lIns="0" tIns="0" rIns="0" bIns="0" rtlCol="0" anchor="ctr"/>
-            <a:lstStyle/>
-            <a:p>
-              <a:pPr marL="0" indent="0" algn="l">
-                <a:buNone/>
-              </a:pPr>
-              <a:r>
-                <a:rPr lang="en-US" sz="1680" b="1" dirty="0">
-                  <a:solidFill>
-                    <a:srgbClr val="FBBF24"/>
-                  </a:solidFill>
-                  <a:latin typeface="Arial" pitchFamily="34" charset="0"/>
-                  <a:ea typeface="Arial" pitchFamily="34" charset="-122"/>
-                  <a:cs typeface="Arial" pitchFamily="34" charset="-120"/>
-                </a:rPr>
-                <a:t>Keep the failures</a:t>
-              </a:r>
-              <a:endParaRPr lang="en-US" sz="1680" dirty="0"/>
-            </a:p>
-          </p:txBody>
-        </p:sp>
-        <p:sp>
-          <p:nvSpPr>
-            <p:cNvPr id="68" name="reveal-1:6:text"/>
-            <p:cNvSpPr/>
-            <p:nvPr/>
-          </p:nvSpPr>
-          <p:spPr>
-            <a:xfrm>
-              <a:off x="4554141" y="3047881"/>
-              <a:ext cx="2809161" cy="564123"/>
-            </a:xfrm>
-            <a:prstGeom prst="rect">
-              <a:avLst/>
-            </a:prstGeom>
-            <a:noFill/>
-            <a:ln/>
-          </p:spPr>
-          <p:txBody>
-            <a:bodyPr wrap="square" lIns="0" tIns="0" rIns="0" bIns="0" rtlCol="0" anchor="t"/>
-            <a:lstStyle/>
-            <a:p>
-              <a:pPr marL="0" indent="0" algn="l">
-                <a:buNone/>
-              </a:pPr>
-              <a:r>
-                <a:rPr lang="en-US" sz="1140" dirty="0">
-                  <a:solidFill>
-                    <a:srgbClr val="B0B0B0"/>
-                  </a:solidFill>
-                  <a:latin typeface="Arial" pitchFamily="34" charset="0"/>
-                  <a:ea typeface="Arial" pitchFamily="34" charset="-122"/>
-                  <a:cs typeface="Arial" pitchFamily="34" charset="-120"/>
-                </a:rPr>
-                <a:t>Turn interesting failures into new, reviewed test rows.</a:t>
-              </a:r>
-              <a:endParaRPr lang="en-US" sz="1140" dirty="0"/>
-            </a:p>
-          </p:txBody>
-        </p:sp>
-        <p:sp>
-          <p:nvSpPr>
-            <p:cNvPr id="70" name="reveal-1:8:shape"/>
-            <p:cNvSpPr/>
-            <p:nvPr/>
-          </p:nvSpPr>
-          <p:spPr>
-            <a:xfrm>
-              <a:off x="4554141" y="3652004"/>
-              <a:ext cx="2809161" cy="668640"/>
-            </a:xfrm>
-            <a:prstGeom prst="roundRect">
-              <a:avLst>
-                <a:gd name="adj" fmla="val 13889"/>
-              </a:avLst>
-            </a:prstGeom>
-            <a:solidFill>
-              <a:srgbClr val="FFFFFF">
-                <a:alpha val="3000"/>
-              </a:srgbClr>
-            </a:solidFill>
-            <a:ln w="12700">
-              <a:solidFill>
-                <a:srgbClr val="333333">
-                  <a:alpha val="0"/>
-                </a:srgbClr>
-              </a:solidFill>
-              <a:prstDash val="solid"/>
-            </a:ln>
-          </p:spPr>
-          <p:txBody>
-            <a:bodyPr/>
-            <a:lstStyle/>
-            <a:p>
-              <a:endParaRPr lang="en-US"/>
-            </a:p>
-          </p:txBody>
-        </p:sp>
-        <p:sp>
-          <p:nvSpPr>
-            <p:cNvPr id="71" name="reveal-1:9:text"/>
-            <p:cNvSpPr/>
-            <p:nvPr/>
-          </p:nvSpPr>
-          <p:spPr>
-            <a:xfrm>
-              <a:off x="4660821" y="3732004"/>
-              <a:ext cx="2595801" cy="508640"/>
-            </a:xfrm>
-            <a:prstGeom prst="rect">
-              <a:avLst/>
-            </a:prstGeom>
-            <a:noFill/>
-            <a:ln/>
-          </p:spPr>
-          <p:txBody>
-            <a:bodyPr wrap="square" lIns="0" tIns="0" rIns="0" bIns="0" rtlCol="0" anchor="t"/>
-            <a:lstStyle/>
-            <a:p>
-              <a:pPr marL="0" indent="0" algn="l">
-                <a:buNone/>
-              </a:pPr>
-              <a:r>
-                <a:rPr lang="en-US" sz="900" b="1" dirty="0">
-                  <a:solidFill>
-                    <a:srgbClr val="DEDEDE"/>
-                  </a:solidFill>
-                  <a:latin typeface="Arial" pitchFamily="34" charset="0"/>
-                  <a:ea typeface="Arial" pitchFamily="34" charset="-122"/>
-                  <a:cs typeface="Arial" pitchFamily="34" charset="-120"/>
-                </a:rPr>
-                <a:t>Redact personal data first.</a:t>
-              </a:r>
-              <a:endParaRPr lang="en-US" sz="900" dirty="0"/>
-            </a:p>
-          </p:txBody>
-        </p:sp>
-      </p:grpSp>
-      <p:grpSp>
-        <p:nvGrpSpPr>
-          <p:cNvPr id="72" name="Reveal 3"/>
-          <p:cNvGrpSpPr/>
-          <p:nvPr/>
-        </p:nvGrpSpPr>
-        <p:grpSpPr>
-          <a:xfrm>
-            <a:off x="7721442" y="1868329"/>
-            <a:ext cx="3220641" cy="3791902"/>
-            <a:chOff x="7721442" y="1868329"/>
-            <a:chExt cx="3220641" cy="3791902"/>
-          </a:xfrm>
-        </p:grpSpPr>
-        <p:sp>
-          <p:nvSpPr>
-            <p:cNvPr id="73" name="reveal-1:2:shape"/>
-            <p:cNvSpPr/>
-            <p:nvPr/>
-          </p:nvSpPr>
-          <p:spPr>
-            <a:xfrm>
-              <a:off x="7721442" y="1868329"/>
-              <a:ext cx="3220641" cy="3791902"/>
-            </a:xfrm>
-            <a:prstGeom prst="roundRect">
-              <a:avLst>
-                <a:gd name="adj" fmla="val 3786"/>
-              </a:avLst>
-            </a:prstGeom>
-            <a:solidFill>
-              <a:srgbClr val="292929"/>
-            </a:solidFill>
-            <a:ln w="7620">
-              <a:solidFill>
-                <a:srgbClr val="474747"/>
-              </a:solidFill>
-              <a:prstDash val="solid"/>
-            </a:ln>
-          </p:spPr>
-          <p:txBody>
-            <a:bodyPr/>
-            <a:lstStyle/>
-            <a:p>
-              <a:endParaRPr lang="en-US"/>
-            </a:p>
-          </p:txBody>
-        </p:sp>
-        <p:sp>
-          <p:nvSpPr>
-            <p:cNvPr id="74" name="reveal-1:2:shape:border-0"/>
-            <p:cNvSpPr/>
-            <p:nvPr/>
-          </p:nvSpPr>
-          <p:spPr>
-            <a:xfrm>
-              <a:off x="7812882" y="1883569"/>
-              <a:ext cx="3037761" cy="0"/>
-            </a:xfrm>
-            <a:prstGeom prst="line">
-              <a:avLst/>
-            </a:prstGeom>
-            <a:noFill/>
-            <a:ln w="30480">
-              <a:solidFill>
-                <a:srgbClr val="4ADE80"/>
-              </a:solidFill>
-              <a:prstDash val="solid"/>
-              <a:headEnd type="none"/>
-              <a:tailEnd type="none"/>
-            </a:ln>
-          </p:spPr>
-          <p:txBody>
-            <a:bodyPr/>
-            <a:lstStyle/>
-            <a:p>
-              <a:endParaRPr lang="en-US"/>
-            </a:p>
-          </p:txBody>
-        </p:sp>
-        <p:sp>
-          <p:nvSpPr>
-            <p:cNvPr id="75" name="reveal-1:3:shape"/>
-            <p:cNvSpPr/>
-            <p:nvPr/>
-          </p:nvSpPr>
-          <p:spPr>
-            <a:xfrm>
-              <a:off x="7927182" y="2096929"/>
-              <a:ext cx="411480" cy="411480"/>
-            </a:xfrm>
-            <a:prstGeom prst="roundRect">
-              <a:avLst>
-                <a:gd name="adj" fmla="val 25926"/>
-              </a:avLst>
-            </a:prstGeom>
-            <a:solidFill>
-              <a:srgbClr val="000000">
-                <a:alpha val="0"/>
-              </a:srgbClr>
-            </a:solidFill>
-            <a:ln w="15240">
-              <a:solidFill>
-                <a:srgbClr val="4ADE80"/>
-              </a:solidFill>
-              <a:prstDash val="solid"/>
-            </a:ln>
-          </p:spPr>
-          <p:txBody>
-            <a:bodyPr/>
-            <a:lstStyle/>
-            <a:p>
-              <a:endParaRPr lang="en-US"/>
-            </a:p>
-          </p:txBody>
-        </p:sp>
-        <p:sp>
-          <p:nvSpPr>
-            <p:cNvPr id="76" name="reveal-1:4:text"/>
-            <p:cNvSpPr/>
-            <p:nvPr/>
-          </p:nvSpPr>
-          <p:spPr>
-            <a:xfrm>
-              <a:off x="7927182" y="2207419"/>
-              <a:ext cx="411480" cy="190500"/>
-            </a:xfrm>
-            <a:prstGeom prst="rect">
-              <a:avLst/>
-            </a:prstGeom>
-            <a:noFill/>
-            <a:ln/>
-          </p:spPr>
-          <p:txBody>
-            <a:bodyPr wrap="square" lIns="0" tIns="0" rIns="0" bIns="0" rtlCol="0" anchor="ctr"/>
-            <a:lstStyle/>
-            <a:p>
-              <a:pPr marL="0" indent="0" algn="ctr">
-                <a:buNone/>
-              </a:pPr>
-              <a:r>
-                <a:rPr lang="en-US" sz="1200" b="1" kern="0" spc="-24" dirty="0">
-                  <a:solidFill>
-                    <a:srgbClr val="4ADE80"/>
-                  </a:solidFill>
-                  <a:latin typeface="Arial" pitchFamily="34" charset="0"/>
-                  <a:ea typeface="Arial" pitchFamily="34" charset="-122"/>
-                  <a:cs typeface="Arial" pitchFamily="34" charset="-120"/>
-                </a:rPr>
-                <a:t>3</a:t>
-              </a:r>
-              <a:endParaRPr lang="en-US" sz="1200" dirty="0"/>
-            </a:p>
-          </p:txBody>
-        </p:sp>
-        <p:sp>
-          <p:nvSpPr>
-            <p:cNvPr id="77" name="reveal-1:5:text"/>
-            <p:cNvSpPr/>
-            <p:nvPr/>
-          </p:nvSpPr>
-          <p:spPr>
-            <a:xfrm>
-              <a:off x="7927182" y="2698909"/>
-              <a:ext cx="2809161" cy="266700"/>
-            </a:xfrm>
-            <a:prstGeom prst="rect">
-              <a:avLst/>
-            </a:prstGeom>
-            <a:noFill/>
-            <a:ln/>
-          </p:spPr>
-          <p:txBody>
-            <a:bodyPr wrap="square" lIns="0" tIns="0" rIns="0" bIns="0" rtlCol="0" anchor="ctr"/>
-            <a:lstStyle/>
-            <a:p>
-              <a:pPr marL="0" indent="0" algn="l">
-                <a:buNone/>
-              </a:pPr>
-              <a:r>
-                <a:rPr lang="en-US" sz="1680" b="1" dirty="0">
-                  <a:solidFill>
-                    <a:srgbClr val="4ADE80"/>
-                  </a:solidFill>
-                  <a:latin typeface="Arial" pitchFamily="34" charset="0"/>
-                  <a:ea typeface="Arial" pitchFamily="34" charset="-122"/>
-                  <a:cs typeface="Arial" pitchFamily="34" charset="-120"/>
-                </a:rPr>
-                <a:t>Same gate</a:t>
-              </a:r>
-              <a:endParaRPr lang="en-US" sz="1680" dirty="0"/>
-            </a:p>
-          </p:txBody>
-        </p:sp>
-        <p:sp>
-          <p:nvSpPr>
-            <p:cNvPr id="78" name="reveal-1:6:text"/>
-            <p:cNvSpPr/>
-            <p:nvPr/>
-          </p:nvSpPr>
-          <p:spPr>
-            <a:xfrm>
-              <a:off x="7927182" y="3047881"/>
-              <a:ext cx="2809161" cy="564123"/>
-            </a:xfrm>
-            <a:prstGeom prst="rect">
-              <a:avLst/>
-            </a:prstGeom>
-            <a:noFill/>
-            <a:ln/>
-          </p:spPr>
-          <p:txBody>
-            <a:bodyPr wrap="square" lIns="0" tIns="0" rIns="0" bIns="0" rtlCol="0" anchor="t"/>
-            <a:lstStyle/>
-            <a:p>
-              <a:pPr marL="0" indent="0" algn="l">
-                <a:buNone/>
-              </a:pPr>
-              <a:r>
-                <a:rPr lang="en-US" sz="1140" dirty="0">
-                  <a:solidFill>
-                    <a:srgbClr val="B0B0B0"/>
-                  </a:solidFill>
-                  <a:latin typeface="Arial" pitchFamily="34" charset="0"/>
-                  <a:ea typeface="Arial" pitchFamily="34" charset="-122"/>
-                  <a:cs typeface="Arial" pitchFamily="34" charset="-120"/>
-                </a:rPr>
-                <a:t>The next change, human or optimizer, runs against them.</a:t>
-              </a:r>
-              <a:endParaRPr lang="en-US" sz="1140" dirty="0"/>
-            </a:p>
-          </p:txBody>
-        </p:sp>
-        <p:sp>
-          <p:nvSpPr>
-            <p:cNvPr id="80" name="reveal-1:8:shape"/>
-            <p:cNvSpPr/>
-            <p:nvPr/>
-          </p:nvSpPr>
-          <p:spPr>
-            <a:xfrm>
-              <a:off x="7927182" y="3652004"/>
-              <a:ext cx="2809161" cy="668640"/>
-            </a:xfrm>
-            <a:prstGeom prst="roundRect">
-              <a:avLst>
-                <a:gd name="adj" fmla="val 13889"/>
-              </a:avLst>
-            </a:prstGeom>
-            <a:solidFill>
-              <a:srgbClr val="FFFFFF">
-                <a:alpha val="3000"/>
-              </a:srgbClr>
-            </a:solidFill>
-            <a:ln w="12700">
-              <a:solidFill>
-                <a:srgbClr val="333333">
-                  <a:alpha val="0"/>
-                </a:srgbClr>
-              </a:solidFill>
-              <a:prstDash val="solid"/>
-            </a:ln>
-          </p:spPr>
-          <p:txBody>
-            <a:bodyPr/>
-            <a:lstStyle/>
-            <a:p>
-              <a:endParaRPr lang="en-US"/>
-            </a:p>
-          </p:txBody>
-        </p:sp>
-        <p:sp>
-          <p:nvSpPr>
-            <p:cNvPr id="81" name="reveal-1:9:text"/>
-            <p:cNvSpPr/>
-            <p:nvPr/>
-          </p:nvSpPr>
-          <p:spPr>
-            <a:xfrm>
-              <a:off x="8033862" y="3732004"/>
-              <a:ext cx="2595801" cy="508640"/>
-            </a:xfrm>
-            <a:prstGeom prst="rect">
-              <a:avLst/>
-            </a:prstGeom>
-            <a:noFill/>
-            <a:ln/>
-          </p:spPr>
-          <p:txBody>
-            <a:bodyPr wrap="square" lIns="0" tIns="0" rIns="0" bIns="0" rtlCol="0" anchor="t"/>
-            <a:lstStyle/>
-            <a:p>
-              <a:pPr marL="0" indent="0" algn="l">
-                <a:buNone/>
-              </a:pPr>
-              <a:r>
-                <a:rPr lang="en-US" sz="900" b="1" dirty="0">
-                  <a:solidFill>
-                    <a:srgbClr val="DEDEDE"/>
-                  </a:solidFill>
-                  <a:latin typeface="Arial" pitchFamily="34" charset="0"/>
-                  <a:ea typeface="Arial" pitchFamily="34" charset="-122"/>
-                  <a:cs typeface="Arial" pitchFamily="34" charset="-120"/>
-                </a:rPr>
-                <a:t>Every production failure becomes a test.</a:t>
-              </a:r>
-              <a:endParaRPr lang="en-US" sz="900" dirty="0"/>
-            </a:p>
-          </p:txBody>
-        </p:sp>
-      </p:grpSp>
-      <p:sp>
-        <p:nvSpPr>
-          <p:cNvPr id="50" name="static:47:text"/>
-          <p:cNvSpPr/>
-          <p:nvPr/>
-        </p:nvSpPr>
-        <p:spPr>
-          <a:xfrm>
-            <a:off x="609600" y="6461760"/>
-            <a:ext cx="1539240" cy="129540"/>
-          </a:xfrm>
-          <a:prstGeom prst="rect">
-            <a:avLst/>
-          </a:prstGeom>
-          <a:noFill/>
-          <a:ln/>
-        </p:spPr>
-        <p:txBody>
-          <a:bodyPr wrap="none" lIns="0" tIns="0" rIns="0" bIns="0" rtlCol="0" anchor="ctr"/>
-          <a:lstStyle/>
-          <a:p>
-            <a:pPr marL="0" indent="0" algn="l">
-              <a:buNone/>
-            </a:pPr>
-            <a:r>
-              <a:rPr lang="en-US" sz="720" kern="0" spc="58" dirty="0">
-                <a:solidFill>
-                  <a:srgbClr val="919191"/>
-                </a:solidFill>
-                <a:latin typeface="Arial" pitchFamily="34" charset="0"/>
-                <a:ea typeface="Arial" pitchFamily="34" charset="-122"/>
-                <a:cs typeface="Arial" pitchFamily="34" charset="-120"/>
-              </a:rPr>
-              <a:t>FY27 AI GENIUS</a:t>
-            </a:r>
-            <a:endParaRPr lang="en-US" sz="720" dirty="0"/>
-          </a:p>
-        </p:txBody>
-      </p:sp>
-      <p:sp>
-        <p:nvSpPr>
-          <p:cNvPr id="51" name="static:48:text"/>
-          <p:cNvSpPr/>
-          <p:nvPr/>
-        </p:nvSpPr>
-        <p:spPr>
-          <a:xfrm>
-            <a:off x="10457736" y="6461760"/>
-            <a:ext cx="1216104" cy="129540"/>
-          </a:xfrm>
-          <a:prstGeom prst="rect">
-            <a:avLst/>
-          </a:prstGeom>
-          <a:noFill/>
-          <a:ln/>
-        </p:spPr>
-        <p:txBody>
-          <a:bodyPr wrap="none" lIns="0" tIns="0" rIns="0" bIns="0" rtlCol="0" anchor="ctr"/>
-          <a:lstStyle/>
-          <a:p>
-            <a:pPr marL="0" indent="0" algn="l">
-              <a:buNone/>
-            </a:pPr>
-            <a:r>
-              <a:rPr lang="en-US" sz="720" kern="0" spc="58" dirty="0">
-                <a:solidFill>
-                  <a:srgbClr val="919191"/>
-                </a:solidFill>
-                <a:latin typeface="Arial" pitchFamily="34" charset="0"/>
-                <a:ea typeface="Arial" pitchFamily="34" charset="-122"/>
-                <a:cs typeface="Arial" pitchFamily="34" charset="-120"/>
-              </a:rPr>
-              <a:t>AI GENIUS / S6 E2 / 17</a:t>
-            </a:r>
-            <a:endParaRPr lang="en-US" sz="720" dirty="0"/>
-          </a:p>
-        </p:txBody>
-      </p:sp>
-    </p:spTree>
-  </p:cSld>
-  <p:clrMapOvr>
-    <a:masterClrMapping/>
-  </p:clrMapOvr>
-  <p:timing>
-    <p:tnLst>
-      <p:par>
-        <p:cTn id="1" dur="indefinite" restart="never" nodeType="tmRoot">
-          <p:childTnLst>
-            <p:seq concurrent="1" nextAc="seek">
-              <p:cTn id="2" dur="indefinite" nodeType="mainSeq">
-                <p:childTnLst>
-                  <p:par>
-                    <p:cTn id="3" fill="hold">
-                      <p:stCondLst>
-                        <p:cond delay="indefinite"/>
-                      </p:stCondLst>
-                      <p:childTnLst>
-                        <p:par>
-                          <p:cTn id="4" fill="hold">
-                            <p:stCondLst>
-                              <p:cond delay="0"/>
-                            </p:stCondLst>
-                            <p:childTnLst>
-                              <p:par>
-                                <p:cTn id="5" presetID="1" presetClass="entr" presetSubtype="0" fill="hold" nodeType="clickEffect">
-                                  <p:stCondLst>
-                                    <p:cond delay="0"/>
-                                  </p:stCondLst>
-                                  <p:childTnLst>
-                                    <p:set>
-                                      <p:cBhvr>
-                                        <p:cTn id="6" dur="1" fill="hold">
-                                          <p:stCondLst>
-                                            <p:cond delay="0"/>
-                                          </p:stCondLst>
-                                        </p:cTn>
-                                        <p:tgtEl>
-                                          <p:spTgt spid="52"/>
-                                        </p:tgtEl>
-                                        <p:attrNameLst>
-                                          <p:attrName>style.visibility</p:attrName>
-                                        </p:attrNameLst>
-                                      </p:cBhvr>
-                                      <p:to>
-                                        <p:strVal val="visible"/>
-                                      </p:to>
-                                    </p:set>
-                                  </p:childTnLst>
-                                </p:cTn>
-                              </p:par>
-                            </p:childTnLst>
-                          </p:cTn>
-                        </p:par>
-                      </p:childTnLst>
-                    </p:cTn>
-                  </p:par>
-                  <p:par>
-                    <p:cTn id="7" fill="hold">
-                      <p:stCondLst>
-                        <p:cond delay="indefinite"/>
-                      </p:stCondLst>
-                      <p:childTnLst>
-                        <p:par>
-                          <p:cTn id="8" fill="hold">
-                            <p:stCondLst>
-                              <p:cond delay="0"/>
-                            </p:stCondLst>
-                            <p:childTnLst>
-                              <p:par>
-                                <p:cTn id="9" presetID="1" presetClass="entr" presetSubtype="0" fill="hold" nodeType="clickEffect">
-                                  <p:stCondLst>
-                                    <p:cond delay="0"/>
-                                  </p:stCondLst>
-                                  <p:childTnLst>
-                                    <p:set>
-                                      <p:cBhvr>
-                                        <p:cTn id="10" dur="1" fill="hold">
-                                          <p:stCondLst>
-                                            <p:cond delay="0"/>
-                                          </p:stCondLst>
-                                        </p:cTn>
-                                        <p:tgtEl>
-                                          <p:spTgt spid="62"/>
-                                        </p:tgtEl>
-                                        <p:attrNameLst>
-                                          <p:attrName>style.visibility</p:attrName>
-                                        </p:attrNameLst>
-                                      </p:cBhvr>
-                                      <p:to>
-                                        <p:strVal val="visible"/>
-                                      </p:to>
-                                    </p:set>
-                                  </p:childTnLst>
-                                </p:cTn>
-                              </p:par>
-                            </p:childTnLst>
-                          </p:cTn>
-                        </p:par>
-                      </p:childTnLst>
-                    </p:cTn>
-                  </p:par>
-                  <p:par>
-                    <p:cTn id="11" fill="hold">
-                      <p:stCondLst>
-                        <p:cond delay="indefinite"/>
-                      </p:stCondLst>
-                      <p:childTnLst>
-                        <p:par>
-                          <p:cTn id="12" fill="hold">
-                            <p:stCondLst>
-                              <p:cond delay="0"/>
-                            </p:stCondLst>
-                            <p:childTnLst>
-                              <p:par>
-                                <p:cTn id="13" presetID="1" presetClass="entr" presetSubtype="0" fill="hold" nodeType="clickEffect">
-                                  <p:stCondLst>
-                                    <p:cond delay="0"/>
-                                  </p:stCondLst>
-                                  <p:childTnLst>
-                                    <p:set>
-                                      <p:cBhvr>
-                                        <p:cTn id="14" dur="1" fill="hold">
-                                          <p:stCondLst>
-                                            <p:cond delay="0"/>
-                                          </p:stCondLst>
-                                        </p:cTn>
-                                        <p:tgtEl>
-                                          <p:spTgt spid="72"/>
-                                        </p:tgtEl>
-                                        <p:attrNameLst>
-                                          <p:attrName>style.visibility</p:attrName>
-                                        </p:attrNameLst>
-                                      </p:cBhvr>
-                                      <p:to>
-                                        <p:strVal val="visible"/>
-                                      </p:to>
-                                    </p:set>
-                                  </p:childTnLst>
-                                </p:cTn>
-                              </p:par>
-                            </p:childTnLst>
-                          </p:cTn>
-                        </p:par>
-                      </p:childTnLst>
-                    </p:cTn>
-                  </p:par>
-                </p:childTnLst>
-              </p:cTn>
-              <p:prevCondLst>
-                <p:cond evt="onPrev" delay="0">
-                  <p:tgtEl>
-                    <p:sldTgt/>
-                  </p:tgtEl>
-                </p:cond>
-              </p:prevCondLst>
-              <p:nextCondLst>
-                <p:cond evt="onNext" delay="0">
-                  <p:tgtEl>
-                    <p:sldTgt/>
-                  </p:tgtEl>
-                </p:cond>
-              </p:nextCondLst>
-            </p:seq>
-          </p:childTnLst>
-        </p:cTn>
-      </p:par>
-    </p:tnLst>
-  </p:timing>
-</p:sld>
-</file>
-
-<file path=ppt/slides/slide17.xml><?xml version="1.0" encoding="utf-8"?>
-<p:sld xmlns:a="http://schemas.openxmlformats.org/drawingml/2006/main" xmlns:r="http://schemas.openxmlformats.org/officeDocument/2006/relationships" xmlns:p="http://schemas.openxmlformats.org/presentationml/2006/main">
-  <p:cSld name="Worth exploring next">
-    <p:spTree>
-      <p:nvGrpSpPr>
-        <p:cNvPr id="1" name=""/>
-        <p:cNvGrpSpPr/>
-        <p:nvPr/>
-      </p:nvGrpSpPr>
-      <p:grpSpPr>
-        <a:xfrm>
-          <a:off x="0" y="0"/>
-          <a:ext cx="0" cy="0"/>
-          <a:chOff x="0" y="0"/>
-          <a:chExt cx="0" cy="0"/>
-        </a:xfrm>
-      </p:grpSpPr>
-      <p:sp>
-        <p:nvSpPr>
-          <p:cNvPr id="2" name="static:0:text"/>
-          <p:cNvSpPr/>
-          <p:nvPr/>
-        </p:nvSpPr>
-        <p:spPr>
-          <a:xfrm>
-            <a:off x="2727960" y="870109"/>
-            <a:ext cx="2479715" cy="152400"/>
-          </a:xfrm>
-          <a:prstGeom prst="rect">
-            <a:avLst/>
-          </a:prstGeom>
-          <a:noFill/>
-          <a:ln/>
-        </p:spPr>
-        <p:txBody>
-          <a:bodyPr wrap="none" lIns="0" tIns="0" rIns="0" bIns="0" rtlCol="0" anchor="ctr"/>
-          <a:lstStyle/>
-          <a:p>
-            <a:pPr marL="0" indent="0" algn="l">
-              <a:buNone/>
-            </a:pPr>
-            <a:r>
-              <a:rPr lang="en-US" sz="960" b="1" kern="0" spc="154" dirty="0">
-                <a:solidFill>
-                  <a:srgbClr val="4DA6FF"/>
-                </a:solidFill>
-                <a:latin typeface="Arial" pitchFamily="34" charset="0"/>
-                <a:ea typeface="Arial" pitchFamily="34" charset="-122"/>
-                <a:cs typeface="Arial" pitchFamily="34" charset="-120"/>
-              </a:rPr>
-              <a:t>MORE IN MICROSOFT FOUNDRY</a:t>
-            </a:r>
-            <a:endParaRPr lang="en-US" sz="960" dirty="0"/>
-          </a:p>
-        </p:txBody>
-      </p:sp>
-      <p:sp>
-        <p:nvSpPr>
-          <p:cNvPr id="3" name="static:1:text"/>
-          <p:cNvSpPr/>
-          <p:nvPr/>
-        </p:nvSpPr>
-        <p:spPr>
-          <a:xfrm>
-            <a:off x="975360" y="1068229"/>
-            <a:ext cx="3094530" cy="411480"/>
-          </a:xfrm>
-          <a:prstGeom prst="rect">
-            <a:avLst/>
-          </a:prstGeom>
-          <a:noFill/>
-          <a:ln/>
-        </p:spPr>
-        <p:txBody>
-          <a:bodyPr wrap="none" lIns="0" tIns="0" rIns="0" bIns="0" rtlCol="0" anchor="ctr"/>
-          <a:lstStyle/>
-          <a:p>
-            <a:pPr marL="0" indent="0" algn="l">
-              <a:buNone/>
-            </a:pPr>
-            <a:r>
-              <a:rPr lang="en-US" sz="2640" b="1" kern="0" spc="-92" dirty="0">
-                <a:solidFill>
-                  <a:srgbClr val="DEDEDE"/>
-                </a:solidFill>
-                <a:latin typeface="Arial" pitchFamily="34" charset="0"/>
-                <a:ea typeface="Arial" pitchFamily="34" charset="-122"/>
-                <a:cs typeface="Arial" pitchFamily="34" charset="-120"/>
-              </a:rPr>
-              <a:t>Worth exploring next</a:t>
-            </a:r>
-            <a:endParaRPr lang="en-US" sz="2640" dirty="0"/>
-          </a:p>
-        </p:txBody>
-      </p:sp>
-      <p:sp>
-        <p:nvSpPr>
-          <p:cNvPr id="4" name="static:2:text"/>
-          <p:cNvSpPr/>
-          <p:nvPr/>
-        </p:nvSpPr>
-        <p:spPr>
-          <a:xfrm>
-            <a:off x="975360" y="2251234"/>
-            <a:ext cx="348377" cy="266700"/>
-          </a:xfrm>
-          <a:prstGeom prst="rect">
-            <a:avLst/>
-          </a:prstGeom>
-          <a:noFill/>
-          <a:ln/>
-        </p:spPr>
-        <p:txBody>
-          <a:bodyPr wrap="none" lIns="0" tIns="0" rIns="0" bIns="0" rtlCol="0" anchor="ctr"/>
-          <a:lstStyle/>
-          <a:p>
-            <a:pPr marL="0" indent="0" algn="l">
-              <a:buNone/>
-            </a:pPr>
-            <a:r>
-              <a:rPr lang="en-US" sz="1680" b="1" dirty="0">
-                <a:solidFill>
-                  <a:srgbClr val="4DA6FF"/>
-                </a:solidFill>
-                <a:latin typeface="Arial" pitchFamily="34" charset="0"/>
-                <a:ea typeface="Arial" pitchFamily="34" charset="-122"/>
-                <a:cs typeface="Arial" pitchFamily="34" charset="-120"/>
-              </a:rPr>
-              <a:t>01</a:t>
-            </a:r>
-            <a:endParaRPr lang="en-US" sz="1680" dirty="0"/>
-          </a:p>
-        </p:txBody>
-      </p:sp>
-      <p:sp>
-        <p:nvSpPr>
-          <p:cNvPr id="5" name="static:3:text"/>
-          <p:cNvSpPr/>
-          <p:nvPr/>
-        </p:nvSpPr>
-        <p:spPr>
-          <a:xfrm>
-            <a:off x="975360" y="2578894"/>
-            <a:ext cx="1962507" cy="266700"/>
-          </a:xfrm>
-          <a:prstGeom prst="rect">
-            <a:avLst/>
-          </a:prstGeom>
-          <a:noFill/>
-          <a:ln/>
-        </p:spPr>
-        <p:txBody>
-          <a:bodyPr wrap="none" lIns="0" tIns="0" rIns="0" bIns="0" rtlCol="0" anchor="ctr"/>
-          <a:lstStyle/>
-          <a:p>
-            <a:pPr marL="0" indent="0" algn="l">
-              <a:buNone/>
-            </a:pPr>
-            <a:r>
-              <a:rPr lang="en-US" sz="1680" b="1" dirty="0">
-                <a:solidFill>
-                  <a:srgbClr val="DEDEDE"/>
-                </a:solidFill>
-                <a:latin typeface="Arial" pitchFamily="34" charset="0"/>
-                <a:ea typeface="Arial" pitchFamily="34" charset="-122"/>
-                <a:cs typeface="Arial" pitchFamily="34" charset="-120"/>
-              </a:rPr>
-              <a:t>Human Annotation</a:t>
-            </a:r>
-            <a:endParaRPr lang="en-US" sz="1680" dirty="0"/>
-          </a:p>
-        </p:txBody>
-      </p:sp>
-      <p:sp>
-        <p:nvSpPr>
-          <p:cNvPr id="6" name="static:4:text"/>
-          <p:cNvSpPr/>
-          <p:nvPr/>
-        </p:nvSpPr>
-        <p:spPr>
-          <a:xfrm>
-            <a:off x="975360" y="2912626"/>
-            <a:ext cx="2510076" cy="190500"/>
-          </a:xfrm>
-          <a:prstGeom prst="rect">
-            <a:avLst/>
-          </a:prstGeom>
-          <a:noFill/>
-          <a:ln/>
-        </p:spPr>
-        <p:txBody>
-          <a:bodyPr wrap="none" lIns="0" tIns="0" rIns="0" bIns="0" rtlCol="0" anchor="ctr"/>
-          <a:lstStyle/>
-          <a:p>
-            <a:pPr marL="0" indent="0" algn="l">
-              <a:buNone/>
-            </a:pPr>
-            <a:r>
-              <a:rPr lang="en-US" sz="1200" dirty="0">
-                <a:solidFill>
-                  <a:srgbClr val="B0B0B0"/>
-                </a:solidFill>
-                <a:latin typeface="Arial" pitchFamily="34" charset="0"/>
-                <a:ea typeface="Arial" pitchFamily="34" charset="-122"/>
-                <a:cs typeface="Arial" pitchFamily="34" charset="-120"/>
-              </a:rPr>
-              <a:t>Bring domain experts into evaluation</a:t>
-            </a:r>
-            <a:endParaRPr lang="en-US" sz="1200" dirty="0"/>
-          </a:p>
-        </p:txBody>
-      </p:sp>
-      <p:sp>
-        <p:nvSpPr>
-          <p:cNvPr id="7" name="static:5:text"/>
-          <p:cNvSpPr/>
-          <p:nvPr/>
-        </p:nvSpPr>
-        <p:spPr>
-          <a:xfrm>
-            <a:off x="4256961" y="2251234"/>
-            <a:ext cx="374690" cy="266700"/>
-          </a:xfrm>
-          <a:prstGeom prst="rect">
-            <a:avLst/>
-          </a:prstGeom>
-          <a:noFill/>
-          <a:ln/>
-        </p:spPr>
-        <p:txBody>
-          <a:bodyPr wrap="none" lIns="0" tIns="0" rIns="0" bIns="0" rtlCol="0" anchor="ctr"/>
-          <a:lstStyle/>
-          <a:p>
-            <a:pPr marL="0" indent="0" algn="l">
-              <a:buNone/>
-            </a:pPr>
-            <a:r>
-              <a:rPr lang="en-US" sz="1680" b="1" dirty="0">
-                <a:solidFill>
-                  <a:srgbClr val="FD8EA1"/>
-                </a:solidFill>
-                <a:latin typeface="Arial" pitchFamily="34" charset="0"/>
-                <a:ea typeface="Arial" pitchFamily="34" charset="-122"/>
-                <a:cs typeface="Arial" pitchFamily="34" charset="-120"/>
-              </a:rPr>
-              <a:t>02</a:t>
-            </a:r>
-            <a:endParaRPr lang="en-US" sz="1680" dirty="0"/>
-          </a:p>
-        </p:txBody>
-      </p:sp>
-      <p:sp>
-        <p:nvSpPr>
-          <p:cNvPr id="8" name="static:6:text"/>
-          <p:cNvSpPr/>
-          <p:nvPr/>
-        </p:nvSpPr>
-        <p:spPr>
-          <a:xfrm>
-            <a:off x="4256961" y="2578894"/>
-            <a:ext cx="2031682" cy="266700"/>
-          </a:xfrm>
-          <a:prstGeom prst="rect">
-            <a:avLst/>
-          </a:prstGeom>
-          <a:noFill/>
-          <a:ln/>
-        </p:spPr>
-        <p:txBody>
-          <a:bodyPr wrap="none" lIns="0" tIns="0" rIns="0" bIns="0" rtlCol="0" anchor="ctr"/>
-          <a:lstStyle/>
-          <a:p>
-            <a:pPr marL="0" indent="0" algn="l">
-              <a:buNone/>
-            </a:pPr>
-            <a:r>
-              <a:rPr lang="en-US" sz="1680" b="1" dirty="0">
-                <a:solidFill>
-                  <a:srgbClr val="DEDEDE"/>
-                </a:solidFill>
-                <a:latin typeface="Arial" pitchFamily="34" charset="0"/>
-                <a:ea typeface="Arial" pitchFamily="34" charset="-122"/>
-                <a:cs typeface="Arial" pitchFamily="34" charset="-120"/>
-              </a:rPr>
-              <a:t>Synthetic Test Data</a:t>
-            </a:r>
-            <a:endParaRPr lang="en-US" sz="1680" dirty="0"/>
-          </a:p>
-        </p:txBody>
-      </p:sp>
-      <p:sp>
-        <p:nvSpPr>
-          <p:cNvPr id="9" name="static:7:text"/>
-          <p:cNvSpPr/>
-          <p:nvPr/>
-        </p:nvSpPr>
-        <p:spPr>
-          <a:xfrm>
-            <a:off x="4256961" y="2912626"/>
-            <a:ext cx="1836182" cy="190500"/>
-          </a:xfrm>
-          <a:prstGeom prst="rect">
-            <a:avLst/>
-          </a:prstGeom>
-          <a:noFill/>
-          <a:ln/>
-        </p:spPr>
-        <p:txBody>
-          <a:bodyPr wrap="none" lIns="0" tIns="0" rIns="0" bIns="0" rtlCol="0" anchor="ctr"/>
-          <a:lstStyle/>
-          <a:p>
-            <a:pPr marL="0" indent="0" algn="l">
-              <a:buNone/>
-            </a:pPr>
-            <a:r>
-              <a:rPr lang="en-US" sz="1200" dirty="0">
-                <a:solidFill>
-                  <a:srgbClr val="B0B0B0"/>
-                </a:solidFill>
-                <a:latin typeface="Arial" pitchFamily="34" charset="0"/>
-                <a:ea typeface="Arial" pitchFamily="34" charset="-122"/>
-                <a:cs typeface="Arial" pitchFamily="34" charset="-120"/>
-              </a:rPr>
-              <a:t>Expand the cases you test</a:t>
-            </a:r>
-            <a:endParaRPr lang="en-US" sz="1200" dirty="0"/>
-          </a:p>
-        </p:txBody>
-      </p:sp>
-      <p:sp>
-        <p:nvSpPr>
-          <p:cNvPr id="10" name="static:8:text"/>
-          <p:cNvSpPr/>
-          <p:nvPr/>
-        </p:nvSpPr>
-        <p:spPr>
-          <a:xfrm>
-            <a:off x="7538680" y="2251234"/>
-            <a:ext cx="380881" cy="266700"/>
-          </a:xfrm>
-          <a:prstGeom prst="rect">
-            <a:avLst/>
-          </a:prstGeom>
-          <a:noFill/>
-          <a:ln/>
-        </p:spPr>
-        <p:txBody>
-          <a:bodyPr wrap="none" lIns="0" tIns="0" rIns="0" bIns="0" rtlCol="0" anchor="ctr"/>
-          <a:lstStyle/>
-          <a:p>
-            <a:pPr marL="0" indent="0" algn="l">
-              <a:buNone/>
-            </a:pPr>
-            <a:r>
-              <a:rPr lang="en-US" sz="1680" b="1" dirty="0">
-                <a:solidFill>
-                  <a:srgbClr val="FBBF24"/>
-                </a:solidFill>
-                <a:latin typeface="Arial" pitchFamily="34" charset="0"/>
-                <a:ea typeface="Arial" pitchFamily="34" charset="-122"/>
-                <a:cs typeface="Arial" pitchFamily="34" charset="-120"/>
-              </a:rPr>
-              <a:t>03</a:t>
-            </a:r>
-            <a:endParaRPr lang="en-US" sz="1680" dirty="0"/>
-          </a:p>
-        </p:txBody>
-      </p:sp>
-      <p:sp>
-        <p:nvSpPr>
-          <p:cNvPr id="11" name="static:9:text"/>
-          <p:cNvSpPr/>
-          <p:nvPr/>
-        </p:nvSpPr>
-        <p:spPr>
-          <a:xfrm>
-            <a:off x="7538680" y="2578894"/>
-            <a:ext cx="1626156" cy="266700"/>
-          </a:xfrm>
-          <a:prstGeom prst="rect">
-            <a:avLst/>
-          </a:prstGeom>
-          <a:noFill/>
-          <a:ln/>
-        </p:spPr>
-        <p:txBody>
-          <a:bodyPr wrap="none" lIns="0" tIns="0" rIns="0" bIns="0" rtlCol="0" anchor="ctr"/>
-          <a:lstStyle/>
-          <a:p>
-            <a:pPr marL="0" indent="0" algn="l">
-              <a:buNone/>
-            </a:pPr>
-            <a:r>
-              <a:rPr lang="en-US" sz="1680" b="1" dirty="0">
-                <a:solidFill>
-                  <a:srgbClr val="DEDEDE"/>
-                </a:solidFill>
-                <a:latin typeface="Arial" pitchFamily="34" charset="0"/>
-                <a:ea typeface="Arial" pitchFamily="34" charset="-122"/>
-                <a:cs typeface="Arial" pitchFamily="34" charset="-120"/>
-              </a:rPr>
-              <a:t>AI Red Teaming</a:t>
-            </a:r>
-            <a:endParaRPr lang="en-US" sz="1680" dirty="0"/>
-          </a:p>
-        </p:txBody>
-      </p:sp>
-      <p:sp>
-        <p:nvSpPr>
-          <p:cNvPr id="12" name="static:10:text"/>
-          <p:cNvSpPr/>
-          <p:nvPr/>
-        </p:nvSpPr>
-        <p:spPr>
-          <a:xfrm>
-            <a:off x="7538680" y="2912626"/>
-            <a:ext cx="1828681" cy="190500"/>
-          </a:xfrm>
-          <a:prstGeom prst="rect">
-            <a:avLst/>
-          </a:prstGeom>
-          <a:noFill/>
-          <a:ln/>
-        </p:spPr>
-        <p:txBody>
-          <a:bodyPr wrap="none" lIns="0" tIns="0" rIns="0" bIns="0" rtlCol="0" anchor="ctr"/>
-          <a:lstStyle/>
-          <a:p>
-            <a:pPr marL="0" indent="0" algn="l">
-              <a:buNone/>
-            </a:pPr>
-            <a:r>
-              <a:rPr lang="en-US" sz="1200" dirty="0">
-                <a:solidFill>
-                  <a:srgbClr val="B0B0B0"/>
-                </a:solidFill>
-                <a:latin typeface="Arial" pitchFamily="34" charset="0"/>
-                <a:ea typeface="Arial" pitchFamily="34" charset="-122"/>
-                <a:cs typeface="Arial" pitchFamily="34" charset="-120"/>
-              </a:rPr>
-              <a:t>Test adversarial behaviour</a:t>
-            </a:r>
-            <a:endParaRPr lang="en-US" sz="1200" dirty="0"/>
-          </a:p>
-        </p:txBody>
-      </p:sp>
-      <p:sp>
-        <p:nvSpPr>
-          <p:cNvPr id="13" name="static:11:text"/>
-          <p:cNvSpPr/>
-          <p:nvPr/>
-        </p:nvSpPr>
-        <p:spPr>
-          <a:xfrm>
-            <a:off x="975360" y="3622834"/>
-            <a:ext cx="385286" cy="266700"/>
-          </a:xfrm>
-          <a:prstGeom prst="rect">
-            <a:avLst/>
-          </a:prstGeom>
-          <a:noFill/>
-          <a:ln/>
-        </p:spPr>
-        <p:txBody>
-          <a:bodyPr wrap="none" lIns="0" tIns="0" rIns="0" bIns="0" rtlCol="0" anchor="ctr"/>
-          <a:lstStyle/>
-          <a:p>
-            <a:pPr marL="0" indent="0" algn="l">
-              <a:buNone/>
-            </a:pPr>
-            <a:r>
-              <a:rPr lang="en-US" sz="1680" b="1" dirty="0">
-                <a:solidFill>
-                  <a:srgbClr val="4ADE80"/>
-                </a:solidFill>
-                <a:latin typeface="Arial" pitchFamily="34" charset="0"/>
-                <a:ea typeface="Arial" pitchFamily="34" charset="-122"/>
-                <a:cs typeface="Arial" pitchFamily="34" charset="-120"/>
-              </a:rPr>
-              <a:t>04</a:t>
-            </a:r>
-            <a:endParaRPr lang="en-US" sz="1680" dirty="0"/>
-          </a:p>
-        </p:txBody>
-      </p:sp>
-      <p:sp>
-        <p:nvSpPr>
-          <p:cNvPr id="14" name="static:12:text"/>
-          <p:cNvSpPr/>
-          <p:nvPr/>
-        </p:nvSpPr>
-        <p:spPr>
-          <a:xfrm>
-            <a:off x="975360" y="3950494"/>
-            <a:ext cx="1121212" cy="266700"/>
-          </a:xfrm>
-          <a:prstGeom prst="rect">
-            <a:avLst/>
-          </a:prstGeom>
-          <a:noFill/>
-          <a:ln/>
-        </p:spPr>
-        <p:txBody>
-          <a:bodyPr wrap="none" lIns="0" tIns="0" rIns="0" bIns="0" rtlCol="0" anchor="ctr"/>
-          <a:lstStyle/>
-          <a:p>
-            <a:pPr marL="0" indent="0" algn="l">
-              <a:buNone/>
-            </a:pPr>
-            <a:r>
-              <a:rPr lang="en-US" sz="1680" b="1" dirty="0">
-                <a:solidFill>
-                  <a:srgbClr val="DEDEDE"/>
-                </a:solidFill>
-                <a:latin typeface="Arial" pitchFamily="34" charset="0"/>
-                <a:ea typeface="Arial" pitchFamily="34" charset="-122"/>
-                <a:cs typeface="Arial" pitchFamily="34" charset="-120"/>
-              </a:rPr>
-              <a:t>Guardrails</a:t>
-            </a:r>
-            <a:endParaRPr lang="en-US" sz="1680" dirty="0"/>
-          </a:p>
-        </p:txBody>
-      </p:sp>
-      <p:sp>
-        <p:nvSpPr>
-          <p:cNvPr id="15" name="static:13:text"/>
-          <p:cNvSpPr/>
-          <p:nvPr/>
-        </p:nvSpPr>
-        <p:spPr>
-          <a:xfrm>
-            <a:off x="975360" y="4284226"/>
-            <a:ext cx="2325291" cy="190500"/>
-          </a:xfrm>
-          <a:prstGeom prst="rect">
-            <a:avLst/>
-          </a:prstGeom>
-          <a:noFill/>
-          <a:ln/>
-        </p:spPr>
-        <p:txBody>
-          <a:bodyPr wrap="none" lIns="0" tIns="0" rIns="0" bIns="0" rtlCol="0" anchor="ctr"/>
-          <a:lstStyle/>
-          <a:p>
-            <a:pPr marL="0" indent="0" algn="l">
-              <a:buNone/>
-            </a:pPr>
-            <a:r>
-              <a:rPr lang="en-US" sz="1200" dirty="0">
-                <a:solidFill>
-                  <a:srgbClr val="B0B0B0"/>
-                </a:solidFill>
-                <a:latin typeface="Arial" pitchFamily="34" charset="0"/>
-                <a:ea typeface="Arial" pitchFamily="34" charset="-122"/>
-                <a:cs typeface="Arial" pitchFamily="34" charset="-120"/>
-              </a:rPr>
-              <a:t>Protect inputs and tool responses</a:t>
-            </a:r>
-            <a:endParaRPr lang="en-US" sz="1200" dirty="0"/>
-          </a:p>
-        </p:txBody>
-      </p:sp>
-      <p:sp>
-        <p:nvSpPr>
-          <p:cNvPr id="16" name="static:14:text"/>
-          <p:cNvSpPr/>
-          <p:nvPr/>
-        </p:nvSpPr>
-        <p:spPr>
-          <a:xfrm>
-            <a:off x="4256961" y="3622834"/>
-            <a:ext cx="378619" cy="266700"/>
-          </a:xfrm>
-          <a:prstGeom prst="rect">
-            <a:avLst/>
-          </a:prstGeom>
-          <a:noFill/>
-          <a:ln/>
-        </p:spPr>
-        <p:txBody>
-          <a:bodyPr wrap="none" lIns="0" tIns="0" rIns="0" bIns="0" rtlCol="0" anchor="ctr"/>
-          <a:lstStyle/>
-          <a:p>
-            <a:pPr marL="0" indent="0" algn="l">
-              <a:buNone/>
-            </a:pPr>
-            <a:r>
-              <a:rPr lang="en-US" sz="1680" b="1" dirty="0">
-                <a:solidFill>
-                  <a:srgbClr val="F87171"/>
-                </a:solidFill>
-                <a:latin typeface="Arial" pitchFamily="34" charset="0"/>
-                <a:ea typeface="Arial" pitchFamily="34" charset="-122"/>
-                <a:cs typeface="Arial" pitchFamily="34" charset="-120"/>
-              </a:rPr>
-              <a:t>05</a:t>
-            </a:r>
-            <a:endParaRPr lang="en-US" sz="1680" dirty="0"/>
-          </a:p>
-        </p:txBody>
-      </p:sp>
-      <p:sp>
-        <p:nvSpPr>
-          <p:cNvPr id="17" name="static:15:text"/>
-          <p:cNvSpPr/>
-          <p:nvPr/>
-        </p:nvSpPr>
-        <p:spPr>
-          <a:xfrm>
-            <a:off x="4256961" y="3950494"/>
-            <a:ext cx="2318385" cy="266700"/>
-          </a:xfrm>
-          <a:prstGeom prst="rect">
-            <a:avLst/>
-          </a:prstGeom>
-          <a:noFill/>
-          <a:ln/>
-        </p:spPr>
-        <p:txBody>
-          <a:bodyPr wrap="none" lIns="0" tIns="0" rIns="0" bIns="0" rtlCol="0" anchor="ctr"/>
-          <a:lstStyle/>
-          <a:p>
-            <a:pPr marL="0" indent="0" algn="l">
-              <a:buNone/>
-            </a:pPr>
-            <a:r>
-              <a:rPr lang="en-US" sz="1680" b="1" dirty="0">
-                <a:solidFill>
-                  <a:srgbClr val="DEDEDE"/>
-                </a:solidFill>
-                <a:latin typeface="Arial" pitchFamily="34" charset="0"/>
-                <a:ea typeface="Arial" pitchFamily="34" charset="-122"/>
-                <a:cs typeface="Arial" pitchFamily="34" charset="-120"/>
-              </a:rPr>
-              <a:t>Identity &amp; Permissions</a:t>
-            </a:r>
-            <a:endParaRPr lang="en-US" sz="1680" dirty="0"/>
-          </a:p>
-        </p:txBody>
-      </p:sp>
-      <p:sp>
-        <p:nvSpPr>
-          <p:cNvPr id="18" name="static:16:text"/>
-          <p:cNvSpPr/>
-          <p:nvPr/>
-        </p:nvSpPr>
-        <p:spPr>
-          <a:xfrm>
-            <a:off x="4256961" y="4284226"/>
-            <a:ext cx="2229922" cy="190500"/>
-          </a:xfrm>
-          <a:prstGeom prst="rect">
-            <a:avLst/>
-          </a:prstGeom>
-          <a:noFill/>
-          <a:ln/>
-        </p:spPr>
-        <p:txBody>
-          <a:bodyPr wrap="none" lIns="0" tIns="0" rIns="0" bIns="0" rtlCol="0" anchor="ctr"/>
-          <a:lstStyle/>
-          <a:p>
-            <a:pPr marL="0" indent="0" algn="l">
-              <a:buNone/>
-            </a:pPr>
-            <a:r>
-              <a:rPr lang="en-US" sz="1200" dirty="0">
-                <a:solidFill>
-                  <a:srgbClr val="B0B0B0"/>
-                </a:solidFill>
-                <a:latin typeface="Arial" pitchFamily="34" charset="0"/>
-                <a:ea typeface="Arial" pitchFamily="34" charset="-122"/>
-                <a:cs typeface="Arial" pitchFamily="34" charset="-120"/>
-              </a:rPr>
-              <a:t>Limit what the agent can access</a:t>
-            </a:r>
-            <a:endParaRPr lang="en-US" sz="1200" dirty="0"/>
-          </a:p>
-        </p:txBody>
-      </p:sp>
-      <p:sp>
-        <p:nvSpPr>
-          <p:cNvPr id="19" name="static:17:text"/>
-          <p:cNvSpPr/>
-          <p:nvPr/>
-        </p:nvSpPr>
-        <p:spPr>
-          <a:xfrm>
-            <a:off x="7538680" y="3622834"/>
-            <a:ext cx="385405" cy="266700"/>
-          </a:xfrm>
-          <a:prstGeom prst="rect">
-            <a:avLst/>
-          </a:prstGeom>
-          <a:noFill/>
-          <a:ln/>
-        </p:spPr>
-        <p:txBody>
-          <a:bodyPr wrap="none" lIns="0" tIns="0" rIns="0" bIns="0" rtlCol="0" anchor="ctr"/>
-          <a:lstStyle/>
-          <a:p>
-            <a:pPr marL="0" indent="0" algn="l">
-              <a:buNone/>
-            </a:pPr>
-            <a:r>
-              <a:rPr lang="en-US" sz="1680" b="1" dirty="0">
-                <a:solidFill>
-                  <a:srgbClr val="4DA6FF"/>
-                </a:solidFill>
-                <a:latin typeface="Arial" pitchFamily="34" charset="0"/>
-                <a:ea typeface="Arial" pitchFamily="34" charset="-122"/>
-                <a:cs typeface="Arial" pitchFamily="34" charset="-120"/>
-              </a:rPr>
-              <a:t>06</a:t>
-            </a:r>
-            <a:endParaRPr lang="en-US" sz="1680" dirty="0"/>
-          </a:p>
-        </p:txBody>
-      </p:sp>
-      <p:sp>
-        <p:nvSpPr>
-          <p:cNvPr id="20" name="static:18:text"/>
-          <p:cNvSpPr/>
-          <p:nvPr/>
-        </p:nvSpPr>
-        <p:spPr>
-          <a:xfrm>
-            <a:off x="7538680" y="3950494"/>
-            <a:ext cx="1861423" cy="266700"/>
-          </a:xfrm>
-          <a:prstGeom prst="rect">
-            <a:avLst/>
-          </a:prstGeom>
-          <a:noFill/>
-          <a:ln/>
-        </p:spPr>
-        <p:txBody>
-          <a:bodyPr wrap="none" lIns="0" tIns="0" rIns="0" bIns="0" rtlCol="0" anchor="ctr"/>
-          <a:lstStyle/>
-          <a:p>
-            <a:pPr marL="0" indent="0" algn="l">
-              <a:buNone/>
-            </a:pPr>
-            <a:r>
-              <a:rPr lang="en-US" sz="1680" b="1" dirty="0">
-                <a:solidFill>
-                  <a:srgbClr val="DEDEDE"/>
-                </a:solidFill>
-                <a:latin typeface="Arial" pitchFamily="34" charset="0"/>
-                <a:ea typeface="Arial" pitchFamily="34" charset="-122"/>
-                <a:cs typeface="Arial" pitchFamily="34" charset="-120"/>
-              </a:rPr>
-              <a:t>Human Approvals</a:t>
-            </a:r>
-            <a:endParaRPr lang="en-US" sz="1680" dirty="0"/>
-          </a:p>
-        </p:txBody>
-      </p:sp>
-      <p:sp>
-        <p:nvSpPr>
-          <p:cNvPr id="21" name="static:19:text"/>
-          <p:cNvSpPr/>
-          <p:nvPr/>
-        </p:nvSpPr>
-        <p:spPr>
-          <a:xfrm>
-            <a:off x="7538680" y="4284226"/>
-            <a:ext cx="2269450" cy="190500"/>
-          </a:xfrm>
-          <a:prstGeom prst="rect">
-            <a:avLst/>
-          </a:prstGeom>
-          <a:noFill/>
-          <a:ln/>
-        </p:spPr>
-        <p:txBody>
-          <a:bodyPr wrap="none" lIns="0" tIns="0" rIns="0" bIns="0" rtlCol="0" anchor="ctr"/>
-          <a:lstStyle/>
-          <a:p>
-            <a:pPr marL="0" indent="0" algn="l">
-              <a:buNone/>
-            </a:pPr>
-            <a:r>
-              <a:rPr lang="en-US" sz="1200" dirty="0">
-                <a:solidFill>
-                  <a:srgbClr val="B0B0B0"/>
-                </a:solidFill>
-                <a:latin typeface="Arial" pitchFamily="34" charset="0"/>
-                <a:ea typeface="Arial" pitchFamily="34" charset="-122"/>
-                <a:cs typeface="Arial" pitchFamily="34" charset="-120"/>
-              </a:rPr>
-              <a:t>Keep people in control of actions</a:t>
-            </a:r>
-            <a:endParaRPr lang="en-US" sz="1200" dirty="0"/>
-          </a:p>
-        </p:txBody>
-      </p:sp>
-      <p:sp>
-        <p:nvSpPr>
-          <p:cNvPr id="22" name="static:20:text"/>
-          <p:cNvSpPr/>
-          <p:nvPr/>
-        </p:nvSpPr>
-        <p:spPr>
-          <a:xfrm>
-            <a:off x="609600" y="6461760"/>
-            <a:ext cx="1539240" cy="129540"/>
-          </a:xfrm>
-          <a:prstGeom prst="rect">
-            <a:avLst/>
-          </a:prstGeom>
-          <a:noFill/>
-          <a:ln/>
-        </p:spPr>
-        <p:txBody>
-          <a:bodyPr wrap="none" lIns="0" tIns="0" rIns="0" bIns="0" rtlCol="0" anchor="ctr"/>
-          <a:lstStyle/>
-          <a:p>
-            <a:pPr marL="0" indent="0" algn="l">
-              <a:buNone/>
-            </a:pPr>
-            <a:r>
-              <a:rPr lang="en-US" sz="720" kern="0" spc="58" dirty="0">
-                <a:solidFill>
-                  <a:srgbClr val="919191"/>
-                </a:solidFill>
-                <a:latin typeface="Arial" pitchFamily="34" charset="0"/>
-                <a:ea typeface="Arial" pitchFamily="34" charset="-122"/>
-                <a:cs typeface="Arial" pitchFamily="34" charset="-120"/>
-              </a:rPr>
-              <a:t>FY27 AI GENIUS</a:t>
-            </a:r>
-            <a:endParaRPr lang="en-US" sz="720" dirty="0"/>
-          </a:p>
-        </p:txBody>
-      </p:sp>
-      <p:sp>
-        <p:nvSpPr>
-          <p:cNvPr id="23" name="static:21:text"/>
-          <p:cNvSpPr/>
-          <p:nvPr/>
-        </p:nvSpPr>
-        <p:spPr>
-          <a:xfrm>
-            <a:off x="10463927" y="6461760"/>
-            <a:ext cx="1209913" cy="129540"/>
-          </a:xfrm>
-          <a:prstGeom prst="rect">
-            <a:avLst/>
-          </a:prstGeom>
-          <a:noFill/>
-          <a:ln/>
-        </p:spPr>
-        <p:txBody>
-          <a:bodyPr wrap="none" lIns="0" tIns="0" rIns="0" bIns="0" rtlCol="0" anchor="ctr"/>
-          <a:lstStyle/>
-          <a:p>
-            <a:pPr marL="0" indent="0" algn="l">
-              <a:buNone/>
-            </a:pPr>
-            <a:r>
-              <a:rPr lang="en-US" sz="720" kern="0" spc="58" dirty="0">
-                <a:solidFill>
-                  <a:srgbClr val="919191"/>
-                </a:solidFill>
-                <a:latin typeface="Arial" pitchFamily="34" charset="0"/>
-                <a:ea typeface="Arial" pitchFamily="34" charset="-122"/>
-                <a:cs typeface="Arial" pitchFamily="34" charset="-120"/>
-              </a:rPr>
-              <a:t>AI GENIUS / S6 E2 / 18</a:t>
-            </a:r>
-            <a:endParaRPr lang="en-US" sz="720" dirty="0"/>
-          </a:p>
-        </p:txBody>
-      </p:sp>
-    </p:spTree>
-  </p:cSld>
-  <p:clrMapOvr>
-    <a:masterClrMapping/>
-  </p:clrMapOvr>
-</p:sld>
-</file>
-
-<file path=ppt/slides/slide18.xml><?xml version="1.0" encoding="utf-8"?>
-<p:sld xmlns:a="http://schemas.openxmlformats.org/drawingml/2006/main" xmlns:r="http://schemas.openxmlformats.org/officeDocument/2006/relationships" xmlns:p="http://schemas.openxmlformats.org/presentationml/2006/main">
-  <p:cSld name="Build measure improve repeat">
-    <p:spTree>
-      <p:nvGrpSpPr>
-        <p:cNvPr id="1" name=""/>
-        <p:cNvGrpSpPr/>
-        <p:nvPr/>
-      </p:nvGrpSpPr>
-      <p:grpSpPr>
-        <a:xfrm>
-          <a:off x="0" y="0"/>
-          <a:ext cx="0" cy="0"/>
-          <a:chOff x="0" y="0"/>
-          <a:chExt cx="0" cy="0"/>
-        </a:xfrm>
-      </p:grpSpPr>
-      <p:sp>
-        <p:nvSpPr>
-          <p:cNvPr id="2" name="static:0:text"/>
-          <p:cNvSpPr/>
-          <p:nvPr/>
-        </p:nvSpPr>
-        <p:spPr>
-          <a:xfrm>
-            <a:off x="975360" y="2343626"/>
-            <a:ext cx="496133" cy="190500"/>
-          </a:xfrm>
-          <a:prstGeom prst="rect">
-            <a:avLst/>
-          </a:prstGeom>
-          <a:noFill/>
-          <a:ln/>
-        </p:spPr>
-        <p:txBody>
-          <a:bodyPr wrap="none" lIns="0" tIns="0" rIns="0" bIns="0" rtlCol="0" anchor="ctr"/>
-          <a:lstStyle/>
-          <a:p>
-            <a:pPr marL="0" indent="0" algn="l">
-              <a:buNone/>
-            </a:pPr>
-            <a:r>
-              <a:rPr lang="en-US" sz="1200" b="1" kern="0" spc="180" dirty="0">
-                <a:solidFill>
-                  <a:srgbClr val="4DA6FF"/>
-                </a:solidFill>
-                <a:latin typeface="Arial" pitchFamily="34" charset="0"/>
-                <a:ea typeface="Arial" pitchFamily="34" charset="-122"/>
-                <a:cs typeface="Arial" pitchFamily="34" charset="-120"/>
-              </a:rPr>
-              <a:t>Q&amp;A</a:t>
-            </a:r>
-            <a:endParaRPr lang="en-US" sz="1200" dirty="0"/>
-          </a:p>
-        </p:txBody>
-      </p:sp>
-      <p:sp>
-        <p:nvSpPr>
-          <p:cNvPr id="3" name="static:1:text"/>
-          <p:cNvSpPr/>
-          <p:nvPr/>
-        </p:nvSpPr>
-        <p:spPr>
-          <a:xfrm>
-            <a:off x="975360" y="2640806"/>
-            <a:ext cx="8494705" cy="624840"/>
-          </a:xfrm>
-          <a:prstGeom prst="rect">
-            <a:avLst/>
-          </a:prstGeom>
-          <a:noFill/>
-          <a:ln/>
-        </p:spPr>
-        <p:txBody>
-          <a:bodyPr wrap="none" lIns="0" tIns="0" rIns="0" bIns="0" rtlCol="0" anchor="ctr"/>
-          <a:lstStyle/>
-          <a:p>
-            <a:pPr marL="0" indent="0" algn="l">
-              <a:buNone/>
-            </a:pPr>
-            <a:r>
-              <a:rPr lang="en-US" sz="4080" b="1" kern="0" spc="-143" dirty="0">
-                <a:solidFill>
-                  <a:srgbClr val="DEDEDE"/>
-                </a:solidFill>
-                <a:latin typeface="Arial" pitchFamily="34" charset="0"/>
-                <a:ea typeface="Arial" pitchFamily="34" charset="-122"/>
-                <a:cs typeface="Arial" pitchFamily="34" charset="-120"/>
-              </a:rPr>
-              <a:t>Build → Measure → Improve → Repeat</a:t>
-            </a:r>
-            <a:endParaRPr lang="en-US" sz="4080" dirty="0"/>
-          </a:p>
-        </p:txBody>
-      </p:sp>
-      <p:sp>
-        <p:nvSpPr>
-          <p:cNvPr id="4" name="static:2:text"/>
-          <p:cNvSpPr/>
-          <p:nvPr/>
-        </p:nvSpPr>
-        <p:spPr>
-          <a:xfrm>
-            <a:off x="975360" y="3387566"/>
-            <a:ext cx="5526524" cy="259080"/>
-          </a:xfrm>
-          <a:prstGeom prst="rect">
-            <a:avLst/>
-          </a:prstGeom>
-          <a:noFill/>
-          <a:ln/>
-        </p:spPr>
-        <p:txBody>
-          <a:bodyPr wrap="none" lIns="0" tIns="0" rIns="0" bIns="0" rtlCol="0" anchor="ctr"/>
-          <a:lstStyle/>
-          <a:p>
-            <a:pPr marL="0" indent="0" algn="l">
-              <a:buNone/>
-            </a:pPr>
-            <a:r>
-              <a:rPr lang="en-US" sz="1620" dirty="0">
-                <a:solidFill>
-                  <a:srgbClr val="B0B0B0"/>
-                </a:solidFill>
-                <a:latin typeface="Arial" pitchFamily="34" charset="0"/>
-                <a:ea typeface="Arial" pitchFamily="34" charset="-122"/>
-                <a:cs typeface="Arial" pitchFamily="34" charset="-120"/>
-              </a:rPr>
-              <a:t>One working agent. Consistent answers. Measured trade-offs.</a:t>
-            </a:r>
-            <a:endParaRPr lang="en-US" sz="1620" dirty="0"/>
-          </a:p>
-        </p:txBody>
-      </p:sp>
-      <p:sp>
-        <p:nvSpPr>
-          <p:cNvPr id="5" name="static:3:text"/>
-          <p:cNvSpPr/>
-          <p:nvPr/>
-        </p:nvSpPr>
-        <p:spPr>
-          <a:xfrm>
-            <a:off x="975360" y="3665220"/>
-            <a:ext cx="2498288" cy="259080"/>
-          </a:xfrm>
-          <a:prstGeom prst="rect">
-            <a:avLst/>
-          </a:prstGeom>
-          <a:noFill/>
-          <a:ln/>
-        </p:spPr>
-        <p:txBody>
-          <a:bodyPr wrap="none" lIns="0" tIns="0" rIns="0" bIns="0" rtlCol="0" anchor="ctr"/>
-          <a:lstStyle/>
-          <a:p>
-            <a:pPr marL="0" indent="0" algn="l">
-              <a:buNone/>
-            </a:pPr>
-            <a:r>
-              <a:rPr lang="en-US" sz="1620" dirty="0">
-                <a:solidFill>
-                  <a:srgbClr val="B0B0B0"/>
-                </a:solidFill>
-                <a:latin typeface="Arial" pitchFamily="34" charset="0"/>
-                <a:ea typeface="Arial" pitchFamily="34" charset="-122"/>
-                <a:cs typeface="Arial" pitchFamily="34" charset="-120"/>
-              </a:rPr>
-              <a:t>Repeatable release checks.</a:t>
-            </a:r>
-            <a:endParaRPr lang="en-US" sz="1620" dirty="0"/>
-          </a:p>
-        </p:txBody>
-      </p:sp>
-      <p:sp>
-        <p:nvSpPr>
-          <p:cNvPr id="6" name="static:4:text"/>
-          <p:cNvSpPr/>
-          <p:nvPr/>
-        </p:nvSpPr>
-        <p:spPr>
-          <a:xfrm>
-            <a:off x="609600" y="6461760"/>
-            <a:ext cx="1539240" cy="129540"/>
-          </a:xfrm>
-          <a:prstGeom prst="rect">
-            <a:avLst/>
-          </a:prstGeom>
-          <a:noFill/>
-          <a:ln/>
-        </p:spPr>
-        <p:txBody>
-          <a:bodyPr wrap="none" lIns="0" tIns="0" rIns="0" bIns="0" rtlCol="0" anchor="ctr"/>
-          <a:lstStyle/>
-          <a:p>
-            <a:pPr marL="0" indent="0" algn="l">
-              <a:buNone/>
-            </a:pPr>
-            <a:r>
-              <a:rPr lang="en-US" sz="720" kern="0" spc="58" dirty="0">
-                <a:solidFill>
-                  <a:srgbClr val="919191"/>
-                </a:solidFill>
-                <a:latin typeface="Arial" pitchFamily="34" charset="0"/>
-                <a:ea typeface="Arial" pitchFamily="34" charset="-122"/>
-                <a:cs typeface="Arial" pitchFamily="34" charset="-120"/>
-              </a:rPr>
-              <a:t>FY27 AI GENIUS</a:t>
-            </a:r>
-            <a:endParaRPr lang="en-US" sz="720" dirty="0"/>
-          </a:p>
-        </p:txBody>
-      </p:sp>
-      <p:sp>
-        <p:nvSpPr>
-          <p:cNvPr id="7" name="static:5:text"/>
-          <p:cNvSpPr/>
-          <p:nvPr/>
-        </p:nvSpPr>
-        <p:spPr>
-          <a:xfrm>
-            <a:off x="10457617" y="6461760"/>
-            <a:ext cx="1216223" cy="129540"/>
-          </a:xfrm>
-          <a:prstGeom prst="rect">
-            <a:avLst/>
-          </a:prstGeom>
-          <a:noFill/>
-          <a:ln/>
-        </p:spPr>
-        <p:txBody>
-          <a:bodyPr wrap="none" lIns="0" tIns="0" rIns="0" bIns="0" rtlCol="0" anchor="ctr"/>
-          <a:lstStyle/>
-          <a:p>
-            <a:pPr marL="0" indent="0" algn="l">
-              <a:buNone/>
-            </a:pPr>
-            <a:r>
-              <a:rPr lang="en-US" sz="720" kern="0" spc="58" dirty="0">
-                <a:solidFill>
-                  <a:srgbClr val="919191"/>
-                </a:solidFill>
-                <a:latin typeface="Arial" pitchFamily="34" charset="0"/>
-                <a:ea typeface="Arial" pitchFamily="34" charset="-122"/>
-                <a:cs typeface="Arial" pitchFamily="34" charset="-120"/>
-              </a:rPr>
-              <a:t>AI GENIUS / S6 E2 / 19</a:t>
-            </a:r>
-            <a:endParaRPr lang="en-US" sz="720" dirty="0"/>
-          </a:p>
-        </p:txBody>
-      </p:sp>
-    </p:spTree>
-  </p:cSld>
-  <p:clrMapOvr>
-    <a:masterClrMapping/>
-  </p:clrMapOvr>
-</p:sld>
-</file>
-
-<file path=ppt/slides/slide19.xml><?xml version="1.0" encoding="utf-8"?>
 <p:sld xmlns:a="http://schemas.openxmlformats.org/drawingml/2006/main" xmlns:p="http://schemas.openxmlformats.org/presentationml/2006/main" xmlns:r="http://schemas.openxmlformats.org/officeDocument/2006/relationships">
   <p:cSld>
     <p:spTree>
@@ -12900,6 +10932,2686 @@
       </p:par>
     </p:tnLst>
   </p:timing>
+</p:sld>
+</file>
+
+<file path=ppt/slides/slide16.xml><?xml version="1.0" encoding="utf-8"?>
+<p:sld xmlns:a="http://schemas.openxmlformats.org/drawingml/2006/main" xmlns:r="http://schemas.openxmlformats.org/officeDocument/2006/relationships" xmlns:p="http://schemas.openxmlformats.org/presentationml/2006/main">
+  <p:cSld name="Demo 6 - Release Check">
+    <p:spTree>
+      <p:nvGrpSpPr>
+        <p:cNvPr id="1" name=""/>
+        <p:cNvGrpSpPr/>
+        <p:nvPr/>
+      </p:nvGrpSpPr>
+      <p:grpSpPr>
+        <a:xfrm>
+          <a:off x="0" y="0"/>
+          <a:ext cx="0" cy="0"/>
+          <a:chOff x="0" y="0"/>
+          <a:chExt cx="0" cy="0"/>
+        </a:xfrm>
+      </p:grpSpPr>
+      <p:sp>
+        <p:nvSpPr>
+          <p:cNvPr id="2" name="static:0:text"/>
+          <p:cNvSpPr/>
+          <p:nvPr/>
+        </p:nvSpPr>
+        <p:spPr>
+          <a:xfrm>
+            <a:off x="975360" y="2343626"/>
+            <a:ext cx="814626" cy="190500"/>
+          </a:xfrm>
+          <a:prstGeom prst="rect">
+            <a:avLst/>
+          </a:prstGeom>
+          <a:noFill/>
+          <a:ln/>
+        </p:spPr>
+        <p:txBody>
+          <a:bodyPr wrap="none" lIns="0" tIns="0" rIns="0" bIns="0" rtlCol="0" anchor="ctr"/>
+          <a:lstStyle/>
+          <a:p>
+            <a:pPr marL="0" indent="0" algn="l">
+              <a:buNone/>
+            </a:pPr>
+            <a:r>
+              <a:rPr lang="en-US" sz="1200" b="1" kern="0" spc="180" dirty="0">
+                <a:solidFill>
+                  <a:srgbClr val="4DA6FF"/>
+                </a:solidFill>
+                <a:latin typeface="Arial" pitchFamily="34" charset="0"/>
+                <a:ea typeface="Arial" pitchFamily="34" charset="-122"/>
+                <a:cs typeface="Arial" pitchFamily="34" charset="-120"/>
+              </a:rPr>
+              <a:t>DEMO 6</a:t>
+            </a:r>
+            <a:endParaRPr lang="en-US" sz="1200" dirty="0"/>
+          </a:p>
+        </p:txBody>
+      </p:sp>
+      <p:sp>
+        <p:nvSpPr>
+          <p:cNvPr id="3" name="static:1:text"/>
+          <p:cNvSpPr/>
+          <p:nvPr/>
+        </p:nvSpPr>
+        <p:spPr>
+          <a:xfrm>
+            <a:off x="975360" y="2640806"/>
+            <a:ext cx="7000000" cy="624840"/>
+          </a:xfrm>
+          <a:prstGeom prst="rect">
+            <a:avLst/>
+          </a:prstGeom>
+          <a:noFill/>
+          <a:ln/>
+        </p:spPr>
+        <p:txBody>
+          <a:bodyPr wrap="none" lIns="0" tIns="0" rIns="0" bIns="0" rtlCol="0" anchor="ctr"/>
+          <a:lstStyle/>
+          <a:p>
+            <a:pPr marL="0" indent="0" algn="l">
+              <a:buNone/>
+            </a:pPr>
+            <a:r>
+              <a:rPr lang="en-US" sz="4080" b="1" kern="0" spc="-143" dirty="0">
+                <a:solidFill>
+                  <a:srgbClr val="DEDEDE"/>
+                </a:solidFill>
+                <a:latin typeface="Arial" pitchFamily="34" charset="0"/>
+                <a:ea typeface="Arial" pitchFamily="34" charset="-122"/>
+                <a:cs typeface="Arial" pitchFamily="34" charset="-120"/>
+              </a:rPr>
+              <a:t>The check that goes red</a:t>
+            </a:r>
+            <a:endParaRPr lang="en-US" sz="4080" dirty="0"/>
+          </a:p>
+        </p:txBody>
+      </p:sp>
+      <p:sp>
+        <p:nvSpPr>
+          <p:cNvPr id="4" name="static:2:text"/>
+          <p:cNvSpPr/>
+          <p:nvPr/>
+        </p:nvSpPr>
+        <p:spPr>
+          <a:xfrm>
+            <a:off x="975360" y="3387566"/>
+            <a:ext cx="6111835" cy="259080"/>
+          </a:xfrm>
+          <a:prstGeom prst="rect">
+            <a:avLst/>
+          </a:prstGeom>
+          <a:noFill/>
+          <a:ln/>
+        </p:spPr>
+        <p:txBody>
+          <a:bodyPr wrap="none" lIns="0" tIns="0" rIns="0" bIns="0" rtlCol="0" anchor="ctr"/>
+          <a:lstStyle/>
+          <a:p>
+            <a:pPr marL="0" indent="0" algn="l">
+              <a:buNone/>
+            </a:pPr>
+            <a:r>
+              <a:rPr lang="en-US" sz="1620" dirty="0">
+                <a:solidFill>
+                  <a:srgbClr val="B0B0B0"/>
+                </a:solidFill>
+                <a:latin typeface="Arial" pitchFamily="34" charset="0"/>
+                <a:ea typeface="Arial" pitchFamily="34" charset="-122"/>
+                <a:cs typeface="Arial" pitchFamily="34" charset="-120"/>
+              </a:rPr>
+              <a:t>Run the fact check on the optimizer’s candidate, then find</a:t>
+            </a:r>
+            <a:endParaRPr lang="en-US" sz="1620" dirty="0"/>
+          </a:p>
+        </p:txBody>
+      </p:sp>
+      <p:sp>
+        <p:nvSpPr>
+          <p:cNvPr id="5" name="static:3:text"/>
+          <p:cNvSpPr/>
+          <p:nvPr/>
+        </p:nvSpPr>
+        <p:spPr>
+          <a:xfrm>
+            <a:off x="975360" y="3665220"/>
+            <a:ext cx="6111835" cy="259080"/>
+          </a:xfrm>
+          <a:prstGeom prst="rect">
+            <a:avLst/>
+          </a:prstGeom>
+          <a:noFill/>
+          <a:ln/>
+        </p:spPr>
+        <p:txBody>
+          <a:bodyPr wrap="none" lIns="0" tIns="0" rIns="0" bIns="0" rtlCol="0" anchor="ctr"/>
+          <a:lstStyle/>
+          <a:p>
+            <a:pPr marL="0" indent="0" algn="l">
+              <a:buNone/>
+            </a:pPr>
+            <a:r>
+              <a:rPr lang="en-US" sz="1620" dirty="0">
+                <a:solidFill>
+                  <a:srgbClr val="B0B0B0"/>
+                </a:solidFill>
+                <a:latin typeface="Arial" pitchFamily="34" charset="0"/>
+                <a:ea typeface="Arial" pitchFamily="34" charset="-122"/>
+                <a:cs typeface="Arial" pitchFamily="34" charset="-120"/>
+              </a:rPr>
+              <a:t>the same check in the pipeline.</a:t>
+            </a:r>
+            <a:endParaRPr lang="en-US" sz="1620" dirty="0"/>
+          </a:p>
+        </p:txBody>
+      </p:sp>
+      <p:sp>
+        <p:nvSpPr>
+          <p:cNvPr id="6" name="static:4:text"/>
+          <p:cNvSpPr/>
+          <p:nvPr/>
+        </p:nvSpPr>
+        <p:spPr>
+          <a:xfrm>
+            <a:off x="609600" y="6461760"/>
+            <a:ext cx="1539240" cy="129540"/>
+          </a:xfrm>
+          <a:prstGeom prst="rect">
+            <a:avLst/>
+          </a:prstGeom>
+          <a:noFill/>
+          <a:ln/>
+        </p:spPr>
+        <p:txBody>
+          <a:bodyPr wrap="none" lIns="0" tIns="0" rIns="0" bIns="0" rtlCol="0" anchor="ctr"/>
+          <a:lstStyle/>
+          <a:p>
+            <a:pPr marL="0" indent="0" algn="l">
+              <a:buNone/>
+            </a:pPr>
+            <a:r>
+              <a:rPr lang="en-US" sz="720" kern="0" spc="58" dirty="0">
+                <a:solidFill>
+                  <a:srgbClr val="919191"/>
+                </a:solidFill>
+                <a:latin typeface="Arial" pitchFamily="34" charset="0"/>
+                <a:ea typeface="Arial" pitchFamily="34" charset="-122"/>
+                <a:cs typeface="Arial" pitchFamily="34" charset="-120"/>
+              </a:rPr>
+              <a:t>FY27 AI GENIUS</a:t>
+            </a:r>
+            <a:endParaRPr lang="en-US" sz="720" dirty="0"/>
+          </a:p>
+        </p:txBody>
+      </p:sp>
+      <p:sp>
+        <p:nvSpPr>
+          <p:cNvPr id="7" name="static:5:text"/>
+          <p:cNvSpPr/>
+          <p:nvPr/>
+        </p:nvSpPr>
+        <p:spPr>
+          <a:xfrm>
+            <a:off x="10459403" y="6461760"/>
+            <a:ext cx="1214438" cy="129540"/>
+          </a:xfrm>
+          <a:prstGeom prst="rect">
+            <a:avLst/>
+          </a:prstGeom>
+          <a:noFill/>
+          <a:ln/>
+        </p:spPr>
+        <p:txBody>
+          <a:bodyPr wrap="none" lIns="0" tIns="0" rIns="0" bIns="0" rtlCol="0" anchor="ctr"/>
+          <a:lstStyle/>
+          <a:p>
+            <a:pPr marL="0" indent="0" algn="l">
+              <a:buNone/>
+            </a:pPr>
+            <a:r>
+              <a:rPr lang="en-US" sz="720" kern="0" spc="58" dirty="0">
+                <a:solidFill>
+                  <a:srgbClr val="919191"/>
+                </a:solidFill>
+                <a:latin typeface="Arial" pitchFamily="34" charset="0"/>
+                <a:ea typeface="Arial" pitchFamily="34" charset="-122"/>
+                <a:cs typeface="Arial" pitchFamily="34" charset="-120"/>
+              </a:rPr>
+              <a:t>AI GENIUS / S6 E2 / 16</a:t>
+            </a:r>
+            <a:endParaRPr lang="en-US" sz="720" dirty="0"/>
+          </a:p>
+        </p:txBody>
+      </p:sp>
+    </p:spTree>
+  </p:cSld>
+  <p:clrMapOvr>
+    <a:masterClrMapping/>
+  </p:clrMapOvr>
+</p:sld>
+</file>
+
+<file path=ppt/slides/slide17.xml><?xml version="1.0" encoding="utf-8"?>
+<p:sld xmlns:a="http://schemas.openxmlformats.org/drawingml/2006/main" xmlns:r="http://schemas.openxmlformats.org/officeDocument/2006/relationships" xmlns:p="http://schemas.openxmlformats.org/presentationml/2006/main">
+  <p:cSld name="From test cases to production">
+    <p:spTree>
+      <p:nvGrpSpPr>
+        <p:cNvPr id="1" name=""/>
+        <p:cNvGrpSpPr/>
+        <p:nvPr/>
+      </p:nvGrpSpPr>
+      <p:grpSpPr>
+        <a:xfrm>
+          <a:off x="0" y="0"/>
+          <a:ext cx="0" cy="0"/>
+          <a:chOff x="0" y="0"/>
+          <a:chExt cx="0" cy="0"/>
+        </a:xfrm>
+      </p:grpSpPr>
+      <p:sp>
+        <p:nvSpPr>
+          <p:cNvPr id="2" name="static:0:text"/>
+          <p:cNvSpPr/>
+          <p:nvPr/>
+        </p:nvSpPr>
+        <p:spPr>
+          <a:xfrm>
+            <a:off x="2727960" y="870109"/>
+            <a:ext cx="2821900" cy="152400"/>
+          </a:xfrm>
+          <a:prstGeom prst="rect">
+            <a:avLst/>
+          </a:prstGeom>
+          <a:noFill/>
+          <a:ln/>
+        </p:spPr>
+        <p:txBody>
+          <a:bodyPr wrap="none" lIns="0" tIns="0" rIns="0" bIns="0" rtlCol="0" anchor="ctr"/>
+          <a:lstStyle/>
+          <a:p>
+            <a:pPr marL="0" indent="0" algn="l">
+              <a:buNone/>
+            </a:pPr>
+            <a:r>
+              <a:rPr lang="en-US" sz="960" b="1" kern="0" spc="154" dirty="0">
+                <a:solidFill>
+                  <a:srgbClr val="4DA6FF"/>
+                </a:solidFill>
+                <a:latin typeface="Arial" pitchFamily="34" charset="0"/>
+                <a:ea typeface="Arial" pitchFamily="34" charset="-122"/>
+                <a:cs typeface="Arial" pitchFamily="34" charset="-120"/>
+              </a:rPr>
+              <a:t>AFTER RELEASE</a:t>
+            </a:r>
+            <a:endParaRPr lang="en-US" sz="960" dirty="0"/>
+          </a:p>
+        </p:txBody>
+      </p:sp>
+      <p:sp>
+        <p:nvSpPr>
+          <p:cNvPr id="3" name="static:1:text"/>
+          <p:cNvSpPr/>
+          <p:nvPr/>
+        </p:nvSpPr>
+        <p:spPr>
+          <a:xfrm>
+            <a:off x="975360" y="1068229"/>
+            <a:ext cx="4356473" cy="411480"/>
+          </a:xfrm>
+          <a:prstGeom prst="rect">
+            <a:avLst/>
+          </a:prstGeom>
+          <a:noFill/>
+          <a:ln/>
+        </p:spPr>
+        <p:txBody>
+          <a:bodyPr wrap="none" lIns="0" tIns="0" rIns="0" bIns="0" rtlCol="0" anchor="ctr"/>
+          <a:lstStyle/>
+          <a:p>
+            <a:pPr marL="0" indent="0" algn="l">
+              <a:buNone/>
+            </a:pPr>
+            <a:r>
+              <a:rPr lang="en-US" sz="2640" b="1" kern="0" spc="-92" dirty="0">
+                <a:solidFill>
+                  <a:srgbClr val="DEDEDE"/>
+                </a:solidFill>
+                <a:latin typeface="Arial" pitchFamily="34" charset="0"/>
+                <a:ea typeface="Arial" pitchFamily="34" charset="-122"/>
+                <a:cs typeface="Arial" pitchFamily="34" charset="-120"/>
+              </a:rPr>
+              <a:t>Production feeds the tests</a:t>
+            </a:r>
+            <a:endParaRPr lang="en-US" sz="2640" dirty="0"/>
+          </a:p>
+        </p:txBody>
+      </p:sp>
+      <p:grpSp>
+        <p:nvGrpSpPr>
+          <p:cNvPr id="52" name="Reveal 1"/>
+          <p:cNvGrpSpPr/>
+          <p:nvPr/>
+        </p:nvGrpSpPr>
+        <p:grpSpPr>
+          <a:xfrm>
+            <a:off x="975360" y="1868329"/>
+            <a:ext cx="3220641" cy="3791902"/>
+            <a:chOff x="975360" y="1868329"/>
+            <a:chExt cx="3220641" cy="3791902"/>
+          </a:xfrm>
+        </p:grpSpPr>
+        <p:sp>
+          <p:nvSpPr>
+            <p:cNvPr id="53" name="reveal-1:2:shape"/>
+            <p:cNvSpPr/>
+            <p:nvPr/>
+          </p:nvSpPr>
+          <p:spPr>
+            <a:xfrm>
+              <a:off x="975360" y="1868329"/>
+              <a:ext cx="3220641" cy="3791902"/>
+            </a:xfrm>
+            <a:prstGeom prst="roundRect">
+              <a:avLst>
+                <a:gd name="adj" fmla="val 3786"/>
+              </a:avLst>
+            </a:prstGeom>
+            <a:solidFill>
+              <a:srgbClr val="292929"/>
+            </a:solidFill>
+            <a:ln w="7620">
+              <a:solidFill>
+                <a:srgbClr val="474747"/>
+              </a:solidFill>
+              <a:prstDash val="solid"/>
+            </a:ln>
+          </p:spPr>
+          <p:txBody>
+            <a:bodyPr/>
+            <a:lstStyle/>
+            <a:p>
+              <a:endParaRPr lang="en-US"/>
+            </a:p>
+          </p:txBody>
+        </p:sp>
+        <p:sp>
+          <p:nvSpPr>
+            <p:cNvPr id="54" name="reveal-1:2:shape:border-0"/>
+            <p:cNvSpPr/>
+            <p:nvPr/>
+          </p:nvSpPr>
+          <p:spPr>
+            <a:xfrm>
+              <a:off x="1066800" y="1883569"/>
+              <a:ext cx="3037761" cy="0"/>
+            </a:xfrm>
+            <a:prstGeom prst="line">
+              <a:avLst/>
+            </a:prstGeom>
+            <a:noFill/>
+            <a:ln w="30480">
+              <a:solidFill>
+                <a:srgbClr val="4DA6FF"/>
+              </a:solidFill>
+              <a:prstDash val="solid"/>
+              <a:headEnd type="none"/>
+              <a:tailEnd type="none"/>
+            </a:ln>
+          </p:spPr>
+          <p:txBody>
+            <a:bodyPr/>
+            <a:lstStyle/>
+            <a:p>
+              <a:endParaRPr lang="en-US"/>
+            </a:p>
+          </p:txBody>
+        </p:sp>
+        <p:sp>
+          <p:nvSpPr>
+            <p:cNvPr id="55" name="reveal-1:3:shape"/>
+            <p:cNvSpPr/>
+            <p:nvPr/>
+          </p:nvSpPr>
+          <p:spPr>
+            <a:xfrm>
+              <a:off x="1181100" y="2096929"/>
+              <a:ext cx="411480" cy="411480"/>
+            </a:xfrm>
+            <a:prstGeom prst="roundRect">
+              <a:avLst>
+                <a:gd name="adj" fmla="val 25926"/>
+              </a:avLst>
+            </a:prstGeom>
+            <a:solidFill>
+              <a:srgbClr val="000000">
+                <a:alpha val="0"/>
+              </a:srgbClr>
+            </a:solidFill>
+            <a:ln w="15240">
+              <a:solidFill>
+                <a:srgbClr val="4DA6FF"/>
+              </a:solidFill>
+              <a:prstDash val="solid"/>
+            </a:ln>
+          </p:spPr>
+          <p:txBody>
+            <a:bodyPr/>
+            <a:lstStyle/>
+            <a:p>
+              <a:endParaRPr lang="en-US"/>
+            </a:p>
+          </p:txBody>
+        </p:sp>
+        <p:sp>
+          <p:nvSpPr>
+            <p:cNvPr id="56" name="reveal-1:4:text"/>
+            <p:cNvSpPr/>
+            <p:nvPr/>
+          </p:nvSpPr>
+          <p:spPr>
+            <a:xfrm>
+              <a:off x="1181100" y="2207419"/>
+              <a:ext cx="411480" cy="190500"/>
+            </a:xfrm>
+            <a:prstGeom prst="rect">
+              <a:avLst/>
+            </a:prstGeom>
+            <a:noFill/>
+            <a:ln/>
+          </p:spPr>
+          <p:txBody>
+            <a:bodyPr wrap="square" lIns="0" tIns="0" rIns="0" bIns="0" rtlCol="0" anchor="ctr"/>
+            <a:lstStyle/>
+            <a:p>
+              <a:pPr marL="0" indent="0" algn="ctr">
+                <a:buNone/>
+              </a:pPr>
+              <a:r>
+                <a:rPr lang="en-US" sz="1200" b="1" kern="0" spc="-24" dirty="0">
+                  <a:solidFill>
+                    <a:srgbClr val="4DA6FF"/>
+                  </a:solidFill>
+                  <a:latin typeface="Arial" pitchFamily="34" charset="0"/>
+                  <a:ea typeface="Arial" pitchFamily="34" charset="-122"/>
+                  <a:cs typeface="Arial" pitchFamily="34" charset="-120"/>
+                </a:rPr>
+                <a:t>1</a:t>
+              </a:r>
+              <a:endParaRPr lang="en-US" sz="1200" dirty="0"/>
+            </a:p>
+          </p:txBody>
+        </p:sp>
+        <p:sp>
+          <p:nvSpPr>
+            <p:cNvPr id="57" name="reveal-1:5:text"/>
+            <p:cNvSpPr/>
+            <p:nvPr/>
+          </p:nvSpPr>
+          <p:spPr>
+            <a:xfrm>
+              <a:off x="1181100" y="2698909"/>
+              <a:ext cx="2809161" cy="266700"/>
+            </a:xfrm>
+            <a:prstGeom prst="rect">
+              <a:avLst/>
+            </a:prstGeom>
+            <a:noFill/>
+            <a:ln/>
+          </p:spPr>
+          <p:txBody>
+            <a:bodyPr wrap="square" lIns="0" tIns="0" rIns="0" bIns="0" rtlCol="0" anchor="ctr"/>
+            <a:lstStyle/>
+            <a:p>
+              <a:pPr marL="0" indent="0" algn="l">
+                <a:buNone/>
+              </a:pPr>
+              <a:r>
+                <a:rPr lang="en-US" sz="1680" b="1" dirty="0">
+                  <a:solidFill>
+                    <a:srgbClr val="4DA6FF"/>
+                  </a:solidFill>
+                  <a:latin typeface="Arial" pitchFamily="34" charset="0"/>
+                  <a:ea typeface="Arial" pitchFamily="34" charset="-122"/>
+                  <a:cs typeface="Arial" pitchFamily="34" charset="-120"/>
+                </a:rPr>
+                <a:t>Sample traces</a:t>
+              </a:r>
+              <a:endParaRPr lang="en-US" sz="1680" dirty="0"/>
+            </a:p>
+          </p:txBody>
+        </p:sp>
+        <p:sp>
+          <p:nvSpPr>
+            <p:cNvPr id="58" name="reveal-1:6:text"/>
+            <p:cNvSpPr/>
+            <p:nvPr/>
+          </p:nvSpPr>
+          <p:spPr>
+            <a:xfrm>
+              <a:off x="1181100" y="3047881"/>
+              <a:ext cx="2809161" cy="564123"/>
+            </a:xfrm>
+            <a:prstGeom prst="rect">
+              <a:avLst/>
+            </a:prstGeom>
+            <a:noFill/>
+            <a:ln/>
+          </p:spPr>
+          <p:txBody>
+            <a:bodyPr wrap="square" lIns="0" tIns="0" rIns="0" bIns="0" rtlCol="0" anchor="t"/>
+            <a:lstStyle/>
+            <a:p>
+              <a:pPr marL="0" indent="0" algn="l">
+                <a:buNone/>
+              </a:pPr>
+              <a:r>
+                <a:rPr lang="en-US" sz="1140" dirty="0">
+                  <a:solidFill>
+                    <a:srgbClr val="B0B0B0"/>
+                  </a:solidFill>
+                  <a:latin typeface="Arial" pitchFamily="34" charset="0"/>
+                  <a:ea typeface="Arial" pitchFamily="34" charset="-122"/>
+                  <a:cs typeface="Arial" pitchFamily="34" charset="-120"/>
+                </a:rPr>
+                <a:t>Continuous evaluation scores a sample of real conversations.</a:t>
+              </a:r>
+              <a:endParaRPr lang="en-US" sz="1140" dirty="0"/>
+            </a:p>
+          </p:txBody>
+        </p:sp>
+        <p:sp>
+          <p:nvSpPr>
+            <p:cNvPr id="60" name="reveal-1:8:shape"/>
+            <p:cNvSpPr/>
+            <p:nvPr/>
+          </p:nvSpPr>
+          <p:spPr>
+            <a:xfrm>
+              <a:off x="1181100" y="3652004"/>
+              <a:ext cx="2809161" cy="668640"/>
+            </a:xfrm>
+            <a:prstGeom prst="roundRect">
+              <a:avLst>
+                <a:gd name="adj" fmla="val 13889"/>
+              </a:avLst>
+            </a:prstGeom>
+            <a:solidFill>
+              <a:srgbClr val="FFFFFF">
+                <a:alpha val="3000"/>
+              </a:srgbClr>
+            </a:solidFill>
+            <a:ln w="12700">
+              <a:solidFill>
+                <a:srgbClr val="333333">
+                  <a:alpha val="0"/>
+                </a:srgbClr>
+              </a:solidFill>
+              <a:prstDash val="solid"/>
+            </a:ln>
+          </p:spPr>
+          <p:txBody>
+            <a:bodyPr/>
+            <a:lstStyle/>
+            <a:p>
+              <a:endParaRPr lang="en-US"/>
+            </a:p>
+          </p:txBody>
+        </p:sp>
+        <p:sp>
+          <p:nvSpPr>
+            <p:cNvPr id="61" name="reveal-1:9:text"/>
+            <p:cNvSpPr/>
+            <p:nvPr/>
+          </p:nvSpPr>
+          <p:spPr>
+            <a:xfrm>
+              <a:off x="1287780" y="3732004"/>
+              <a:ext cx="2595801" cy="508640"/>
+            </a:xfrm>
+            <a:prstGeom prst="rect">
+              <a:avLst/>
+            </a:prstGeom>
+            <a:noFill/>
+            <a:ln/>
+          </p:spPr>
+          <p:txBody>
+            <a:bodyPr wrap="square" lIns="0" tIns="0" rIns="0" bIns="0" rtlCol="0" anchor="t"/>
+            <a:lstStyle/>
+            <a:p>
+              <a:pPr marL="0" indent="0" algn="l">
+                <a:buNone/>
+              </a:pPr>
+              <a:r>
+                <a:rPr lang="en-US" sz="900" b="1" dirty="0">
+                  <a:solidFill>
+                    <a:srgbClr val="DEDEDE"/>
+                  </a:solidFill>
+                  <a:latin typeface="Arial" pitchFamily="34" charset="0"/>
+                  <a:ea typeface="Arial" pitchFamily="34" charset="-122"/>
+                  <a:cs typeface="Arial" pitchFamily="34" charset="-120"/>
+                </a:rPr>
+                <a:t>Alert on quality, latency and cost.</a:t>
+              </a:r>
+              <a:endParaRPr lang="en-US" sz="900" dirty="0"/>
+            </a:p>
+          </p:txBody>
+        </p:sp>
+      </p:grpSp>
+      <p:grpSp>
+        <p:nvGrpSpPr>
+          <p:cNvPr id="62" name="Reveal 2"/>
+          <p:cNvGrpSpPr/>
+          <p:nvPr/>
+        </p:nvGrpSpPr>
+        <p:grpSpPr>
+          <a:xfrm>
+            <a:off x="4348401" y="1868329"/>
+            <a:ext cx="3220641" cy="3791902"/>
+            <a:chOff x="4348401" y="1868329"/>
+            <a:chExt cx="3220641" cy="3791902"/>
+          </a:xfrm>
+        </p:grpSpPr>
+        <p:sp>
+          <p:nvSpPr>
+            <p:cNvPr id="63" name="reveal-1:2:shape"/>
+            <p:cNvSpPr/>
+            <p:nvPr/>
+          </p:nvSpPr>
+          <p:spPr>
+            <a:xfrm>
+              <a:off x="4348401" y="1868329"/>
+              <a:ext cx="3220641" cy="3791902"/>
+            </a:xfrm>
+            <a:prstGeom prst="roundRect">
+              <a:avLst>
+                <a:gd name="adj" fmla="val 3786"/>
+              </a:avLst>
+            </a:prstGeom>
+            <a:solidFill>
+              <a:srgbClr val="292929"/>
+            </a:solidFill>
+            <a:ln w="7620">
+              <a:solidFill>
+                <a:srgbClr val="474747"/>
+              </a:solidFill>
+              <a:prstDash val="solid"/>
+            </a:ln>
+          </p:spPr>
+          <p:txBody>
+            <a:bodyPr/>
+            <a:lstStyle/>
+            <a:p>
+              <a:endParaRPr lang="en-US"/>
+            </a:p>
+          </p:txBody>
+        </p:sp>
+        <p:sp>
+          <p:nvSpPr>
+            <p:cNvPr id="64" name="reveal-1:2:shape:border-0"/>
+            <p:cNvSpPr/>
+            <p:nvPr/>
+          </p:nvSpPr>
+          <p:spPr>
+            <a:xfrm>
+              <a:off x="4439841" y="1883569"/>
+              <a:ext cx="3037761" cy="0"/>
+            </a:xfrm>
+            <a:prstGeom prst="line">
+              <a:avLst/>
+            </a:prstGeom>
+            <a:noFill/>
+            <a:ln w="30480">
+              <a:solidFill>
+                <a:srgbClr val="FBBF24"/>
+              </a:solidFill>
+              <a:prstDash val="solid"/>
+              <a:headEnd type="none"/>
+              <a:tailEnd type="none"/>
+            </a:ln>
+          </p:spPr>
+          <p:txBody>
+            <a:bodyPr/>
+            <a:lstStyle/>
+            <a:p>
+              <a:endParaRPr lang="en-US"/>
+            </a:p>
+          </p:txBody>
+        </p:sp>
+        <p:sp>
+          <p:nvSpPr>
+            <p:cNvPr id="65" name="reveal-1:3:shape"/>
+            <p:cNvSpPr/>
+            <p:nvPr/>
+          </p:nvSpPr>
+          <p:spPr>
+            <a:xfrm>
+              <a:off x="4554141" y="2096929"/>
+              <a:ext cx="411480" cy="411480"/>
+            </a:xfrm>
+            <a:prstGeom prst="roundRect">
+              <a:avLst>
+                <a:gd name="adj" fmla="val 25926"/>
+              </a:avLst>
+            </a:prstGeom>
+            <a:solidFill>
+              <a:srgbClr val="000000">
+                <a:alpha val="0"/>
+              </a:srgbClr>
+            </a:solidFill>
+            <a:ln w="15240">
+              <a:solidFill>
+                <a:srgbClr val="FBBF24"/>
+              </a:solidFill>
+              <a:prstDash val="solid"/>
+            </a:ln>
+          </p:spPr>
+          <p:txBody>
+            <a:bodyPr/>
+            <a:lstStyle/>
+            <a:p>
+              <a:endParaRPr lang="en-US"/>
+            </a:p>
+          </p:txBody>
+        </p:sp>
+        <p:sp>
+          <p:nvSpPr>
+            <p:cNvPr id="66" name="reveal-1:4:text"/>
+            <p:cNvSpPr/>
+            <p:nvPr/>
+          </p:nvSpPr>
+          <p:spPr>
+            <a:xfrm>
+              <a:off x="4554141" y="2207419"/>
+              <a:ext cx="411480" cy="190500"/>
+            </a:xfrm>
+            <a:prstGeom prst="rect">
+              <a:avLst/>
+            </a:prstGeom>
+            <a:noFill/>
+            <a:ln/>
+          </p:spPr>
+          <p:txBody>
+            <a:bodyPr wrap="square" lIns="0" tIns="0" rIns="0" bIns="0" rtlCol="0" anchor="ctr"/>
+            <a:lstStyle/>
+            <a:p>
+              <a:pPr marL="0" indent="0" algn="ctr">
+                <a:buNone/>
+              </a:pPr>
+              <a:r>
+                <a:rPr lang="en-US" sz="1200" b="1" kern="0" spc="-24" dirty="0">
+                  <a:solidFill>
+                    <a:srgbClr val="FBBF24"/>
+                  </a:solidFill>
+                  <a:latin typeface="Arial" pitchFamily="34" charset="0"/>
+                  <a:ea typeface="Arial" pitchFamily="34" charset="-122"/>
+                  <a:cs typeface="Arial" pitchFamily="34" charset="-120"/>
+                </a:rPr>
+                <a:t>2</a:t>
+              </a:r>
+              <a:endParaRPr lang="en-US" sz="1200" dirty="0"/>
+            </a:p>
+          </p:txBody>
+        </p:sp>
+        <p:sp>
+          <p:nvSpPr>
+            <p:cNvPr id="67" name="reveal-1:5:text"/>
+            <p:cNvSpPr/>
+            <p:nvPr/>
+          </p:nvSpPr>
+          <p:spPr>
+            <a:xfrm>
+              <a:off x="4554141" y="2698909"/>
+              <a:ext cx="2809161" cy="266700"/>
+            </a:xfrm>
+            <a:prstGeom prst="rect">
+              <a:avLst/>
+            </a:prstGeom>
+            <a:noFill/>
+            <a:ln/>
+          </p:spPr>
+          <p:txBody>
+            <a:bodyPr wrap="square" lIns="0" tIns="0" rIns="0" bIns="0" rtlCol="0" anchor="ctr"/>
+            <a:lstStyle/>
+            <a:p>
+              <a:pPr marL="0" indent="0" algn="l">
+                <a:buNone/>
+              </a:pPr>
+              <a:r>
+                <a:rPr lang="en-US" sz="1680" b="1" dirty="0">
+                  <a:solidFill>
+                    <a:srgbClr val="FBBF24"/>
+                  </a:solidFill>
+                  <a:latin typeface="Arial" pitchFamily="34" charset="0"/>
+                  <a:ea typeface="Arial" pitchFamily="34" charset="-122"/>
+                  <a:cs typeface="Arial" pitchFamily="34" charset="-120"/>
+                </a:rPr>
+                <a:t>Keep the failures</a:t>
+              </a:r>
+              <a:endParaRPr lang="en-US" sz="1680" dirty="0"/>
+            </a:p>
+          </p:txBody>
+        </p:sp>
+        <p:sp>
+          <p:nvSpPr>
+            <p:cNvPr id="68" name="reveal-1:6:text"/>
+            <p:cNvSpPr/>
+            <p:nvPr/>
+          </p:nvSpPr>
+          <p:spPr>
+            <a:xfrm>
+              <a:off x="4554141" y="3047881"/>
+              <a:ext cx="2809161" cy="564123"/>
+            </a:xfrm>
+            <a:prstGeom prst="rect">
+              <a:avLst/>
+            </a:prstGeom>
+            <a:noFill/>
+            <a:ln/>
+          </p:spPr>
+          <p:txBody>
+            <a:bodyPr wrap="square" lIns="0" tIns="0" rIns="0" bIns="0" rtlCol="0" anchor="t"/>
+            <a:lstStyle/>
+            <a:p>
+              <a:pPr marL="0" indent="0" algn="l">
+                <a:buNone/>
+              </a:pPr>
+              <a:r>
+                <a:rPr lang="en-US" sz="1140" dirty="0">
+                  <a:solidFill>
+                    <a:srgbClr val="B0B0B0"/>
+                  </a:solidFill>
+                  <a:latin typeface="Arial" pitchFamily="34" charset="0"/>
+                  <a:ea typeface="Arial" pitchFamily="34" charset="-122"/>
+                  <a:cs typeface="Arial" pitchFamily="34" charset="-120"/>
+                </a:rPr>
+                <a:t>Turn interesting failures into new, reviewed test rows.</a:t>
+              </a:r>
+              <a:endParaRPr lang="en-US" sz="1140" dirty="0"/>
+            </a:p>
+          </p:txBody>
+        </p:sp>
+        <p:sp>
+          <p:nvSpPr>
+            <p:cNvPr id="70" name="reveal-1:8:shape"/>
+            <p:cNvSpPr/>
+            <p:nvPr/>
+          </p:nvSpPr>
+          <p:spPr>
+            <a:xfrm>
+              <a:off x="4554141" y="3652004"/>
+              <a:ext cx="2809161" cy="668640"/>
+            </a:xfrm>
+            <a:prstGeom prst="roundRect">
+              <a:avLst>
+                <a:gd name="adj" fmla="val 13889"/>
+              </a:avLst>
+            </a:prstGeom>
+            <a:solidFill>
+              <a:srgbClr val="FFFFFF">
+                <a:alpha val="3000"/>
+              </a:srgbClr>
+            </a:solidFill>
+            <a:ln w="12700">
+              <a:solidFill>
+                <a:srgbClr val="333333">
+                  <a:alpha val="0"/>
+                </a:srgbClr>
+              </a:solidFill>
+              <a:prstDash val="solid"/>
+            </a:ln>
+          </p:spPr>
+          <p:txBody>
+            <a:bodyPr/>
+            <a:lstStyle/>
+            <a:p>
+              <a:endParaRPr lang="en-US"/>
+            </a:p>
+          </p:txBody>
+        </p:sp>
+        <p:sp>
+          <p:nvSpPr>
+            <p:cNvPr id="71" name="reveal-1:9:text"/>
+            <p:cNvSpPr/>
+            <p:nvPr/>
+          </p:nvSpPr>
+          <p:spPr>
+            <a:xfrm>
+              <a:off x="4660821" y="3732004"/>
+              <a:ext cx="2595801" cy="508640"/>
+            </a:xfrm>
+            <a:prstGeom prst="rect">
+              <a:avLst/>
+            </a:prstGeom>
+            <a:noFill/>
+            <a:ln/>
+          </p:spPr>
+          <p:txBody>
+            <a:bodyPr wrap="square" lIns="0" tIns="0" rIns="0" bIns="0" rtlCol="0" anchor="t"/>
+            <a:lstStyle/>
+            <a:p>
+              <a:pPr marL="0" indent="0" algn="l">
+                <a:buNone/>
+              </a:pPr>
+              <a:r>
+                <a:rPr lang="en-US" sz="900" b="1" dirty="0">
+                  <a:solidFill>
+                    <a:srgbClr val="DEDEDE"/>
+                  </a:solidFill>
+                  <a:latin typeface="Arial" pitchFamily="34" charset="0"/>
+                  <a:ea typeface="Arial" pitchFamily="34" charset="-122"/>
+                  <a:cs typeface="Arial" pitchFamily="34" charset="-120"/>
+                </a:rPr>
+                <a:t>Redact personal data first.</a:t>
+              </a:r>
+              <a:endParaRPr lang="en-US" sz="900" dirty="0"/>
+            </a:p>
+          </p:txBody>
+        </p:sp>
+      </p:grpSp>
+      <p:grpSp>
+        <p:nvGrpSpPr>
+          <p:cNvPr id="72" name="Reveal 3"/>
+          <p:cNvGrpSpPr/>
+          <p:nvPr/>
+        </p:nvGrpSpPr>
+        <p:grpSpPr>
+          <a:xfrm>
+            <a:off x="7721442" y="1868329"/>
+            <a:ext cx="3220641" cy="3791902"/>
+            <a:chOff x="7721442" y="1868329"/>
+            <a:chExt cx="3220641" cy="3791902"/>
+          </a:xfrm>
+        </p:grpSpPr>
+        <p:sp>
+          <p:nvSpPr>
+            <p:cNvPr id="73" name="reveal-1:2:shape"/>
+            <p:cNvSpPr/>
+            <p:nvPr/>
+          </p:nvSpPr>
+          <p:spPr>
+            <a:xfrm>
+              <a:off x="7721442" y="1868329"/>
+              <a:ext cx="3220641" cy="3791902"/>
+            </a:xfrm>
+            <a:prstGeom prst="roundRect">
+              <a:avLst>
+                <a:gd name="adj" fmla="val 3786"/>
+              </a:avLst>
+            </a:prstGeom>
+            <a:solidFill>
+              <a:srgbClr val="292929"/>
+            </a:solidFill>
+            <a:ln w="7620">
+              <a:solidFill>
+                <a:srgbClr val="474747"/>
+              </a:solidFill>
+              <a:prstDash val="solid"/>
+            </a:ln>
+          </p:spPr>
+          <p:txBody>
+            <a:bodyPr/>
+            <a:lstStyle/>
+            <a:p>
+              <a:endParaRPr lang="en-US"/>
+            </a:p>
+          </p:txBody>
+        </p:sp>
+        <p:sp>
+          <p:nvSpPr>
+            <p:cNvPr id="74" name="reveal-1:2:shape:border-0"/>
+            <p:cNvSpPr/>
+            <p:nvPr/>
+          </p:nvSpPr>
+          <p:spPr>
+            <a:xfrm>
+              <a:off x="7812882" y="1883569"/>
+              <a:ext cx="3037761" cy="0"/>
+            </a:xfrm>
+            <a:prstGeom prst="line">
+              <a:avLst/>
+            </a:prstGeom>
+            <a:noFill/>
+            <a:ln w="30480">
+              <a:solidFill>
+                <a:srgbClr val="4ADE80"/>
+              </a:solidFill>
+              <a:prstDash val="solid"/>
+              <a:headEnd type="none"/>
+              <a:tailEnd type="none"/>
+            </a:ln>
+          </p:spPr>
+          <p:txBody>
+            <a:bodyPr/>
+            <a:lstStyle/>
+            <a:p>
+              <a:endParaRPr lang="en-US"/>
+            </a:p>
+          </p:txBody>
+        </p:sp>
+        <p:sp>
+          <p:nvSpPr>
+            <p:cNvPr id="75" name="reveal-1:3:shape"/>
+            <p:cNvSpPr/>
+            <p:nvPr/>
+          </p:nvSpPr>
+          <p:spPr>
+            <a:xfrm>
+              <a:off x="7927182" y="2096929"/>
+              <a:ext cx="411480" cy="411480"/>
+            </a:xfrm>
+            <a:prstGeom prst="roundRect">
+              <a:avLst>
+                <a:gd name="adj" fmla="val 25926"/>
+              </a:avLst>
+            </a:prstGeom>
+            <a:solidFill>
+              <a:srgbClr val="000000">
+                <a:alpha val="0"/>
+              </a:srgbClr>
+            </a:solidFill>
+            <a:ln w="15240">
+              <a:solidFill>
+                <a:srgbClr val="4ADE80"/>
+              </a:solidFill>
+              <a:prstDash val="solid"/>
+            </a:ln>
+          </p:spPr>
+          <p:txBody>
+            <a:bodyPr/>
+            <a:lstStyle/>
+            <a:p>
+              <a:endParaRPr lang="en-US"/>
+            </a:p>
+          </p:txBody>
+        </p:sp>
+        <p:sp>
+          <p:nvSpPr>
+            <p:cNvPr id="76" name="reveal-1:4:text"/>
+            <p:cNvSpPr/>
+            <p:nvPr/>
+          </p:nvSpPr>
+          <p:spPr>
+            <a:xfrm>
+              <a:off x="7927182" y="2207419"/>
+              <a:ext cx="411480" cy="190500"/>
+            </a:xfrm>
+            <a:prstGeom prst="rect">
+              <a:avLst/>
+            </a:prstGeom>
+            <a:noFill/>
+            <a:ln/>
+          </p:spPr>
+          <p:txBody>
+            <a:bodyPr wrap="square" lIns="0" tIns="0" rIns="0" bIns="0" rtlCol="0" anchor="ctr"/>
+            <a:lstStyle/>
+            <a:p>
+              <a:pPr marL="0" indent="0" algn="ctr">
+                <a:buNone/>
+              </a:pPr>
+              <a:r>
+                <a:rPr lang="en-US" sz="1200" b="1" kern="0" spc="-24" dirty="0">
+                  <a:solidFill>
+                    <a:srgbClr val="4ADE80"/>
+                  </a:solidFill>
+                  <a:latin typeface="Arial" pitchFamily="34" charset="0"/>
+                  <a:ea typeface="Arial" pitchFamily="34" charset="-122"/>
+                  <a:cs typeface="Arial" pitchFamily="34" charset="-120"/>
+                </a:rPr>
+                <a:t>3</a:t>
+              </a:r>
+              <a:endParaRPr lang="en-US" sz="1200" dirty="0"/>
+            </a:p>
+          </p:txBody>
+        </p:sp>
+        <p:sp>
+          <p:nvSpPr>
+            <p:cNvPr id="77" name="reveal-1:5:text"/>
+            <p:cNvSpPr/>
+            <p:nvPr/>
+          </p:nvSpPr>
+          <p:spPr>
+            <a:xfrm>
+              <a:off x="7927182" y="2698909"/>
+              <a:ext cx="2809161" cy="266700"/>
+            </a:xfrm>
+            <a:prstGeom prst="rect">
+              <a:avLst/>
+            </a:prstGeom>
+            <a:noFill/>
+            <a:ln/>
+          </p:spPr>
+          <p:txBody>
+            <a:bodyPr wrap="square" lIns="0" tIns="0" rIns="0" bIns="0" rtlCol="0" anchor="ctr"/>
+            <a:lstStyle/>
+            <a:p>
+              <a:pPr marL="0" indent="0" algn="l">
+                <a:buNone/>
+              </a:pPr>
+              <a:r>
+                <a:rPr lang="en-US" sz="1680" b="1" dirty="0">
+                  <a:solidFill>
+                    <a:srgbClr val="4ADE80"/>
+                  </a:solidFill>
+                  <a:latin typeface="Arial" pitchFamily="34" charset="0"/>
+                  <a:ea typeface="Arial" pitchFamily="34" charset="-122"/>
+                  <a:cs typeface="Arial" pitchFamily="34" charset="-120"/>
+                </a:rPr>
+                <a:t>Same gate</a:t>
+              </a:r>
+              <a:endParaRPr lang="en-US" sz="1680" dirty="0"/>
+            </a:p>
+          </p:txBody>
+        </p:sp>
+        <p:sp>
+          <p:nvSpPr>
+            <p:cNvPr id="78" name="reveal-1:6:text"/>
+            <p:cNvSpPr/>
+            <p:nvPr/>
+          </p:nvSpPr>
+          <p:spPr>
+            <a:xfrm>
+              <a:off x="7927182" y="3047881"/>
+              <a:ext cx="2809161" cy="564123"/>
+            </a:xfrm>
+            <a:prstGeom prst="rect">
+              <a:avLst/>
+            </a:prstGeom>
+            <a:noFill/>
+            <a:ln/>
+          </p:spPr>
+          <p:txBody>
+            <a:bodyPr wrap="square" lIns="0" tIns="0" rIns="0" bIns="0" rtlCol="0" anchor="t"/>
+            <a:lstStyle/>
+            <a:p>
+              <a:pPr marL="0" indent="0" algn="l">
+                <a:buNone/>
+              </a:pPr>
+              <a:r>
+                <a:rPr lang="en-US" sz="1140" dirty="0">
+                  <a:solidFill>
+                    <a:srgbClr val="B0B0B0"/>
+                  </a:solidFill>
+                  <a:latin typeface="Arial" pitchFamily="34" charset="0"/>
+                  <a:ea typeface="Arial" pitchFamily="34" charset="-122"/>
+                  <a:cs typeface="Arial" pitchFamily="34" charset="-120"/>
+                </a:rPr>
+                <a:t>The next change, human or optimizer, runs against them.</a:t>
+              </a:r>
+              <a:endParaRPr lang="en-US" sz="1140" dirty="0"/>
+            </a:p>
+          </p:txBody>
+        </p:sp>
+        <p:sp>
+          <p:nvSpPr>
+            <p:cNvPr id="80" name="reveal-1:8:shape"/>
+            <p:cNvSpPr/>
+            <p:nvPr/>
+          </p:nvSpPr>
+          <p:spPr>
+            <a:xfrm>
+              <a:off x="7927182" y="3652004"/>
+              <a:ext cx="2809161" cy="668640"/>
+            </a:xfrm>
+            <a:prstGeom prst="roundRect">
+              <a:avLst>
+                <a:gd name="adj" fmla="val 13889"/>
+              </a:avLst>
+            </a:prstGeom>
+            <a:solidFill>
+              <a:srgbClr val="FFFFFF">
+                <a:alpha val="3000"/>
+              </a:srgbClr>
+            </a:solidFill>
+            <a:ln w="12700">
+              <a:solidFill>
+                <a:srgbClr val="333333">
+                  <a:alpha val="0"/>
+                </a:srgbClr>
+              </a:solidFill>
+              <a:prstDash val="solid"/>
+            </a:ln>
+          </p:spPr>
+          <p:txBody>
+            <a:bodyPr/>
+            <a:lstStyle/>
+            <a:p>
+              <a:endParaRPr lang="en-US"/>
+            </a:p>
+          </p:txBody>
+        </p:sp>
+        <p:sp>
+          <p:nvSpPr>
+            <p:cNvPr id="81" name="reveal-1:9:text"/>
+            <p:cNvSpPr/>
+            <p:nvPr/>
+          </p:nvSpPr>
+          <p:spPr>
+            <a:xfrm>
+              <a:off x="8033862" y="3732004"/>
+              <a:ext cx="2595801" cy="508640"/>
+            </a:xfrm>
+            <a:prstGeom prst="rect">
+              <a:avLst/>
+            </a:prstGeom>
+            <a:noFill/>
+            <a:ln/>
+          </p:spPr>
+          <p:txBody>
+            <a:bodyPr wrap="square" lIns="0" tIns="0" rIns="0" bIns="0" rtlCol="0" anchor="t"/>
+            <a:lstStyle/>
+            <a:p>
+              <a:pPr marL="0" indent="0" algn="l">
+                <a:buNone/>
+              </a:pPr>
+              <a:r>
+                <a:rPr lang="en-US" sz="900" b="1" dirty="0">
+                  <a:solidFill>
+                    <a:srgbClr val="DEDEDE"/>
+                  </a:solidFill>
+                  <a:latin typeface="Arial" pitchFamily="34" charset="0"/>
+                  <a:ea typeface="Arial" pitchFamily="34" charset="-122"/>
+                  <a:cs typeface="Arial" pitchFamily="34" charset="-120"/>
+                </a:rPr>
+                <a:t>Every production failure becomes a test.</a:t>
+              </a:r>
+              <a:endParaRPr lang="en-US" sz="900" dirty="0"/>
+            </a:p>
+          </p:txBody>
+        </p:sp>
+      </p:grpSp>
+      <p:sp>
+        <p:nvSpPr>
+          <p:cNvPr id="50" name="static:47:text"/>
+          <p:cNvSpPr/>
+          <p:nvPr/>
+        </p:nvSpPr>
+        <p:spPr>
+          <a:xfrm>
+            <a:off x="609600" y="6461760"/>
+            <a:ext cx="1539240" cy="129540"/>
+          </a:xfrm>
+          <a:prstGeom prst="rect">
+            <a:avLst/>
+          </a:prstGeom>
+          <a:noFill/>
+          <a:ln/>
+        </p:spPr>
+        <p:txBody>
+          <a:bodyPr wrap="none" lIns="0" tIns="0" rIns="0" bIns="0" rtlCol="0" anchor="ctr"/>
+          <a:lstStyle/>
+          <a:p>
+            <a:pPr marL="0" indent="0" algn="l">
+              <a:buNone/>
+            </a:pPr>
+            <a:r>
+              <a:rPr lang="en-US" sz="720" kern="0" spc="58" dirty="0">
+                <a:solidFill>
+                  <a:srgbClr val="919191"/>
+                </a:solidFill>
+                <a:latin typeface="Arial" pitchFamily="34" charset="0"/>
+                <a:ea typeface="Arial" pitchFamily="34" charset="-122"/>
+                <a:cs typeface="Arial" pitchFamily="34" charset="-120"/>
+              </a:rPr>
+              <a:t>FY27 AI GENIUS</a:t>
+            </a:r>
+            <a:endParaRPr lang="en-US" sz="720" dirty="0"/>
+          </a:p>
+        </p:txBody>
+      </p:sp>
+      <p:sp>
+        <p:nvSpPr>
+          <p:cNvPr id="51" name="static:48:text"/>
+          <p:cNvSpPr/>
+          <p:nvPr/>
+        </p:nvSpPr>
+        <p:spPr>
+          <a:xfrm>
+            <a:off x="10457736" y="6461760"/>
+            <a:ext cx="1216104" cy="129540"/>
+          </a:xfrm>
+          <a:prstGeom prst="rect">
+            <a:avLst/>
+          </a:prstGeom>
+          <a:noFill/>
+          <a:ln/>
+        </p:spPr>
+        <p:txBody>
+          <a:bodyPr wrap="none" lIns="0" tIns="0" rIns="0" bIns="0" rtlCol="0" anchor="ctr"/>
+          <a:lstStyle/>
+          <a:p>
+            <a:pPr marL="0" indent="0" algn="l">
+              <a:buNone/>
+            </a:pPr>
+            <a:r>
+              <a:rPr lang="en-US" sz="720" kern="0" spc="58" dirty="0">
+                <a:solidFill>
+                  <a:srgbClr val="919191"/>
+                </a:solidFill>
+                <a:latin typeface="Arial" pitchFamily="34" charset="0"/>
+                <a:ea typeface="Arial" pitchFamily="34" charset="-122"/>
+                <a:cs typeface="Arial" pitchFamily="34" charset="-120"/>
+              </a:rPr>
+              <a:t>AI GENIUS / S6 E2 / 17</a:t>
+            </a:r>
+            <a:endParaRPr lang="en-US" sz="720" dirty="0"/>
+          </a:p>
+        </p:txBody>
+      </p:sp>
+    </p:spTree>
+  </p:cSld>
+  <p:clrMapOvr>
+    <a:masterClrMapping/>
+  </p:clrMapOvr>
+  <p:timing>
+    <p:tnLst>
+      <p:par>
+        <p:cTn id="1" dur="indefinite" restart="never" nodeType="tmRoot">
+          <p:childTnLst>
+            <p:seq concurrent="1" nextAc="seek">
+              <p:cTn id="2" dur="indefinite" nodeType="mainSeq">
+                <p:childTnLst>
+                  <p:par>
+                    <p:cTn id="3" fill="hold">
+                      <p:stCondLst>
+                        <p:cond delay="indefinite"/>
+                      </p:stCondLst>
+                      <p:childTnLst>
+                        <p:par>
+                          <p:cTn id="4" fill="hold">
+                            <p:stCondLst>
+                              <p:cond delay="0"/>
+                            </p:stCondLst>
+                            <p:childTnLst>
+                              <p:par>
+                                <p:cTn id="5" presetID="1" presetClass="entr" presetSubtype="0" fill="hold" nodeType="clickEffect">
+                                  <p:stCondLst>
+                                    <p:cond delay="0"/>
+                                  </p:stCondLst>
+                                  <p:childTnLst>
+                                    <p:set>
+                                      <p:cBhvr>
+                                        <p:cTn id="6" dur="1" fill="hold">
+                                          <p:stCondLst>
+                                            <p:cond delay="0"/>
+                                          </p:stCondLst>
+                                        </p:cTn>
+                                        <p:tgtEl>
+                                          <p:spTgt spid="52"/>
+                                        </p:tgtEl>
+                                        <p:attrNameLst>
+                                          <p:attrName>style.visibility</p:attrName>
+                                        </p:attrNameLst>
+                                      </p:cBhvr>
+                                      <p:to>
+                                        <p:strVal val="visible"/>
+                                      </p:to>
+                                    </p:set>
+                                  </p:childTnLst>
+                                </p:cTn>
+                              </p:par>
+                            </p:childTnLst>
+                          </p:cTn>
+                        </p:par>
+                      </p:childTnLst>
+                    </p:cTn>
+                  </p:par>
+                  <p:par>
+                    <p:cTn id="7" fill="hold">
+                      <p:stCondLst>
+                        <p:cond delay="indefinite"/>
+                      </p:stCondLst>
+                      <p:childTnLst>
+                        <p:par>
+                          <p:cTn id="8" fill="hold">
+                            <p:stCondLst>
+                              <p:cond delay="0"/>
+                            </p:stCondLst>
+                            <p:childTnLst>
+                              <p:par>
+                                <p:cTn id="9" presetID="1" presetClass="entr" presetSubtype="0" fill="hold" nodeType="clickEffect">
+                                  <p:stCondLst>
+                                    <p:cond delay="0"/>
+                                  </p:stCondLst>
+                                  <p:childTnLst>
+                                    <p:set>
+                                      <p:cBhvr>
+                                        <p:cTn id="10" dur="1" fill="hold">
+                                          <p:stCondLst>
+                                            <p:cond delay="0"/>
+                                          </p:stCondLst>
+                                        </p:cTn>
+                                        <p:tgtEl>
+                                          <p:spTgt spid="62"/>
+                                        </p:tgtEl>
+                                        <p:attrNameLst>
+                                          <p:attrName>style.visibility</p:attrName>
+                                        </p:attrNameLst>
+                                      </p:cBhvr>
+                                      <p:to>
+                                        <p:strVal val="visible"/>
+                                      </p:to>
+                                    </p:set>
+                                  </p:childTnLst>
+                                </p:cTn>
+                              </p:par>
+                            </p:childTnLst>
+                          </p:cTn>
+                        </p:par>
+                      </p:childTnLst>
+                    </p:cTn>
+                  </p:par>
+                  <p:par>
+                    <p:cTn id="11" fill="hold">
+                      <p:stCondLst>
+                        <p:cond delay="indefinite"/>
+                      </p:stCondLst>
+                      <p:childTnLst>
+                        <p:par>
+                          <p:cTn id="12" fill="hold">
+                            <p:stCondLst>
+                              <p:cond delay="0"/>
+                            </p:stCondLst>
+                            <p:childTnLst>
+                              <p:par>
+                                <p:cTn id="13" presetID="1" presetClass="entr" presetSubtype="0" fill="hold" nodeType="clickEffect">
+                                  <p:stCondLst>
+                                    <p:cond delay="0"/>
+                                  </p:stCondLst>
+                                  <p:childTnLst>
+                                    <p:set>
+                                      <p:cBhvr>
+                                        <p:cTn id="14" dur="1" fill="hold">
+                                          <p:stCondLst>
+                                            <p:cond delay="0"/>
+                                          </p:stCondLst>
+                                        </p:cTn>
+                                        <p:tgtEl>
+                                          <p:spTgt spid="72"/>
+                                        </p:tgtEl>
+                                        <p:attrNameLst>
+                                          <p:attrName>style.visibility</p:attrName>
+                                        </p:attrNameLst>
+                                      </p:cBhvr>
+                                      <p:to>
+                                        <p:strVal val="visible"/>
+                                      </p:to>
+                                    </p:set>
+                                  </p:childTnLst>
+                                </p:cTn>
+                              </p:par>
+                            </p:childTnLst>
+                          </p:cTn>
+                        </p:par>
+                      </p:childTnLst>
+                    </p:cTn>
+                  </p:par>
+                </p:childTnLst>
+              </p:cTn>
+              <p:prevCondLst>
+                <p:cond evt="onPrev" delay="0">
+                  <p:tgtEl>
+                    <p:sldTgt/>
+                  </p:tgtEl>
+                </p:cond>
+              </p:prevCondLst>
+              <p:nextCondLst>
+                <p:cond evt="onNext" delay="0">
+                  <p:tgtEl>
+                    <p:sldTgt/>
+                  </p:tgtEl>
+                </p:cond>
+              </p:nextCondLst>
+            </p:seq>
+          </p:childTnLst>
+        </p:cTn>
+      </p:par>
+    </p:tnLst>
+  </p:timing>
+</p:sld>
+</file>
+
+<file path=ppt/slides/slide18.xml><?xml version="1.0" encoding="utf-8"?>
+<p:sld xmlns:a="http://schemas.openxmlformats.org/drawingml/2006/main" xmlns:r="http://schemas.openxmlformats.org/officeDocument/2006/relationships" xmlns:p="http://schemas.openxmlformats.org/presentationml/2006/main">
+  <p:cSld name="Worth exploring next">
+    <p:spTree>
+      <p:nvGrpSpPr>
+        <p:cNvPr id="1" name=""/>
+        <p:cNvGrpSpPr/>
+        <p:nvPr/>
+      </p:nvGrpSpPr>
+      <p:grpSpPr>
+        <a:xfrm>
+          <a:off x="0" y="0"/>
+          <a:ext cx="0" cy="0"/>
+          <a:chOff x="0" y="0"/>
+          <a:chExt cx="0" cy="0"/>
+        </a:xfrm>
+      </p:grpSpPr>
+      <p:sp>
+        <p:nvSpPr>
+          <p:cNvPr id="2" name="static:0:text"/>
+          <p:cNvSpPr/>
+          <p:nvPr/>
+        </p:nvSpPr>
+        <p:spPr>
+          <a:xfrm>
+            <a:off x="2727960" y="870109"/>
+            <a:ext cx="2479715" cy="152400"/>
+          </a:xfrm>
+          <a:prstGeom prst="rect">
+            <a:avLst/>
+          </a:prstGeom>
+          <a:noFill/>
+          <a:ln/>
+        </p:spPr>
+        <p:txBody>
+          <a:bodyPr wrap="none" lIns="0" tIns="0" rIns="0" bIns="0" rtlCol="0" anchor="ctr"/>
+          <a:lstStyle/>
+          <a:p>
+            <a:pPr marL="0" indent="0" algn="l">
+              <a:buNone/>
+            </a:pPr>
+            <a:r>
+              <a:rPr lang="en-US" sz="960" b="1" kern="0" spc="154" dirty="0">
+                <a:solidFill>
+                  <a:srgbClr val="4DA6FF"/>
+                </a:solidFill>
+                <a:latin typeface="Arial" pitchFamily="34" charset="0"/>
+                <a:ea typeface="Arial" pitchFamily="34" charset="-122"/>
+                <a:cs typeface="Arial" pitchFamily="34" charset="-120"/>
+              </a:rPr>
+              <a:t>MORE IN MICROSOFT FOUNDRY</a:t>
+            </a:r>
+            <a:endParaRPr lang="en-US" sz="960" dirty="0"/>
+          </a:p>
+        </p:txBody>
+      </p:sp>
+      <p:sp>
+        <p:nvSpPr>
+          <p:cNvPr id="3" name="static:1:text"/>
+          <p:cNvSpPr/>
+          <p:nvPr/>
+        </p:nvSpPr>
+        <p:spPr>
+          <a:xfrm>
+            <a:off x="975360" y="1068229"/>
+            <a:ext cx="3094530" cy="411480"/>
+          </a:xfrm>
+          <a:prstGeom prst="rect">
+            <a:avLst/>
+          </a:prstGeom>
+          <a:noFill/>
+          <a:ln/>
+        </p:spPr>
+        <p:txBody>
+          <a:bodyPr wrap="none" lIns="0" tIns="0" rIns="0" bIns="0" rtlCol="0" anchor="ctr"/>
+          <a:lstStyle/>
+          <a:p>
+            <a:pPr marL="0" indent="0" algn="l">
+              <a:buNone/>
+            </a:pPr>
+            <a:r>
+              <a:rPr lang="en-US" sz="2640" b="1" kern="0" spc="-92" dirty="0">
+                <a:solidFill>
+                  <a:srgbClr val="DEDEDE"/>
+                </a:solidFill>
+                <a:latin typeface="Arial" pitchFamily="34" charset="0"/>
+                <a:ea typeface="Arial" pitchFamily="34" charset="-122"/>
+                <a:cs typeface="Arial" pitchFamily="34" charset="-120"/>
+              </a:rPr>
+              <a:t>Worth exploring next</a:t>
+            </a:r>
+            <a:endParaRPr lang="en-US" sz="2640" dirty="0"/>
+          </a:p>
+        </p:txBody>
+      </p:sp>
+      <p:sp>
+        <p:nvSpPr>
+          <p:cNvPr id="4" name="static:2:text"/>
+          <p:cNvSpPr/>
+          <p:nvPr/>
+        </p:nvSpPr>
+        <p:spPr>
+          <a:xfrm>
+            <a:off x="975360" y="2251234"/>
+            <a:ext cx="348377" cy="266700"/>
+          </a:xfrm>
+          <a:prstGeom prst="rect">
+            <a:avLst/>
+          </a:prstGeom>
+          <a:noFill/>
+          <a:ln/>
+        </p:spPr>
+        <p:txBody>
+          <a:bodyPr wrap="none" lIns="0" tIns="0" rIns="0" bIns="0" rtlCol="0" anchor="ctr"/>
+          <a:lstStyle/>
+          <a:p>
+            <a:pPr marL="0" indent="0" algn="l">
+              <a:buNone/>
+            </a:pPr>
+            <a:r>
+              <a:rPr lang="en-US" sz="1680" b="1" dirty="0">
+                <a:solidFill>
+                  <a:srgbClr val="4DA6FF"/>
+                </a:solidFill>
+                <a:latin typeface="Arial" pitchFamily="34" charset="0"/>
+                <a:ea typeface="Arial" pitchFamily="34" charset="-122"/>
+                <a:cs typeface="Arial" pitchFamily="34" charset="-120"/>
+              </a:rPr>
+              <a:t>01</a:t>
+            </a:r>
+            <a:endParaRPr lang="en-US" sz="1680" dirty="0"/>
+          </a:p>
+        </p:txBody>
+      </p:sp>
+      <p:sp>
+        <p:nvSpPr>
+          <p:cNvPr id="5" name="static:3:text"/>
+          <p:cNvSpPr/>
+          <p:nvPr/>
+        </p:nvSpPr>
+        <p:spPr>
+          <a:xfrm>
+            <a:off x="975360" y="2578894"/>
+            <a:ext cx="1962507" cy="266700"/>
+          </a:xfrm>
+          <a:prstGeom prst="rect">
+            <a:avLst/>
+          </a:prstGeom>
+          <a:noFill/>
+          <a:ln/>
+        </p:spPr>
+        <p:txBody>
+          <a:bodyPr wrap="none" lIns="0" tIns="0" rIns="0" bIns="0" rtlCol="0" anchor="ctr"/>
+          <a:lstStyle/>
+          <a:p>
+            <a:pPr marL="0" indent="0" algn="l">
+              <a:buNone/>
+            </a:pPr>
+            <a:r>
+              <a:rPr lang="en-US" sz="1680" b="1" dirty="0">
+                <a:solidFill>
+                  <a:srgbClr val="DEDEDE"/>
+                </a:solidFill>
+                <a:latin typeface="Arial" pitchFamily="34" charset="0"/>
+                <a:ea typeface="Arial" pitchFamily="34" charset="-122"/>
+                <a:cs typeface="Arial" pitchFamily="34" charset="-120"/>
+              </a:rPr>
+              <a:t>Human Annotation</a:t>
+            </a:r>
+            <a:endParaRPr lang="en-US" sz="1680" dirty="0"/>
+          </a:p>
+        </p:txBody>
+      </p:sp>
+      <p:sp>
+        <p:nvSpPr>
+          <p:cNvPr id="6" name="static:4:text"/>
+          <p:cNvSpPr/>
+          <p:nvPr/>
+        </p:nvSpPr>
+        <p:spPr>
+          <a:xfrm>
+            <a:off x="975360" y="2912626"/>
+            <a:ext cx="2510076" cy="190500"/>
+          </a:xfrm>
+          <a:prstGeom prst="rect">
+            <a:avLst/>
+          </a:prstGeom>
+          <a:noFill/>
+          <a:ln/>
+        </p:spPr>
+        <p:txBody>
+          <a:bodyPr wrap="none" lIns="0" tIns="0" rIns="0" bIns="0" rtlCol="0" anchor="ctr"/>
+          <a:lstStyle/>
+          <a:p>
+            <a:pPr marL="0" indent="0" algn="l">
+              <a:buNone/>
+            </a:pPr>
+            <a:r>
+              <a:rPr lang="en-US" sz="1200" dirty="0">
+                <a:solidFill>
+                  <a:srgbClr val="B0B0B0"/>
+                </a:solidFill>
+                <a:latin typeface="Arial" pitchFamily="34" charset="0"/>
+                <a:ea typeface="Arial" pitchFamily="34" charset="-122"/>
+                <a:cs typeface="Arial" pitchFamily="34" charset="-120"/>
+              </a:rPr>
+              <a:t>Bring domain experts into evaluation</a:t>
+            </a:r>
+            <a:endParaRPr lang="en-US" sz="1200" dirty="0"/>
+          </a:p>
+        </p:txBody>
+      </p:sp>
+      <p:sp>
+        <p:nvSpPr>
+          <p:cNvPr id="7" name="static:5:text"/>
+          <p:cNvSpPr/>
+          <p:nvPr/>
+        </p:nvSpPr>
+        <p:spPr>
+          <a:xfrm>
+            <a:off x="4256961" y="2251234"/>
+            <a:ext cx="374690" cy="266700"/>
+          </a:xfrm>
+          <a:prstGeom prst="rect">
+            <a:avLst/>
+          </a:prstGeom>
+          <a:noFill/>
+          <a:ln/>
+        </p:spPr>
+        <p:txBody>
+          <a:bodyPr wrap="none" lIns="0" tIns="0" rIns="0" bIns="0" rtlCol="0" anchor="ctr"/>
+          <a:lstStyle/>
+          <a:p>
+            <a:pPr marL="0" indent="0" algn="l">
+              <a:buNone/>
+            </a:pPr>
+            <a:r>
+              <a:rPr lang="en-US" sz="1680" b="1" dirty="0">
+                <a:solidFill>
+                  <a:srgbClr val="FD8EA1"/>
+                </a:solidFill>
+                <a:latin typeface="Arial" pitchFamily="34" charset="0"/>
+                <a:ea typeface="Arial" pitchFamily="34" charset="-122"/>
+                <a:cs typeface="Arial" pitchFamily="34" charset="-120"/>
+              </a:rPr>
+              <a:t>02</a:t>
+            </a:r>
+            <a:endParaRPr lang="en-US" sz="1680" dirty="0"/>
+          </a:p>
+        </p:txBody>
+      </p:sp>
+      <p:sp>
+        <p:nvSpPr>
+          <p:cNvPr id="8" name="static:6:text"/>
+          <p:cNvSpPr/>
+          <p:nvPr/>
+        </p:nvSpPr>
+        <p:spPr>
+          <a:xfrm>
+            <a:off x="4256961" y="2578894"/>
+            <a:ext cx="2031682" cy="266700"/>
+          </a:xfrm>
+          <a:prstGeom prst="rect">
+            <a:avLst/>
+          </a:prstGeom>
+          <a:noFill/>
+          <a:ln/>
+        </p:spPr>
+        <p:txBody>
+          <a:bodyPr wrap="none" lIns="0" tIns="0" rIns="0" bIns="0" rtlCol="0" anchor="ctr"/>
+          <a:lstStyle/>
+          <a:p>
+            <a:pPr marL="0" indent="0" algn="l">
+              <a:buNone/>
+            </a:pPr>
+            <a:r>
+              <a:rPr lang="en-US" sz="1680" b="1" dirty="0">
+                <a:solidFill>
+                  <a:srgbClr val="DEDEDE"/>
+                </a:solidFill>
+                <a:latin typeface="Arial" pitchFamily="34" charset="0"/>
+                <a:ea typeface="Arial" pitchFamily="34" charset="-122"/>
+                <a:cs typeface="Arial" pitchFamily="34" charset="-120"/>
+              </a:rPr>
+              <a:t>Synthetic Test Data</a:t>
+            </a:r>
+            <a:endParaRPr lang="en-US" sz="1680" dirty="0"/>
+          </a:p>
+        </p:txBody>
+      </p:sp>
+      <p:sp>
+        <p:nvSpPr>
+          <p:cNvPr id="9" name="static:7:text"/>
+          <p:cNvSpPr/>
+          <p:nvPr/>
+        </p:nvSpPr>
+        <p:spPr>
+          <a:xfrm>
+            <a:off x="4256961" y="2912626"/>
+            <a:ext cx="1836182" cy="190500"/>
+          </a:xfrm>
+          <a:prstGeom prst="rect">
+            <a:avLst/>
+          </a:prstGeom>
+          <a:noFill/>
+          <a:ln/>
+        </p:spPr>
+        <p:txBody>
+          <a:bodyPr wrap="none" lIns="0" tIns="0" rIns="0" bIns="0" rtlCol="0" anchor="ctr"/>
+          <a:lstStyle/>
+          <a:p>
+            <a:pPr marL="0" indent="0" algn="l">
+              <a:buNone/>
+            </a:pPr>
+            <a:r>
+              <a:rPr lang="en-US" sz="1200" dirty="0">
+                <a:solidFill>
+                  <a:srgbClr val="B0B0B0"/>
+                </a:solidFill>
+                <a:latin typeface="Arial" pitchFamily="34" charset="0"/>
+                <a:ea typeface="Arial" pitchFamily="34" charset="-122"/>
+                <a:cs typeface="Arial" pitchFamily="34" charset="-120"/>
+              </a:rPr>
+              <a:t>Expand the cases you test</a:t>
+            </a:r>
+            <a:endParaRPr lang="en-US" sz="1200" dirty="0"/>
+          </a:p>
+        </p:txBody>
+      </p:sp>
+      <p:sp>
+        <p:nvSpPr>
+          <p:cNvPr id="10" name="static:8:text"/>
+          <p:cNvSpPr/>
+          <p:nvPr/>
+        </p:nvSpPr>
+        <p:spPr>
+          <a:xfrm>
+            <a:off x="7538680" y="2251234"/>
+            <a:ext cx="380881" cy="266700"/>
+          </a:xfrm>
+          <a:prstGeom prst="rect">
+            <a:avLst/>
+          </a:prstGeom>
+          <a:noFill/>
+          <a:ln/>
+        </p:spPr>
+        <p:txBody>
+          <a:bodyPr wrap="none" lIns="0" tIns="0" rIns="0" bIns="0" rtlCol="0" anchor="ctr"/>
+          <a:lstStyle/>
+          <a:p>
+            <a:pPr marL="0" indent="0" algn="l">
+              <a:buNone/>
+            </a:pPr>
+            <a:r>
+              <a:rPr lang="en-US" sz="1680" b="1" dirty="0">
+                <a:solidFill>
+                  <a:srgbClr val="FBBF24"/>
+                </a:solidFill>
+                <a:latin typeface="Arial" pitchFamily="34" charset="0"/>
+                <a:ea typeface="Arial" pitchFamily="34" charset="-122"/>
+                <a:cs typeface="Arial" pitchFamily="34" charset="-120"/>
+              </a:rPr>
+              <a:t>03</a:t>
+            </a:r>
+            <a:endParaRPr lang="en-US" sz="1680" dirty="0"/>
+          </a:p>
+        </p:txBody>
+      </p:sp>
+      <p:sp>
+        <p:nvSpPr>
+          <p:cNvPr id="11" name="static:9:text"/>
+          <p:cNvSpPr/>
+          <p:nvPr/>
+        </p:nvSpPr>
+        <p:spPr>
+          <a:xfrm>
+            <a:off x="7538680" y="2578894"/>
+            <a:ext cx="1626156" cy="266700"/>
+          </a:xfrm>
+          <a:prstGeom prst="rect">
+            <a:avLst/>
+          </a:prstGeom>
+          <a:noFill/>
+          <a:ln/>
+        </p:spPr>
+        <p:txBody>
+          <a:bodyPr wrap="none" lIns="0" tIns="0" rIns="0" bIns="0" rtlCol="0" anchor="ctr"/>
+          <a:lstStyle/>
+          <a:p>
+            <a:pPr marL="0" indent="0" algn="l">
+              <a:buNone/>
+            </a:pPr>
+            <a:r>
+              <a:rPr lang="en-US" sz="1680" b="1" dirty="0">
+                <a:solidFill>
+                  <a:srgbClr val="DEDEDE"/>
+                </a:solidFill>
+                <a:latin typeface="Arial" pitchFamily="34" charset="0"/>
+                <a:ea typeface="Arial" pitchFamily="34" charset="-122"/>
+                <a:cs typeface="Arial" pitchFamily="34" charset="-120"/>
+              </a:rPr>
+              <a:t>AI Red Teaming</a:t>
+            </a:r>
+            <a:endParaRPr lang="en-US" sz="1680" dirty="0"/>
+          </a:p>
+        </p:txBody>
+      </p:sp>
+      <p:sp>
+        <p:nvSpPr>
+          <p:cNvPr id="12" name="static:10:text"/>
+          <p:cNvSpPr/>
+          <p:nvPr/>
+        </p:nvSpPr>
+        <p:spPr>
+          <a:xfrm>
+            <a:off x="7538680" y="2912626"/>
+            <a:ext cx="1828681" cy="190500"/>
+          </a:xfrm>
+          <a:prstGeom prst="rect">
+            <a:avLst/>
+          </a:prstGeom>
+          <a:noFill/>
+          <a:ln/>
+        </p:spPr>
+        <p:txBody>
+          <a:bodyPr wrap="none" lIns="0" tIns="0" rIns="0" bIns="0" rtlCol="0" anchor="ctr"/>
+          <a:lstStyle/>
+          <a:p>
+            <a:pPr marL="0" indent="0" algn="l">
+              <a:buNone/>
+            </a:pPr>
+            <a:r>
+              <a:rPr lang="en-US" sz="1200" dirty="0">
+                <a:solidFill>
+                  <a:srgbClr val="B0B0B0"/>
+                </a:solidFill>
+                <a:latin typeface="Arial" pitchFamily="34" charset="0"/>
+                <a:ea typeface="Arial" pitchFamily="34" charset="-122"/>
+                <a:cs typeface="Arial" pitchFamily="34" charset="-120"/>
+              </a:rPr>
+              <a:t>Test adversarial behaviour</a:t>
+            </a:r>
+            <a:endParaRPr lang="en-US" sz="1200" dirty="0"/>
+          </a:p>
+        </p:txBody>
+      </p:sp>
+      <p:sp>
+        <p:nvSpPr>
+          <p:cNvPr id="13" name="static:11:text"/>
+          <p:cNvSpPr/>
+          <p:nvPr/>
+        </p:nvSpPr>
+        <p:spPr>
+          <a:xfrm>
+            <a:off x="975360" y="3622834"/>
+            <a:ext cx="385286" cy="266700"/>
+          </a:xfrm>
+          <a:prstGeom prst="rect">
+            <a:avLst/>
+          </a:prstGeom>
+          <a:noFill/>
+          <a:ln/>
+        </p:spPr>
+        <p:txBody>
+          <a:bodyPr wrap="none" lIns="0" tIns="0" rIns="0" bIns="0" rtlCol="0" anchor="ctr"/>
+          <a:lstStyle/>
+          <a:p>
+            <a:pPr marL="0" indent="0" algn="l">
+              <a:buNone/>
+            </a:pPr>
+            <a:r>
+              <a:rPr lang="en-US" sz="1680" b="1" dirty="0">
+                <a:solidFill>
+                  <a:srgbClr val="4ADE80"/>
+                </a:solidFill>
+                <a:latin typeface="Arial" pitchFamily="34" charset="0"/>
+                <a:ea typeface="Arial" pitchFamily="34" charset="-122"/>
+                <a:cs typeface="Arial" pitchFamily="34" charset="-120"/>
+              </a:rPr>
+              <a:t>04</a:t>
+            </a:r>
+            <a:endParaRPr lang="en-US" sz="1680" dirty="0"/>
+          </a:p>
+        </p:txBody>
+      </p:sp>
+      <p:sp>
+        <p:nvSpPr>
+          <p:cNvPr id="14" name="static:12:text"/>
+          <p:cNvSpPr/>
+          <p:nvPr/>
+        </p:nvSpPr>
+        <p:spPr>
+          <a:xfrm>
+            <a:off x="975360" y="3950494"/>
+            <a:ext cx="1121212" cy="266700"/>
+          </a:xfrm>
+          <a:prstGeom prst="rect">
+            <a:avLst/>
+          </a:prstGeom>
+          <a:noFill/>
+          <a:ln/>
+        </p:spPr>
+        <p:txBody>
+          <a:bodyPr wrap="none" lIns="0" tIns="0" rIns="0" bIns="0" rtlCol="0" anchor="ctr"/>
+          <a:lstStyle/>
+          <a:p>
+            <a:pPr marL="0" indent="0" algn="l">
+              <a:buNone/>
+            </a:pPr>
+            <a:r>
+              <a:rPr lang="en-US" sz="1680" b="1" dirty="0">
+                <a:solidFill>
+                  <a:srgbClr val="DEDEDE"/>
+                </a:solidFill>
+                <a:latin typeface="Arial" pitchFamily="34" charset="0"/>
+                <a:ea typeface="Arial" pitchFamily="34" charset="-122"/>
+                <a:cs typeface="Arial" pitchFamily="34" charset="-120"/>
+              </a:rPr>
+              <a:t>Guardrails</a:t>
+            </a:r>
+            <a:endParaRPr lang="en-US" sz="1680" dirty="0"/>
+          </a:p>
+        </p:txBody>
+      </p:sp>
+      <p:sp>
+        <p:nvSpPr>
+          <p:cNvPr id="15" name="static:13:text"/>
+          <p:cNvSpPr/>
+          <p:nvPr/>
+        </p:nvSpPr>
+        <p:spPr>
+          <a:xfrm>
+            <a:off x="975360" y="4284226"/>
+            <a:ext cx="2325291" cy="190500"/>
+          </a:xfrm>
+          <a:prstGeom prst="rect">
+            <a:avLst/>
+          </a:prstGeom>
+          <a:noFill/>
+          <a:ln/>
+        </p:spPr>
+        <p:txBody>
+          <a:bodyPr wrap="none" lIns="0" tIns="0" rIns="0" bIns="0" rtlCol="0" anchor="ctr"/>
+          <a:lstStyle/>
+          <a:p>
+            <a:pPr marL="0" indent="0" algn="l">
+              <a:buNone/>
+            </a:pPr>
+            <a:r>
+              <a:rPr lang="en-US" sz="1200" dirty="0">
+                <a:solidFill>
+                  <a:srgbClr val="B0B0B0"/>
+                </a:solidFill>
+                <a:latin typeface="Arial" pitchFamily="34" charset="0"/>
+                <a:ea typeface="Arial" pitchFamily="34" charset="-122"/>
+                <a:cs typeface="Arial" pitchFamily="34" charset="-120"/>
+              </a:rPr>
+              <a:t>Protect inputs and tool responses</a:t>
+            </a:r>
+            <a:endParaRPr lang="en-US" sz="1200" dirty="0"/>
+          </a:p>
+        </p:txBody>
+      </p:sp>
+      <p:sp>
+        <p:nvSpPr>
+          <p:cNvPr id="16" name="static:14:text"/>
+          <p:cNvSpPr/>
+          <p:nvPr/>
+        </p:nvSpPr>
+        <p:spPr>
+          <a:xfrm>
+            <a:off x="4256961" y="3622834"/>
+            <a:ext cx="378619" cy="266700"/>
+          </a:xfrm>
+          <a:prstGeom prst="rect">
+            <a:avLst/>
+          </a:prstGeom>
+          <a:noFill/>
+          <a:ln/>
+        </p:spPr>
+        <p:txBody>
+          <a:bodyPr wrap="none" lIns="0" tIns="0" rIns="0" bIns="0" rtlCol="0" anchor="ctr"/>
+          <a:lstStyle/>
+          <a:p>
+            <a:pPr marL="0" indent="0" algn="l">
+              <a:buNone/>
+            </a:pPr>
+            <a:r>
+              <a:rPr lang="en-US" sz="1680" b="1" dirty="0">
+                <a:solidFill>
+                  <a:srgbClr val="F87171"/>
+                </a:solidFill>
+                <a:latin typeface="Arial" pitchFamily="34" charset="0"/>
+                <a:ea typeface="Arial" pitchFamily="34" charset="-122"/>
+                <a:cs typeface="Arial" pitchFamily="34" charset="-120"/>
+              </a:rPr>
+              <a:t>05</a:t>
+            </a:r>
+            <a:endParaRPr lang="en-US" sz="1680" dirty="0"/>
+          </a:p>
+        </p:txBody>
+      </p:sp>
+      <p:sp>
+        <p:nvSpPr>
+          <p:cNvPr id="17" name="static:15:text"/>
+          <p:cNvSpPr/>
+          <p:nvPr/>
+        </p:nvSpPr>
+        <p:spPr>
+          <a:xfrm>
+            <a:off x="4256961" y="3950494"/>
+            <a:ext cx="2318385" cy="266700"/>
+          </a:xfrm>
+          <a:prstGeom prst="rect">
+            <a:avLst/>
+          </a:prstGeom>
+          <a:noFill/>
+          <a:ln/>
+        </p:spPr>
+        <p:txBody>
+          <a:bodyPr wrap="none" lIns="0" tIns="0" rIns="0" bIns="0" rtlCol="0" anchor="ctr"/>
+          <a:lstStyle/>
+          <a:p>
+            <a:pPr marL="0" indent="0" algn="l">
+              <a:buNone/>
+            </a:pPr>
+            <a:r>
+              <a:rPr lang="en-US" sz="1680" b="1" dirty="0">
+                <a:solidFill>
+                  <a:srgbClr val="DEDEDE"/>
+                </a:solidFill>
+                <a:latin typeface="Arial" pitchFamily="34" charset="0"/>
+                <a:ea typeface="Arial" pitchFamily="34" charset="-122"/>
+                <a:cs typeface="Arial" pitchFamily="34" charset="-120"/>
+              </a:rPr>
+              <a:t>Identity &amp; Permissions</a:t>
+            </a:r>
+            <a:endParaRPr lang="en-US" sz="1680" dirty="0"/>
+          </a:p>
+        </p:txBody>
+      </p:sp>
+      <p:sp>
+        <p:nvSpPr>
+          <p:cNvPr id="18" name="static:16:text"/>
+          <p:cNvSpPr/>
+          <p:nvPr/>
+        </p:nvSpPr>
+        <p:spPr>
+          <a:xfrm>
+            <a:off x="4256961" y="4284226"/>
+            <a:ext cx="2229922" cy="190500"/>
+          </a:xfrm>
+          <a:prstGeom prst="rect">
+            <a:avLst/>
+          </a:prstGeom>
+          <a:noFill/>
+          <a:ln/>
+        </p:spPr>
+        <p:txBody>
+          <a:bodyPr wrap="none" lIns="0" tIns="0" rIns="0" bIns="0" rtlCol="0" anchor="ctr"/>
+          <a:lstStyle/>
+          <a:p>
+            <a:pPr marL="0" indent="0" algn="l">
+              <a:buNone/>
+            </a:pPr>
+            <a:r>
+              <a:rPr lang="en-US" sz="1200" dirty="0">
+                <a:solidFill>
+                  <a:srgbClr val="B0B0B0"/>
+                </a:solidFill>
+                <a:latin typeface="Arial" pitchFamily="34" charset="0"/>
+                <a:ea typeface="Arial" pitchFamily="34" charset="-122"/>
+                <a:cs typeface="Arial" pitchFamily="34" charset="-120"/>
+              </a:rPr>
+              <a:t>Limit what the agent can access</a:t>
+            </a:r>
+            <a:endParaRPr lang="en-US" sz="1200" dirty="0"/>
+          </a:p>
+        </p:txBody>
+      </p:sp>
+      <p:sp>
+        <p:nvSpPr>
+          <p:cNvPr id="19" name="static:17:text"/>
+          <p:cNvSpPr/>
+          <p:nvPr/>
+        </p:nvSpPr>
+        <p:spPr>
+          <a:xfrm>
+            <a:off x="7538680" y="3622834"/>
+            <a:ext cx="385405" cy="266700"/>
+          </a:xfrm>
+          <a:prstGeom prst="rect">
+            <a:avLst/>
+          </a:prstGeom>
+          <a:noFill/>
+          <a:ln/>
+        </p:spPr>
+        <p:txBody>
+          <a:bodyPr wrap="none" lIns="0" tIns="0" rIns="0" bIns="0" rtlCol="0" anchor="ctr"/>
+          <a:lstStyle/>
+          <a:p>
+            <a:pPr marL="0" indent="0" algn="l">
+              <a:buNone/>
+            </a:pPr>
+            <a:r>
+              <a:rPr lang="en-US" sz="1680" b="1" dirty="0">
+                <a:solidFill>
+                  <a:srgbClr val="4DA6FF"/>
+                </a:solidFill>
+                <a:latin typeface="Arial" pitchFamily="34" charset="0"/>
+                <a:ea typeface="Arial" pitchFamily="34" charset="-122"/>
+                <a:cs typeface="Arial" pitchFamily="34" charset="-120"/>
+              </a:rPr>
+              <a:t>06</a:t>
+            </a:r>
+            <a:endParaRPr lang="en-US" sz="1680" dirty="0"/>
+          </a:p>
+        </p:txBody>
+      </p:sp>
+      <p:sp>
+        <p:nvSpPr>
+          <p:cNvPr id="20" name="static:18:text"/>
+          <p:cNvSpPr/>
+          <p:nvPr/>
+        </p:nvSpPr>
+        <p:spPr>
+          <a:xfrm>
+            <a:off x="7538680" y="3950494"/>
+            <a:ext cx="1861423" cy="266700"/>
+          </a:xfrm>
+          <a:prstGeom prst="rect">
+            <a:avLst/>
+          </a:prstGeom>
+          <a:noFill/>
+          <a:ln/>
+        </p:spPr>
+        <p:txBody>
+          <a:bodyPr wrap="none" lIns="0" tIns="0" rIns="0" bIns="0" rtlCol="0" anchor="ctr"/>
+          <a:lstStyle/>
+          <a:p>
+            <a:pPr marL="0" indent="0" algn="l">
+              <a:buNone/>
+            </a:pPr>
+            <a:r>
+              <a:rPr lang="en-US" sz="1680" b="1" dirty="0">
+                <a:solidFill>
+                  <a:srgbClr val="DEDEDE"/>
+                </a:solidFill>
+                <a:latin typeface="Arial" pitchFamily="34" charset="0"/>
+                <a:ea typeface="Arial" pitchFamily="34" charset="-122"/>
+                <a:cs typeface="Arial" pitchFamily="34" charset="-120"/>
+              </a:rPr>
+              <a:t>Human Approvals</a:t>
+            </a:r>
+            <a:endParaRPr lang="en-US" sz="1680" dirty="0"/>
+          </a:p>
+        </p:txBody>
+      </p:sp>
+      <p:sp>
+        <p:nvSpPr>
+          <p:cNvPr id="21" name="static:19:text"/>
+          <p:cNvSpPr/>
+          <p:nvPr/>
+        </p:nvSpPr>
+        <p:spPr>
+          <a:xfrm>
+            <a:off x="7538680" y="4284226"/>
+            <a:ext cx="2269450" cy="190500"/>
+          </a:xfrm>
+          <a:prstGeom prst="rect">
+            <a:avLst/>
+          </a:prstGeom>
+          <a:noFill/>
+          <a:ln/>
+        </p:spPr>
+        <p:txBody>
+          <a:bodyPr wrap="none" lIns="0" tIns="0" rIns="0" bIns="0" rtlCol="0" anchor="ctr"/>
+          <a:lstStyle/>
+          <a:p>
+            <a:pPr marL="0" indent="0" algn="l">
+              <a:buNone/>
+            </a:pPr>
+            <a:r>
+              <a:rPr lang="en-US" sz="1200" dirty="0">
+                <a:solidFill>
+                  <a:srgbClr val="B0B0B0"/>
+                </a:solidFill>
+                <a:latin typeface="Arial" pitchFamily="34" charset="0"/>
+                <a:ea typeface="Arial" pitchFamily="34" charset="-122"/>
+                <a:cs typeface="Arial" pitchFamily="34" charset="-120"/>
+              </a:rPr>
+              <a:t>Keep people in control of actions</a:t>
+            </a:r>
+            <a:endParaRPr lang="en-US" sz="1200" dirty="0"/>
+          </a:p>
+        </p:txBody>
+      </p:sp>
+      <p:sp>
+        <p:nvSpPr>
+          <p:cNvPr id="22" name="static:20:text"/>
+          <p:cNvSpPr/>
+          <p:nvPr/>
+        </p:nvSpPr>
+        <p:spPr>
+          <a:xfrm>
+            <a:off x="609600" y="6461760"/>
+            <a:ext cx="1539240" cy="129540"/>
+          </a:xfrm>
+          <a:prstGeom prst="rect">
+            <a:avLst/>
+          </a:prstGeom>
+          <a:noFill/>
+          <a:ln/>
+        </p:spPr>
+        <p:txBody>
+          <a:bodyPr wrap="none" lIns="0" tIns="0" rIns="0" bIns="0" rtlCol="0" anchor="ctr"/>
+          <a:lstStyle/>
+          <a:p>
+            <a:pPr marL="0" indent="0" algn="l">
+              <a:buNone/>
+            </a:pPr>
+            <a:r>
+              <a:rPr lang="en-US" sz="720" kern="0" spc="58" dirty="0">
+                <a:solidFill>
+                  <a:srgbClr val="919191"/>
+                </a:solidFill>
+                <a:latin typeface="Arial" pitchFamily="34" charset="0"/>
+                <a:ea typeface="Arial" pitchFamily="34" charset="-122"/>
+                <a:cs typeface="Arial" pitchFamily="34" charset="-120"/>
+              </a:rPr>
+              <a:t>FY27 AI GENIUS</a:t>
+            </a:r>
+            <a:endParaRPr lang="en-US" sz="720" dirty="0"/>
+          </a:p>
+        </p:txBody>
+      </p:sp>
+      <p:sp>
+        <p:nvSpPr>
+          <p:cNvPr id="23" name="static:21:text"/>
+          <p:cNvSpPr/>
+          <p:nvPr/>
+        </p:nvSpPr>
+        <p:spPr>
+          <a:xfrm>
+            <a:off x="10463927" y="6461760"/>
+            <a:ext cx="1209913" cy="129540"/>
+          </a:xfrm>
+          <a:prstGeom prst="rect">
+            <a:avLst/>
+          </a:prstGeom>
+          <a:noFill/>
+          <a:ln/>
+        </p:spPr>
+        <p:txBody>
+          <a:bodyPr wrap="none" lIns="0" tIns="0" rIns="0" bIns="0" rtlCol="0" anchor="ctr"/>
+          <a:lstStyle/>
+          <a:p>
+            <a:pPr marL="0" indent="0" algn="l">
+              <a:buNone/>
+            </a:pPr>
+            <a:r>
+              <a:rPr lang="en-US" sz="720" kern="0" spc="58" dirty="0">
+                <a:solidFill>
+                  <a:srgbClr val="919191"/>
+                </a:solidFill>
+                <a:latin typeface="Arial" pitchFamily="34" charset="0"/>
+                <a:ea typeface="Arial" pitchFamily="34" charset="-122"/>
+                <a:cs typeface="Arial" pitchFamily="34" charset="-120"/>
+              </a:rPr>
+              <a:t>AI GENIUS / S6 E2 / 18</a:t>
+            </a:r>
+            <a:endParaRPr lang="en-US" sz="720" dirty="0"/>
+          </a:p>
+        </p:txBody>
+      </p:sp>
+    </p:spTree>
+  </p:cSld>
+  <p:clrMapOvr>
+    <a:masterClrMapping/>
+  </p:clrMapOvr>
+</p:sld>
+</file>
+
+<file path=ppt/slides/slide19.xml><?xml version="1.0" encoding="utf-8"?>
+<p:sld xmlns:a="http://schemas.openxmlformats.org/drawingml/2006/main" xmlns:r="http://schemas.openxmlformats.org/officeDocument/2006/relationships" xmlns:p="http://schemas.openxmlformats.org/presentationml/2006/main">
+  <p:cSld name="Build measure improve repeat">
+    <p:spTree>
+      <p:nvGrpSpPr>
+        <p:cNvPr id="1" name=""/>
+        <p:cNvGrpSpPr/>
+        <p:nvPr/>
+      </p:nvGrpSpPr>
+      <p:grpSpPr>
+        <a:xfrm>
+          <a:off x="0" y="0"/>
+          <a:ext cx="0" cy="0"/>
+          <a:chOff x="0" y="0"/>
+          <a:chExt cx="0" cy="0"/>
+        </a:xfrm>
+      </p:grpSpPr>
+      <p:sp>
+        <p:nvSpPr>
+          <p:cNvPr id="2" name="static:0:text"/>
+          <p:cNvSpPr/>
+          <p:nvPr/>
+        </p:nvSpPr>
+        <p:spPr>
+          <a:xfrm>
+            <a:off x="975360" y="2343626"/>
+            <a:ext cx="496133" cy="190500"/>
+          </a:xfrm>
+          <a:prstGeom prst="rect">
+            <a:avLst/>
+          </a:prstGeom>
+          <a:noFill/>
+          <a:ln/>
+        </p:spPr>
+        <p:txBody>
+          <a:bodyPr wrap="none" lIns="0" tIns="0" rIns="0" bIns="0" rtlCol="0" anchor="ctr"/>
+          <a:lstStyle/>
+          <a:p>
+            <a:pPr marL="0" indent="0" algn="l">
+              <a:buNone/>
+            </a:pPr>
+            <a:r>
+              <a:rPr lang="en-US" sz="1200" b="1" kern="0" spc="180" dirty="0">
+                <a:solidFill>
+                  <a:srgbClr val="4DA6FF"/>
+                </a:solidFill>
+                <a:latin typeface="Arial" pitchFamily="34" charset="0"/>
+                <a:ea typeface="Arial" pitchFamily="34" charset="-122"/>
+                <a:cs typeface="Arial" pitchFamily="34" charset="-120"/>
+              </a:rPr>
+              <a:t>Q&amp;A</a:t>
+            </a:r>
+            <a:endParaRPr lang="en-US" sz="1200" dirty="0"/>
+          </a:p>
+        </p:txBody>
+      </p:sp>
+      <p:sp>
+        <p:nvSpPr>
+          <p:cNvPr id="3" name="static:1:text"/>
+          <p:cNvSpPr/>
+          <p:nvPr/>
+        </p:nvSpPr>
+        <p:spPr>
+          <a:xfrm>
+            <a:off x="975360" y="2640806"/>
+            <a:ext cx="8494705" cy="624840"/>
+          </a:xfrm>
+          <a:prstGeom prst="rect">
+            <a:avLst/>
+          </a:prstGeom>
+          <a:noFill/>
+          <a:ln/>
+        </p:spPr>
+        <p:txBody>
+          <a:bodyPr wrap="none" lIns="0" tIns="0" rIns="0" bIns="0" rtlCol="0" anchor="ctr"/>
+          <a:lstStyle/>
+          <a:p>
+            <a:pPr marL="0" indent="0" algn="l">
+              <a:buNone/>
+            </a:pPr>
+            <a:r>
+              <a:rPr lang="en-US" sz="4080" b="1" kern="0" spc="-143" dirty="0">
+                <a:solidFill>
+                  <a:srgbClr val="DEDEDE"/>
+                </a:solidFill>
+                <a:latin typeface="Arial" pitchFamily="34" charset="0"/>
+                <a:ea typeface="Arial" pitchFamily="34" charset="-122"/>
+                <a:cs typeface="Arial" pitchFamily="34" charset="-120"/>
+              </a:rPr>
+              <a:t>Build → Measure → Improve → Repeat</a:t>
+            </a:r>
+            <a:endParaRPr lang="en-US" sz="4080" dirty="0"/>
+          </a:p>
+        </p:txBody>
+      </p:sp>
+      <p:sp>
+        <p:nvSpPr>
+          <p:cNvPr id="4" name="static:2:text"/>
+          <p:cNvSpPr/>
+          <p:nvPr/>
+        </p:nvSpPr>
+        <p:spPr>
+          <a:xfrm>
+            <a:off x="975360" y="3387566"/>
+            <a:ext cx="5526524" cy="259080"/>
+          </a:xfrm>
+          <a:prstGeom prst="rect">
+            <a:avLst/>
+          </a:prstGeom>
+          <a:noFill/>
+          <a:ln/>
+        </p:spPr>
+        <p:txBody>
+          <a:bodyPr wrap="none" lIns="0" tIns="0" rIns="0" bIns="0" rtlCol="0" anchor="ctr"/>
+          <a:lstStyle/>
+          <a:p>
+            <a:pPr marL="0" indent="0" algn="l">
+              <a:buNone/>
+            </a:pPr>
+            <a:r>
+              <a:rPr lang="en-US" sz="1620" dirty="0">
+                <a:solidFill>
+                  <a:srgbClr val="B0B0B0"/>
+                </a:solidFill>
+                <a:latin typeface="Arial" pitchFamily="34" charset="0"/>
+                <a:ea typeface="Arial" pitchFamily="34" charset="-122"/>
+                <a:cs typeface="Arial" pitchFamily="34" charset="-120"/>
+              </a:rPr>
+              <a:t>One working agent. Consistent answers. Measured trade-offs.</a:t>
+            </a:r>
+            <a:endParaRPr lang="en-US" sz="1620" dirty="0"/>
+          </a:p>
+        </p:txBody>
+      </p:sp>
+      <p:sp>
+        <p:nvSpPr>
+          <p:cNvPr id="5" name="static:3:text"/>
+          <p:cNvSpPr/>
+          <p:nvPr/>
+        </p:nvSpPr>
+        <p:spPr>
+          <a:xfrm>
+            <a:off x="975360" y="3665220"/>
+            <a:ext cx="2498288" cy="259080"/>
+          </a:xfrm>
+          <a:prstGeom prst="rect">
+            <a:avLst/>
+          </a:prstGeom>
+          <a:noFill/>
+          <a:ln/>
+        </p:spPr>
+        <p:txBody>
+          <a:bodyPr wrap="none" lIns="0" tIns="0" rIns="0" bIns="0" rtlCol="0" anchor="ctr"/>
+          <a:lstStyle/>
+          <a:p>
+            <a:pPr marL="0" indent="0" algn="l">
+              <a:buNone/>
+            </a:pPr>
+            <a:r>
+              <a:rPr lang="en-US" sz="1620" dirty="0">
+                <a:solidFill>
+                  <a:srgbClr val="B0B0B0"/>
+                </a:solidFill>
+                <a:latin typeface="Arial" pitchFamily="34" charset="0"/>
+                <a:ea typeface="Arial" pitchFamily="34" charset="-122"/>
+                <a:cs typeface="Arial" pitchFamily="34" charset="-120"/>
+              </a:rPr>
+              <a:t>Repeatable release checks.</a:t>
+            </a:r>
+            <a:endParaRPr lang="en-US" sz="1620" dirty="0"/>
+          </a:p>
+        </p:txBody>
+      </p:sp>
+      <p:sp>
+        <p:nvSpPr>
+          <p:cNvPr id="6" name="static:4:text"/>
+          <p:cNvSpPr/>
+          <p:nvPr/>
+        </p:nvSpPr>
+        <p:spPr>
+          <a:xfrm>
+            <a:off x="609600" y="6461760"/>
+            <a:ext cx="1539240" cy="129540"/>
+          </a:xfrm>
+          <a:prstGeom prst="rect">
+            <a:avLst/>
+          </a:prstGeom>
+          <a:noFill/>
+          <a:ln/>
+        </p:spPr>
+        <p:txBody>
+          <a:bodyPr wrap="none" lIns="0" tIns="0" rIns="0" bIns="0" rtlCol="0" anchor="ctr"/>
+          <a:lstStyle/>
+          <a:p>
+            <a:pPr marL="0" indent="0" algn="l">
+              <a:buNone/>
+            </a:pPr>
+            <a:r>
+              <a:rPr lang="en-US" sz="720" kern="0" spc="58" dirty="0">
+                <a:solidFill>
+                  <a:srgbClr val="919191"/>
+                </a:solidFill>
+                <a:latin typeface="Arial" pitchFamily="34" charset="0"/>
+                <a:ea typeface="Arial" pitchFamily="34" charset="-122"/>
+                <a:cs typeface="Arial" pitchFamily="34" charset="-120"/>
+              </a:rPr>
+              <a:t>FY27 AI GENIUS</a:t>
+            </a:r>
+            <a:endParaRPr lang="en-US" sz="720" dirty="0"/>
+          </a:p>
+        </p:txBody>
+      </p:sp>
+      <p:sp>
+        <p:nvSpPr>
+          <p:cNvPr id="7" name="static:5:text"/>
+          <p:cNvSpPr/>
+          <p:nvPr/>
+        </p:nvSpPr>
+        <p:spPr>
+          <a:xfrm>
+            <a:off x="10457617" y="6461760"/>
+            <a:ext cx="1216223" cy="129540"/>
+          </a:xfrm>
+          <a:prstGeom prst="rect">
+            <a:avLst/>
+          </a:prstGeom>
+          <a:noFill/>
+          <a:ln/>
+        </p:spPr>
+        <p:txBody>
+          <a:bodyPr wrap="none" lIns="0" tIns="0" rIns="0" bIns="0" rtlCol="0" anchor="ctr"/>
+          <a:lstStyle/>
+          <a:p>
+            <a:pPr marL="0" indent="0" algn="l">
+              <a:buNone/>
+            </a:pPr>
+            <a:r>
+              <a:rPr lang="en-US" sz="720" kern="0" spc="58" dirty="0">
+                <a:solidFill>
+                  <a:srgbClr val="919191"/>
+                </a:solidFill>
+                <a:latin typeface="Arial" pitchFamily="34" charset="0"/>
+                <a:ea typeface="Arial" pitchFamily="34" charset="-122"/>
+                <a:cs typeface="Arial" pitchFamily="34" charset="-120"/>
+              </a:rPr>
+              <a:t>AI GENIUS / S6 E2 / 19</a:t>
+            </a:r>
+            <a:endParaRPr lang="en-US" sz="720" dirty="0"/>
+          </a:p>
+        </p:txBody>
+      </p:sp>
+    </p:spTree>
+  </p:cSld>
+  <p:clrMapOvr>
+    <a:masterClrMapping/>
+  </p:clrMapOvr>
 </p:sld>
 </file>
 
@@ -18082,7 +18794,7 @@
                 <a:ea typeface="Arial" pitchFamily="34" charset="-122"/>
                 <a:cs typeface="Arial" pitchFamily="34" charset="-120"/>
               </a:rPr>
-              <a:t>Ask the purchasing question, explore its sources and save the baseline</a:t>
+              <a:t>Ask two questions: one it gets right, and one that</a:t>
             </a:r>
             <a:endParaRPr lang="en-US" sz="1620" dirty="0"/>
           </a:p>
@@ -18121,7 +18833,7 @@
                 <a:ea typeface="Arial" pitchFamily="34" charset="-122"/>
                 <a:cs typeface="Arial" pitchFamily="34" charset="-120"/>
               </a:rPr>
-              <a:t>run.</a:t>
+              <a:t>looks right but isn’t.</a:t>
             </a:r>
             <a:endParaRPr lang="en-US" sz="1620" dirty="0"/>
           </a:p>

--- a/presentation/presentation.pptx
+++ b/presentation/presentation.pptx
@@ -710,7 +710,7 @@
           </a:p>
           <a:p>
             <a:r>
-              <a:t>These are the evaluators we actually run. The next-action judge is a custom prompt evaluator: pass/fail against a reference answer, and its reason starts with what the tools did, for example 'used the line-manager lookup instead of the required higher-level route'. That reason is what the optimizer learns from: Microsoft's own lesson is that the reflector only sees what the evaluator returns. The rubric scores weighted dimensions such as approval route, current approver and citations. Per-question criteria are specific checks, such as 'asks for the total cost first', which the optimizer also uses. Built-in evaluators such as Groundedness exist; we chose task-specific ones because the failure we care about is a wrong approver, not an unsupported claim. The rubric evaluator is in preview.</a:t>
+              <a:t>These are the evaluators we actually run. The next-action judge is a custom prompt evaluator: pass/fail against a reference answer, and its reason starts with what the tools did, for example 'used the line-manager lookup instead of the required higher-level route'. That reason is what the optimizer learns from: Microsoft's own lesson is that the reflector only sees what the evaluator returns. The rubric scores weighted dimensions such as approval route, current approver and citations. Built-in evaluators such as Groundedness exist; we chose task-specific ones because the failure we care about is a wrong approver, not an unsupported claim. The rubric evaluator is in preview.</a:t>
             </a:r>
           </a:p>
           <a:p/>
@@ -721,7 +721,7 @@
           </a:p>
           <a:p>
             <a:r>
-              <a:t>Let's measure the starting agent against these criteria across purchasing cases.</a:t>
+              <a:t>Let's measure the starting agent with these two judges across purchasing cases.</a:t>
             </a:r>
           </a:p>
           <a:p/>
@@ -824,7 +824,7 @@
           <a:p/>
           <a:p>
             <a:r>
-              <a:t>Suggested timing: 6 minutes</a:t>
+              <a:t>Suggested timing: 7 minutes</a:t>
             </a:r>
           </a:p>
           <a:p/>
@@ -857,7 +857,7 @@
           </a:p>
           <a:p>
             <a:r>
-              <a:t>Open the holdout evaluation run in Foundry: 22 questions, with different departments, people and dates from the ones the optimizer trains on. Baseline: 18 of 22. Click Wen Li, $9,300 of laptops: sent to her line manager instead of the Category Manager, the same failure as Marcus. Read the judge's reason. Tell the earlier story briefly: with our first mock search tool the baseline scored 12 of 18; fixing two tools, not the prompt, took it to 18 of 18, so we added harder questions. Two runs of the same agent differ by about one question, so only trust changes of two or more.</a:t>
+              <a:t>Open your prepared holdout run in Foundry: questions with different departments, people and dates from the ones the optimizer trains on. Click a failing question and read the judge's reason: it describes what the tools did, not just that the answer was wrong. Which questions fail varies from run to run; when we built this, the over-$5,000 ones did, sending the employee to their line manager instead of the Category Manager, the same failure as Marcus. Then the story from building it: with our first mock search tool the baseline scored 12 of 18; fixing two tools, not the prompt, took it to 18 of 18, so we wrote harder questions. Finish with your own noise level from the two baseline runs: only trust a change bigger than that.</a:t>
             </a:r>
           </a:p>
           <a:p/>
@@ -868,7 +868,7 @@
           </a:p>
           <a:p>
             <a:r>
-              <a:t>Prepared run: the 18/22 holdout evaluation, open in a tab, with Wen Li's row ready. Screenshot it as a backup.</a:t>
+              <a:t>Prepared: your holdout evaluation run, open in a tab, with a failing question ready, and your noise level from two baseline runs. Screenshot both as a backup.</a:t>
             </a:r>
           </a:p>
           <a:p/>
@@ -1015,7 +1015,7 @@
           </a:p>
           <a:p>
             <a:r>
-              <a:t>The optimizer evaluates the baseline, reflects on failed practice questions, proposes a change, tests it on a few training questions, then scores it on the holdout it never trains on. Microsoft's guidance: changes under 0.03 are noise, 0.03 to 0.10 are moderate. Land the takeaway: fix the tools first. The optimizer refines a working agent; it doesn't rescue a broken one. Our first runs started from a broken search tool, and the optimizer learned to memorise its way around it.</a:t>
+              <a:t>The optimizer evaluates the baseline, reflects on failed practice questions, proposes a change, tests it on a few training questions, then scores it on the holdout it never trains on. Microsoft's guidance: changes under 0.03 are noise, 0.03 to 0.10 are moderate. The optimizer can also use per-question criteria, specific checks such as 'asks for the total cost first'; our evaluation runs don't use them, so mention them here, not on the Evaluate slide. Land the takeaway: fix the tools first. The optimizer can change the prompt, the tool descriptions and the model, but not the code behind a tool. Our first runs started from a broken search tool: the score still went up, but by copying facts into the prompt, not by fixing the search.</a:t>
             </a:r>
           </a:p>
           <a:p/>
@@ -1162,7 +1162,7 @@
           </a:p>
           <a:p>
             <a:r>
-              <a:t>Open the agent's Optimize tab and the completed run. Best candidate: 0.691 on the holdout, +0.078, a moderate gain. Click View changes and sort what you see into two piles. Rules: answer-first wording, no extra 'confirm the approval is recorded' step, budget kept to one sentence. Copied facts: training names and amounts, some hidden in the tool descriptions where reviewers rarely look: Quentin Blake, 'Grace already approved', $460 printer toner on 27 October. And the rule that mattered, find the role the policy requires before looking up who holds it, isn't there. The score went up; that doesn't mean you ship it.</a:t>
+              <a:t>Open the agent's Optimize tab and your prepared run. Every run differs, so read it rather than following a script. First, the score change on the holdout: by Microsoft's scale, under 0.03 is noise and 0.03 to 0.10 is moderate; also count how many questions changed, against your noise level. Then View changes on the best candidate, in the instructions and the tool descriptions, and sort what you find: rules worth keeping, such as answer-first wording; copied facts, such as training names and amounts, which in ours were hidden in the tool descriptions; and what's missing, such as a rule for the Demo 4 failure. The score went up; that doesn't mean you ship it.</a:t>
             </a:r>
           </a:p>
           <a:p/>
@@ -1173,7 +1173,7 @@
           </a:p>
           <a:p>
             <a:r>
-              <a:t>Prepared run: Optimize tab open on the completed run, with View changes ready on the instructions and on the ask tool description. Screenshot both. The candidate is saved in sample/evaluation/candidates/optimiser-0.691/.</a:t>
+              <a:t>Prepared: the Optimize tab on your completed run, with View changes ready on the instructions and the ask tool description. If your run has nothing worth showing, use the candidate saved from ours in sample/evaluation/candidates/optimiser-0.691/: +0.078 on the holdout, three good rules, training names and amounts in its tool descriptions, and no role rule.</a:t>
             </a:r>
           </a:p>
           <a:p/>
@@ -1428,13 +1428,13 @@
           <a:lstStyle/>
           <a:p>
             <a:r>
-              <a:t>Demo 6 - The check that goes red</a:t>
+              <a:t>Demo 6 - Three pull requests</a:t>
             </a:r>
           </a:p>
           <a:p/>
           <a:p>
             <a:r>
-              <a:t>Suggested timing: 5 minutes</a:t>
+              <a:t>Suggested timing: 8 minutes</a:t>
             </a:r>
           </a:p>
           <a:p/>
@@ -1445,7 +1445,7 @@
           </a:p>
           <a:p>
             <a:r>
-              <a:t>The cheapest check catches the copied facts in a second.</a:t>
+              <a:t>The cheapest check runs first; the evaluation catches what it can't.</a:t>
             </a:r>
           </a:p>
           <a:p/>
@@ -1456,7 +1456,7 @@
           </a:p>
           <a:p>
             <a:r>
-              <a:t>Release gates check evaluation results; approvals record the release decision.</a:t>
+              <a:t>A pull request check runs on every proposed change; it blocks merging only if the branch's ruleset requires it.</a:t>
             </a:r>
           </a:p>
           <a:p/>
@@ -1467,7 +1467,7 @@
           </a:p>
           <a:p>
             <a:r>
-              <a:t>In the terminal, run check_prompt_facts.py with the baseline and the optimizer's candidate (playbook command). One second, no model: it lists the seven copied facts. Then switch to GitHub: the same script is the first step of the pull-request workflow, before any evaluation spends money. Show the workflow file and one completed run. Close the loop: a person keeps the good rules, removes the copied facts and adds the missing role rule. That reviewed version is in candidates/reviewed, and it goes through the same gate.</a:t>
+              <a:t>Three prepared pull requests, one per outcome. First, the optimizer's saved candidate: the offline fact check goes red in seconds, listing the seven names, amounts and dates it copied in, and no evaluation runs. Run the same check live in the terminal to show it's one second and no model. Second, a change titled 'Speed up: skip the Work IQ lookup': it passes the fact check, but the development set catches it, because questions about leave, delegation and the Category Manager start failing. It looked like an optimisation; only the evaluation could tell. Third, the reviewed version: the optimizer's good rules, no copied facts, plus the rule it missed. It passes. The gate only asks that a change not fall below the baseline by more than the normal wobble. And it blocks merging only if a ruleset on main requires it; admins can still bypass, and every bypass is recorded.</a:t>
             </a:r>
           </a:p>
           <a:p/>
@@ -1478,7 +1478,7 @@
           </a:p>
           <a:p>
             <a:r>
-              <a:t>Live: the fact-check command. Prepared: the GitHub Actions tab with one completed workflow run. If CI isn't working on the day, use slides 14 and 15 with the live command.</a:t>
+              <a:t>Prepared: the three pull requests, opened after the optimizer finished and left open. Live: the fact-check command from the playbook. If CI isn't working on the day, use slides 14 and 15 with the live command.</a:t>
             </a:r>
           </a:p>
           <a:p/>
@@ -2077,7 +2077,7 @@
           </a:p>
           <a:p>
             <a:r>
-              <a:t>Let's run that first check on the optimizer's candidate.</a:t>
+              <a:t>Let's see the gate handle three real pull requests.</a:t>
             </a:r>
           </a:p>
           <a:p/>
@@ -2458,7 +2458,7 @@
           <a:p/>
           <a:p>
             <a:r>
-              <a:t>Suggested timing: 2 minutes</a:t>
+              <a:t>Suggested timing: 1 minutes</a:t>
             </a:r>
           </a:p>
           <a:p/>
@@ -2480,7 +2480,7 @@
           </a:p>
           <a:p>
             <a:r>
-              <a:t>Quality, speed and cost are different priorities when choosing a model.</a:t>
+              <a:t>Speed is how long the user waits; cost is what you pay. Smaller models usually win on both, so they share a card.</a:t>
             </a:r>
           </a:p>
           <a:p/>
@@ -2491,7 +2491,7 @@
           </a:p>
           <a:p>
             <a:r>
-              <a:t>Model 1 handles complex reasoning, at higher cost and with slower responses. Model 2 prioritises speed but is less capable on complex tasks. Model 3 keeps high-volume work inexpensive but is less suited to nuanced requests. Compare the trade-offs in Foundry, then revisit the starting choice with task-specific evaluations.</a:t>
+              <a:t>Keep this short. Model 1 handles complex reasoning, at higher cost and with slower responses. Model 2 is fast and cheap but less capable on complex tasks; speed and cost usually go together, though not always (batch jobs are cheap but slow). Model Router picks a model per request, sending simple questions to small models and hard ones to strong models; it saves money but is less predictable, so test it like any other model. Land the line at the bottom: the first choice is a hypothesis, and evaluations are how you test it.</a:t>
             </a:r>
           </a:p>
           <a:p/>
@@ -2605,7 +2605,7 @@
           <a:p/>
           <a:p>
             <a:r>
-              <a:t>Suggested timing: 3 minutes</a:t>
+              <a:t>Suggested timing: 2 minutes</a:t>
             </a:r>
           </a:p>
           <a:p/>
@@ -2796,7 +2796,7 @@
           </a:p>
           <a:p>
             <a:r>
-              <a:t>Return to the purchasing question and explain the three source types: institutional documents, business records and workplace conversations. Open tools.py: each IQ is a tool shaped like the real MCP tool. Foundry IQ is knowledge_base_retrieve over policies, Work IQ is ask over people, roles, leave, recorded delegations and messages, and Fabric IQ is search_ontology returning one fixed budget. Line to land: policy tells you who must approve; Work IQ tells you who that is today. Tim, the Hospitality Lead, is on leave; the Approvals Register records Priya as his delegate. A chat message or an email can tell you who to contact, but never transfers approval authority. Real IQs are LLM-backed agents with generic tool descriptions; domain guidance lives in the knowledge base or ontology. Ours are deterministic local stand-ins, so none is a real IQ connection.</a:t>
+              <a:t>Return to the purchasing question and explain the three source types: institutional documents, business records and workplace conversations. Open tools.py: each IQ is a tool shaped like the real MCP tool. Foundry IQ is knowledge_base_retrieve over policies, Work IQ is ask over people, roles, leave, recorded delegations and messages, and Fabric IQ is search_ontology returning one fixed budget. Line to land: Foundry IQ tells you what the rules say, Work IQ tells you who can approve today, and Fabric IQ tells you whether there is budget left. (Our Fabric stand-in always returns the same budget, so it never changes the answer in the demo.) Tim, the Hospitality Lead, is on leave; the Approvals Register records Priya as his delegate. A chat message or an email can tell you who to contact, but never transfers approval authority. Real IQs are LLM-backed agents with generic tool descriptions; domain guidance lives in the knowledge base or ontology. Ours are deterministic local stand-ins, so none is a real IQ connection.</a:t>
             </a:r>
           </a:p>
           <a:p/>
@@ -2910,7 +2910,7 @@
           <a:p/>
           <a:p>
             <a:r>
-              <a:t>Suggested timing: 5 minutes</a:t>
+              <a:t>Suggested timing: 4 minutes</a:t>
             </a:r>
           </a:p>
           <a:p/>
@@ -2943,7 +2943,7 @@
           </a:p>
           <a:p>
             <a:r>
-              <a:t>Ask the dinner question first (playbook command). It should ask about alcohol; reply 'Yes, there will be wine.' Hospitality Lead approval is needed, Tim is on leave, and the Approvals Register records Priya as his delegate: Work IQ doing its job. Then ask the second question: Marcus Webb in Engineering, 21 October, a $6,800 video-conferencing system with two quotes. Expect a confident answer: Samuel is on leave and Leah Fischer holds his delegation, so ask Leah. It used Work IQ, checked leave, found the delegation and cited everything, and it is wrong: above $5,000 the policy needs Category Manager approval, and Marco is away until 2 November with no delegate. It asked Work IQ the wrong question. One question can't tell you how often this happens; that's what evaluation is for.</a:t>
+              <a:t>Ask the dinner question first (playbook command). It should ask about alcohol; reply 'Yes, there will be wine.' Hospitality Lead approval is needed, Tim is on leave, and the Approvals Register records Priya as his delegate: Work IQ doing its job. Then ask the second question: Marcus Webb in Engineering, 21 October, a $6,800 video-conferencing system with two quotes. The right answer: above $5,000 the policy needs Category Manager approval, and Marco is away until 2 November with no delegate; Leah Fischer's delegation covers line-manager approval only. It sometimes gets this right and sometimes names Leah. If it's wrong: it used Work IQ, checked leave, found the delegation and cited everything, and still asked the wrong question. If it's right: good answer, but it's one run; how often does it get this right? Either way: one answer isn't evidence; that's what evaluation is for.</a:t>
             </a:r>
           </a:p>
           <a:p/>
@@ -2954,7 +2954,7 @@
           </a:p>
           <a:p>
             <a:r>
-              <a:t>Rehearse the Marcus question three times. If it ever answers correctly, say so and move on: Demo 4 shows the same failure in a recorded run (Wen Li, $9,300). Screenshot both answers as a backup.</a:t>
+              <a:t>Rehearse the Marcus question three times and note what it says. Whichever way it answers, the line is the same: one answer isn't evidence. If the network fails, show your screenshots, then a failing question from the prepared holdout run in Demo 4.</a:t>
             </a:r>
           </a:p>
           <a:p/>
@@ -3215,7 +3215,7 @@
           <a:p/>
           <a:p>
             <a:r>
-              <a:t>Suggested timing: 4 minutes</a:t>
+              <a:t>Suggested timing: 3 minutes</a:t>
             </a:r>
           </a:p>
           <a:p/>
@@ -5172,434 +5172,6 @@
           </p:txBody>
         </p:sp>
       </p:grpSp>
-      <p:grpSp>
-        <p:nvGrpSpPr>
-          <p:cNvPr id="39" name="Reveal 3"/>
-          <p:cNvGrpSpPr/>
-          <p:nvPr/>
-        </p:nvGrpSpPr>
-        <p:grpSpPr>
-          <a:xfrm>
-            <a:off x="7721560" y="1868329"/>
-            <a:ext cx="3220641" cy="3791902"/>
-            <a:chOff x="7721560" y="1868329"/>
-            <a:chExt cx="3220641" cy="3791902"/>
-          </a:xfrm>
-        </p:grpSpPr>
-        <p:sp>
-          <p:nvSpPr>
-            <p:cNvPr id="24" name="reveal-3:20:shape"/>
-            <p:cNvSpPr/>
-            <p:nvPr/>
-          </p:nvSpPr>
-          <p:spPr>
-            <a:xfrm>
-              <a:off x="7721560" y="1868329"/>
-              <a:ext cx="3220641" cy="3791902"/>
-            </a:xfrm>
-            <a:prstGeom prst="roundRect">
-              <a:avLst>
-                <a:gd name="adj" fmla="val 3786"/>
-              </a:avLst>
-            </a:prstGeom>
-            <a:solidFill>
-              <a:srgbClr val="292929"/>
-            </a:solidFill>
-            <a:ln w="7620">
-              <a:solidFill>
-                <a:srgbClr val="474747"/>
-              </a:solidFill>
-              <a:prstDash val="solid"/>
-            </a:ln>
-          </p:spPr>
-          <p:txBody>
-            <a:bodyPr/>
-            <a:lstStyle/>
-            <a:p>
-              <a:endParaRPr lang="en-US"/>
-            </a:p>
-          </p:txBody>
-        </p:sp>
-        <p:sp>
-          <p:nvSpPr>
-            <p:cNvPr id="25" name="reveal-3:20:shape:border-0"/>
-            <p:cNvSpPr/>
-            <p:nvPr/>
-          </p:nvSpPr>
-          <p:spPr>
-            <a:xfrm>
-              <a:off x="7813000" y="1883569"/>
-              <a:ext cx="3037761" cy="0"/>
-            </a:xfrm>
-            <a:prstGeom prst="line">
-              <a:avLst/>
-            </a:prstGeom>
-            <a:noFill/>
-            <a:ln w="30480">
-              <a:solidFill>
-                <a:srgbClr val="FBBF24"/>
-              </a:solidFill>
-              <a:prstDash val="solid"/>
-              <a:headEnd type="none"/>
-              <a:tailEnd type="none"/>
-            </a:ln>
-          </p:spPr>
-          <p:txBody>
-            <a:bodyPr/>
-            <a:lstStyle/>
-            <a:p>
-              <a:endParaRPr lang="en-US"/>
-            </a:p>
-          </p:txBody>
-        </p:sp>
-        <p:sp>
-          <p:nvSpPr>
-            <p:cNvPr id="26" name="reveal-3:21:shape"/>
-            <p:cNvSpPr/>
-            <p:nvPr/>
-          </p:nvSpPr>
-          <p:spPr>
-            <a:xfrm>
-              <a:off x="7927300" y="2096929"/>
-              <a:ext cx="411480" cy="411480"/>
-            </a:xfrm>
-            <a:prstGeom prst="roundRect">
-              <a:avLst>
-                <a:gd name="adj" fmla="val 25926"/>
-              </a:avLst>
-            </a:prstGeom>
-            <a:solidFill>
-              <a:srgbClr val="000000">
-                <a:alpha val="0"/>
-              </a:srgbClr>
-            </a:solidFill>
-            <a:ln w="15240">
-              <a:solidFill>
-                <a:srgbClr val="FBBF24"/>
-              </a:solidFill>
-              <a:prstDash val="solid"/>
-            </a:ln>
-          </p:spPr>
-          <p:txBody>
-            <a:bodyPr/>
-            <a:lstStyle/>
-            <a:p>
-              <a:endParaRPr lang="en-US"/>
-            </a:p>
-          </p:txBody>
-        </p:sp>
-        <p:sp>
-          <p:nvSpPr>
-            <p:cNvPr id="27" name="reveal-3:22:text"/>
-            <p:cNvSpPr/>
-            <p:nvPr/>
-          </p:nvSpPr>
-          <p:spPr>
-            <a:xfrm>
-              <a:off x="8082677" y="2207419"/>
-              <a:ext cx="192048" cy="190500"/>
-            </a:xfrm>
-            <a:prstGeom prst="rect">
-              <a:avLst/>
-            </a:prstGeom>
-            <a:noFill/>
-            <a:ln/>
-          </p:spPr>
-          <p:txBody>
-            <a:bodyPr wrap="none" lIns="0" tIns="0" rIns="0" bIns="0" rtlCol="0" anchor="ctr"/>
-            <a:lstStyle/>
-            <a:p>
-              <a:pPr marL="0" indent="0" algn="l">
-                <a:buNone/>
-              </a:pPr>
-              <a:r>
-                <a:rPr lang="en-US" sz="1200" b="1" kern="0" spc="-24" dirty="0">
-                  <a:solidFill>
-                    <a:srgbClr val="FBBF24"/>
-                  </a:solidFill>
-                  <a:latin typeface="Arial" pitchFamily="34" charset="0"/>
-                  <a:ea typeface="Arial" pitchFamily="34" charset="-122"/>
-                  <a:cs typeface="Arial" pitchFamily="34" charset="-120"/>
-                </a:rPr>
-                <a:t>C</a:t>
-              </a:r>
-              <a:endParaRPr lang="en-US" sz="1200" dirty="0"/>
-            </a:p>
-          </p:txBody>
-        </p:sp>
-        <p:sp>
-          <p:nvSpPr>
-            <p:cNvPr id="28" name="reveal-3:23:text"/>
-            <p:cNvSpPr/>
-            <p:nvPr/>
-          </p:nvSpPr>
-          <p:spPr>
-            <a:xfrm>
-              <a:off x="7927300" y="2698909"/>
-              <a:ext cx="741045" cy="266700"/>
-            </a:xfrm>
-            <a:prstGeom prst="rect">
-              <a:avLst/>
-            </a:prstGeom>
-            <a:noFill/>
-            <a:ln/>
-          </p:spPr>
-          <p:txBody>
-            <a:bodyPr wrap="none" lIns="0" tIns="0" rIns="0" bIns="0" rtlCol="0" anchor="ctr"/>
-            <a:lstStyle/>
-            <a:p>
-              <a:pPr marL="0" indent="0" algn="l">
-                <a:buNone/>
-              </a:pPr>
-              <a:r>
-                <a:rPr lang="en-US" sz="1680" b="1" dirty="0">
-                  <a:solidFill>
-                    <a:srgbClr val="FBBF24"/>
-                  </a:solidFill>
-                  <a:latin typeface="Arial" pitchFamily="34" charset="0"/>
-                  <a:ea typeface="Arial" pitchFamily="34" charset="-122"/>
-                  <a:cs typeface="Arial" pitchFamily="34" charset="-120"/>
-                </a:rPr>
-                <a:t>Per-question criteria</a:t>
-              </a:r>
-              <a:endParaRPr lang="en-US" sz="1680" dirty="0"/>
-            </a:p>
-          </p:txBody>
-        </p:sp>
-        <p:sp>
-          <p:nvSpPr>
-            <p:cNvPr id="29" name="reveal-3:24:text"/>
-            <p:cNvSpPr/>
-            <p:nvPr/>
-          </p:nvSpPr>
-          <p:spPr>
-            <a:xfrm>
-              <a:off x="7927300" y="3285649"/>
-              <a:ext cx="2825115" cy="182880"/>
-            </a:xfrm>
-            <a:prstGeom prst="rect">
-              <a:avLst/>
-            </a:prstGeom>
-            <a:noFill/>
-            <a:ln/>
-          </p:spPr>
-          <p:txBody>
-            <a:bodyPr wrap="none" lIns="0" tIns="0" rIns="0" bIns="0" rtlCol="0" anchor="ctr"/>
-            <a:lstStyle/>
-            <a:p>
-              <a:pPr marL="0" indent="0" algn="l">
-                <a:buNone/>
-              </a:pPr>
-              <a:r>
-                <a:rPr lang="en-US" sz="1140" dirty="0">
-                  <a:solidFill>
-                    <a:srgbClr val="B0B0B0"/>
-                  </a:solidFill>
-                  <a:latin typeface="Arial" pitchFamily="34" charset="0"/>
-                  <a:ea typeface="Arial" pitchFamily="34" charset="-122"/>
-                  <a:cs typeface="Arial" pitchFamily="34" charset="-120"/>
-                </a:rPr>
-                <a:t>What must this answer get right?</a:t>
-              </a:r>
-              <a:endParaRPr lang="en-US" sz="1140" dirty="0"/>
-            </a:p>
-          </p:txBody>
-        </p:sp>
-        <p:sp>
-          <p:nvSpPr>
-            <p:cNvPr id="30" name="reveal-3:25:text"/>
-            <p:cNvSpPr/>
-            <p:nvPr/>
-          </p:nvSpPr>
-          <p:spPr>
-            <a:xfrm>
-              <a:off x="7927300" y="3481030"/>
-              <a:ext cx="701397" cy="182880"/>
-            </a:xfrm>
-            <a:prstGeom prst="rect">
-              <a:avLst/>
-            </a:prstGeom>
-            <a:noFill/>
-            <a:ln/>
-          </p:spPr>
-          <p:txBody>
-            <a:bodyPr wrap="none" lIns="0" tIns="0" rIns="0" bIns="0" rtlCol="0" anchor="ctr"/>
-            <a:lstStyle/>
-            <a:p>
-              <a:pPr marL="0" indent="0" algn="l">
-                <a:buNone/>
-              </a:pPr>
-              <a:r>
-                <a:rPr lang="en-US" sz="1140" dirty="0">
-                  <a:solidFill>
-                    <a:srgbClr val="B0B0B0"/>
-                  </a:solidFill>
-                  <a:latin typeface="Arial" pitchFamily="34" charset="0"/>
-                  <a:ea typeface="Arial" pitchFamily="34" charset="-122"/>
-                  <a:cs typeface="Arial" pitchFamily="34" charset="-120"/>
-                </a:rPr>
-                <a:t/>
-              </a:r>
-              <a:endParaRPr lang="en-US" sz="1140" dirty="0"/>
-            </a:p>
-          </p:txBody>
-        </p:sp>
-        <p:sp>
-          <p:nvSpPr>
-            <p:cNvPr id="31" name="reveal-3:26:shape"/>
-            <p:cNvSpPr/>
-            <p:nvPr/>
-          </p:nvSpPr>
-          <p:spPr>
-            <a:xfrm>
-              <a:off x="7927300" y="3889772"/>
-              <a:ext cx="2809161" cy="636984"/>
-            </a:xfrm>
-            <a:prstGeom prst="roundRect">
-              <a:avLst>
-                <a:gd name="adj" fmla="val 11963"/>
-              </a:avLst>
-            </a:prstGeom>
-            <a:solidFill>
-              <a:srgbClr val="FFFFFF">
-                <a:alpha val="3000"/>
-              </a:srgbClr>
-            </a:solidFill>
-            <a:ln w="12700">
-              <a:solidFill>
-                <a:srgbClr val="333333">
-                  <a:alpha val="0"/>
-                </a:srgbClr>
-              </a:solidFill>
-              <a:prstDash val="solid"/>
-            </a:ln>
-          </p:spPr>
-          <p:txBody>
-            <a:bodyPr/>
-            <a:lstStyle/>
-            <a:p>
-              <a:endParaRPr lang="en-US"/>
-            </a:p>
-          </p:txBody>
-        </p:sp>
-        <p:sp>
-          <p:nvSpPr>
-            <p:cNvPr id="32" name="reveal-3:27:text"/>
-            <p:cNvSpPr/>
-            <p:nvPr/>
-          </p:nvSpPr>
-          <p:spPr>
-            <a:xfrm>
-              <a:off x="8033980" y="3973592"/>
-              <a:ext cx="2606159" cy="152400"/>
-            </a:xfrm>
-            <a:prstGeom prst="rect">
-              <a:avLst/>
-            </a:prstGeom>
-            <a:noFill/>
-            <a:ln/>
-          </p:spPr>
-          <p:txBody>
-            <a:bodyPr wrap="none" lIns="0" tIns="0" rIns="0" bIns="0" rtlCol="0" anchor="ctr"/>
-            <a:lstStyle/>
-            <a:p>
-              <a:pPr marL="0" indent="0" algn="l">
-                <a:buNone/>
-              </a:pPr>
-              <a:r>
-                <a:rPr lang="en-US" sz="900" b="1" dirty="0">
-                  <a:solidFill>
-                    <a:srgbClr val="DEDEDE"/>
-                  </a:solidFill>
-                  <a:latin typeface="Arial" pitchFamily="34" charset="0"/>
-                  <a:ea typeface="Arial" pitchFamily="34" charset="-122"/>
-                  <a:cs typeface="Arial" pitchFamily="34" charset="-120"/>
-                </a:rPr>
-                <a:t>Specific checks, such as “asks for the total</a:t>
-              </a:r>
-              <a:endParaRPr lang="en-US" sz="900" dirty="0"/>
-            </a:p>
-          </p:txBody>
-        </p:sp>
-        <p:sp>
-          <p:nvSpPr>
-            <p:cNvPr id="33" name="reveal-3:28:text"/>
-            <p:cNvSpPr/>
-            <p:nvPr/>
-          </p:nvSpPr>
-          <p:spPr>
-            <a:xfrm>
-              <a:off x="8033980" y="4122182"/>
-              <a:ext cx="984290" cy="152400"/>
-            </a:xfrm>
-            <a:prstGeom prst="rect">
-              <a:avLst/>
-            </a:prstGeom>
-            <a:noFill/>
-            <a:ln/>
-          </p:spPr>
-          <p:txBody>
-            <a:bodyPr wrap="none" lIns="0" tIns="0" rIns="0" bIns="0" rtlCol="0" anchor="ctr"/>
-            <a:lstStyle/>
-            <a:p>
-              <a:pPr marL="0" indent="0" algn="l">
-                <a:buNone/>
-              </a:pPr>
-              <a:r>
-                <a:rPr lang="en-US" sz="900" b="1" dirty="0">
-                  <a:solidFill>
-                    <a:srgbClr val="DEDEDE"/>
-                  </a:solidFill>
-                  <a:latin typeface="Arial" pitchFamily="34" charset="0"/>
-                  <a:ea typeface="Arial" pitchFamily="34" charset="-122"/>
-                  <a:cs typeface="Arial" pitchFamily="34" charset="-120"/>
-                </a:rPr>
-                <a:t>cost first”.</a:t>
-              </a:r>
-              <a:endParaRPr lang="en-US" sz="900" dirty="0"/>
-            </a:p>
-          </p:txBody>
-        </p:sp>
-        <p:sp>
-          <p:nvSpPr>
-            <p:cNvPr id="34" name="reveal-3:29:text"/>
-            <p:cNvSpPr/>
-            <p:nvPr/>
-          </p:nvSpPr>
-          <p:spPr>
-            <a:xfrm>
-              <a:off x="8033980" y="4308872"/>
-              <a:ext cx="1616035" cy="129540"/>
-            </a:xfrm>
-            <a:prstGeom prst="rect">
-              <a:avLst/>
-            </a:prstGeom>
-            <a:noFill/>
-            <a:ln/>
-          </p:spPr>
-          <p:txBody>
-            <a:bodyPr wrap="none" lIns="0" tIns="0" rIns="0" bIns="0" rtlCol="0" anchor="ctr"/>
-            <a:lstStyle/>
-            <a:p>
-              <a:pPr marL="0" indent="0" algn="l">
-                <a:buNone/>
-              </a:pPr>
-              <a:r>
-                <a:rPr lang="en-US" sz="720" b="1" kern="0" spc="43" dirty="0">
-                  <a:solidFill>
-                    <a:srgbClr val="B0B0B0"/>
-                  </a:solidFill>
-                  <a:latin typeface="Arial" pitchFamily="34" charset="0"/>
-                  <a:ea typeface="Arial" pitchFamily="34" charset="-122"/>
-                  <a:cs typeface="Arial" pitchFamily="34" charset="-120"/>
-                </a:rPr>
-                <a:t>USED BY AGENT OPTIMIZER</a:t>
-              </a:r>
-              <a:endParaRPr lang="en-US" sz="720" dirty="0"/>
-            </a:p>
-          </p:txBody>
-        </p:sp>
-      </p:grpSp>
       <p:sp>
         <p:nvSpPr>
           <p:cNvPr id="35" name="static:30:text"/>
@@ -7449,7 +7021,7 @@
                 </a:solidFill>
                 <a:latin typeface="Arial"/>
               </a:rPr>
-              <a:t>The optimizer refines a working agent; it doesn’t rescue a broken one.</a:t>
+              <a:t>The optimizer edits prompts, not tool code.</a:t>
             </a:r>
           </a:p>
         </p:txBody>
@@ -11024,7 +10596,7 @@
                 <a:ea typeface="Arial" pitchFamily="34" charset="-122"/>
                 <a:cs typeface="Arial" pitchFamily="34" charset="-120"/>
               </a:rPr>
-              <a:t>The check that goes red</a:t>
+              <a:t>Three pull requests</a:t>
             </a:r>
             <a:endParaRPr lang="en-US" sz="4080" dirty="0"/>
           </a:p>
@@ -11063,7 +10635,7 @@
                 <a:ea typeface="Arial" pitchFamily="34" charset="-122"/>
                 <a:cs typeface="Arial" pitchFamily="34" charset="-120"/>
               </a:rPr>
-              <a:t>Run the fact check on the optimizer’s candidate, then find</a:t>
+              <a:t>Copied facts, a regression that looks like a speed-up, and a</a:t>
             </a:r>
             <a:endParaRPr lang="en-US" sz="1620" dirty="0"/>
           </a:p>
@@ -11102,7 +10674,7 @@
                 <a:ea typeface="Arial" pitchFamily="34" charset="-122"/>
                 <a:cs typeface="Arial" pitchFamily="34" charset="-120"/>
               </a:rPr>
-              <a:t>the same check in the pipeline.</a:t>
+              <a:t>reviewed improvement. What does the gate do with each?</a:t>
             </a:r>
             <a:endParaRPr lang="en-US" sz="1620" dirty="0"/>
           </a:p>
@@ -15329,8 +14901,8 @@
           </p:nvSpPr>
           <p:spPr>
             <a:xfrm>
-              <a:off x="2064782" y="3549372"/>
-              <a:ext cx="747236" cy="228600"/>
+              <a:off x="1066800" y="3549372"/>
+              <a:ext cx="2651760" cy="228600"/>
             </a:xfrm>
             <a:prstGeom prst="rect">
               <a:avLst/>
@@ -15342,7 +14914,7 @@
             <a:bodyPr wrap="none" lIns="0" tIns="0" rIns="0" bIns="0" rtlCol="0" anchor="ctr"/>
             <a:lstStyle/>
             <a:p>
-              <a:pPr marL="0" indent="0" algn="l">
+              <a:pPr marL="0" indent="0" algn="ctr">
                 <a:buNone/>
               </a:pPr>
               <a:r>
@@ -15368,8 +14940,8 @@
           </p:nvSpPr>
           <p:spPr>
             <a:xfrm>
-              <a:off x="1414820" y="3857149"/>
-              <a:ext cx="2047042" cy="243840"/>
+              <a:off x="1066800" y="3857149"/>
+              <a:ext cx="2651760" cy="243840"/>
             </a:xfrm>
             <a:prstGeom prst="rect">
               <a:avLst/>
@@ -15381,7 +14953,7 @@
             <a:bodyPr wrap="none" lIns="0" tIns="0" rIns="0" bIns="0" rtlCol="0" anchor="ctr"/>
             <a:lstStyle/>
             <a:p>
-              <a:pPr marL="0" indent="0" algn="l">
+              <a:pPr marL="0" indent="0" algn="ctr">
                 <a:buNone/>
               </a:pPr>
               <a:r>
@@ -15407,8 +14979,8 @@
           </p:nvSpPr>
           <p:spPr>
             <a:xfrm>
-              <a:off x="1751528" y="4192429"/>
-              <a:ext cx="1373624" cy="190500"/>
+              <a:off x="1066800" y="4192429"/>
+              <a:ext cx="2651760" cy="190500"/>
             </a:xfrm>
             <a:prstGeom prst="rect">
               <a:avLst/>
@@ -15420,7 +14992,7 @@
             <a:bodyPr wrap="none" lIns="0" tIns="0" rIns="0" bIns="0" rtlCol="0" anchor="ctr"/>
             <a:lstStyle/>
             <a:p>
-              <a:pPr marL="0" indent="0" algn="l">
+              <a:pPr marL="0" indent="0" algn="ctr">
                 <a:buNone/>
               </a:pPr>
               <a:r>
@@ -15446,8 +15018,8 @@
           </p:nvSpPr>
           <p:spPr>
             <a:xfrm>
-              <a:off x="1713309" y="4398169"/>
-              <a:ext cx="1450181" cy="190500"/>
+              <a:off x="1066800" y="4398169"/>
+              <a:ext cx="2651760" cy="190500"/>
             </a:xfrm>
             <a:prstGeom prst="rect">
               <a:avLst/>
@@ -15459,7 +15031,7 @@
             <a:bodyPr wrap="none" lIns="0" tIns="0" rIns="0" bIns="0" rtlCol="0" anchor="ctr"/>
             <a:lstStyle/>
             <a:p>
-              <a:pPr marL="0" indent="0" algn="l">
+              <a:pPr marL="0" indent="0" algn="ctr">
                 <a:buNone/>
               </a:pPr>
               <a:r>
@@ -15521,8 +15093,8 @@
           </p:nvSpPr>
           <p:spPr>
             <a:xfrm>
-              <a:off x="1909643" y="4832509"/>
-              <a:ext cx="1057394" cy="175260"/>
+              <a:off x="1066800" y="4832509"/>
+              <a:ext cx="2651760" cy="175260"/>
             </a:xfrm>
             <a:prstGeom prst="rect">
               <a:avLst/>
@@ -15534,7 +15106,7 @@
             <a:bodyPr wrap="none" lIns="0" tIns="0" rIns="0" bIns="0" rtlCol="0" anchor="ctr"/>
             <a:lstStyle/>
             <a:p>
-              <a:pPr marL="0" indent="0" algn="l">
+              <a:pPr marL="0" indent="0" algn="ctr">
                 <a:buNone/>
               </a:pPr>
               <a:r>
@@ -15560,8 +15132,8 @@
           </p:nvSpPr>
           <p:spPr>
             <a:xfrm>
-              <a:off x="1811417" y="5003959"/>
-              <a:ext cx="1253966" cy="175260"/>
+              <a:off x="1066800" y="5003959"/>
+              <a:ext cx="2651760" cy="175260"/>
             </a:xfrm>
             <a:prstGeom prst="rect">
               <a:avLst/>
@@ -15573,7 +15145,7 @@
             <a:bodyPr wrap="none" lIns="0" tIns="0" rIns="0" bIns="0" rtlCol="0" anchor="ctr"/>
             <a:lstStyle/>
             <a:p>
-              <a:pPr marL="0" indent="0" algn="l">
+              <a:pPr marL="0" indent="0" algn="ctr">
                 <a:buNone/>
               </a:pPr>
               <a:r>
@@ -15710,8 +15282,8 @@
           </p:nvSpPr>
           <p:spPr>
             <a:xfrm>
-              <a:off x="5070872" y="3549372"/>
-              <a:ext cx="770096" cy="228600"/>
+              <a:off x="4084320" y="3549372"/>
+              <a:ext cx="2651760" cy="228600"/>
             </a:xfrm>
             <a:prstGeom prst="rect">
               <a:avLst/>
@@ -15723,7 +15295,7 @@
             <a:bodyPr wrap="none" lIns="0" tIns="0" rIns="0" bIns="0" rtlCol="0" anchor="ctr"/>
             <a:lstStyle/>
             <a:p>
-              <a:pPr marL="0" indent="0" algn="l">
+              <a:pPr marL="0" indent="0" algn="ctr">
                 <a:buNone/>
               </a:pPr>
               <a:r>
@@ -15749,8 +15321,8 @@
           </p:nvSpPr>
           <p:spPr>
             <a:xfrm>
-              <a:off x="4464368" y="3857149"/>
-              <a:ext cx="1983105" cy="243840"/>
+              <a:off x="4084320" y="3857149"/>
+              <a:ext cx="2651760" cy="243840"/>
             </a:xfrm>
             <a:prstGeom prst="rect">
               <a:avLst/>
@@ -15762,7 +15334,7 @@
             <a:bodyPr wrap="none" lIns="0" tIns="0" rIns="0" bIns="0" rtlCol="0" anchor="ctr"/>
             <a:lstStyle/>
             <a:p>
-              <a:pPr marL="0" indent="0" algn="l">
+              <a:pPr marL="0" indent="0" algn="ctr">
                 <a:buNone/>
               </a:pPr>
               <a:r>
@@ -15774,7 +15346,7 @@
                   <a:ea typeface="Arial" pitchFamily="34" charset="-122"/>
                   <a:cs typeface="Arial" pitchFamily="34" charset="-120"/>
                 </a:rPr>
-                <a:t>Optimised for speed</a:t>
+                <a:t>Fast and low cost</a:t>
               </a:r>
               <a:endParaRPr lang="en-US" sz="1560" dirty="0"/>
             </a:p>
@@ -15788,8 +15360,8 @@
           </p:nvSpPr>
           <p:spPr>
             <a:xfrm>
-              <a:off x="4862393" y="4192429"/>
-              <a:ext cx="1187053" cy="190500"/>
+              <a:off x="4084320" y="4192429"/>
+              <a:ext cx="2651760" cy="190500"/>
             </a:xfrm>
             <a:prstGeom prst="rect">
               <a:avLst/>
@@ -15801,7 +15373,7 @@
             <a:bodyPr wrap="none" lIns="0" tIns="0" rIns="0" bIns="0" rtlCol="0" anchor="ctr"/>
             <a:lstStyle/>
             <a:p>
-              <a:pPr marL="0" indent="0" algn="l">
+              <a:pPr marL="0" indent="0" algn="ctr">
                 <a:buNone/>
               </a:pPr>
               <a:r>
@@ -15813,7 +15385,7 @@
                   <a:ea typeface="Arial" pitchFamily="34" charset="-122"/>
                   <a:cs typeface="Arial" pitchFamily="34" charset="-120"/>
                 </a:rPr>
-                <a:t>Responsive chat</a:t>
+                <a:t>Responsive chat and</a:t>
               </a:r>
               <a:endParaRPr lang="en-US" sz="1200" dirty="0"/>
             </a:p>
@@ -15827,8 +15399,8 @@
           </p:nvSpPr>
           <p:spPr>
             <a:xfrm>
-              <a:off x="4676894" y="4398169"/>
-              <a:ext cx="1557933" cy="190500"/>
+              <a:off x="4084320" y="4398169"/>
+              <a:ext cx="2651760" cy="190500"/>
             </a:xfrm>
             <a:prstGeom prst="rect">
               <a:avLst/>
@@ -15840,7 +15412,7 @@
             <a:bodyPr wrap="none" lIns="0" tIns="0" rIns="0" bIns="0" rtlCol="0" anchor="ctr"/>
             <a:lstStyle/>
             <a:p>
-              <a:pPr marL="0" indent="0" algn="l">
+              <a:pPr marL="0" indent="0" algn="ctr">
                 <a:buNone/>
               </a:pPr>
               <a:r>
@@ -15852,7 +15424,7 @@
                   <a:ea typeface="Arial" pitchFamily="34" charset="-122"/>
                   <a:cs typeface="Arial" pitchFamily="34" charset="-120"/>
                 </a:rPr>
-                <a:t>and quick interactions</a:t>
+                <a:t>high-volume tasks</a:t>
               </a:r>
               <a:endParaRPr lang="en-US" sz="1200" dirty="0"/>
             </a:p>
@@ -15902,8 +15474,8 @@
           </p:nvSpPr>
           <p:spPr>
             <a:xfrm>
-              <a:off x="4654272" y="4832509"/>
-              <a:ext cx="1603177" cy="175260"/>
+              <a:off x="4084320" y="4832509"/>
+              <a:ext cx="2651760" cy="175260"/>
             </a:xfrm>
             <a:prstGeom prst="rect">
               <a:avLst/>
@@ -15915,7 +15487,7 @@
             <a:bodyPr wrap="none" lIns="0" tIns="0" rIns="0" bIns="0" rtlCol="0" anchor="ctr"/>
             <a:lstStyle/>
             <a:p>
-              <a:pPr marL="0" indent="0" algn="l">
+              <a:pPr marL="0" indent="0" algn="ctr">
                 <a:buNone/>
               </a:pPr>
               <a:r>
@@ -15941,8 +15513,8 @@
           </p:nvSpPr>
           <p:spPr>
             <a:xfrm>
-              <a:off x="4841677" y="5003959"/>
-              <a:ext cx="1228487" cy="175260"/>
+              <a:off x="4084320" y="5003959"/>
+              <a:ext cx="2651760" cy="175260"/>
             </a:xfrm>
             <a:prstGeom prst="rect">
               <a:avLst/>
@@ -15954,7 +15526,7 @@
             <a:bodyPr wrap="none" lIns="0" tIns="0" rIns="0" bIns="0" rtlCol="0" anchor="ctr"/>
             <a:lstStyle/>
             <a:p>
-              <a:pPr marL="0" indent="0" algn="l">
+              <a:pPr marL="0" indent="0" algn="ctr">
                 <a:buNone/>
               </a:pPr>
               <a:r>
@@ -16055,7 +15627,7 @@
         </p:sp>
         <p:pic>
           <p:nvPicPr>
-            <p:cNvPr id="26" name="reveal-3:21:svg:vector-4-21" descr="Model 3: a compact robot beside a stack of coins"/>
+            <p:cNvPr id="26" name="reveal-3:21:svg:vector-4-21" descr="Model Router: a robot sending requests to small, medium and large models"/>
             <p:cNvPicPr>
               <a:picLocks noChangeAspect="1"/>
             </p:cNvPicPr>
@@ -16091,8 +15663,8 @@
           </p:nvSpPr>
           <p:spPr>
             <a:xfrm>
-              <a:off x="8086011" y="3549372"/>
-              <a:ext cx="774859" cy="228600"/>
+              <a:off x="7101840" y="3549372"/>
+              <a:ext cx="2651760" cy="228600"/>
             </a:xfrm>
             <a:prstGeom prst="rect">
               <a:avLst/>
@@ -16104,7 +15676,7 @@
             <a:bodyPr wrap="none" lIns="0" tIns="0" rIns="0" bIns="0" rtlCol="0" anchor="ctr"/>
             <a:lstStyle/>
             <a:p>
-              <a:pPr marL="0" indent="0" algn="l">
+              <a:pPr marL="0" indent="0" algn="ctr">
                 <a:buNone/>
               </a:pPr>
               <a:r>
@@ -16116,7 +15688,7 @@
                   <a:ea typeface="Arial" pitchFamily="34" charset="-122"/>
                   <a:cs typeface="Arial" pitchFamily="34" charset="-120"/>
                 </a:rPr>
-                <a:t>Model 3</a:t>
+                <a:t>Model Router</a:t>
               </a:r>
               <a:endParaRPr lang="en-US" sz="1440" dirty="0"/>
             </a:p>
@@ -16130,8 +15702,8 @@
           </p:nvSpPr>
           <p:spPr>
             <a:xfrm>
-              <a:off x="7565469" y="3857149"/>
-              <a:ext cx="1815822" cy="243840"/>
+              <a:off x="7101840" y="3857149"/>
+              <a:ext cx="2651760" cy="243840"/>
             </a:xfrm>
             <a:prstGeom prst="rect">
               <a:avLst/>
@@ -16143,7 +15715,7 @@
             <a:bodyPr wrap="none" lIns="0" tIns="0" rIns="0" bIns="0" rtlCol="0" anchor="ctr"/>
             <a:lstStyle/>
             <a:p>
-              <a:pPr marL="0" indent="0" algn="l">
+              <a:pPr marL="0" indent="0" algn="ctr">
                 <a:buNone/>
               </a:pPr>
               <a:r>
@@ -16155,7 +15727,7 @@
                   <a:ea typeface="Arial" pitchFamily="34" charset="-122"/>
                   <a:cs typeface="Arial" pitchFamily="34" charset="-120"/>
                 </a:rPr>
-                <a:t>Optimised for cost</a:t>
+                <a:t>Decides per request</a:t>
               </a:r>
               <a:endParaRPr lang="en-US" sz="1560" dirty="0"/>
             </a:p>
@@ -16169,8 +15741,8 @@
           </p:nvSpPr>
           <p:spPr>
             <a:xfrm>
-              <a:off x="7977188" y="4192429"/>
-              <a:ext cx="992386" cy="190500"/>
+              <a:off x="7101840" y="4192429"/>
+              <a:ext cx="2651760" cy="190500"/>
             </a:xfrm>
             <a:prstGeom prst="rect">
               <a:avLst/>
@@ -16182,7 +15754,7 @@
             <a:bodyPr wrap="none" lIns="0" tIns="0" rIns="0" bIns="0" rtlCol="0" anchor="ctr"/>
             <a:lstStyle/>
             <a:p>
-              <a:pPr marL="0" indent="0" algn="l">
+              <a:pPr marL="0" indent="0" algn="ctr">
                 <a:buNone/>
               </a:pPr>
               <a:r>
@@ -16194,7 +15766,7 @@
                   <a:ea typeface="Arial" pitchFamily="34" charset="-122"/>
                   <a:cs typeface="Arial" pitchFamily="34" charset="-120"/>
                 </a:rPr>
-                <a:t>High-volume,</a:t>
+                <a:t>Easy questions: small model</a:t>
               </a:r>
               <a:endParaRPr lang="en-US" sz="1200" dirty="0"/>
             </a:p>
@@ -16208,8 +15780,8 @@
           </p:nvSpPr>
           <p:spPr>
             <a:xfrm>
-              <a:off x="7878961" y="4398169"/>
-              <a:ext cx="1188958" cy="190500"/>
+              <a:off x="7101840" y="4398169"/>
+              <a:ext cx="2651760" cy="190500"/>
             </a:xfrm>
             <a:prstGeom prst="rect">
               <a:avLst/>
@@ -16221,7 +15793,7 @@
             <a:bodyPr wrap="none" lIns="0" tIns="0" rIns="0" bIns="0" rtlCol="0" anchor="ctr"/>
             <a:lstStyle/>
             <a:p>
-              <a:pPr marL="0" indent="0" algn="l">
+              <a:pPr marL="0" indent="0" algn="ctr">
                 <a:buNone/>
               </a:pPr>
               <a:r>
@@ -16233,7 +15805,7 @@
                   <a:ea typeface="Arial" pitchFamily="34" charset="-122"/>
                   <a:cs typeface="Arial" pitchFamily="34" charset="-120"/>
                 </a:rPr>
-                <a:t>repeatable tasks</a:t>
+                <a:t>Hard questions: strong model</a:t>
               </a:r>
               <a:endParaRPr lang="en-US" sz="1200" dirty="0"/>
             </a:p>
@@ -16283,8 +15855,8 @@
           </p:nvSpPr>
           <p:spPr>
             <a:xfrm>
-              <a:off x="7726204" y="4832509"/>
-              <a:ext cx="1494353" cy="175260"/>
+              <a:off x="7101840" y="4832509"/>
+              <a:ext cx="2651760" cy="175260"/>
             </a:xfrm>
             <a:prstGeom prst="rect">
               <a:avLst/>
@@ -16296,7 +15868,7 @@
             <a:bodyPr wrap="none" lIns="0" tIns="0" rIns="0" bIns="0" rtlCol="0" anchor="ctr"/>
             <a:lstStyle/>
             <a:p>
-              <a:pPr marL="0" indent="0" algn="l">
+              <a:pPr marL="0" indent="0" algn="ctr">
                 <a:buNone/>
               </a:pPr>
               <a:r>
@@ -16308,7 +15880,7 @@
                   <a:ea typeface="Arial" pitchFamily="34" charset="-122"/>
                   <a:cs typeface="Arial" pitchFamily="34" charset="-120"/>
                 </a:rPr>
-                <a:t>Trade-off: less suited</a:t>
+                <a:t>Trade-off: less predictable</a:t>
               </a:r>
               <a:endParaRPr lang="en-US" sz="1080" dirty="0"/>
             </a:p>
@@ -16322,8 +15894,8 @@
           </p:nvSpPr>
           <p:spPr>
             <a:xfrm>
-              <a:off x="7756684" y="5003959"/>
-              <a:ext cx="1433393" cy="175260"/>
+              <a:off x="7101840" y="5003959"/>
+              <a:ext cx="2651760" cy="175260"/>
             </a:xfrm>
             <a:prstGeom prst="rect">
               <a:avLst/>
@@ -16335,7 +15907,7 @@
             <a:bodyPr wrap="none" lIns="0" tIns="0" rIns="0" bIns="0" rtlCol="0" anchor="ctr"/>
             <a:lstStyle/>
             <a:p>
-              <a:pPr marL="0" indent="0" algn="l">
+              <a:pPr marL="0" indent="0" algn="ctr">
                 <a:buNone/>
               </a:pPr>
               <a:r>
@@ -16347,7 +15919,7 @@
                   <a:ea typeface="Arial" pitchFamily="34" charset="-122"/>
                   <a:cs typeface="Arial" pitchFamily="34" charset="-120"/>
                 </a:rPr>
-                <a:t>to nuanced requests</a:t>
+                <a:t>Test it like any model</a:t>
               </a:r>
               <a:endParaRPr lang="en-US" sz="1080" dirty="0"/>
             </a:p>
@@ -16446,8 +16018,8 @@
         </p:nvSpPr>
         <p:spPr>
           <a:xfrm>
-            <a:off x="3461862" y="5686247"/>
-            <a:ext cx="4633703" cy="311824"/>
+            <a:off x="975360" y="5686247"/>
+            <a:ext cx="8869680" cy="311824"/>
           </a:xfrm>
           <a:prstGeom prst="rect">
             <a:avLst/>
@@ -16459,7 +16031,7 @@
           <a:bodyPr wrap="none" lIns="0" tIns="0" rIns="0" bIns="0" rtlCol="0" anchor="ctr"/>
           <a:lstStyle/>
           <a:p>
-            <a:pPr marL="0" indent="0" algn="l">
+            <a:pPr marL="0" indent="0" algn="ctr">
               <a:buNone/>
             </a:pPr>
             <a:r>
@@ -16471,7 +16043,18 @@
                 <a:ea typeface="Arial" pitchFamily="34" charset="-122"/>
                 <a:cs typeface="Arial" pitchFamily="34" charset="-120"/>
               </a:rPr>
-              <a:t>Or a model which can decide on the fly?</a:t>
+              <a:t>The first choice is a hypothesis. </a:t>
+            </a:r>
+            <a:r>
+              <a:rPr lang="en-US" sz="1560" b="1" dirty="0">
+                <a:solidFill>
+                  <a:srgbClr val="FBBF24"/>
+                </a:solidFill>
+                <a:latin typeface="Arial" pitchFamily="34" charset="0"/>
+                <a:ea typeface="Arial" pitchFamily="34" charset="-122"/>
+                <a:cs typeface="Arial" pitchFamily="34" charset="-120"/>
+              </a:rPr>
+              <a:t>Evaluations are how you test it.</a:t>
             </a:r>
             <a:endParaRPr lang="en-US" sz="1560" dirty="0"/>
           </a:p>
@@ -18387,7 +17970,7 @@
         <p:spPr>
           <a:xfrm>
             <a:off x="975360" y="5800000"/>
-            <a:ext cx="9965841" cy="400000"/>
+            <a:ext cx="8869680" cy="400000"/>
           </a:xfrm>
           <a:prstGeom prst="rect">
             <a:avLst/>
@@ -18401,43 +17984,61 @@
           <a:lstStyle/>
           <a:p>
             <a:r>
-              <a:rPr sz="1800" b="1">
+              <a:rPr sz="1600" b="1">
                 <a:solidFill>
                   <a:srgbClr val="DEDEDE"/>
                 </a:solidFill>
                 <a:latin typeface="Arial"/>
               </a:rPr>
-              <a:t>Policy tells you </a:t>
-            </a:r>
-            <a:r>
-              <a:rPr sz="1800" b="1">
+              <a:t>Foundry IQ: </a:t>
+            </a:r>
+            <a:r>
+              <a:rPr sz="1600" b="1">
                 <a:solidFill>
                   <a:srgbClr val="FBBF24"/>
                 </a:solidFill>
                 <a:latin typeface="Arial"/>
               </a:rPr>
-              <a:t>who must approve</a:t>
-            </a:r>
-            <a:r>
-              <a:rPr sz="1800" b="1">
+              <a:t>the rules</a:t>
+            </a:r>
+            <a:r>
+              <a:rPr sz="1600" b="1">
                 <a:solidFill>
                   <a:srgbClr val="DEDEDE"/>
                 </a:solidFill>
                 <a:latin typeface="Arial"/>
               </a:rPr>
-              <a:t>. Work IQ tells you </a:t>
-            </a:r>
-            <a:r>
-              <a:rPr sz="1800" b="1">
+              <a:t>. Fabric IQ: </a:t>
+            </a:r>
+            <a:r>
+              <a:rPr sz="1600" b="1">
                 <a:solidFill>
                   <a:srgbClr val="FBBF24"/>
                 </a:solidFill>
                 <a:latin typeface="Arial"/>
               </a:rPr>
-              <a:t>who that is today</a:t>
-            </a:r>
-            <a:r>
-              <a:rPr sz="1800" b="1">
+              <a:t>the budget left</a:t>
+            </a:r>
+            <a:r>
+              <a:rPr sz="1600" b="1">
+                <a:solidFill>
+                  <a:srgbClr val="DEDEDE"/>
+                </a:solidFill>
+                <a:latin typeface="Arial"/>
+              </a:rPr>
+              <a:t>. Work IQ: </a:t>
+            </a:r>
+            <a:r>
+              <a:rPr sz="1600" b="1">
+                <a:solidFill>
+                  <a:srgbClr val="FBBF24"/>
+                </a:solidFill>
+                <a:latin typeface="Arial"/>
+              </a:rPr>
+              <a:t>who can approve today</a:t>
+            </a:r>
+            <a:r>
+              <a:rPr sz="1600" b="1">
                 <a:solidFill>
                   <a:srgbClr val="DEDEDE"/>
                 </a:solidFill>

--- a/presentation/presentation.pptx
+++ b/presentation/presentation.pptx
@@ -1015,7 +1015,7 @@
           </a:p>
           <a:p>
             <a:r>
-              <a:t>The optimizer evaluates the baseline, reflects on failed practice questions, proposes a change, tests it on a few training questions, then scores it on the holdout it never trains on. Microsoft's guidance: changes under 0.03 are noise, 0.03 to 0.10 are moderate. The optimizer can also use per-question criteria, specific checks such as 'asks for the total cost first'; our evaluation runs don't use them, so mention them here, not on the Evaluate slide. Land the takeaway: fix the tools first. The optimizer can change the prompt, the tool descriptions and the model, but not the code behind a tool. Our first runs started from a broken search tool: the score still went up, but by copying facts into the prompt, not by fixing the search.</a:t>
+              <a:t>The optimizer evaluates the baseline, reflects on failed practice questions, proposes a change, tests it on a few training questions, then scores it on the validation set, which influences candidate selection. Microsoft's guidance: changes under 0.03 are noise, 0.03 to 0.10 are moderate. The optimizer can also use per-question criteria, specific checks such as 'asks for the total cost first'; our evaluation runs don't use them, so mention them here, not on the Evaluate slide. Land the takeaway: grounding first. Work IQ and the other IQ tools expose fixed interfaces; optimise how the agent queries them and applies the returned evidence. Use traces to distinguish missing evidence from incorrect reasoning. Our early mock search needed repair: the score went up by copying facts into the prompt, but that did not fix retrieval.</a:t>
             </a:r>
           </a:p>
           <a:p/>
@@ -7012,7 +7012,7 @@
                 </a:solidFill>
                 <a:latin typeface="Arial"/>
               </a:rPr>
-              <a:t>Fix the tools first. </a:t>
+              <a:t>Grounding first. </a:t>
             </a:r>
             <a:r>
               <a:rPr sz="1800" b="1">
@@ -7021,7 +7021,7 @@
                 </a:solidFill>
                 <a:latin typeface="Arial"/>
               </a:rPr>
-              <a:t>The optimizer edits prompts, not tool code.</a:t>
+              <a:t>Optimise how the agent uses tools and evidence.</a:t>
             </a:r>
           </a:p>
         </p:txBody>

--- a/presentation/presentation.pptx
+++ b/presentation/presentation.pptx
@@ -1230,13 +1230,13 @@
 DEFINITION
 A pull request check runs on every proposed change; it blocks merging only if the branch's ruleset requires it.
 TALK TRACK
-Two prepared pull requests. First, the reviewed improvement: the development set passed on the PR; after merge, main evaluated -dev on the holdout, a reviewer inspected it, every drift case passed, then a separate release approval deployed the same commit. Second, the bad prompt: no tools, the same answer every time. The cheap offline checks pass, but the development set fails against the baseline, and because branch protection requires that check, it can't be merged normally. Optionally run the fact check live on the old copied-facts candidate: one second, no model. The gate only asks that a change not fall below the baseline by more than the normal wobble. Admins can still bypass, and every bypass is recorded.
+Two prepared pull requests. First, the reviewed improvement: the development set passed on the PR; after merge, main evaluated -dev on the holdout, a reviewer inspected it, every drift case passed, then a separate release approval deployed the same commit. Second, the bad prompt: no tools, the same answer every time. The cheap offline checks pass, but the development set fails against the baseline, and because branch protection requires that check, it can't be merged normally. Optionally run the fact check live on the old copied-facts candidate: one second, no model. The gate only asks that a change not fall below the baseline by more than the normal wobble. Admins can still bypass, and every bypass is recorded. If asked about the official Foundry evaluation GitHub Action: it uses the same evaluation API, but only writes a report. It exposes no run ID or pass/fail result, so it can't gate a merge. We kept our run ID and added the gate.
 DEMO CHECKPOINT
 Prepared: both pull requests and the main promotion run, opened after the optimizer finished. Live (optional): the fact-check command from the playbook. If CI isn't working on the day, use slides 14 and 15 with the live command.
 TRANSITION
 And after release, production keeps feeding the tests.
 SOURCES
-GitHub Actions release-check demonstration.</a:t>
+GitHub Actions release-check demonstration; microsoft/ai-agent-evals v3-beta action.py (checked 19 October 2026).</a:t>
             </a:r>
             <a:endParaRPr lang="en-US" dirty="0"/>
           </a:p>
@@ -18702,7 +18702,7 @@
         <p:spPr>
           <a:xfrm>
             <a:off x="8313420" y="2684740"/>
-            <a:ext cx="1743313" cy="182880"/>
+            <a:ext cx="1803559" cy="182880"/>
           </a:xfrm>
           <a:prstGeom prst="rect">
             <a:avLst/>
@@ -18733,7 +18733,7 @@
                   </a:extLst>
                 </a:hlinkClick>
               </a:rPr>
-              <a:t>Run evaluations in GitHub</a:t>
+              <a:t>Foundry evaluation GitHub</a:t>
             </a:r>
             <a:endParaRPr lang="en-US" sz="1140" dirty="0"/>
           </a:p>
@@ -18748,7 +18748,7 @@
         <p:spPr>
           <a:xfrm>
             <a:off x="8313420" y="2872859"/>
-            <a:ext cx="572810" cy="182880"/>
+            <a:ext cx="1312307" cy="182880"/>
           </a:xfrm>
           <a:prstGeom prst="rect">
             <a:avLst/>
@@ -18779,7 +18779,7 @@
                   </a:extLst>
                 </a:hlinkClick>
               </a:rPr>
-              <a:t>Actions</a:t>
+              <a:t>Action (alternative)</a:t>
             </a:r>
             <a:endParaRPr lang="en-US" sz="1140" dirty="0"/>
           </a:p>
